--- a/Review-I.pptx
+++ b/Review-I.pptx
@@ -9093,7 +9093,7 @@
                 <a:ea typeface="Calibri" pitchFamily="34" charset="-122"/>
                 <a:cs typeface="Calibri" pitchFamily="34" charset="-120"/>
               </a:rPr>
-              <a:t>Four executable rules — data minimisation, lawful basis, storage limitation, security safeguards — each returns pass/fail, a 0–1 score and plain findings; overall = mean of applicable rules.</a:t>
+              <a:t>Seven executable rules — data minimisation, lawful basis, storage limitation, security safeguards, purpose limitation, transparency/notice, accountability — each returns pass/fail, a 0–1 score and plain findings; overall = mean of applicable rules.</a:t>
             </a:r>
           </a:p>
           <a:p>
@@ -9396,7 +9396,7 @@
                 <a:ea typeface="Calibri" pitchFamily="34" charset="-122"/>
                 <a:cs typeface="Calibri" pitchFamily="34" charset="-120"/>
               </a:rPr>
-              <a:t>Compliance framework: 4 executable DPDP rules + a declarative purpose policy + a ComplianceReport artifact (0–1 score, pass-rate, per-rule findings).</a:t>
+              <a:t>Compliance framework: 7 executable DPDP rules + a declarative purpose policy + a ComplianceReport artifact (0–1 score, pass-rate, per-rule findings).</a:t>
             </a:r>
           </a:p>
           <a:p>
@@ -9456,7 +9456,7 @@
                 <a:ea typeface="Calibri" pitchFamily="34" charset="-122"/>
                 <a:cs typeface="Calibri" pitchFamily="34" charset="-120"/>
               </a:rPr>
-              <a:t>End-to-end demo: a compliant run scores ≈ 1.0 vs a "grab-everything, declare-nothing" run ≈ 0.2 — the thesis shown, not asserted. Test suite passing.</a:t>
+              <a:t>Benchmarking harness: three techniques scored on the identical rule set — compliance-aware 1.000, minimising-but-undocumented 0.500, unconstrained baseline 0.131. 91 tests passing.</a:t>
             </a:r>
           </a:p>
           <a:p>
@@ -9744,14 +9744,14 @@
       </p:pic>
       <p:sp>
         <p:nvSpPr>
-          <p:cNvPr id="20" name="Text 2"/>
+          <p:cNvPr id="20" name="Text 20"/>
           <p:cNvSpPr txBox="1"/>
           <p:nvPr/>
         </p:nvSpPr>
         <p:spPr>
           <a:xfrm>
-            <a:off x="640080" y="1230000"/>
-            <a:ext cx="10900000" cy="1250000"/>
+            <a:off x="640080" y="1200000"/>
+            <a:ext cx="10900000" cy="900000"/>
           </a:xfrm>
           <a:prstGeom prst="rect">
             <a:avLst/>
@@ -9771,7 +9771,7 @@
               <a:buChar char="•"/>
             </a:pPr>
             <a:r>
-              <a:rPr lang="en-US" sz="1300" dirty="0">
+              <a:rPr lang="en-US" sz="1250" dirty="0">
                 <a:solidFill>
                   <a:srgbClr val="000000"/>
                 </a:solidFill>
@@ -9779,7 +9779,7 @@
                 <a:ea typeface="Calibri" pitchFamily="34" charset="-122"/>
                 <a:cs typeface="Calibri" pitchFamily="34" charset="-120"/>
               </a:rPr>
-              <a:t>Same harness, two extraction runs for the care-coordination purpose, on synthetic data (field categories only — no personal values).</a:t>
+              <a:t>Three techniques attempt the same three extraction tasks over the same synthetic HIS data, scored by the identical seven-rule DPDP set.</a:t>
             </a:r>
           </a:p>
           <a:p>
@@ -9791,7 +9791,7 @@
               <a:buChar char="•"/>
             </a:pPr>
             <a:r>
-              <a:rPr lang="en-US" sz="1300" dirty="0">
+              <a:rPr lang="en-US" sz="1250" dirty="0">
                 <a:solidFill>
                   <a:srgbClr val="000000"/>
                 </a:solidFill>
@@ -9799,66 +9799,1063 @@
                 <a:ea typeface="Calibri" pitchFamily="34" charset="-122"/>
                 <a:cs typeface="Calibri" pitchFamily="34" charset="-120"/>
               </a:rPr>
-              <a:t>Compliant run: minimal necessary categories, lawful basis + reference declared, retention 60 days with audited deletion, full security posture.</a:t>
+              <a:t>They differ only in how they treat personal data — not in speed or coverage.</a:t>
             </a:r>
           </a:p>
         </p:txBody>
       </p:sp>
+      <p:graphicFrame>
+        <p:nvGraphicFramePr>
+          <p:cNvPr id="30" name="Benchmark Table"/>
+          <p:cNvGraphicFramePr>
+            <a:graphicFrameLocks noGrp="1"/>
+          </p:cNvGraphicFramePr>
+          <p:nvPr/>
+        </p:nvGraphicFramePr>
+        <p:xfrm>
+          <a:off x="548640" y="2250000"/>
+          <a:ext cx="11091672" cy="2520000"/>
+        </p:xfrm>
+        <a:graphic>
+          <a:graphicData uri="http://schemas.openxmlformats.org/drawingml/2006/table">
+            <a:tbl>
+              <a:tblPr/>
+              <a:tblGrid>
+                <a:gridCol w="2750000"/>
+                <a:gridCol w="1850000"/>
+                <a:gridCol w="1500000"/>
+                <a:gridCol w="4991672"/>
+              </a:tblGrid>
+              <a:tr h="600000">
+                <a:tc>
+                  <a:txBody>
+                    <a:bodyPr/>
+                    <a:lstStyle/>
+                    <a:p>
+                      <a:pPr marL="0" indent="0">
+                        <a:buNone/>
+                      </a:pPr>
+                      <a:r>
+                        <a:rPr lang="en-US" sz="1250" b="1" dirty="0">
+                          <a:solidFill>
+                            <a:srgbClr val="FFFFFF"/>
+                          </a:solidFill>
+                          <a:latin typeface="Calibri" pitchFamily="34" charset="0"/>
+                          <a:ea typeface="Calibri" pitchFamily="34" charset="-122"/>
+                          <a:cs typeface="Calibri" pitchFamily="34" charset="-120"/>
+                        </a:rPr>
+                        <a:t>Technique</a:t>
+                      </a:r>
+                      <a:endParaRPr lang="en-US" sz="1250" dirty="0"/>
+                    </a:p>
+                  </a:txBody>
+                  <a:tcPr marL="54864" marR="54864" marT="54864" marB="54864" anchor="ctr">
+                    <a:lnL w="9525" cap="flat" cmpd="sng" algn="ctr">
+                      <a:solidFill>
+                        <a:srgbClr val="BFBFBF"/>
+                      </a:solidFill>
+                      <a:prstDash val="solid"/>
+                      <a:round/>
+                      <a:headEnd type="none" w="med" len="med"/>
+                      <a:tailEnd type="none" w="med" len="med"/>
+                    </a:lnL>
+                    <a:lnR w="9525" cap="flat" cmpd="sng" algn="ctr">
+                      <a:solidFill>
+                        <a:srgbClr val="BFBFBF"/>
+                      </a:solidFill>
+                      <a:prstDash val="solid"/>
+                      <a:round/>
+                      <a:headEnd type="none" w="med" len="med"/>
+                      <a:tailEnd type="none" w="med" len="med"/>
+                    </a:lnR>
+                    <a:lnT w="9525" cap="flat" cmpd="sng" algn="ctr">
+                      <a:solidFill>
+                        <a:srgbClr val="BFBFBF"/>
+                      </a:solidFill>
+                      <a:prstDash val="solid"/>
+                      <a:round/>
+                      <a:headEnd type="none" w="med" len="med"/>
+                      <a:tailEnd type="none" w="med" len="med"/>
+                    </a:lnT>
+                    <a:lnB w="9525" cap="flat" cmpd="sng" algn="ctr">
+                      <a:solidFill>
+                        <a:srgbClr val="BFBFBF"/>
+                      </a:solidFill>
+                      <a:prstDash val="solid"/>
+                      <a:round/>
+                      <a:headEnd type="none" w="med" len="med"/>
+                      <a:tailEnd type="none" w="med" len="med"/>
+                    </a:lnB>
+                    <a:solidFill>
+                      <a:srgbClr val="1D2F82"/>
+                    </a:solidFill>
+                  </a:tcPr>
+                </a:tc>
+                <a:tc>
+                  <a:txBody>
+                    <a:bodyPr/>
+                    <a:lstStyle/>
+                    <a:p>
+                      <a:pPr marL="0" indent="0">
+                        <a:buNone/>
+                      </a:pPr>
+                      <a:r>
+                        <a:rPr lang="en-US" sz="1250" b="1" dirty="0">
+                          <a:solidFill>
+                            <a:srgbClr val="FFFFFF"/>
+                          </a:solidFill>
+                          <a:latin typeface="Calibri" pitchFamily="34" charset="0"/>
+                          <a:ea typeface="Calibri" pitchFamily="34" charset="-122"/>
+                          <a:cs typeface="Calibri" pitchFamily="34" charset="-120"/>
+                        </a:rPr>
+                        <a:t>Compliance score</a:t>
+                      </a:r>
+                      <a:endParaRPr lang="en-US" sz="1250" dirty="0"/>
+                    </a:p>
+                  </a:txBody>
+                  <a:tcPr marL="54864" marR="54864" marT="54864" marB="54864" anchor="ctr">
+                    <a:lnL w="9525" cap="flat" cmpd="sng" algn="ctr">
+                      <a:solidFill>
+                        <a:srgbClr val="BFBFBF"/>
+                      </a:solidFill>
+                      <a:prstDash val="solid"/>
+                      <a:round/>
+                      <a:headEnd type="none" w="med" len="med"/>
+                      <a:tailEnd type="none" w="med" len="med"/>
+                    </a:lnL>
+                    <a:lnR w="9525" cap="flat" cmpd="sng" algn="ctr">
+                      <a:solidFill>
+                        <a:srgbClr val="BFBFBF"/>
+                      </a:solidFill>
+                      <a:prstDash val="solid"/>
+                      <a:round/>
+                      <a:headEnd type="none" w="med" len="med"/>
+                      <a:tailEnd type="none" w="med" len="med"/>
+                    </a:lnR>
+                    <a:lnT w="9525" cap="flat" cmpd="sng" algn="ctr">
+                      <a:solidFill>
+                        <a:srgbClr val="BFBFBF"/>
+                      </a:solidFill>
+                      <a:prstDash val="solid"/>
+                      <a:round/>
+                      <a:headEnd type="none" w="med" len="med"/>
+                      <a:tailEnd type="none" w="med" len="med"/>
+                    </a:lnT>
+                    <a:lnB w="9525" cap="flat" cmpd="sng" algn="ctr">
+                      <a:solidFill>
+                        <a:srgbClr val="BFBFBF"/>
+                      </a:solidFill>
+                      <a:prstDash val="solid"/>
+                      <a:round/>
+                      <a:headEnd type="none" w="med" len="med"/>
+                      <a:tailEnd type="none" w="med" len="med"/>
+                    </a:lnB>
+                    <a:solidFill>
+                      <a:srgbClr val="1D2F82"/>
+                    </a:solidFill>
+                  </a:tcPr>
+                </a:tc>
+                <a:tc>
+                  <a:txBody>
+                    <a:bodyPr/>
+                    <a:lstStyle/>
+                    <a:p>
+                      <a:pPr marL="0" indent="0">
+                        <a:buNone/>
+                      </a:pPr>
+                      <a:r>
+                        <a:rPr lang="en-US" sz="1250" b="1" dirty="0">
+                          <a:solidFill>
+                            <a:srgbClr val="FFFFFF"/>
+                          </a:solidFill>
+                          <a:latin typeface="Calibri" pitchFamily="34" charset="0"/>
+                          <a:ea typeface="Calibri" pitchFamily="34" charset="-122"/>
+                          <a:cs typeface="Calibri" pitchFamily="34" charset="-120"/>
+                        </a:rPr>
+                        <a:t>Rules passed</a:t>
+                      </a:r>
+                      <a:endParaRPr lang="en-US" sz="1250" dirty="0"/>
+                    </a:p>
+                  </a:txBody>
+                  <a:tcPr marL="54864" marR="54864" marT="54864" marB="54864" anchor="ctr">
+                    <a:lnL w="9525" cap="flat" cmpd="sng" algn="ctr">
+                      <a:solidFill>
+                        <a:srgbClr val="BFBFBF"/>
+                      </a:solidFill>
+                      <a:prstDash val="solid"/>
+                      <a:round/>
+                      <a:headEnd type="none" w="med" len="med"/>
+                      <a:tailEnd type="none" w="med" len="med"/>
+                    </a:lnL>
+                    <a:lnR w="9525" cap="flat" cmpd="sng" algn="ctr">
+                      <a:solidFill>
+                        <a:srgbClr val="BFBFBF"/>
+                      </a:solidFill>
+                      <a:prstDash val="solid"/>
+                      <a:round/>
+                      <a:headEnd type="none" w="med" len="med"/>
+                      <a:tailEnd type="none" w="med" len="med"/>
+                    </a:lnR>
+                    <a:lnT w="9525" cap="flat" cmpd="sng" algn="ctr">
+                      <a:solidFill>
+                        <a:srgbClr val="BFBFBF"/>
+                      </a:solidFill>
+                      <a:prstDash val="solid"/>
+                      <a:round/>
+                      <a:headEnd type="none" w="med" len="med"/>
+                      <a:tailEnd type="none" w="med" len="med"/>
+                    </a:lnT>
+                    <a:lnB w="9525" cap="flat" cmpd="sng" algn="ctr">
+                      <a:solidFill>
+                        <a:srgbClr val="BFBFBF"/>
+                      </a:solidFill>
+                      <a:prstDash val="solid"/>
+                      <a:round/>
+                      <a:headEnd type="none" w="med" len="med"/>
+                      <a:tailEnd type="none" w="med" len="med"/>
+                    </a:lnB>
+                    <a:solidFill>
+                      <a:srgbClr val="1D2F82"/>
+                    </a:solidFill>
+                  </a:tcPr>
+                </a:tc>
+                <a:tc>
+                  <a:txBody>
+                    <a:bodyPr/>
+                    <a:lstStyle/>
+                    <a:p>
+                      <a:pPr marL="0" indent="0">
+                        <a:buNone/>
+                      </a:pPr>
+                      <a:r>
+                        <a:rPr lang="en-US" sz="1250" b="1" dirty="0">
+                          <a:solidFill>
+                            <a:srgbClr val="FFFFFF"/>
+                          </a:solidFill>
+                          <a:latin typeface="Calibri" pitchFamily="34" charset="0"/>
+                          <a:ea typeface="Calibri" pitchFamily="34" charset="-122"/>
+                          <a:cs typeface="Calibri" pitchFamily="34" charset="-120"/>
+                        </a:rPr>
+                        <a:t>Behaviour</a:t>
+                      </a:r>
+                      <a:endParaRPr lang="en-US" sz="1250" dirty="0"/>
+                    </a:p>
+                  </a:txBody>
+                  <a:tcPr marL="54864" marR="54864" marT="54864" marB="54864" anchor="ctr">
+                    <a:lnL w="9525" cap="flat" cmpd="sng" algn="ctr">
+                      <a:solidFill>
+                        <a:srgbClr val="BFBFBF"/>
+                      </a:solidFill>
+                      <a:prstDash val="solid"/>
+                      <a:round/>
+                      <a:headEnd type="none" w="med" len="med"/>
+                      <a:tailEnd type="none" w="med" len="med"/>
+                    </a:lnL>
+                    <a:lnR w="9525" cap="flat" cmpd="sng" algn="ctr">
+                      <a:solidFill>
+                        <a:srgbClr val="BFBFBF"/>
+                      </a:solidFill>
+                      <a:prstDash val="solid"/>
+                      <a:round/>
+                      <a:headEnd type="none" w="med" len="med"/>
+                      <a:tailEnd type="none" w="med" len="med"/>
+                    </a:lnR>
+                    <a:lnT w="9525" cap="flat" cmpd="sng" algn="ctr">
+                      <a:solidFill>
+                        <a:srgbClr val="BFBFBF"/>
+                      </a:solidFill>
+                      <a:prstDash val="solid"/>
+                      <a:round/>
+                      <a:headEnd type="none" w="med" len="med"/>
+                      <a:tailEnd type="none" w="med" len="med"/>
+                    </a:lnT>
+                    <a:lnB w="9525" cap="flat" cmpd="sng" algn="ctr">
+                      <a:solidFill>
+                        <a:srgbClr val="BFBFBF"/>
+                      </a:solidFill>
+                      <a:prstDash val="solid"/>
+                      <a:round/>
+                      <a:headEnd type="none" w="med" len="med"/>
+                      <a:tailEnd type="none" w="med" len="med"/>
+                    </a:lnB>
+                    <a:solidFill>
+                      <a:srgbClr val="1D2F82"/>
+                    </a:solidFill>
+                  </a:tcPr>
+                </a:tc>
+                <a:extLst>
+                  <a:ext uri="{0D108BD9-81ED-4DB2-BD59-A6C34878D82A}">
+                    <a16:rowId xmlns:a16="http://schemas.microsoft.com/office/drawing/2014/main" val="10001"/>
+                  </a:ext>
+                </a:extLst>
+              </a:tr>
+              <a:tr h="640000">
+                <a:tc>
+                  <a:txBody>
+                    <a:bodyPr/>
+                    <a:lstStyle/>
+                    <a:p>
+                      <a:pPr marL="0" indent="0">
+                        <a:buNone/>
+                      </a:pPr>
+                      <a:r>
+                        <a:rPr lang="en-US" sz="1200" dirty="0">
+                          <a:solidFill>
+                            <a:srgbClr val="000000"/>
+                          </a:solidFill>
+                          <a:latin typeface="Calibri" pitchFamily="34" charset="0"/>
+                          <a:ea typeface="Calibri" pitchFamily="34" charset="-122"/>
+                          <a:cs typeface="Calibri" pitchFamily="34" charset="-120"/>
+                        </a:rPr>
+                        <a:t>compliance-aware (ours)</a:t>
+                      </a:r>
+                      <a:endParaRPr lang="en-US" sz="1200" dirty="0"/>
+                    </a:p>
+                  </a:txBody>
+                  <a:tcPr marL="54864" marR="54864" marT="54864" marB="54864" anchor="ctr">
+                    <a:lnL w="9525" cap="flat" cmpd="sng" algn="ctr">
+                      <a:solidFill>
+                        <a:srgbClr val="BFBFBF"/>
+                      </a:solidFill>
+                      <a:prstDash val="solid"/>
+                      <a:round/>
+                      <a:headEnd type="none" w="med" len="med"/>
+                      <a:tailEnd type="none" w="med" len="med"/>
+                    </a:lnL>
+                    <a:lnR w="9525" cap="flat" cmpd="sng" algn="ctr">
+                      <a:solidFill>
+                        <a:srgbClr val="BFBFBF"/>
+                      </a:solidFill>
+                      <a:prstDash val="solid"/>
+                      <a:round/>
+                      <a:headEnd type="none" w="med" len="med"/>
+                      <a:tailEnd type="none" w="med" len="med"/>
+                    </a:lnR>
+                    <a:lnT w="9525" cap="flat" cmpd="sng" algn="ctr">
+                      <a:solidFill>
+                        <a:srgbClr val="BFBFBF"/>
+                      </a:solidFill>
+                      <a:prstDash val="solid"/>
+                      <a:round/>
+                      <a:headEnd type="none" w="med" len="med"/>
+                      <a:tailEnd type="none" w="med" len="med"/>
+                    </a:lnT>
+                    <a:lnB w="9525" cap="flat" cmpd="sng" algn="ctr">
+                      <a:solidFill>
+                        <a:srgbClr val="BFBFBF"/>
+                      </a:solidFill>
+                      <a:prstDash val="solid"/>
+                      <a:round/>
+                      <a:headEnd type="none" w="med" len="med"/>
+                      <a:tailEnd type="none" w="med" len="med"/>
+                    </a:lnB>
+                  </a:tcPr>
+                </a:tc>
+                <a:tc>
+                  <a:txBody>
+                    <a:bodyPr/>
+                    <a:lstStyle/>
+                    <a:p>
+                      <a:pPr marL="0" indent="0">
+                        <a:buNone/>
+                      </a:pPr>
+                      <a:r>
+                        <a:rPr lang="en-US" sz="1400" b="1" dirty="0">
+                          <a:solidFill>
+                            <a:srgbClr val="1D2F82"/>
+                          </a:solidFill>
+                          <a:latin typeface="Calibri" pitchFamily="34" charset="0"/>
+                          <a:ea typeface="Calibri" pitchFamily="34" charset="-122"/>
+                          <a:cs typeface="Calibri" pitchFamily="34" charset="-120"/>
+                        </a:rPr>
+                        <a:t>1.000</a:t>
+                      </a:r>
+                      <a:endParaRPr lang="en-US" sz="1400" dirty="0"/>
+                    </a:p>
+                  </a:txBody>
+                  <a:tcPr marL="54864" marR="54864" marT="54864" marB="54864" anchor="ctr">
+                    <a:lnL w="9525" cap="flat" cmpd="sng" algn="ctr">
+                      <a:solidFill>
+                        <a:srgbClr val="BFBFBF"/>
+                      </a:solidFill>
+                      <a:prstDash val="solid"/>
+                      <a:round/>
+                      <a:headEnd type="none" w="med" len="med"/>
+                      <a:tailEnd type="none" w="med" len="med"/>
+                    </a:lnL>
+                    <a:lnR w="9525" cap="flat" cmpd="sng" algn="ctr">
+                      <a:solidFill>
+                        <a:srgbClr val="BFBFBF"/>
+                      </a:solidFill>
+                      <a:prstDash val="solid"/>
+                      <a:round/>
+                      <a:headEnd type="none" w="med" len="med"/>
+                      <a:tailEnd type="none" w="med" len="med"/>
+                    </a:lnR>
+                    <a:lnT w="9525" cap="flat" cmpd="sng" algn="ctr">
+                      <a:solidFill>
+                        <a:srgbClr val="BFBFBF"/>
+                      </a:solidFill>
+                      <a:prstDash val="solid"/>
+                      <a:round/>
+                      <a:headEnd type="none" w="med" len="med"/>
+                      <a:tailEnd type="none" w="med" len="med"/>
+                    </a:lnT>
+                    <a:lnB w="9525" cap="flat" cmpd="sng" algn="ctr">
+                      <a:solidFill>
+                        <a:srgbClr val="BFBFBF"/>
+                      </a:solidFill>
+                      <a:prstDash val="solid"/>
+                      <a:round/>
+                      <a:headEnd type="none" w="med" len="med"/>
+                      <a:tailEnd type="none" w="med" len="med"/>
+                    </a:lnB>
+                  </a:tcPr>
+                </a:tc>
+                <a:tc>
+                  <a:txBody>
+                    <a:bodyPr/>
+                    <a:lstStyle/>
+                    <a:p>
+                      <a:pPr marL="0" indent="0">
+                        <a:buNone/>
+                      </a:pPr>
+                      <a:r>
+                        <a:rPr lang="en-US" sz="1200" dirty="0">
+                          <a:solidFill>
+                            <a:srgbClr val="000000"/>
+                          </a:solidFill>
+                          <a:latin typeface="Calibri" pitchFamily="34" charset="0"/>
+                          <a:ea typeface="Calibri" pitchFamily="34" charset="-122"/>
+                          <a:cs typeface="Calibri" pitchFamily="34" charset="-120"/>
+                        </a:rPr>
+                        <a:t>7 / 7</a:t>
+                      </a:r>
+                      <a:endParaRPr lang="en-US" sz="1200" dirty="0"/>
+                    </a:p>
+                  </a:txBody>
+                  <a:tcPr marL="54864" marR="54864" marT="54864" marB="54864" anchor="ctr">
+                    <a:lnL w="9525" cap="flat" cmpd="sng" algn="ctr">
+                      <a:solidFill>
+                        <a:srgbClr val="BFBFBF"/>
+                      </a:solidFill>
+                      <a:prstDash val="solid"/>
+                      <a:round/>
+                      <a:headEnd type="none" w="med" len="med"/>
+                      <a:tailEnd type="none" w="med" len="med"/>
+                    </a:lnL>
+                    <a:lnR w="9525" cap="flat" cmpd="sng" algn="ctr">
+                      <a:solidFill>
+                        <a:srgbClr val="BFBFBF"/>
+                      </a:solidFill>
+                      <a:prstDash val="solid"/>
+                      <a:round/>
+                      <a:headEnd type="none" w="med" len="med"/>
+                      <a:tailEnd type="none" w="med" len="med"/>
+                    </a:lnR>
+                    <a:lnT w="9525" cap="flat" cmpd="sng" algn="ctr">
+                      <a:solidFill>
+                        <a:srgbClr val="BFBFBF"/>
+                      </a:solidFill>
+                      <a:prstDash val="solid"/>
+                      <a:round/>
+                      <a:headEnd type="none" w="med" len="med"/>
+                      <a:tailEnd type="none" w="med" len="med"/>
+                    </a:lnT>
+                    <a:lnB w="9525" cap="flat" cmpd="sng" algn="ctr">
+                      <a:solidFill>
+                        <a:srgbClr val="BFBFBF"/>
+                      </a:solidFill>
+                      <a:prstDash val="solid"/>
+                      <a:round/>
+                      <a:headEnd type="none" w="med" len="med"/>
+                      <a:tailEnd type="none" w="med" len="med"/>
+                    </a:lnB>
+                  </a:tcPr>
+                </a:tc>
+                <a:tc>
+                  <a:txBody>
+                    <a:bodyPr/>
+                    <a:lstStyle/>
+                    <a:p>
+                      <a:pPr marL="0" indent="0">
+                        <a:buNone/>
+                      </a:pPr>
+                      <a:r>
+                        <a:rPr lang="en-US" sz="1100" dirty="0">
+                          <a:solidFill>
+                            <a:srgbClr val="000000"/>
+                          </a:solidFill>
+                          <a:latin typeface="Calibri" pitchFamily="34" charset="0"/>
+                          <a:ea typeface="Calibri" pitchFamily="34" charset="-122"/>
+                          <a:cs typeface="Calibri" pitchFamily="34" charset="-120"/>
+                        </a:rPr>
+                        <a:t>Pulls only the fields each task needs; files a full manifest</a:t>
+                      </a:r>
+                      <a:endParaRPr lang="en-US" sz="1100" dirty="0"/>
+                    </a:p>
+                  </a:txBody>
+                  <a:tcPr marL="54864" marR="54864" marT="54864" marB="54864" anchor="ctr">
+                    <a:lnL w="9525" cap="flat" cmpd="sng" algn="ctr">
+                      <a:solidFill>
+                        <a:srgbClr val="BFBFBF"/>
+                      </a:solidFill>
+                      <a:prstDash val="solid"/>
+                      <a:round/>
+                      <a:headEnd type="none" w="med" len="med"/>
+                      <a:tailEnd type="none" w="med" len="med"/>
+                    </a:lnL>
+                    <a:lnR w="9525" cap="flat" cmpd="sng" algn="ctr">
+                      <a:solidFill>
+                        <a:srgbClr val="BFBFBF"/>
+                      </a:solidFill>
+                      <a:prstDash val="solid"/>
+                      <a:round/>
+                      <a:headEnd type="none" w="med" len="med"/>
+                      <a:tailEnd type="none" w="med" len="med"/>
+                    </a:lnR>
+                    <a:lnT w="9525" cap="flat" cmpd="sng" algn="ctr">
+                      <a:solidFill>
+                        <a:srgbClr val="BFBFBF"/>
+                      </a:solidFill>
+                      <a:prstDash val="solid"/>
+                      <a:round/>
+                      <a:headEnd type="none" w="med" len="med"/>
+                      <a:tailEnd type="none" w="med" len="med"/>
+                    </a:lnT>
+                    <a:lnB w="9525" cap="flat" cmpd="sng" algn="ctr">
+                      <a:solidFill>
+                        <a:srgbClr val="BFBFBF"/>
+                      </a:solidFill>
+                      <a:prstDash val="solid"/>
+                      <a:round/>
+                      <a:headEnd type="none" w="med" len="med"/>
+                      <a:tailEnd type="none" w="med" len="med"/>
+                    </a:lnB>
+                  </a:tcPr>
+                </a:tc>
+                <a:extLst>
+                  <a:ext uri="{0D108BD9-81ED-4DB2-BD59-A6C34878D82A}">
+                    <a16:rowId xmlns:a16="http://schemas.microsoft.com/office/drawing/2014/main" val="10001"/>
+                  </a:ext>
+                </a:extLst>
+              </a:tr>
+              <a:tr h="640000">
+                <a:tc>
+                  <a:txBody>
+                    <a:bodyPr/>
+                    <a:lstStyle/>
+                    <a:p>
+                      <a:pPr marL="0" indent="0">
+                        <a:buNone/>
+                      </a:pPr>
+                      <a:r>
+                        <a:rPr lang="en-US" sz="1200" dirty="0">
+                          <a:solidFill>
+                            <a:srgbClr val="000000"/>
+                          </a:solidFill>
+                          <a:latin typeface="Calibri" pitchFamily="34" charset="0"/>
+                          <a:ea typeface="Calibri" pitchFamily="34" charset="-122"/>
+                          <a:cs typeface="Calibri" pitchFamily="34" charset="-120"/>
+                        </a:rPr>
+                        <a:t>minimising, undocumented</a:t>
+                      </a:r>
+                      <a:endParaRPr lang="en-US" sz="1200" dirty="0"/>
+                    </a:p>
+                  </a:txBody>
+                  <a:tcPr marL="54864" marR="54864" marT="54864" marB="54864" anchor="ctr">
+                    <a:lnL w="9525" cap="flat" cmpd="sng" algn="ctr">
+                      <a:solidFill>
+                        <a:srgbClr val="BFBFBF"/>
+                      </a:solidFill>
+                      <a:prstDash val="solid"/>
+                      <a:round/>
+                      <a:headEnd type="none" w="med" len="med"/>
+                      <a:tailEnd type="none" w="med" len="med"/>
+                    </a:lnL>
+                    <a:lnR w="9525" cap="flat" cmpd="sng" algn="ctr">
+                      <a:solidFill>
+                        <a:srgbClr val="BFBFBF"/>
+                      </a:solidFill>
+                      <a:prstDash val="solid"/>
+                      <a:round/>
+                      <a:headEnd type="none" w="med" len="med"/>
+                      <a:tailEnd type="none" w="med" len="med"/>
+                    </a:lnR>
+                    <a:lnT w="9525" cap="flat" cmpd="sng" algn="ctr">
+                      <a:solidFill>
+                        <a:srgbClr val="BFBFBF"/>
+                      </a:solidFill>
+                      <a:prstDash val="solid"/>
+                      <a:round/>
+                      <a:headEnd type="none" w="med" len="med"/>
+                      <a:tailEnd type="none" w="med" len="med"/>
+                    </a:lnT>
+                    <a:lnB w="9525" cap="flat" cmpd="sng" algn="ctr">
+                      <a:solidFill>
+                        <a:srgbClr val="BFBFBF"/>
+                      </a:solidFill>
+                      <a:prstDash val="solid"/>
+                      <a:round/>
+                      <a:headEnd type="none" w="med" len="med"/>
+                      <a:tailEnd type="none" w="med" len="med"/>
+                    </a:lnB>
+                  </a:tcPr>
+                </a:tc>
+                <a:tc>
+                  <a:txBody>
+                    <a:bodyPr/>
+                    <a:lstStyle/>
+                    <a:p>
+                      <a:pPr marL="0" indent="0">
+                        <a:buNone/>
+                      </a:pPr>
+                      <a:r>
+                        <a:rPr lang="en-US" sz="1400" b="1" dirty="0">
+                          <a:solidFill>
+                            <a:srgbClr val="1D2F82"/>
+                          </a:solidFill>
+                          <a:latin typeface="Calibri" pitchFamily="34" charset="0"/>
+                          <a:ea typeface="Calibri" pitchFamily="34" charset="-122"/>
+                          <a:cs typeface="Calibri" pitchFamily="34" charset="-120"/>
+                        </a:rPr>
+                        <a:t>0.500</a:t>
+                      </a:r>
+                      <a:endParaRPr lang="en-US" sz="1400" dirty="0"/>
+                    </a:p>
+                  </a:txBody>
+                  <a:tcPr marL="54864" marR="54864" marT="54864" marB="54864" anchor="ctr">
+                    <a:lnL w="9525" cap="flat" cmpd="sng" algn="ctr">
+                      <a:solidFill>
+                        <a:srgbClr val="BFBFBF"/>
+                      </a:solidFill>
+                      <a:prstDash val="solid"/>
+                      <a:round/>
+                      <a:headEnd type="none" w="med" len="med"/>
+                      <a:tailEnd type="none" w="med" len="med"/>
+                    </a:lnL>
+                    <a:lnR w="9525" cap="flat" cmpd="sng" algn="ctr">
+                      <a:solidFill>
+                        <a:srgbClr val="BFBFBF"/>
+                      </a:solidFill>
+                      <a:prstDash val="solid"/>
+                      <a:round/>
+                      <a:headEnd type="none" w="med" len="med"/>
+                      <a:tailEnd type="none" w="med" len="med"/>
+                    </a:lnR>
+                    <a:lnT w="9525" cap="flat" cmpd="sng" algn="ctr">
+                      <a:solidFill>
+                        <a:srgbClr val="BFBFBF"/>
+                      </a:solidFill>
+                      <a:prstDash val="solid"/>
+                      <a:round/>
+                      <a:headEnd type="none" w="med" len="med"/>
+                      <a:tailEnd type="none" w="med" len="med"/>
+                    </a:lnT>
+                    <a:lnB w="9525" cap="flat" cmpd="sng" algn="ctr">
+                      <a:solidFill>
+                        <a:srgbClr val="BFBFBF"/>
+                      </a:solidFill>
+                      <a:prstDash val="solid"/>
+                      <a:round/>
+                      <a:headEnd type="none" w="med" len="med"/>
+                      <a:tailEnd type="none" w="med" len="med"/>
+                    </a:lnB>
+                  </a:tcPr>
+                </a:tc>
+                <a:tc>
+                  <a:txBody>
+                    <a:bodyPr/>
+                    <a:lstStyle/>
+                    <a:p>
+                      <a:pPr marL="0" indent="0">
+                        <a:buNone/>
+                      </a:pPr>
+                      <a:r>
+                        <a:rPr lang="en-US" sz="1200" dirty="0">
+                          <a:solidFill>
+                            <a:srgbClr val="000000"/>
+                          </a:solidFill>
+                          <a:latin typeface="Calibri" pitchFamily="34" charset="0"/>
+                          <a:ea typeface="Calibri" pitchFamily="34" charset="-122"/>
+                          <a:cs typeface="Calibri" pitchFamily="34" charset="-120"/>
+                        </a:rPr>
+                        <a:t>2 / 7</a:t>
+                      </a:r>
+                      <a:endParaRPr lang="en-US" sz="1200" dirty="0"/>
+                    </a:p>
+                  </a:txBody>
+                  <a:tcPr marL="54864" marR="54864" marT="54864" marB="54864" anchor="ctr">
+                    <a:lnL w="9525" cap="flat" cmpd="sng" algn="ctr">
+                      <a:solidFill>
+                        <a:srgbClr val="BFBFBF"/>
+                      </a:solidFill>
+                      <a:prstDash val="solid"/>
+                      <a:round/>
+                      <a:headEnd type="none" w="med" len="med"/>
+                      <a:tailEnd type="none" w="med" len="med"/>
+                    </a:lnL>
+                    <a:lnR w="9525" cap="flat" cmpd="sng" algn="ctr">
+                      <a:solidFill>
+                        <a:srgbClr val="BFBFBF"/>
+                      </a:solidFill>
+                      <a:prstDash val="solid"/>
+                      <a:round/>
+                      <a:headEnd type="none" w="med" len="med"/>
+                      <a:tailEnd type="none" w="med" len="med"/>
+                    </a:lnR>
+                    <a:lnT w="9525" cap="flat" cmpd="sng" algn="ctr">
+                      <a:solidFill>
+                        <a:srgbClr val="BFBFBF"/>
+                      </a:solidFill>
+                      <a:prstDash val="solid"/>
+                      <a:round/>
+                      <a:headEnd type="none" w="med" len="med"/>
+                      <a:tailEnd type="none" w="med" len="med"/>
+                    </a:lnT>
+                    <a:lnB w="9525" cap="flat" cmpd="sng" algn="ctr">
+                      <a:solidFill>
+                        <a:srgbClr val="BFBFBF"/>
+                      </a:solidFill>
+                      <a:prstDash val="solid"/>
+                      <a:round/>
+                      <a:headEnd type="none" w="med" len="med"/>
+                      <a:tailEnd type="none" w="med" len="med"/>
+                    </a:lnB>
+                  </a:tcPr>
+                </a:tc>
+                <a:tc>
+                  <a:txBody>
+                    <a:bodyPr/>
+                    <a:lstStyle/>
+                    <a:p>
+                      <a:pPr marL="0" indent="0">
+                        <a:buNone/>
+                      </a:pPr>
+                      <a:r>
+                        <a:rPr lang="en-US" sz="1100" dirty="0">
+                          <a:solidFill>
+                            <a:srgbClr val="000000"/>
+                          </a:solidFill>
+                          <a:latin typeface="Calibri" pitchFamily="34" charset="0"/>
+                          <a:ea typeface="Calibri" pitchFamily="34" charset="-122"/>
+                          <a:cs typeface="Calibri" pitchFamily="34" charset="-120"/>
+                        </a:rPr>
+                        <a:t>Pulls only what it needs, but files no compliance paperwork</a:t>
+                      </a:r>
+                      <a:endParaRPr lang="en-US" sz="1100" dirty="0"/>
+                    </a:p>
+                  </a:txBody>
+                  <a:tcPr marL="54864" marR="54864" marT="54864" marB="54864" anchor="ctr">
+                    <a:lnL w="9525" cap="flat" cmpd="sng" algn="ctr">
+                      <a:solidFill>
+                        <a:srgbClr val="BFBFBF"/>
+                      </a:solidFill>
+                      <a:prstDash val="solid"/>
+                      <a:round/>
+                      <a:headEnd type="none" w="med" len="med"/>
+                      <a:tailEnd type="none" w="med" len="med"/>
+                    </a:lnL>
+                    <a:lnR w="9525" cap="flat" cmpd="sng" algn="ctr">
+                      <a:solidFill>
+                        <a:srgbClr val="BFBFBF"/>
+                      </a:solidFill>
+                      <a:prstDash val="solid"/>
+                      <a:round/>
+                      <a:headEnd type="none" w="med" len="med"/>
+                      <a:tailEnd type="none" w="med" len="med"/>
+                    </a:lnR>
+                    <a:lnT w="9525" cap="flat" cmpd="sng" algn="ctr">
+                      <a:solidFill>
+                        <a:srgbClr val="BFBFBF"/>
+                      </a:solidFill>
+                      <a:prstDash val="solid"/>
+                      <a:round/>
+                      <a:headEnd type="none" w="med" len="med"/>
+                      <a:tailEnd type="none" w="med" len="med"/>
+                    </a:lnT>
+                    <a:lnB w="9525" cap="flat" cmpd="sng" algn="ctr">
+                      <a:solidFill>
+                        <a:srgbClr val="BFBFBF"/>
+                      </a:solidFill>
+                      <a:prstDash val="solid"/>
+                      <a:round/>
+                      <a:headEnd type="none" w="med" len="med"/>
+                      <a:tailEnd type="none" w="med" len="med"/>
+                    </a:lnB>
+                  </a:tcPr>
+                </a:tc>
+                <a:extLst>
+                  <a:ext uri="{0D108BD9-81ED-4DB2-BD59-A6C34878D82A}">
+                    <a16:rowId xmlns:a16="http://schemas.microsoft.com/office/drawing/2014/main" val="10001"/>
+                  </a:ext>
+                </a:extLst>
+              </a:tr>
+              <a:tr h="640000">
+                <a:tc>
+                  <a:txBody>
+                    <a:bodyPr/>
+                    <a:lstStyle/>
+                    <a:p>
+                      <a:pPr marL="0" indent="0">
+                        <a:buNone/>
+                      </a:pPr>
+                      <a:r>
+                        <a:rPr lang="en-US" sz="1200" dirty="0">
+                          <a:solidFill>
+                            <a:srgbClr val="000000"/>
+                          </a:solidFill>
+                          <a:latin typeface="Calibri" pitchFamily="34" charset="0"/>
+                          <a:ea typeface="Calibri" pitchFamily="34" charset="-122"/>
+                          <a:cs typeface="Calibri" pitchFamily="34" charset="-120"/>
+                        </a:rPr>
+                        <a:t>unconstrained (baseline)</a:t>
+                      </a:r>
+                      <a:endParaRPr lang="en-US" sz="1200" dirty="0"/>
+                    </a:p>
+                  </a:txBody>
+                  <a:tcPr marL="54864" marR="54864" marT="54864" marB="54864" anchor="ctr">
+                    <a:lnL w="9525" cap="flat" cmpd="sng" algn="ctr">
+                      <a:solidFill>
+                        <a:srgbClr val="BFBFBF"/>
+                      </a:solidFill>
+                      <a:prstDash val="solid"/>
+                      <a:round/>
+                      <a:headEnd type="none" w="med" len="med"/>
+                      <a:tailEnd type="none" w="med" len="med"/>
+                    </a:lnL>
+                    <a:lnR w="9525" cap="flat" cmpd="sng" algn="ctr">
+                      <a:solidFill>
+                        <a:srgbClr val="BFBFBF"/>
+                      </a:solidFill>
+                      <a:prstDash val="solid"/>
+                      <a:round/>
+                      <a:headEnd type="none" w="med" len="med"/>
+                      <a:tailEnd type="none" w="med" len="med"/>
+                    </a:lnR>
+                    <a:lnT w="9525" cap="flat" cmpd="sng" algn="ctr">
+                      <a:solidFill>
+                        <a:srgbClr val="BFBFBF"/>
+                      </a:solidFill>
+                      <a:prstDash val="solid"/>
+                      <a:round/>
+                      <a:headEnd type="none" w="med" len="med"/>
+                      <a:tailEnd type="none" w="med" len="med"/>
+                    </a:lnT>
+                    <a:lnB w="9525" cap="flat" cmpd="sng" algn="ctr">
+                      <a:solidFill>
+                        <a:srgbClr val="BFBFBF"/>
+                      </a:solidFill>
+                      <a:prstDash val="solid"/>
+                      <a:round/>
+                      <a:headEnd type="none" w="med" len="med"/>
+                      <a:tailEnd type="none" w="med" len="med"/>
+                    </a:lnB>
+                  </a:tcPr>
+                </a:tc>
+                <a:tc>
+                  <a:txBody>
+                    <a:bodyPr/>
+                    <a:lstStyle/>
+                    <a:p>
+                      <a:pPr marL="0" indent="0">
+                        <a:buNone/>
+                      </a:pPr>
+                      <a:r>
+                        <a:rPr lang="en-US" sz="1400" b="1" dirty="0">
+                          <a:solidFill>
+                            <a:srgbClr val="1D2F82"/>
+                          </a:solidFill>
+                          <a:latin typeface="Calibri" pitchFamily="34" charset="0"/>
+                          <a:ea typeface="Calibri" pitchFamily="34" charset="-122"/>
+                          <a:cs typeface="Calibri" pitchFamily="34" charset="-120"/>
+                        </a:rPr>
+                        <a:t>0.131</a:t>
+                      </a:r>
+                      <a:endParaRPr lang="en-US" sz="1400" dirty="0"/>
+                    </a:p>
+                  </a:txBody>
+                  <a:tcPr marL="54864" marR="54864" marT="54864" marB="54864" anchor="ctr">
+                    <a:lnL w="9525" cap="flat" cmpd="sng" algn="ctr">
+                      <a:solidFill>
+                        <a:srgbClr val="BFBFBF"/>
+                      </a:solidFill>
+                      <a:prstDash val="solid"/>
+                      <a:round/>
+                      <a:headEnd type="none" w="med" len="med"/>
+                      <a:tailEnd type="none" w="med" len="med"/>
+                    </a:lnL>
+                    <a:lnR w="9525" cap="flat" cmpd="sng" algn="ctr">
+                      <a:solidFill>
+                        <a:srgbClr val="BFBFBF"/>
+                      </a:solidFill>
+                      <a:prstDash val="solid"/>
+                      <a:round/>
+                      <a:headEnd type="none" w="med" len="med"/>
+                      <a:tailEnd type="none" w="med" len="med"/>
+                    </a:lnR>
+                    <a:lnT w="9525" cap="flat" cmpd="sng" algn="ctr">
+                      <a:solidFill>
+                        <a:srgbClr val="BFBFBF"/>
+                      </a:solidFill>
+                      <a:prstDash val="solid"/>
+                      <a:round/>
+                      <a:headEnd type="none" w="med" len="med"/>
+                      <a:tailEnd type="none" w="med" len="med"/>
+                    </a:lnT>
+                    <a:lnB w="9525" cap="flat" cmpd="sng" algn="ctr">
+                      <a:solidFill>
+                        <a:srgbClr val="BFBFBF"/>
+                      </a:solidFill>
+                      <a:prstDash val="solid"/>
+                      <a:round/>
+                      <a:headEnd type="none" w="med" len="med"/>
+                      <a:tailEnd type="none" w="med" len="med"/>
+                    </a:lnB>
+                  </a:tcPr>
+                </a:tc>
+                <a:tc>
+                  <a:txBody>
+                    <a:bodyPr/>
+                    <a:lstStyle/>
+                    <a:p>
+                      <a:pPr marL="0" indent="0">
+                        <a:buNone/>
+                      </a:pPr>
+                      <a:r>
+                        <a:rPr lang="en-US" sz="1200" dirty="0">
+                          <a:solidFill>
+                            <a:srgbClr val="000000"/>
+                          </a:solidFill>
+                          <a:latin typeface="Calibri" pitchFamily="34" charset="0"/>
+                          <a:ea typeface="Calibri" pitchFamily="34" charset="-122"/>
+                          <a:cs typeface="Calibri" pitchFamily="34" charset="-120"/>
+                        </a:rPr>
+                        <a:t>0 / 7</a:t>
+                      </a:r>
+                      <a:endParaRPr lang="en-US" sz="1200" dirty="0"/>
+                    </a:p>
+                  </a:txBody>
+                  <a:tcPr marL="54864" marR="54864" marT="54864" marB="54864" anchor="ctr">
+                    <a:lnL w="9525" cap="flat" cmpd="sng" algn="ctr">
+                      <a:solidFill>
+                        <a:srgbClr val="BFBFBF"/>
+                      </a:solidFill>
+                      <a:prstDash val="solid"/>
+                      <a:round/>
+                      <a:headEnd type="none" w="med" len="med"/>
+                      <a:tailEnd type="none" w="med" len="med"/>
+                    </a:lnL>
+                    <a:lnR w="9525" cap="flat" cmpd="sng" algn="ctr">
+                      <a:solidFill>
+                        <a:srgbClr val="BFBFBF"/>
+                      </a:solidFill>
+                      <a:prstDash val="solid"/>
+                      <a:round/>
+                      <a:headEnd type="none" w="med" len="med"/>
+                      <a:tailEnd type="none" w="med" len="med"/>
+                    </a:lnR>
+                    <a:lnT w="9525" cap="flat" cmpd="sng" algn="ctr">
+                      <a:solidFill>
+                        <a:srgbClr val="BFBFBF"/>
+                      </a:solidFill>
+                      <a:prstDash val="solid"/>
+                      <a:round/>
+                      <a:headEnd type="none" w="med" len="med"/>
+                      <a:tailEnd type="none" w="med" len="med"/>
+                    </a:lnT>
+                    <a:lnB w="9525" cap="flat" cmpd="sng" algn="ctr">
+                      <a:solidFill>
+                        <a:srgbClr val="BFBFBF"/>
+                      </a:solidFill>
+                      <a:prstDash val="solid"/>
+                      <a:round/>
+                      <a:headEnd type="none" w="med" len="med"/>
+                      <a:tailEnd type="none" w="med" len="med"/>
+                    </a:lnB>
+                  </a:tcPr>
+                </a:tc>
+                <a:tc>
+                  <a:txBody>
+                    <a:bodyPr/>
+                    <a:lstStyle/>
+                    <a:p>
+                      <a:pPr marL="0" indent="0">
+                        <a:buNone/>
+                      </a:pPr>
+                      <a:r>
+                        <a:rPr lang="en-US" sz="1100" dirty="0">
+                          <a:solidFill>
+                            <a:srgbClr val="000000"/>
+                          </a:solidFill>
+                          <a:latin typeface="Calibri" pitchFamily="34" charset="0"/>
+                          <a:ea typeface="Calibri" pitchFamily="34" charset="-122"/>
+                          <a:cs typeface="Calibri" pitchFamily="34" charset="-120"/>
+                        </a:rPr>
+                        <a:t>Ignores the task; sweeps every field of every layer it can reach</a:t>
+                      </a:r>
+                      <a:endParaRPr lang="en-US" sz="1100" dirty="0"/>
+                    </a:p>
+                  </a:txBody>
+                  <a:tcPr marL="54864" marR="54864" marT="54864" marB="54864" anchor="ctr">
+                    <a:lnL w="9525" cap="flat" cmpd="sng" algn="ctr">
+                      <a:solidFill>
+                        <a:srgbClr val="BFBFBF"/>
+                      </a:solidFill>
+                      <a:prstDash val="solid"/>
+                      <a:round/>
+                      <a:headEnd type="none" w="med" len="med"/>
+                      <a:tailEnd type="none" w="med" len="med"/>
+                    </a:lnL>
+                    <a:lnR w="9525" cap="flat" cmpd="sng" algn="ctr">
+                      <a:solidFill>
+                        <a:srgbClr val="BFBFBF"/>
+                      </a:solidFill>
+                      <a:prstDash val="solid"/>
+                      <a:round/>
+                      <a:headEnd type="none" w="med" len="med"/>
+                      <a:tailEnd type="none" w="med" len="med"/>
+                    </a:lnR>
+                    <a:lnT w="9525" cap="flat" cmpd="sng" algn="ctr">
+                      <a:solidFill>
+                        <a:srgbClr val="BFBFBF"/>
+                      </a:solidFill>
+                      <a:prstDash val="solid"/>
+                      <a:round/>
+                      <a:headEnd type="none" w="med" len="med"/>
+                      <a:tailEnd type="none" w="med" len="med"/>
+                    </a:lnT>
+                    <a:lnB w="9525" cap="flat" cmpd="sng" algn="ctr">
+                      <a:solidFill>
+                        <a:srgbClr val="BFBFBF"/>
+                      </a:solidFill>
+                      <a:prstDash val="solid"/>
+                      <a:round/>
+                      <a:headEnd type="none" w="med" len="med"/>
+                      <a:tailEnd type="none" w="med" len="med"/>
+                    </a:lnB>
+                  </a:tcPr>
+                </a:tc>
+                <a:extLst>
+                  <a:ext uri="{0D108BD9-81ED-4DB2-BD59-A6C34878D82A}">
+                    <a16:rowId xmlns:a16="http://schemas.microsoft.com/office/drawing/2014/main" val="10001"/>
+                  </a:ext>
+                </a:extLst>
+              </a:tr>
+            </a:tbl>
+          </a:graphicData>
+        </a:graphic>
+      </p:graphicFrame>
       <p:sp>
         <p:nvSpPr>
-          <p:cNvPr id="21" name="Screenshot Placeholder"/>
-          <p:cNvSpPr/>
-          <p:nvPr/>
-        </p:nvSpPr>
-        <p:spPr>
-          <a:xfrm>
-            <a:off x="1200000" y="2650000"/>
-            <a:ext cx="9792000" cy="2600000"/>
-          </a:xfrm>
-          <a:prstGeom prst="rect">
-            <a:avLst/>
-          </a:prstGeom>
-          <a:solidFill>
-            <a:srgbClr val="FFFFFF"/>
-          </a:solidFill>
-          <a:ln w="15875">
-            <a:solidFill>
-              <a:srgbClr val="1D2F82"/>
-            </a:solidFill>
-            <a:prstDash val="dash"/>
-          </a:ln>
-        </p:spPr>
-        <p:txBody>
-          <a:bodyPr wrap="square" lIns="91440" tIns="45720" rIns="91440" bIns="45720" rtlCol="0" anchor="ctr"/>
-          <a:lstStyle/>
-          <a:p>
-            <a:pPr algn="ctr">
-              <a:buNone/>
-            </a:pPr>
-            <a:r>
-              <a:rPr lang="en-US" sz="1300" dirty="0">
-                <a:solidFill>
-                  <a:srgbClr val="808080"/>
-                </a:solidFill>
-                <a:latin typeface="Calibri" pitchFamily="34" charset="0"/>
-                <a:ea typeface="Calibri" pitchFamily="34" charset="-122"/>
-                <a:cs typeface="Calibri" pitchFamily="34" charset="-120"/>
-              </a:rPr>
-              <a:t>[ Screenshot: score_extraction_run.py — compliant run, per-rule table, overall ≈ 1.0 ]</a:t>
-            </a:r>
-          </a:p>
-        </p:txBody>
-      </p:sp>
-      <p:sp>
-        <p:nvSpPr>
-          <p:cNvPr id="22" name="Caption"/>
+          <p:cNvPr id="22" name="Text 22"/>
           <p:cNvSpPr txBox="1"/>
           <p:nvPr/>
         </p:nvSpPr>
         <p:spPr>
           <a:xfrm>
-            <a:off x="1200000" y="5380000"/>
-            <a:ext cx="9792000" cy="380000"/>
+            <a:off x="640080" y="4950000"/>
+            <a:ext cx="10900000" cy="1150000"/>
           </a:xfrm>
           <a:prstGeom prst="rect">
             <a:avLst/>
@@ -9867,14 +10864,18 @@
           <a:ln/>
         </p:spPr>
         <p:txBody>
-          <a:bodyPr wrap="square" lIns="0" tIns="0" rIns="0" bIns="0" rtlCol="0" anchor="ctr"/>
+          <a:bodyPr wrap="square" lIns="0" tIns="0" rIns="0" bIns="0" rtlCol="0" anchor="t"/>
           <a:lstStyle/>
           <a:p>
-            <a:pPr algn="ctr">
-              <a:buNone/>
+            <a:pPr marL="177800" indent="-177800">
+              <a:spcAft>
+                <a:spcPts val="400"/>
+              </a:spcAft>
+              <a:buSzPct val="100000"/>
+              <a:buChar char="•"/>
             </a:pPr>
             <a:r>
-              <a:rPr lang="en-US" sz="1100" i="1" dirty="0">
+              <a:rPr lang="en-US" sz="1200" dirty="0">
                 <a:solidFill>
                   <a:srgbClr val="000000"/>
                 </a:solidFill>
@@ -9882,7 +10883,27 @@
                 <a:ea typeface="Calibri" pitchFamily="34" charset="-122"/>
                 <a:cs typeface="Calibri" pitchFamily="34" charset="-120"/>
               </a:rPr>
-              <a:t>Figure 1. Per-rule compliance report for the compliant run (data minimisation, lawful basis, storage limitation, security safeguards). Screenshot to be inserted.</a:t>
+              <a:t>The middle row is the key result: it passes data minimisation outright, yet still loses half its marks for declaring no lawful-basis reference, no deletion route, no notice and no audit trail.</a:t>
+            </a:r>
+          </a:p>
+          <a:p>
+            <a:pPr marL="177800" indent="-177800">
+              <a:spcAft>
+                <a:spcPts val="400"/>
+              </a:spcAft>
+              <a:buSzPct val="100000"/>
+              <a:buChar char="•"/>
+            </a:pPr>
+            <a:r>
+              <a:rPr lang="en-US" sz="1200" dirty="0">
+                <a:solidFill>
+                  <a:srgbClr val="000000"/>
+                </a:solidFill>
+                <a:latin typeface="Calibri" pitchFamily="34" charset="0"/>
+                <a:ea typeface="Calibri" pitchFamily="34" charset="-122"/>
+                <a:cs typeface="Calibri" pitchFamily="34" charset="-120"/>
+              </a:rPr>
+              <a:t>A 0.869 gap on identical rules — purely a compliance difference, invisible to any coverage or speed benchmark.</a:t>
             </a:r>
           </a:p>
         </p:txBody>
@@ -10024,14 +11045,14 @@
       </p:pic>
       <p:sp>
         <p:nvSpPr>
-          <p:cNvPr id="20" name="Text 2"/>
+          <p:cNvPr id="20" name="Text 20"/>
           <p:cNvSpPr txBox="1"/>
           <p:nvPr/>
         </p:nvSpPr>
         <p:spPr>
           <a:xfrm>
-            <a:off x="640080" y="1230000"/>
-            <a:ext cx="10900000" cy="1250000"/>
+            <a:off x="640080" y="1200000"/>
+            <a:ext cx="10900000" cy="1100000"/>
           </a:xfrm>
           <a:prstGeom prst="rect">
             <a:avLst/>
@@ -10051,7 +11072,7 @@
               <a:buChar char="•"/>
             </a:pPr>
             <a:r>
-              <a:rPr lang="en-US" sz="1300" dirty="0">
+              <a:rPr lang="en-US" sz="1250" dirty="0">
                 <a:solidFill>
                   <a:srgbClr val="000000"/>
                 </a:solidFill>
@@ -10059,7 +11080,7 @@
                 <a:ea typeface="Calibri" pitchFamily="34" charset="-122"/>
                 <a:cs typeface="Calibri" pitchFamily="34" charset="-120"/>
               </a:rPr>
-              <a:t>Careless run: extra field categories, no lawful basis, no retention or deletion policy, partial security — the shape of an unconstrained scraper.</a:t>
+              <a:t>Every deduction is explained in words, not just scored — “no lawful basis declared”, “1/4 required safeguards in place”.</a:t>
             </a:r>
           </a:p>
           <a:p>
@@ -10071,7 +11092,7 @@
               <a:buChar char="•"/>
             </a:pPr>
             <a:r>
-              <a:rPr lang="en-US" sz="1300" dirty="0">
+              <a:rPr lang="en-US" sz="1250" dirty="0">
                 <a:solidFill>
                   <a:srgbClr val="000000"/>
                 </a:solidFill>
@@ -10079,7 +11100,7 @@
                 <a:ea typeface="Calibri" pitchFamily="34" charset="-122"/>
                 <a:cs typeface="Calibri" pitchFamily="34" charset="-120"/>
               </a:rPr>
-              <a:t>Data-minimisation and lawful-basis rules fail; overall compliance ≈ 0.2. The ≈ 0.8 gap is produced by the same rules that will later score baseline techniques (e.g. AutoScraper).</a:t>
+              <a:t>This is what makes the score auditable rather than arbitrary, and why the scorer is deterministic code and not a language model.</a:t>
             </a:r>
           </a:p>
         </p:txBody>
@@ -10092,8 +11113,8 @@
         </p:nvSpPr>
         <p:spPr>
           <a:xfrm>
-            <a:off x="1200000" y="2650000"/>
-            <a:ext cx="9792000" cy="2600000"/>
+            <a:off x="1200000" y="2450000"/>
+            <a:ext cx="9792000" cy="2800000"/>
           </a:xfrm>
           <a:prstGeom prst="rect">
             <a:avLst/>
@@ -10124,14 +11145,14 @@
                 <a:ea typeface="Calibri" pitchFamily="34" charset="-122"/>
                 <a:cs typeface="Calibri" pitchFamily="34" charset="-120"/>
               </a:rPr>
-              <a:t>[ Screenshot: score_extraction_run.py — careless run, failing rules highlighted, overall ≈ 0.2 ]</a:t>
+              <a:t>[ Screenshot: python scripts/score_extraction_run.py — per-rule breakdown ]</a:t>
             </a:r>
           </a:p>
         </p:txBody>
       </p:sp>
       <p:sp>
         <p:nvSpPr>
-          <p:cNvPr id="22" name="Caption"/>
+          <p:cNvPr id="22" name="Text 22"/>
           <p:cNvSpPr txBox="1"/>
           <p:nvPr/>
         </p:nvSpPr>
@@ -10147,7 +11168,7 @@
           <a:ln/>
         </p:spPr>
         <p:txBody>
-          <a:bodyPr wrap="square" lIns="0" tIns="0" rIns="0" bIns="0" rtlCol="0" anchor="ctr"/>
+          <a:bodyPr wrap="square" lIns="0" tIns="0" rIns="0" bIns="0" rtlCol="0" anchor="t"/>
           <a:lstStyle/>
           <a:p>
             <a:pPr algn="ctr">
@@ -10162,7 +11183,7 @@
                 <a:ea typeface="Calibri" pitchFamily="34" charset="-122"/>
                 <a:cs typeface="Calibri" pitchFamily="34" charset="-120"/>
               </a:rPr>
-              <a:t>Figure 2. Same harness on a 'grab-everything, declare-nothing' run. Screenshot to be inserted.</a:t>
+              <a:t>Figure 1. Per-rule findings for one run. Screenshot to be inserted.</a:t>
             </a:r>
           </a:p>
         </p:txBody>

--- a/Review-I.pptx
+++ b/Review-I.pptx
@@ -8,16 +8,15 @@
     <p:notesMasterId r:id="rId13"/>
   </p:notesMasterIdLst>
   <p:sldIdLst>
-    <p:sldId id="256" r:id="rId2"/>
-    <p:sldId id="257" r:id="rId3"/>
-    <p:sldId id="258" r:id="rId4"/>
-    <p:sldId id="259" r:id="rId5"/>
-    <p:sldId id="260" r:id="rId6"/>
-    <p:sldId id="267" r:id="rId18"/>
-    <p:sldId id="261" r:id="rId7"/>
-    <p:sldId id="262" r:id="rId8"/>
-    <p:sldId id="263" r:id="rId9"/>
-    <p:sldId id="264" r:id="rId10"/>
+    <p:sldId id="257" r:id="rId2"/>
+    <p:sldId id="259" r:id="rId3"/>
+    <p:sldId id="260" r:id="rId4"/>
+    <p:sldId id="267" r:id="rId5"/>
+    <p:sldId id="261" r:id="rId6"/>
+    <p:sldId id="262" r:id="rId7"/>
+    <p:sldId id="263" r:id="rId8"/>
+    <p:sldId id="264" r:id="rId9"/>
+    <p:sldId id="269" r:id="rId10"/>
     <p:sldId id="265" r:id="rId11"/>
     <p:sldId id="266" r:id="rId12"/>
   </p:sldIdLst>
@@ -397,90 +396,6 @@
           <a:p>
             <a:fld id="{F7021451-1387-4CA6-816F-3879F97B5CBC}" type="slidenum">
               <a:rPr lang="en-US"/>
-              <a:t>10</a:t>
-            </a:fld>
-            <a:endParaRPr lang="en-US"/>
-          </a:p>
-        </p:txBody>
-      </p:sp>
-    </p:spTree>
-    <p:extLst>
-      <p:ext uri="{BB962C8B-B14F-4D97-AF65-F5344CB8AC3E}">
-        <p14:creationId xmlns:p14="http://schemas.microsoft.com/office/powerpoint/2010/main" val="1024086991"/>
-      </p:ext>
-    </p:extLst>
-  </p:cSld>
-  <p:clrMapOvr>
-    <a:masterClrMapping/>
-  </p:clrMapOvr>
-</p:notes>
-</file>
-
-<file path=ppt/notesSlides/notesSlide11.xml><?xml version="1.0" encoding="utf-8"?>
-<p:notes xmlns:a="http://schemas.openxmlformats.org/drawingml/2006/main" xmlns:r="http://schemas.openxmlformats.org/officeDocument/2006/relationships" xmlns:p="http://schemas.openxmlformats.org/presentationml/2006/main">
-  <p:cSld>
-    <p:spTree>
-      <p:nvGrpSpPr>
-        <p:cNvPr id="1" name=""/>
-        <p:cNvGrpSpPr/>
-        <p:nvPr/>
-      </p:nvGrpSpPr>
-      <p:grpSpPr>
-        <a:xfrm>
-          <a:off x="0" y="0"/>
-          <a:ext cx="0" cy="0"/>
-          <a:chOff x="0" y="0"/>
-          <a:chExt cx="0" cy="0"/>
-        </a:xfrm>
-      </p:grpSpPr>
-      <p:sp>
-        <p:nvSpPr>
-          <p:cNvPr id="2" name="Slide Image Placeholder 1"/>
-          <p:cNvSpPr>
-            <a:spLocks noGrp="1" noRot="1" noChangeAspect="1"/>
-          </p:cNvSpPr>
-          <p:nvPr>
-            <p:ph type="sldImg"/>
-          </p:nvPr>
-        </p:nvSpPr>
-        <p:spPr/>
-      </p:sp>
-      <p:sp>
-        <p:nvSpPr>
-          <p:cNvPr id="3" name="Notes Placeholder 2"/>
-          <p:cNvSpPr>
-            <a:spLocks noGrp="1"/>
-          </p:cNvSpPr>
-          <p:nvPr>
-            <p:ph type="body" idx="1"/>
-          </p:nvPr>
-        </p:nvSpPr>
-        <p:spPr/>
-        <p:txBody>
-          <a:bodyPr/>
-          <a:lstStyle/>
-          <a:p>
-            <a:endParaRPr lang="en-US" dirty="0"/>
-          </a:p>
-        </p:txBody>
-      </p:sp>
-      <p:sp>
-        <p:nvSpPr>
-          <p:cNvPr id="4" name="Slide Number Placeholder 3"/>
-          <p:cNvSpPr>
-            <a:spLocks noGrp="1"/>
-          </p:cNvSpPr>
-          <p:nvPr>
-            <p:ph type="sldNum" sz="quarter" idx="10"/>
-          </p:nvPr>
-        </p:nvSpPr>
-        <p:spPr/>
-        <p:txBody>
-          <a:bodyPr/>
-          <a:lstStyle/>
-          <a:p>
-            <a:fld id="{F7021451-1387-4CA6-816F-3879F97B5CBC}" type="slidenum">
-              <a:rPr lang="en-US"/>
               <a:t>11</a:t>
             </a:fld>
             <a:endParaRPr lang="en-US"/>
@@ -733,7 +648,7 @@
           <a:p>
             <a:fld id="{F7021451-1387-4CA6-816F-3879F97B5CBC}" type="slidenum">
               <a:rPr lang="en-US"/>
-              <a:t>4</a:t>
+              <a:t>5</a:t>
             </a:fld>
             <a:endParaRPr lang="en-US"/>
           </a:p>
@@ -817,7 +732,7 @@
           <a:p>
             <a:fld id="{F7021451-1387-4CA6-816F-3879F97B5CBC}" type="slidenum">
               <a:rPr lang="en-US"/>
-              <a:t>5</a:t>
+              <a:t>6</a:t>
             </a:fld>
             <a:endParaRPr lang="en-US"/>
           </a:p>
@@ -880,7 +795,10 @@
           <a:bodyPr/>
           <a:lstStyle/>
           <a:p>
-            <a:endParaRPr lang="en-US" dirty="0"/>
+            <a:r>
+              <a:rPr lang="en-US" dirty="0"/>
+              <a:t>Add your results here — graphs, tables, screenshots or outputs.</a:t>
+            </a:r>
           </a:p>
         </p:txBody>
       </p:sp>
@@ -901,7 +819,7 @@
           <a:p>
             <a:fld id="{F7021451-1387-4CA6-816F-3879F97B5CBC}" type="slidenum">
               <a:rPr lang="en-US"/>
-              <a:t>6</a:t>
+              <a:t>7</a:t>
             </a:fld>
             <a:endParaRPr lang="en-US"/>
           </a:p>
@@ -964,7 +882,10 @@
           <a:bodyPr/>
           <a:lstStyle/>
           <a:p>
-            <a:endParaRPr lang="en-US" dirty="0"/>
+            <a:r>
+              <a:rPr lang="en-US" dirty="0"/>
+              <a:t>Add your results here — graphs, tables, screenshots or outputs.</a:t>
+            </a:r>
           </a:p>
         </p:txBody>
       </p:sp>
@@ -985,7 +906,7 @@
           <a:p>
             <a:fld id="{F7021451-1387-4CA6-816F-3879F97B5CBC}" type="slidenum">
               <a:rPr lang="en-US"/>
-              <a:t>7</a:t>
+              <a:t>8</a:t>
             </a:fld>
             <a:endParaRPr lang="en-US"/>
           </a:p>
@@ -1009,7 +930,13 @@
   <p:cSld>
     <p:spTree>
       <p:nvGrpSpPr>
-        <p:cNvPr id="1" name=""/>
+        <p:cNvPr id="1" name="">
+          <a:extLst>
+            <a:ext uri="{FF2B5EF4-FFF2-40B4-BE49-F238E27FC236}">
+              <a16:creationId xmlns:a16="http://schemas.microsoft.com/office/drawing/2014/main" id="{99755647-AA68-A712-66DB-85825EA9DB64}"/>
+            </a:ext>
+          </a:extLst>
+        </p:cNvPr>
         <p:cNvGrpSpPr/>
         <p:nvPr/>
       </p:nvGrpSpPr>
@@ -1023,7 +950,13 @@
       </p:grpSpPr>
       <p:sp>
         <p:nvSpPr>
-          <p:cNvPr id="2" name="Slide Image Placeholder 1"/>
+          <p:cNvPr id="2" name="Slide Image Placeholder 1">
+            <a:extLst>
+              <a:ext uri="{FF2B5EF4-FFF2-40B4-BE49-F238E27FC236}">
+                <a16:creationId xmlns:a16="http://schemas.microsoft.com/office/drawing/2014/main" id="{35FE7569-18CF-F6AF-ECC5-6B396D9BE37C}"/>
+              </a:ext>
+            </a:extLst>
+          </p:cNvPr>
           <p:cNvSpPr>
             <a:spLocks noGrp="1" noRot="1" noChangeAspect="1"/>
           </p:cNvSpPr>
@@ -1035,7 +968,13 @@
       </p:sp>
       <p:sp>
         <p:nvSpPr>
-          <p:cNvPr id="3" name="Notes Placeholder 2"/>
+          <p:cNvPr id="3" name="Notes Placeholder 2">
+            <a:extLst>
+              <a:ext uri="{FF2B5EF4-FFF2-40B4-BE49-F238E27FC236}">
+                <a16:creationId xmlns:a16="http://schemas.microsoft.com/office/drawing/2014/main" id="{3B05BD70-93D6-8BF5-DEAE-924FF57B2E01}"/>
+              </a:ext>
+            </a:extLst>
+          </p:cNvPr>
           <p:cNvSpPr>
             <a:spLocks noGrp="1"/>
           </p:cNvSpPr>
@@ -1057,7 +996,13 @@
       </p:sp>
       <p:sp>
         <p:nvSpPr>
-          <p:cNvPr id="4" name="Slide Number Placeholder 3"/>
+          <p:cNvPr id="4" name="Slide Number Placeholder 3">
+            <a:extLst>
+              <a:ext uri="{FF2B5EF4-FFF2-40B4-BE49-F238E27FC236}">
+                <a16:creationId xmlns:a16="http://schemas.microsoft.com/office/drawing/2014/main" id="{86109ED8-EDD5-A8AE-9C9D-23A0A5E5A143}"/>
+              </a:ext>
+            </a:extLst>
+          </p:cNvPr>
           <p:cNvSpPr>
             <a:spLocks noGrp="1"/>
           </p:cNvSpPr>
@@ -1072,7 +1017,7 @@
           <a:p>
             <a:fld id="{F7021451-1387-4CA6-816F-3879F97B5CBC}" type="slidenum">
               <a:rPr lang="en-US"/>
-              <a:t>8</a:t>
+              <a:t>9</a:t>
             </a:fld>
             <a:endParaRPr lang="en-US"/>
           </a:p>
@@ -1081,7 +1026,7 @@
     </p:spTree>
     <p:extLst>
       <p:ext uri="{BB962C8B-B14F-4D97-AF65-F5344CB8AC3E}">
-        <p14:creationId xmlns:p14="http://schemas.microsoft.com/office/powerpoint/2010/main" val="1024086991"/>
+        <p14:creationId xmlns:p14="http://schemas.microsoft.com/office/powerpoint/2010/main" val="3649335519"/>
       </p:ext>
     </p:extLst>
   </p:cSld>
@@ -1135,10 +1080,7 @@
           <a:bodyPr/>
           <a:lstStyle/>
           <a:p>
-            <a:r>
-              <a:rPr lang="en-US" dirty="0"/>
-              <a:t>Add your results here — graphs, tables, screenshots or outputs.</a:t>
-            </a:r>
+            <a:endParaRPr lang="en-US" dirty="0"/>
           </a:p>
         </p:txBody>
       </p:sp>
@@ -1159,7 +1101,7 @@
           <a:p>
             <a:fld id="{F7021451-1387-4CA6-816F-3879F97B5CBC}" type="slidenum">
               <a:rPr lang="en-US"/>
-              <a:t>9</a:t>
+              <a:t>10</a:t>
             </a:fld>
             <a:endParaRPr lang="en-US"/>
           </a:p>
@@ -1492,7 +1434,7 @@
 
 <file path=ppt/slides/slide1.xml><?xml version="1.0" encoding="utf-8"?>
 <p:sld xmlns:a="http://schemas.openxmlformats.org/drawingml/2006/main" xmlns:r="http://schemas.openxmlformats.org/officeDocument/2006/relationships" xmlns:p="http://schemas.openxmlformats.org/presentationml/2006/main">
-  <p:cSld name="Slide 1">
+  <p:cSld name="Slide 2">
     <p:bg>
       <p:bgPr>
         <a:solidFill>
@@ -1548,54 +1490,15 @@
                 <a:ea typeface="Calibri" pitchFamily="34" charset="-122"/>
                 <a:cs typeface="Calibri" pitchFamily="34" charset="-120"/>
               </a:rPr>
-              <a:t>1</a:t>
+              <a:t>2</a:t>
             </a:r>
             <a:endParaRPr lang="en-US" sz="1000" dirty="0"/>
-          </a:p>
-        </p:txBody>
-      </p:sp>
-      <p:sp>
-        <p:nvSpPr>
-          <p:cNvPr id="3" name="Text 1"/>
-          <p:cNvSpPr txBox="1"/>
-          <p:nvPr/>
-        </p:nvSpPr>
-        <p:spPr>
-          <a:xfrm>
-            <a:off x="548640" y="320040"/>
-            <a:ext cx="9601200" cy="685800"/>
-          </a:xfrm>
-          <a:prstGeom prst="rect">
-            <a:avLst/>
-          </a:prstGeom>
-          <a:noFill/>
-          <a:ln/>
-        </p:spPr>
-        <p:txBody>
-          <a:bodyPr wrap="square" lIns="0" tIns="0" rIns="0" bIns="0" rtlCol="0" anchor="ctr"/>
-          <a:lstStyle/>
-          <a:p>
-            <a:pPr marL="0" indent="0">
-              <a:buNone/>
-            </a:pPr>
-            <a:r>
-              <a:rPr lang="en-US" sz="2800" b="1" dirty="0">
-                <a:solidFill>
-                  <a:srgbClr val="1D2F82"/>
-                </a:solidFill>
-                <a:latin typeface="Calibri" pitchFamily="34" charset="0"/>
-                <a:ea typeface="Calibri" pitchFamily="34" charset="-122"/>
-                <a:cs typeface="Calibri" pitchFamily="34" charset="-120"/>
-              </a:rPr>
-              <a:t>Slide 1 — Scanned, Guide-Signed Title Slide (Mandatory)</a:t>
-            </a:r>
-            <a:endParaRPr lang="en-US" sz="2800" dirty="0"/>
           </a:p>
         </p:txBody>
       </p:sp>
       <p:pic>
         <p:nvPicPr>
-          <p:cNvPr id="4" name="Image 0" descr="logo.png"/>
+          <p:cNvPr id="3" name="Image 0" descr="logo.png"/>
           <p:cNvPicPr>
             <a:picLocks noChangeAspect="1"/>
           </p:cNvPicPr>
@@ -1609,8 +1512,8 @@
         </p:blipFill>
         <p:spPr>
           <a:xfrm>
-            <a:off x="10362895" y="320040"/>
-            <a:ext cx="1371600" cy="518746"/>
+            <a:off x="548640" y="365760"/>
+            <a:ext cx="2011680" cy="760828"/>
           </a:xfrm>
           <a:prstGeom prst="rect">
             <a:avLst/>
@@ -1619,14 +1522,14 @@
       </p:pic>
       <p:sp>
         <p:nvSpPr>
-          <p:cNvPr id="5" name="Text 2"/>
+          <p:cNvPr id="4" name="Text 1"/>
           <p:cNvSpPr txBox="1"/>
           <p:nvPr/>
         </p:nvSpPr>
         <p:spPr>
           <a:xfrm>
-            <a:off x="640080" y="1554480"/>
-            <a:ext cx="10881360" cy="4937760"/>
+            <a:off x="5486400" y="411480"/>
+            <a:ext cx="6217920" cy="320040"/>
           </a:xfrm>
           <a:prstGeom prst="rect">
             <a:avLst/>
@@ -1635,18 +1538,53 @@
           <a:ln/>
         </p:spPr>
         <p:txBody>
-          <a:bodyPr wrap="square" lIns="0" tIns="0" rIns="0" bIns="0" rtlCol="0" anchor="t"/>
+          <a:bodyPr wrap="square" lIns="0" tIns="0" rIns="0" bIns="0" rtlCol="0" anchor="ctr"/>
           <a:lstStyle/>
           <a:p>
-            <a:pPr marL="177800" indent="-177800">
-              <a:spcAft>
-                <a:spcPts val="800"/>
-              </a:spcAft>
-              <a:buSzPct val="100000"/>
-              <a:buChar char="•"/>
+            <a:pPr marL="0" indent="0" algn="r">
+              <a:buNone/>
             </a:pPr>
             <a:r>
-              <a:rPr lang="en-US" sz="1600" dirty="0">
+              <a:rPr lang="en-US" sz="1400" b="1" dirty="0">
+                <a:solidFill>
+                  <a:srgbClr val="1D2F82"/>
+                </a:solidFill>
+                <a:latin typeface="Calibri" pitchFamily="34" charset="0"/>
+                <a:ea typeface="Calibri" pitchFamily="34" charset="-122"/>
+                <a:cs typeface="Calibri" pitchFamily="34" charset="-120"/>
+              </a:rPr>
+              <a:t>School of Electronics Engineering (SENSE)</a:t>
+            </a:r>
+            <a:endParaRPr lang="en-US" sz="1400" dirty="0"/>
+          </a:p>
+        </p:txBody>
+      </p:sp>
+      <p:sp>
+        <p:nvSpPr>
+          <p:cNvPr id="5" name="Text 2"/>
+          <p:cNvSpPr txBox="1"/>
+          <p:nvPr/>
+        </p:nvSpPr>
+        <p:spPr>
+          <a:xfrm>
+            <a:off x="5486400" y="749808"/>
+            <a:ext cx="6217920" cy="274320"/>
+          </a:xfrm>
+          <a:prstGeom prst="rect">
+            <a:avLst/>
+          </a:prstGeom>
+          <a:noFill/>
+          <a:ln/>
+        </p:spPr>
+        <p:txBody>
+          <a:bodyPr wrap="square" lIns="0" tIns="0" rIns="0" bIns="0" rtlCol="0" anchor="ctr"/>
+          <a:lstStyle/>
+          <a:p>
+            <a:pPr marL="0" indent="0" algn="r">
+              <a:buNone/>
+            </a:pPr>
+            <a:r>
+              <a:rPr lang="en-US" sz="1200" dirty="0">
                 <a:solidFill>
                   <a:srgbClr val="000000"/>
                 </a:solidFill>
@@ -1654,20 +1592,82 @@
                 <a:ea typeface="Calibri" pitchFamily="34" charset="-122"/>
                 <a:cs typeface="Calibri" pitchFamily="34" charset="-120"/>
               </a:rPr>
-              <a:t>Before the Review-I, obtain the guide's signature with date on the title slide (next slide).</a:t>
+              <a:t>Project-I (2026)</a:t>
             </a:r>
-            <a:endParaRPr lang="en-US" sz="1600" dirty="0"/>
-          </a:p>
-          <a:p>
-            <a:pPr marL="177800" indent="-177800">
-              <a:spcAft>
-                <a:spcPts val="800"/>
-              </a:spcAft>
-              <a:buSzPct val="100000"/>
-              <a:buChar char="•"/>
+            <a:endParaRPr lang="en-US" sz="1200" dirty="0"/>
+          </a:p>
+        </p:txBody>
+      </p:sp>
+      <p:sp>
+        <p:nvSpPr>
+          <p:cNvPr id="6" name="Text 3"/>
+          <p:cNvSpPr txBox="1"/>
+          <p:nvPr/>
+        </p:nvSpPr>
+        <p:spPr>
+          <a:xfrm>
+            <a:off x="548640" y="1737360"/>
+            <a:ext cx="11091672" cy="914400"/>
+          </a:xfrm>
+          <a:prstGeom prst="rect">
+            <a:avLst/>
+          </a:prstGeom>
+          <a:noFill/>
+          <a:ln/>
+        </p:spPr>
+        <p:txBody>
+          <a:bodyPr wrap="square" lIns="0" tIns="0" rIns="0" bIns="0" rtlCol="0" anchor="ctr"/>
+          <a:lstStyle/>
+          <a:p>
+            <a:pPr algn="ctr"/>
+            <a:r>
+              <a:rPr lang="en-IN" sz="3200" b="1" dirty="0">
+                <a:solidFill>
+                  <a:srgbClr val="1D2F82"/>
+                </a:solidFill>
+                <a:latin typeface="Calibri" pitchFamily="34" charset="0"/>
+                <a:ea typeface="Calibri" pitchFamily="34" charset="-122"/>
+                <a:cs typeface="Calibri" pitchFamily="34" charset="-120"/>
+              </a:rPr>
+              <a:t>Data Extraction Techniques for HIS Towards DPDP Compliance</a:t>
+            </a:r>
+            <a:endParaRPr lang="en-US" sz="3200" b="1" dirty="0">
+              <a:solidFill>
+                <a:srgbClr val="1D2F82"/>
+              </a:solidFill>
+              <a:latin typeface="Calibri" pitchFamily="34" charset="0"/>
+              <a:ea typeface="Calibri" pitchFamily="34" charset="-122"/>
+              <a:cs typeface="Calibri" pitchFamily="34" charset="-120"/>
+            </a:endParaRPr>
+          </a:p>
+        </p:txBody>
+      </p:sp>
+      <p:sp>
+        <p:nvSpPr>
+          <p:cNvPr id="7" name="Text 4"/>
+          <p:cNvSpPr txBox="1"/>
+          <p:nvPr/>
+        </p:nvSpPr>
+        <p:spPr>
+          <a:xfrm>
+            <a:off x="822960" y="3063240"/>
+            <a:ext cx="2560320" cy="384048"/>
+          </a:xfrm>
+          <a:prstGeom prst="rect">
+            <a:avLst/>
+          </a:prstGeom>
+          <a:noFill/>
+          <a:ln/>
+        </p:spPr>
+        <p:txBody>
+          <a:bodyPr wrap="square" lIns="0" tIns="0" rIns="0" bIns="0" rtlCol="0" anchor="ctr"/>
+          <a:lstStyle/>
+          <a:p>
+            <a:pPr marL="0" indent="0">
+              <a:buNone/>
             </a:pPr>
             <a:r>
-              <a:rPr lang="en-US" sz="1600" dirty="0">
+              <a:rPr lang="en-US" sz="1400" b="1" dirty="0">
                 <a:solidFill>
                   <a:srgbClr val="000000"/>
                 </a:solidFill>
@@ -1675,20 +1675,38 @@
                 <a:ea typeface="Calibri" pitchFamily="34" charset="-122"/>
                 <a:cs typeface="Calibri" pitchFamily="34" charset="-120"/>
               </a:rPr>
-              <a:t>Scan or photograph the signed title slide clearly.</a:t>
+              <a:t>Student Name(s):</a:t>
             </a:r>
-            <a:endParaRPr lang="en-US" sz="1600" dirty="0"/>
-          </a:p>
-          <a:p>
-            <a:pPr marL="177800" indent="-177800">
-              <a:spcAft>
-                <a:spcPts val="800"/>
-              </a:spcAft>
-              <a:buSzPct val="100000"/>
-              <a:buChar char="•"/>
+            <a:endParaRPr lang="en-US" sz="1400" dirty="0"/>
+          </a:p>
+        </p:txBody>
+      </p:sp>
+      <p:sp>
+        <p:nvSpPr>
+          <p:cNvPr id="8" name="Text 5"/>
+          <p:cNvSpPr txBox="1"/>
+          <p:nvPr/>
+        </p:nvSpPr>
+        <p:spPr>
+          <a:xfrm>
+            <a:off x="3474720" y="3063240"/>
+            <a:ext cx="4023360" cy="384048"/>
+          </a:xfrm>
+          <a:prstGeom prst="rect">
+            <a:avLst/>
+          </a:prstGeom>
+          <a:noFill/>
+          <a:ln/>
+        </p:spPr>
+        <p:txBody>
+          <a:bodyPr wrap="square" lIns="0" tIns="0" rIns="0" bIns="0" rtlCol="0" anchor="ctr"/>
+          <a:lstStyle/>
+          <a:p>
+            <a:pPr marL="0" indent="0">
+              <a:buNone/>
             </a:pPr>
             <a:r>
-              <a:rPr lang="en-US" sz="1600" dirty="0">
+              <a:rPr lang="en-US" sz="1400" dirty="0">
                 <a:solidFill>
                   <a:srgbClr val="000000"/>
                 </a:solidFill>
@@ -1696,20 +1714,12 @@
                 <a:ea typeface="Calibri" pitchFamily="34" charset="-122"/>
                 <a:cs typeface="Calibri" pitchFamily="34" charset="-120"/>
               </a:rPr>
-              <a:t>Replace this slide with the scanned copy, so that it remains Slide 1 of the presentation.</a:t>
+              <a:t>Ananya Karmakar          (23BLC1017)</a:t>
             </a:r>
-            <a:endParaRPr lang="en-US" sz="1600" dirty="0"/>
-          </a:p>
-          <a:p>
-            <a:pPr marL="177800" indent="-177800">
-              <a:spcAft>
-                <a:spcPts val="800"/>
-              </a:spcAft>
-              <a:buSzPct val="100000"/>
-              <a:buChar char="•"/>
-            </a:pPr>
+          </a:p>
+          <a:p>
             <a:r>
-              <a:rPr lang="en-US" sz="1600" dirty="0">
+              <a:rPr lang="en-US" sz="1400" dirty="0">
                 <a:solidFill>
                   <a:srgbClr val="000000"/>
                 </a:solidFill>
@@ -1717,9 +1727,540 @@
                 <a:ea typeface="Calibri" pitchFamily="34" charset="-122"/>
                 <a:cs typeface="Calibri" pitchFamily="34" charset="-120"/>
               </a:rPr>
-              <a:t>This requirement applies to every review of Project-I (2026).</a:t>
+              <a:t>Avanindra S Kushwah   (23BLC1089)</a:t>
             </a:r>
-            <a:endParaRPr lang="en-US" sz="1600" dirty="0"/>
+            <a:endParaRPr lang="en-US" sz="1400" dirty="0"/>
+          </a:p>
+        </p:txBody>
+      </p:sp>
+      <p:sp>
+        <p:nvSpPr>
+          <p:cNvPr id="9" name="Shape 6"/>
+          <p:cNvSpPr/>
+          <p:nvPr/>
+        </p:nvSpPr>
+        <p:spPr>
+          <a:xfrm>
+            <a:off x="3474720" y="3465576"/>
+            <a:ext cx="4023360" cy="0"/>
+          </a:xfrm>
+          <a:prstGeom prst="line">
+            <a:avLst/>
+          </a:prstGeom>
+          <a:noFill/>
+          <a:ln w="12700">
+            <a:solidFill>
+              <a:srgbClr val="BFBFBF"/>
+            </a:solidFill>
+            <a:prstDash val="solid"/>
+          </a:ln>
+        </p:spPr>
+        <p:txBody>
+          <a:bodyPr/>
+          <a:lstStyle/>
+          <a:p>
+            <a:endParaRPr lang="en-US"/>
+          </a:p>
+        </p:txBody>
+      </p:sp>
+      <p:sp>
+        <p:nvSpPr>
+          <p:cNvPr id="10" name="Text 7"/>
+          <p:cNvSpPr txBox="1"/>
+          <p:nvPr/>
+        </p:nvSpPr>
+        <p:spPr>
+          <a:xfrm>
+            <a:off x="822960" y="3657600"/>
+            <a:ext cx="2560320" cy="384048"/>
+          </a:xfrm>
+          <a:prstGeom prst="rect">
+            <a:avLst/>
+          </a:prstGeom>
+          <a:noFill/>
+          <a:ln/>
+        </p:spPr>
+        <p:txBody>
+          <a:bodyPr wrap="square" lIns="0" tIns="0" rIns="0" bIns="0" rtlCol="0" anchor="ctr"/>
+          <a:lstStyle/>
+          <a:p>
+            <a:pPr marL="0" indent="0">
+              <a:buNone/>
+            </a:pPr>
+            <a:r>
+              <a:rPr lang="en-US" sz="1400" b="1" dirty="0">
+                <a:solidFill>
+                  <a:srgbClr val="000000"/>
+                </a:solidFill>
+                <a:latin typeface="Calibri" pitchFamily="34" charset="0"/>
+                <a:ea typeface="Calibri" pitchFamily="34" charset="-122"/>
+                <a:cs typeface="Calibri" pitchFamily="34" charset="-120"/>
+              </a:rPr>
+              <a:t>Guide:</a:t>
+            </a:r>
+            <a:endParaRPr lang="en-US" sz="1400" dirty="0"/>
+          </a:p>
+        </p:txBody>
+      </p:sp>
+      <p:sp>
+        <p:nvSpPr>
+          <p:cNvPr id="11" name="Text 8"/>
+          <p:cNvSpPr txBox="1"/>
+          <p:nvPr/>
+        </p:nvSpPr>
+        <p:spPr>
+          <a:xfrm>
+            <a:off x="3474720" y="3657600"/>
+            <a:ext cx="4023360" cy="384048"/>
+          </a:xfrm>
+          <a:prstGeom prst="rect">
+            <a:avLst/>
+          </a:prstGeom>
+          <a:noFill/>
+          <a:ln/>
+        </p:spPr>
+        <p:txBody>
+          <a:bodyPr wrap="square" lIns="0" tIns="0" rIns="0" bIns="0" rtlCol="0" anchor="ctr"/>
+          <a:lstStyle/>
+          <a:p>
+            <a:pPr marL="0" indent="0">
+              <a:buNone/>
+            </a:pPr>
+            <a:r>
+              <a:rPr lang="en-US" sz="1400" dirty="0">
+                <a:solidFill>
+                  <a:srgbClr val="000000"/>
+                </a:solidFill>
+                <a:latin typeface="Calibri" pitchFamily="34" charset="0"/>
+                <a:ea typeface="Calibri" pitchFamily="34" charset="-122"/>
+                <a:cs typeface="Calibri" pitchFamily="34" charset="-120"/>
+              </a:rPr>
+              <a:t>Dr. Manoj Kumar, SENSE</a:t>
+            </a:r>
+            <a:endParaRPr lang="en-US" sz="1400" dirty="0"/>
+          </a:p>
+        </p:txBody>
+      </p:sp>
+      <p:sp>
+        <p:nvSpPr>
+          <p:cNvPr id="12" name="Shape 9"/>
+          <p:cNvSpPr/>
+          <p:nvPr/>
+        </p:nvSpPr>
+        <p:spPr>
+          <a:xfrm>
+            <a:off x="3474720" y="4059936"/>
+            <a:ext cx="4023360" cy="0"/>
+          </a:xfrm>
+          <a:prstGeom prst="line">
+            <a:avLst/>
+          </a:prstGeom>
+          <a:noFill/>
+          <a:ln w="12700">
+            <a:solidFill>
+              <a:srgbClr val="BFBFBF"/>
+            </a:solidFill>
+            <a:prstDash val="solid"/>
+          </a:ln>
+        </p:spPr>
+        <p:txBody>
+          <a:bodyPr/>
+          <a:lstStyle/>
+          <a:p>
+            <a:endParaRPr lang="en-US"/>
+          </a:p>
+        </p:txBody>
+      </p:sp>
+      <p:sp>
+        <p:nvSpPr>
+          <p:cNvPr id="13" name="Text 10"/>
+          <p:cNvSpPr txBox="1"/>
+          <p:nvPr/>
+        </p:nvSpPr>
+        <p:spPr>
+          <a:xfrm>
+            <a:off x="822960" y="4251960"/>
+            <a:ext cx="2560320" cy="384048"/>
+          </a:xfrm>
+          <a:prstGeom prst="rect">
+            <a:avLst/>
+          </a:prstGeom>
+          <a:noFill/>
+          <a:ln/>
+        </p:spPr>
+        <p:txBody>
+          <a:bodyPr wrap="square" lIns="0" tIns="0" rIns="0" bIns="0" rtlCol="0" anchor="ctr"/>
+          <a:lstStyle/>
+          <a:p>
+            <a:pPr marL="0" indent="0">
+              <a:buNone/>
+            </a:pPr>
+            <a:r>
+              <a:rPr lang="en-US" sz="1400" b="1" dirty="0">
+                <a:solidFill>
+                  <a:srgbClr val="000000"/>
+                </a:solidFill>
+                <a:latin typeface="Calibri" pitchFamily="34" charset="0"/>
+                <a:ea typeface="Calibri" pitchFamily="34" charset="-122"/>
+                <a:cs typeface="Calibri" pitchFamily="34" charset="-120"/>
+              </a:rPr>
+              <a:t>Programme / School:</a:t>
+            </a:r>
+            <a:endParaRPr lang="en-US" sz="1400" dirty="0"/>
+          </a:p>
+        </p:txBody>
+      </p:sp>
+      <p:sp>
+        <p:nvSpPr>
+          <p:cNvPr id="14" name="Text 11"/>
+          <p:cNvSpPr txBox="1"/>
+          <p:nvPr/>
+        </p:nvSpPr>
+        <p:spPr>
+          <a:xfrm>
+            <a:off x="3474720" y="4251960"/>
+            <a:ext cx="4023360" cy="384048"/>
+          </a:xfrm>
+          <a:prstGeom prst="rect">
+            <a:avLst/>
+          </a:prstGeom>
+          <a:noFill/>
+          <a:ln/>
+        </p:spPr>
+        <p:txBody>
+          <a:bodyPr wrap="square" lIns="0" tIns="0" rIns="0" bIns="0" rtlCol="0" anchor="ctr"/>
+          <a:lstStyle/>
+          <a:p>
+            <a:pPr marL="0" indent="0">
+              <a:buNone/>
+            </a:pPr>
+            <a:r>
+              <a:rPr lang="en-US" sz="1400" dirty="0">
+                <a:solidFill>
+                  <a:srgbClr val="000000"/>
+                </a:solidFill>
+                <a:latin typeface="Calibri" pitchFamily="34" charset="0"/>
+                <a:ea typeface="Calibri" pitchFamily="34" charset="-122"/>
+                <a:cs typeface="Calibri" pitchFamily="34" charset="-120"/>
+              </a:rPr>
+              <a:t>B.Tech — SENSE, VIT Chennai</a:t>
+            </a:r>
+            <a:endParaRPr lang="en-US" sz="1400" dirty="0"/>
+          </a:p>
+        </p:txBody>
+      </p:sp>
+      <p:sp>
+        <p:nvSpPr>
+          <p:cNvPr id="15" name="Shape 12"/>
+          <p:cNvSpPr/>
+          <p:nvPr/>
+        </p:nvSpPr>
+        <p:spPr>
+          <a:xfrm>
+            <a:off x="3474720" y="4654296"/>
+            <a:ext cx="4023360" cy="0"/>
+          </a:xfrm>
+          <a:prstGeom prst="line">
+            <a:avLst/>
+          </a:prstGeom>
+          <a:noFill/>
+          <a:ln w="12700">
+            <a:solidFill>
+              <a:srgbClr val="BFBFBF"/>
+            </a:solidFill>
+            <a:prstDash val="solid"/>
+          </a:ln>
+        </p:spPr>
+        <p:txBody>
+          <a:bodyPr/>
+          <a:lstStyle/>
+          <a:p>
+            <a:endParaRPr lang="en-US"/>
+          </a:p>
+        </p:txBody>
+      </p:sp>
+      <p:sp>
+        <p:nvSpPr>
+          <p:cNvPr id="16" name="Text 13"/>
+          <p:cNvSpPr txBox="1"/>
+          <p:nvPr/>
+        </p:nvSpPr>
+        <p:spPr>
+          <a:xfrm>
+            <a:off x="822960" y="4846320"/>
+            <a:ext cx="2560320" cy="384048"/>
+          </a:xfrm>
+          <a:prstGeom prst="rect">
+            <a:avLst/>
+          </a:prstGeom>
+          <a:noFill/>
+          <a:ln/>
+        </p:spPr>
+        <p:txBody>
+          <a:bodyPr wrap="square" lIns="0" tIns="0" rIns="0" bIns="0" rtlCol="0" anchor="ctr"/>
+          <a:lstStyle/>
+          <a:p>
+            <a:pPr marL="0" indent="0">
+              <a:buNone/>
+            </a:pPr>
+            <a:r>
+              <a:rPr lang="en-US" sz="1400" b="1" dirty="0">
+                <a:solidFill>
+                  <a:srgbClr val="000000"/>
+                </a:solidFill>
+                <a:latin typeface="Calibri" pitchFamily="34" charset="0"/>
+                <a:ea typeface="Calibri" pitchFamily="34" charset="-122"/>
+                <a:cs typeface="Calibri" pitchFamily="34" charset="-120"/>
+              </a:rPr>
+              <a:t>Review &amp; Date:</a:t>
+            </a:r>
+            <a:endParaRPr lang="en-US" sz="1400" dirty="0"/>
+          </a:p>
+        </p:txBody>
+      </p:sp>
+      <p:sp>
+        <p:nvSpPr>
+          <p:cNvPr id="17" name="Text 14"/>
+          <p:cNvSpPr txBox="1"/>
+          <p:nvPr/>
+        </p:nvSpPr>
+        <p:spPr>
+          <a:xfrm>
+            <a:off x="3474720" y="4846320"/>
+            <a:ext cx="4023360" cy="384048"/>
+          </a:xfrm>
+          <a:prstGeom prst="rect">
+            <a:avLst/>
+          </a:prstGeom>
+          <a:noFill/>
+          <a:ln/>
+        </p:spPr>
+        <p:txBody>
+          <a:bodyPr wrap="square" lIns="0" tIns="0" rIns="0" bIns="0" rtlCol="0" anchor="ctr"/>
+          <a:lstStyle/>
+          <a:p>
+            <a:pPr marL="0" indent="0">
+              <a:buNone/>
+            </a:pPr>
+            <a:r>
+              <a:rPr lang="en-US" sz="1400" dirty="0">
+                <a:solidFill>
+                  <a:srgbClr val="000000"/>
+                </a:solidFill>
+                <a:latin typeface="Calibri" pitchFamily="34" charset="0"/>
+                <a:ea typeface="Calibri" pitchFamily="34" charset="-122"/>
+                <a:cs typeface="Calibri" pitchFamily="34" charset="-120"/>
+              </a:rPr>
+              <a:t>Review-I  ·  02.09.2026 (Wednesday)</a:t>
+            </a:r>
+            <a:endParaRPr lang="en-US" sz="1400" dirty="0"/>
+          </a:p>
+        </p:txBody>
+      </p:sp>
+      <p:sp>
+        <p:nvSpPr>
+          <p:cNvPr id="18" name="Shape 15"/>
+          <p:cNvSpPr/>
+          <p:nvPr/>
+        </p:nvSpPr>
+        <p:spPr>
+          <a:xfrm>
+            <a:off x="3474720" y="5248656"/>
+            <a:ext cx="4023360" cy="0"/>
+          </a:xfrm>
+          <a:prstGeom prst="line">
+            <a:avLst/>
+          </a:prstGeom>
+          <a:noFill/>
+          <a:ln w="12700">
+            <a:solidFill>
+              <a:srgbClr val="BFBFBF"/>
+            </a:solidFill>
+            <a:prstDash val="solid"/>
+          </a:ln>
+        </p:spPr>
+        <p:txBody>
+          <a:bodyPr/>
+          <a:lstStyle/>
+          <a:p>
+            <a:endParaRPr lang="en-US"/>
+          </a:p>
+        </p:txBody>
+      </p:sp>
+      <p:sp>
+        <p:nvSpPr>
+          <p:cNvPr id="19" name="Shape 16"/>
+          <p:cNvSpPr/>
+          <p:nvPr/>
+        </p:nvSpPr>
+        <p:spPr>
+          <a:xfrm>
+            <a:off x="8046720" y="3063240"/>
+            <a:ext cx="3657600" cy="2194560"/>
+          </a:xfrm>
+          <a:prstGeom prst="rect">
+            <a:avLst/>
+          </a:prstGeom>
+          <a:solidFill>
+            <a:srgbClr val="FFFFFF"/>
+          </a:solidFill>
+          <a:ln w="15875">
+            <a:solidFill>
+              <a:srgbClr val="1D2F82"/>
+            </a:solidFill>
+            <a:prstDash val="solid"/>
+          </a:ln>
+        </p:spPr>
+        <p:txBody>
+          <a:bodyPr/>
+          <a:lstStyle/>
+          <a:p>
+            <a:endParaRPr lang="en-US"/>
+          </a:p>
+        </p:txBody>
+      </p:sp>
+      <p:sp>
+        <p:nvSpPr>
+          <p:cNvPr id="20" name="Text 17"/>
+          <p:cNvSpPr txBox="1"/>
+          <p:nvPr/>
+        </p:nvSpPr>
+        <p:spPr>
+          <a:xfrm>
+            <a:off x="8229600" y="3246120"/>
+            <a:ext cx="3291840" cy="365760"/>
+          </a:xfrm>
+          <a:prstGeom prst="rect">
+            <a:avLst/>
+          </a:prstGeom>
+          <a:noFill/>
+          <a:ln/>
+        </p:spPr>
+        <p:txBody>
+          <a:bodyPr wrap="square" lIns="0" tIns="0" rIns="0" bIns="0" rtlCol="0" anchor="ctr"/>
+          <a:lstStyle/>
+          <a:p>
+            <a:pPr marL="0" indent="0">
+              <a:buNone/>
+            </a:pPr>
+            <a:r>
+              <a:rPr lang="en-US" sz="1400" b="1" dirty="0">
+                <a:solidFill>
+                  <a:srgbClr val="1D2F82"/>
+                </a:solidFill>
+                <a:latin typeface="Calibri" pitchFamily="34" charset="0"/>
+                <a:ea typeface="Calibri" pitchFamily="34" charset="-122"/>
+                <a:cs typeface="Calibri" pitchFamily="34" charset="-120"/>
+              </a:rPr>
+              <a:t>Guide's Signature with Date</a:t>
+            </a:r>
+            <a:endParaRPr lang="en-US" sz="1400" dirty="0"/>
+          </a:p>
+        </p:txBody>
+      </p:sp>
+      <p:sp>
+        <p:nvSpPr>
+          <p:cNvPr id="21" name="Text 18"/>
+          <p:cNvSpPr txBox="1"/>
+          <p:nvPr/>
+        </p:nvSpPr>
+        <p:spPr>
+          <a:xfrm>
+            <a:off x="8229600" y="3886200"/>
+            <a:ext cx="3291840" cy="320040"/>
+          </a:xfrm>
+          <a:prstGeom prst="rect">
+            <a:avLst/>
+          </a:prstGeom>
+          <a:noFill/>
+          <a:ln/>
+        </p:spPr>
+        <p:txBody>
+          <a:bodyPr wrap="square" lIns="0" tIns="0" rIns="0" bIns="0" rtlCol="0" anchor="ctr"/>
+          <a:lstStyle/>
+          <a:p>
+            <a:pPr marL="0" indent="0">
+              <a:buNone/>
+            </a:pPr>
+            <a:r>
+              <a:rPr lang="en-US" sz="1300" dirty="0">
+                <a:solidFill>
+                  <a:srgbClr val="000000"/>
+                </a:solidFill>
+                <a:latin typeface="Calibri" pitchFamily="34" charset="0"/>
+                <a:ea typeface="Calibri" pitchFamily="34" charset="-122"/>
+                <a:cs typeface="Calibri" pitchFamily="34" charset="-120"/>
+              </a:rPr>
+              <a:t>Signature: _____________________</a:t>
+            </a:r>
+            <a:endParaRPr lang="en-US" sz="1300" dirty="0"/>
+          </a:p>
+        </p:txBody>
+      </p:sp>
+      <p:sp>
+        <p:nvSpPr>
+          <p:cNvPr id="22" name="Text 19"/>
+          <p:cNvSpPr txBox="1"/>
+          <p:nvPr/>
+        </p:nvSpPr>
+        <p:spPr>
+          <a:xfrm>
+            <a:off x="8229600" y="4434840"/>
+            <a:ext cx="3291840" cy="320040"/>
+          </a:xfrm>
+          <a:prstGeom prst="rect">
+            <a:avLst/>
+          </a:prstGeom>
+          <a:noFill/>
+          <a:ln/>
+        </p:spPr>
+        <p:txBody>
+          <a:bodyPr wrap="square" lIns="0" tIns="0" rIns="0" bIns="0" rtlCol="0" anchor="ctr"/>
+          <a:lstStyle/>
+          <a:p>
+            <a:pPr marL="0" indent="0">
+              <a:buNone/>
+            </a:pPr>
+            <a:r>
+              <a:rPr lang="en-US" sz="1300" dirty="0">
+                <a:solidFill>
+                  <a:srgbClr val="000000"/>
+                </a:solidFill>
+                <a:latin typeface="Calibri" pitchFamily="34" charset="0"/>
+                <a:ea typeface="Calibri" pitchFamily="34" charset="-122"/>
+                <a:cs typeface="Calibri" pitchFamily="34" charset="-120"/>
+              </a:rPr>
+              <a:t>Date: _________________________</a:t>
+            </a:r>
+            <a:endParaRPr lang="en-US" sz="1300" dirty="0"/>
+          </a:p>
+        </p:txBody>
+      </p:sp>
+      <p:sp>
+        <p:nvSpPr>
+          <p:cNvPr id="23" name="Text 20"/>
+          <p:cNvSpPr txBox="1"/>
+          <p:nvPr/>
+        </p:nvSpPr>
+        <p:spPr>
+          <a:xfrm>
+            <a:off x="822960" y="5760720"/>
+            <a:ext cx="10607040" cy="548640"/>
+          </a:xfrm>
+          <a:prstGeom prst="rect">
+            <a:avLst/>
+          </a:prstGeom>
+          <a:noFill/>
+          <a:ln/>
+        </p:spPr>
+        <p:txBody>
+          <a:bodyPr wrap="square" lIns="0" tIns="0" rIns="0" bIns="0" rtlCol="0" anchor="ctr"/>
+          <a:lstStyle/>
+          <a:p>
+            <a:pPr marL="0" indent="0">
+              <a:buNone/>
+            </a:pPr>
+            <a:endParaRPr lang="en-US" sz="1200" dirty="0"/>
           </a:p>
         </p:txBody>
       </p:sp>
@@ -1789,7 +2330,7 @@
                 <a:ea typeface="Calibri" pitchFamily="34" charset="-122"/>
                 <a:cs typeface="Calibri" pitchFamily="34" charset="-120"/>
               </a:rPr>
-              <a:t>11</a:t>
+              <a:t>12</a:t>
             </a:r>
             <a:endParaRPr lang="en-US" sz="1000" dirty="0"/>
           </a:p>
@@ -1887,7 +2428,7 @@
               <a:buNone/>
             </a:pPr>
             <a:r>
-              <a:rPr lang="en-US" sz="1000" dirty="0">
+              <a:rPr lang="en-US" sz="1200" dirty="0">
                 <a:solidFill>
                   <a:srgbClr val="000000"/>
                 </a:solidFill>
@@ -1907,7 +2448,7 @@
               <a:buNone/>
             </a:pPr>
             <a:r>
-              <a:rPr lang="en-US" sz="1000" dirty="0">
+              <a:rPr lang="en-US" sz="1200" dirty="0">
                 <a:solidFill>
                   <a:srgbClr val="000000"/>
                 </a:solidFill>
@@ -1927,7 +2468,7 @@
               <a:buNone/>
             </a:pPr>
             <a:r>
-              <a:rPr lang="en-US" sz="1000" dirty="0">
+              <a:rPr lang="en-US" sz="1200" dirty="0">
                 <a:solidFill>
                   <a:srgbClr val="000000"/>
                 </a:solidFill>
@@ -1947,7 +2488,7 @@
               <a:buNone/>
             </a:pPr>
             <a:r>
-              <a:rPr lang="en-US" sz="1000" dirty="0">
+              <a:rPr lang="en-US" sz="1200" dirty="0">
                 <a:solidFill>
                   <a:srgbClr val="000000"/>
                 </a:solidFill>
@@ -1967,7 +2508,7 @@
               <a:buNone/>
             </a:pPr>
             <a:r>
-              <a:rPr lang="en-US" sz="1000" dirty="0">
+              <a:rPr lang="en-US" sz="1200" dirty="0">
                 <a:solidFill>
                   <a:srgbClr val="000000"/>
                 </a:solidFill>
@@ -1987,7 +2528,7 @@
               <a:buNone/>
             </a:pPr>
             <a:r>
-              <a:rPr lang="en-US" sz="1000" dirty="0">
+              <a:rPr lang="en-US" sz="1200" dirty="0">
                 <a:solidFill>
                   <a:srgbClr val="000000"/>
                 </a:solidFill>
@@ -2007,7 +2548,7 @@
               <a:buNone/>
             </a:pPr>
             <a:r>
-              <a:rPr lang="en-US" sz="1000" dirty="0">
+              <a:rPr lang="en-US" sz="1200" dirty="0">
                 <a:solidFill>
                   <a:srgbClr val="000000"/>
                 </a:solidFill>
@@ -2027,7 +2568,7 @@
               <a:buNone/>
             </a:pPr>
             <a:r>
-              <a:rPr lang="en-US" sz="1000" dirty="0">
+              <a:rPr lang="en-US" sz="1200" dirty="0">
                 <a:solidFill>
                   <a:srgbClr val="000000"/>
                 </a:solidFill>
@@ -2047,7 +2588,7 @@
               <a:buNone/>
             </a:pPr>
             <a:r>
-              <a:rPr lang="en-US" sz="1000" dirty="0">
+              <a:rPr lang="en-US" sz="1200" dirty="0">
                 <a:solidFill>
                   <a:srgbClr val="000000"/>
                 </a:solidFill>
@@ -2067,7 +2608,7 @@
               <a:buNone/>
             </a:pPr>
             <a:r>
-              <a:rPr lang="en-US" sz="1000" dirty="0">
+              <a:rPr lang="en-US" sz="1200" dirty="0">
                 <a:solidFill>
                   <a:srgbClr val="000000"/>
                 </a:solidFill>
@@ -2087,7 +2628,7 @@
               <a:buNone/>
             </a:pPr>
             <a:r>
-              <a:rPr lang="en-US" sz="1000" dirty="0">
+              <a:rPr lang="en-US" sz="1200" dirty="0">
                 <a:solidFill>
                   <a:srgbClr val="000000"/>
                 </a:solidFill>
@@ -2107,7 +2648,7 @@
               <a:buNone/>
             </a:pPr>
             <a:r>
-              <a:rPr lang="en-US" sz="1000" dirty="0">
+              <a:rPr lang="en-US" sz="1200" dirty="0">
                 <a:solidFill>
                   <a:srgbClr val="000000"/>
                 </a:solidFill>
@@ -2117,45 +2658,6 @@
               </a:rPr>
               <a:t>[12] M. A. Brown, A. Gruen, G. Maldoff, S. Messing, Z. Sanderson, and M. Zimmer, "Web Scraping for Research: Legal, Ethical, Institutional, and Scientific Considerations," Big Data &amp; Society, 2025.</a:t>
             </a:r>
-          </a:p>
-        </p:txBody>
-      </p:sp>
-      <p:sp>
-        <p:nvSpPr>
-          <p:cNvPr id="6" name="Text 3"/>
-          <p:cNvSpPr txBox="1"/>
-          <p:nvPr/>
-        </p:nvSpPr>
-        <p:spPr>
-          <a:xfrm>
-            <a:off x="640080" y="5806440"/>
-            <a:ext cx="10881360" cy="365760"/>
-          </a:xfrm>
-          <a:prstGeom prst="rect">
-            <a:avLst/>
-          </a:prstGeom>
-          <a:noFill/>
-          <a:ln/>
-        </p:spPr>
-        <p:txBody>
-          <a:bodyPr wrap="square" lIns="0" tIns="0" rIns="0" bIns="0" rtlCol="0" anchor="ctr"/>
-          <a:lstStyle/>
-          <a:p>
-            <a:pPr marL="0" indent="0">
-              <a:buNone/>
-            </a:pPr>
-            <a:r>
-              <a:rPr lang="en-US" sz="1200" i="1" dirty="0">
-                <a:solidFill>
-                  <a:srgbClr val="000000"/>
-                </a:solidFill>
-                <a:latin typeface="Calibri" pitchFamily="34" charset="0"/>
-                <a:ea typeface="Calibri" pitchFamily="34" charset="-122"/>
-                <a:cs typeface="Calibri" pitchFamily="34" charset="-120"/>
-              </a:rPr>
-              <a:t>Use IEEE format. Every reference listed must be cited in the slides / report.</a:t>
-            </a:r>
-            <a:endParaRPr lang="en-US" sz="1200" dirty="0"/>
           </a:p>
         </p:txBody>
       </p:sp>
@@ -2225,7 +2727,7 @@
                 <a:ea typeface="Calibri" pitchFamily="34" charset="-122"/>
                 <a:cs typeface="Calibri" pitchFamily="34" charset="-120"/>
               </a:rPr>
-              <a:t>12</a:t>
+              <a:t>13</a:t>
             </a:r>
             <a:endParaRPr lang="en-US" sz="1000" dirty="0"/>
           </a:p>
@@ -2302,9 +2804,9 @@
 </p:sld>
 </file>
 
-<file path=ppt/slides/slide12.xml><?xml version="1.0" encoding="utf-8"?>
+<file path=ppt/slides/slide2.xml><?xml version="1.0" encoding="utf-8"?>
 <p:sld xmlns:a="http://schemas.openxmlformats.org/drawingml/2006/main" xmlns:r="http://schemas.openxmlformats.org/officeDocument/2006/relationships" xmlns:p="http://schemas.openxmlformats.org/presentationml/2006/main">
-  <p:cSld name="Slide 5b">
+  <p:cSld name="Slide 4">
     <p:bg>
       <p:bgPr>
         <a:solidFill>
@@ -2360,7 +2862,7 @@
                 <a:ea typeface="Calibri" pitchFamily="34" charset="-122"/>
                 <a:cs typeface="Calibri" pitchFamily="34" charset="-120"/>
               </a:rPr>
-              <a:t>6</a:t>
+              <a:t>4</a:t>
             </a:r>
             <a:endParaRPr lang="en-US" sz="1000" dirty="0"/>
           </a:p>
@@ -2399,7 +2901,416 @@
                 <a:ea typeface="Calibri" pitchFamily="34" charset="-122"/>
                 <a:cs typeface="Calibri" pitchFamily="34" charset="-120"/>
               </a:rPr>
-              <a:t>Literature Survey (contd.)</a:t>
+              <a:t>Problem Statement &amp; Background</a:t>
+            </a:r>
+            <a:endParaRPr lang="en-US" sz="2800" dirty="0"/>
+          </a:p>
+        </p:txBody>
+      </p:sp>
+      <p:pic>
+        <p:nvPicPr>
+          <p:cNvPr id="4" name="Image 0" descr="logo.png"/>
+          <p:cNvPicPr>
+            <a:picLocks noChangeAspect="1"/>
+          </p:cNvPicPr>
+          <p:nvPr/>
+        </p:nvPicPr>
+        <p:blipFill>
+          <a:blip r:embed="rId3"/>
+          <a:stretch>
+            <a:fillRect/>
+          </a:stretch>
+        </p:blipFill>
+        <p:spPr>
+          <a:xfrm>
+            <a:off x="10362895" y="320040"/>
+            <a:ext cx="1371600" cy="518746"/>
+          </a:xfrm>
+          <a:prstGeom prst="rect">
+            <a:avLst/>
+          </a:prstGeom>
+        </p:spPr>
+      </p:pic>
+      <p:sp>
+        <p:nvSpPr>
+          <p:cNvPr id="5" name="Text 2"/>
+          <p:cNvSpPr txBox="1"/>
+          <p:nvPr/>
+        </p:nvSpPr>
+        <p:spPr>
+          <a:xfrm>
+            <a:off x="640080" y="1325880"/>
+            <a:ext cx="10881360" cy="4937760"/>
+          </a:xfrm>
+          <a:prstGeom prst="rect">
+            <a:avLst/>
+          </a:prstGeom>
+          <a:noFill/>
+          <a:ln/>
+        </p:spPr>
+        <p:txBody>
+          <a:bodyPr wrap="square" lIns="0" tIns="0" rIns="0" bIns="0" rtlCol="0" anchor="t"/>
+          <a:lstStyle/>
+          <a:p>
+            <a:pPr marL="177800" indent="-177800">
+              <a:spcBef>
+                <a:spcPts val="700"/>
+              </a:spcBef>
+              <a:spcAft>
+                <a:spcPts val="300"/>
+              </a:spcAft>
+              <a:buSzPct val="100000"/>
+              <a:buChar char="•"/>
+            </a:pPr>
+            <a:r>
+              <a:rPr lang="en-US" sz="1500" b="1" dirty="0">
+                <a:solidFill>
+                  <a:srgbClr val="1D2F82"/>
+                </a:solidFill>
+                <a:latin typeface="Calibri" pitchFamily="34" charset="0"/>
+                <a:ea typeface="Calibri" pitchFamily="34" charset="-122"/>
+                <a:cs typeface="Calibri" pitchFamily="34" charset="-120"/>
+              </a:rPr>
+              <a:t>Problem Statement:</a:t>
+            </a:r>
+          </a:p>
+          <a:p>
+            <a:pPr marL="457200" lvl="1" indent="-228600">
+              <a:spcAft>
+                <a:spcPts val="500"/>
+              </a:spcAft>
+              <a:buSzPct val="90000"/>
+              <a:buChar char="–"/>
+            </a:pPr>
+            <a:r>
+              <a:rPr lang="en-US" sz="1250" dirty="0">
+                <a:solidFill>
+                  <a:srgbClr val="000000"/>
+                </a:solidFill>
+                <a:latin typeface="Calibri" pitchFamily="34" charset="0"/>
+                <a:ea typeface="Calibri" pitchFamily="34" charset="-122"/>
+                <a:cs typeface="Calibri" pitchFamily="34" charset="-120"/>
+              </a:rPr>
+              <a:t>Hospital Information Systems hold highly sensitive personal data, yet techniques for extracting data from HIS portals are judged only on speed, robustness and coverage.</a:t>
+            </a:r>
+          </a:p>
+          <a:p>
+            <a:pPr marL="457200" lvl="1" indent="-228600">
+              <a:spcAft>
+                <a:spcPts val="500"/>
+              </a:spcAft>
+              <a:buSzPct val="90000"/>
+              <a:buChar char="–"/>
+            </a:pPr>
+            <a:r>
+              <a:rPr lang="en-US" sz="1250" dirty="0">
+                <a:solidFill>
+                  <a:srgbClr val="000000"/>
+                </a:solidFill>
+                <a:latin typeface="Calibri" pitchFamily="34" charset="0"/>
+                <a:ea typeface="Calibri" pitchFamily="34" charset="-122"/>
+                <a:cs typeface="Calibri" pitchFamily="34" charset="-120"/>
+              </a:rPr>
+              <a:t>DPDP Act 2023 compliance is treated as a legal afterthought, never as a measurable property of the extraction technique itself.</a:t>
+            </a:r>
+          </a:p>
+          <a:p>
+            <a:pPr marL="177800" indent="-177800">
+              <a:spcBef>
+                <a:spcPts val="700"/>
+              </a:spcBef>
+              <a:spcAft>
+                <a:spcPts val="300"/>
+              </a:spcAft>
+              <a:buSzPct val="100000"/>
+              <a:buChar char="•"/>
+            </a:pPr>
+            <a:r>
+              <a:rPr lang="en-US" sz="1500" b="1" dirty="0">
+                <a:solidFill>
+                  <a:srgbClr val="1D2F82"/>
+                </a:solidFill>
+                <a:latin typeface="Calibri" pitchFamily="34" charset="0"/>
+                <a:ea typeface="Calibri" pitchFamily="34" charset="-122"/>
+                <a:cs typeface="Calibri" pitchFamily="34" charset="-120"/>
+              </a:rPr>
+              <a:t>Background &amp; Significance:</a:t>
+            </a:r>
+          </a:p>
+          <a:p>
+            <a:pPr marL="457200" lvl="1" indent="-228600">
+              <a:spcAft>
+                <a:spcPts val="500"/>
+              </a:spcAft>
+              <a:buSzPct val="90000"/>
+              <a:buChar char="–"/>
+            </a:pPr>
+            <a:r>
+              <a:rPr lang="en-US" sz="1250" dirty="0">
+                <a:solidFill>
+                  <a:srgbClr val="000000"/>
+                </a:solidFill>
+                <a:latin typeface="Calibri" pitchFamily="34" charset="0"/>
+                <a:ea typeface="Calibri" pitchFamily="34" charset="-122"/>
+                <a:cs typeface="Calibri" pitchFamily="34" charset="-120"/>
+              </a:rPr>
+              <a:t>HIS platforms are heterogeneous and frequently updated; staff-facing data access is credentialed and portal-based — Tier-2, headless-browser automation.</a:t>
+            </a:r>
+          </a:p>
+          <a:p>
+            <a:pPr marL="457200" lvl="1" indent="-228600">
+              <a:spcAft>
+                <a:spcPts val="500"/>
+              </a:spcAft>
+              <a:buSzPct val="90000"/>
+              <a:buChar char="–"/>
+            </a:pPr>
+            <a:r>
+              <a:rPr lang="en-US" sz="1250" dirty="0">
+                <a:solidFill>
+                  <a:srgbClr val="000000"/>
+                </a:solidFill>
+                <a:latin typeface="Calibri" pitchFamily="34" charset="0"/>
+                <a:ea typeface="Calibri" pitchFamily="34" charset="-122"/>
+                <a:cs typeface="Calibri" pitchFamily="34" charset="-120"/>
+              </a:rPr>
+              <a:t>The DPDP Act 2023 makes lawful basis, purpose limitation, data minimisation and security safeguards binding on any entity processing patient data in India.</a:t>
+            </a:r>
+          </a:p>
+          <a:p>
+            <a:pPr marL="177800" indent="-177800">
+              <a:spcBef>
+                <a:spcPts val="700"/>
+              </a:spcBef>
+              <a:spcAft>
+                <a:spcPts val="300"/>
+              </a:spcAft>
+              <a:buSzPct val="100000"/>
+              <a:buChar char="•"/>
+            </a:pPr>
+            <a:r>
+              <a:rPr lang="en-US" sz="1500" b="1" dirty="0">
+                <a:solidFill>
+                  <a:srgbClr val="1D2F82"/>
+                </a:solidFill>
+                <a:latin typeface="Calibri" pitchFamily="34" charset="0"/>
+                <a:ea typeface="Calibri" pitchFamily="34" charset="-122"/>
+                <a:cs typeface="Calibri" pitchFamily="34" charset="-120"/>
+              </a:rPr>
+              <a:t>Existing Solutions:</a:t>
+            </a:r>
+          </a:p>
+          <a:p>
+            <a:pPr marL="457200" lvl="1" indent="-228600">
+              <a:spcAft>
+                <a:spcPts val="500"/>
+              </a:spcAft>
+              <a:buSzPct val="90000"/>
+              <a:buChar char="–"/>
+            </a:pPr>
+            <a:r>
+              <a:rPr lang="en-US" sz="1250" dirty="0">
+                <a:solidFill>
+                  <a:srgbClr val="000000"/>
+                </a:solidFill>
+                <a:latin typeface="Calibri" pitchFamily="34" charset="0"/>
+                <a:ea typeface="Calibri" pitchFamily="34" charset="-122"/>
+                <a:cs typeface="Calibri" pitchFamily="34" charset="-120"/>
+              </a:rPr>
+              <a:t>Rule / wrapper scrapers (fast, brittle); headless-browser automation (handles auth and dynamic pages); LLM / agentic extractors — AutoScraper (EMNLP 2024), AXE (2026).</a:t>
+            </a:r>
+          </a:p>
+          <a:p>
+            <a:pPr marL="457200" lvl="1" indent="-228600">
+              <a:spcAft>
+                <a:spcPts val="500"/>
+              </a:spcAft>
+              <a:buSzPct val="90000"/>
+              <a:buChar char="–"/>
+            </a:pPr>
+            <a:r>
+              <a:rPr lang="en-US" sz="1250" dirty="0">
+                <a:solidFill>
+                  <a:srgbClr val="000000"/>
+                </a:solidFill>
+                <a:latin typeface="Calibri" pitchFamily="34" charset="0"/>
+                <a:ea typeface="Calibri" pitchFamily="34" charset="-122"/>
+                <a:cs typeface="Calibri" pitchFamily="34" charset="-120"/>
+              </a:rPr>
+              <a:t>Compliance guidance for scraping exists only as qualitative checklists (e.g. Web Scraping for Research, 2025).</a:t>
+            </a:r>
+          </a:p>
+          <a:p>
+            <a:pPr marL="177800" indent="-177800">
+              <a:spcBef>
+                <a:spcPts val="700"/>
+              </a:spcBef>
+              <a:spcAft>
+                <a:spcPts val="300"/>
+              </a:spcAft>
+              <a:buSzPct val="100000"/>
+              <a:buChar char="•"/>
+            </a:pPr>
+            <a:r>
+              <a:rPr lang="en-US" sz="1500" b="1" dirty="0">
+                <a:solidFill>
+                  <a:srgbClr val="1D2F82"/>
+                </a:solidFill>
+                <a:latin typeface="Calibri" pitchFamily="34" charset="0"/>
+                <a:ea typeface="Calibri" pitchFamily="34" charset="-122"/>
+                <a:cs typeface="Calibri" pitchFamily="34" charset="-120"/>
+              </a:rPr>
+              <a:t>Limitations / Research Gap:</a:t>
+            </a:r>
+          </a:p>
+          <a:p>
+            <a:pPr marL="457200" lvl="1" indent="-228600">
+              <a:spcAft>
+                <a:spcPts val="500"/>
+              </a:spcAft>
+              <a:buSzPct val="90000"/>
+              <a:buChar char="–"/>
+            </a:pPr>
+            <a:r>
+              <a:rPr lang="en-US" sz="1250" dirty="0">
+                <a:solidFill>
+                  <a:srgbClr val="000000"/>
+                </a:solidFill>
+                <a:latin typeface="Calibri" pitchFamily="34" charset="0"/>
+                <a:ea typeface="Calibri" pitchFamily="34" charset="-122"/>
+                <a:cs typeface="Calibri" pitchFamily="34" charset="-120"/>
+              </a:rPr>
+              <a:t>No existing technique reports a compliance score, so compliance cannot be compared across extraction methods.</a:t>
+            </a:r>
+          </a:p>
+          <a:p>
+            <a:pPr marL="457200" lvl="1" indent="-228600">
+              <a:spcAft>
+                <a:spcPts val="500"/>
+              </a:spcAft>
+              <a:buSzPct val="90000"/>
+              <a:buChar char="–"/>
+            </a:pPr>
+            <a:r>
+              <a:rPr lang="en-US" sz="1250" dirty="0">
+                <a:solidFill>
+                  <a:srgbClr val="000000"/>
+                </a:solidFill>
+                <a:latin typeface="Calibri" pitchFamily="34" charset="0"/>
+                <a:ea typeface="Calibri" pitchFamily="34" charset="-122"/>
+                <a:cs typeface="Calibri" pitchFamily="34" charset="-120"/>
+              </a:rPr>
+              <a:t>Our gap: make DPDP compliance a benchmarkable, per-technique number produced by one shared harness.</a:t>
+            </a:r>
+          </a:p>
+        </p:txBody>
+      </p:sp>
+    </p:spTree>
+  </p:cSld>
+  <p:clrMapOvr>
+    <a:masterClrMapping/>
+  </p:clrMapOvr>
+</p:sld>
+</file>
+
+<file path=ppt/slides/slide3.xml><?xml version="1.0" encoding="utf-8"?>
+<p:sld xmlns:a="http://schemas.openxmlformats.org/drawingml/2006/main" xmlns:r="http://schemas.openxmlformats.org/officeDocument/2006/relationships" xmlns:p="http://schemas.openxmlformats.org/presentationml/2006/main">
+  <p:cSld name="Slide 5">
+    <p:bg>
+      <p:bgPr>
+        <a:solidFill>
+          <a:srgbClr val="FFFFFF"/>
+        </a:solidFill>
+        <a:effectLst/>
+      </p:bgPr>
+    </p:bg>
+    <p:spTree>
+      <p:nvGrpSpPr>
+        <p:cNvPr id="1" name=""/>
+        <p:cNvGrpSpPr/>
+        <p:nvPr/>
+      </p:nvGrpSpPr>
+      <p:grpSpPr>
+        <a:xfrm>
+          <a:off x="0" y="0"/>
+          <a:ext cx="0" cy="0"/>
+          <a:chOff x="0" y="0"/>
+          <a:chExt cx="0" cy="0"/>
+        </a:xfrm>
+      </p:grpSpPr>
+      <p:sp>
+        <p:nvSpPr>
+          <p:cNvPr id="2" name="Text 0"/>
+          <p:cNvSpPr txBox="1"/>
+          <p:nvPr/>
+        </p:nvSpPr>
+        <p:spPr>
+          <a:xfrm>
+            <a:off x="11460175" y="6446520"/>
+            <a:ext cx="457200" cy="274320"/>
+          </a:xfrm>
+          <a:prstGeom prst="rect">
+            <a:avLst/>
+          </a:prstGeom>
+          <a:noFill/>
+          <a:ln/>
+        </p:spPr>
+        <p:txBody>
+          <a:bodyPr wrap="square" lIns="0" tIns="0" rIns="0" bIns="0" rtlCol="0" anchor="ctr"/>
+          <a:lstStyle/>
+          <a:p>
+            <a:pPr marL="0" indent="0" algn="r">
+              <a:buNone/>
+            </a:pPr>
+            <a:r>
+              <a:rPr lang="en-US" sz="1000" dirty="0">
+                <a:solidFill>
+                  <a:srgbClr val="808080"/>
+                </a:solidFill>
+                <a:latin typeface="Calibri" pitchFamily="34" charset="0"/>
+                <a:ea typeface="Calibri" pitchFamily="34" charset="-122"/>
+                <a:cs typeface="Calibri" pitchFamily="34" charset="-120"/>
+              </a:rPr>
+              <a:t>5</a:t>
+            </a:r>
+            <a:endParaRPr lang="en-US" sz="1000" dirty="0"/>
+          </a:p>
+        </p:txBody>
+      </p:sp>
+      <p:sp>
+        <p:nvSpPr>
+          <p:cNvPr id="3" name="Text 1"/>
+          <p:cNvSpPr txBox="1"/>
+          <p:nvPr/>
+        </p:nvSpPr>
+        <p:spPr>
+          <a:xfrm>
+            <a:off x="548640" y="320040"/>
+            <a:ext cx="9601200" cy="685800"/>
+          </a:xfrm>
+          <a:prstGeom prst="rect">
+            <a:avLst/>
+          </a:prstGeom>
+          <a:noFill/>
+          <a:ln/>
+        </p:spPr>
+        <p:txBody>
+          <a:bodyPr wrap="square" lIns="0" tIns="0" rIns="0" bIns="0" rtlCol="0" anchor="ctr"/>
+          <a:lstStyle/>
+          <a:p>
+            <a:pPr marL="0" indent="0">
+              <a:buNone/>
+            </a:pPr>
+            <a:r>
+              <a:rPr lang="en-US" sz="2800" b="1" dirty="0">
+                <a:solidFill>
+                  <a:srgbClr val="1D2F82"/>
+                </a:solidFill>
+                <a:latin typeface="Calibri" pitchFamily="34" charset="0"/>
+                <a:ea typeface="Calibri" pitchFamily="34" charset="-122"/>
+                <a:cs typeface="Calibri" pitchFamily="34" charset="-120"/>
+              </a:rPr>
+              <a:t>Literature Survey</a:t>
             </a:r>
             <a:endParaRPr lang="en-US" sz="2800" dirty="0"/>
           </a:p>
@@ -2853,7 +3764,7 @@
                           <a:ea typeface="Calibri" pitchFamily="34" charset="-122"/>
                           <a:cs typeface="Calibri" pitchFamily="34" charset="-120"/>
                         </a:rPr>
-                        <a:t>7</a:t>
+                        <a:t>1</a:t>
                       </a:r>
                       <a:endParaRPr lang="en-US" sz="1100" dirty="0"/>
                     </a:p>
@@ -2914,7 +3825,7 @@
                           <a:ea typeface="Calibri" pitchFamily="34" charset="-122"/>
                           <a:cs typeface="Calibri" pitchFamily="34" charset="-120"/>
                         </a:rPr>
-                        <a:t>ACM IMC, 2025</a:t>
+                        <a:t>Ruchitaa et al., 2023</a:t>
                       </a:r>
                       <a:endParaRPr lang="en-US" sz="1050" dirty="0"/>
                     </a:p>
@@ -2975,7 +3886,7 @@
                           <a:ea typeface="Calibri" pitchFamily="34" charset="-122"/>
                           <a:cs typeface="Calibri" pitchFamily="34" charset="-120"/>
                         </a:rPr>
-                        <a:t>Scrapers Selectively Respect robots.txt Directives — large-scale study</a:t>
+                        <a:t>Web Scraping Tools and Techniques: A Brief Survey — ICITIIT</a:t>
                       </a:r>
                       <a:endParaRPr lang="en-US" sz="1050" dirty="0"/>
                     </a:p>
@@ -3036,7 +3947,7 @@
                           <a:ea typeface="Calibri" pitchFamily="34" charset="-122"/>
                           <a:cs typeface="Calibri" pitchFamily="34" charset="-120"/>
                         </a:rPr>
-                        <a:t>Internet-scale measurement of robots.txt compliance in the wild</a:t>
+                        <a:t>Survey / taxonomy of scraping tools and methods</a:t>
                       </a:r>
                       <a:endParaRPr lang="en-US" sz="1000" dirty="0"/>
                     </a:p>
@@ -3097,7 +4008,7 @@
                           <a:ea typeface="Calibri" pitchFamily="34" charset="-122"/>
                           <a:cs typeface="Calibri" pitchFamily="34" charset="-120"/>
                         </a:rPr>
-                        <a:t>Compliance observed after the fact, never designed into the technique</a:t>
+                        <a:t>Broad catalogue; no domain-specific (HIS) use and no compliance axis</a:t>
                       </a:r>
                       <a:endParaRPr lang="en-US" sz="1000" dirty="0"/>
                     </a:p>
@@ -3165,7 +4076,7 @@
                           <a:ea typeface="Calibri" pitchFamily="34" charset="-122"/>
                           <a:cs typeface="Calibri" pitchFamily="34" charset="-120"/>
                         </a:rPr>
-                        <a:t>8</a:t>
+                        <a:t>2</a:t>
                       </a:r>
                       <a:endParaRPr lang="en-US" sz="1100" dirty="0"/>
                     </a:p>
@@ -3226,7 +4137,7 @@
                           <a:ea typeface="Calibri" pitchFamily="34" charset="-122"/>
                           <a:cs typeface="Calibri" pitchFamily="34" charset="-120"/>
                         </a:rPr>
-                        <a:t>Purnawan &amp; Surendro, 2016</a:t>
+                        <a:t>Huang et al., 2024</a:t>
                       </a:r>
                       <a:endParaRPr lang="en-US" sz="1050" dirty="0"/>
                     </a:p>
@@ -3287,7 +4198,7 @@
                           <a:ea typeface="Calibri" pitchFamily="34" charset="-122"/>
                           <a:cs typeface="Calibri" pitchFamily="34" charset="-120"/>
                         </a:rPr>
-                        <a:t>Building Enterprise Architecture for Hospital Information System — ICoICT</a:t>
+                        <a:t>AutoScraper: A Progressive Understanding Web Agent — EMNLP</a:t>
                       </a:r>
                       <a:endParaRPr lang="en-US" sz="1050" dirty="0"/>
                     </a:p>
@@ -3348,7 +4259,7 @@
                           <a:ea typeface="Calibri" pitchFamily="34" charset="-122"/>
                           <a:cs typeface="Calibri" pitchFamily="34" charset="-120"/>
                         </a:rPr>
-                        <a:t>Enterprise-architecture modelling of HIS structure</a:t>
+                        <a:t>Two-stage LLM agent using HTML hierarchy + cross-page similarity; executability metric</a:t>
                       </a:r>
                       <a:endParaRPr lang="en-US" sz="1000" dirty="0"/>
                     </a:p>
@@ -3409,7 +4320,7 @@
                           <a:ea typeface="Calibri" pitchFamily="34" charset="-122"/>
                           <a:cs typeface="Calibri" pitchFamily="34" charset="-120"/>
                         </a:rPr>
-                        <a:t>Useful layer model; predates LLM extraction, no data-egress / compliance view</a:t>
+                        <a:t>SOTA scraper generation, but evaluated only on executability / coverage — no data protection</a:t>
                       </a:r>
                       <a:endParaRPr lang="en-US" sz="1000" dirty="0"/>
                     </a:p>
@@ -3455,7 +4366,7 @@
                 </a:tc>
                 <a:extLst>
                   <a:ext uri="{0D108BD9-81ED-4DB2-BD59-A6C34878D82A}">
-                    <a16:rowId xmlns:a16="http://schemas.microsoft.com/office/drawing/2014/main" val="10001"/>
+                    <a16:rowId xmlns:a16="http://schemas.microsoft.com/office/drawing/2014/main" val="2600590760"/>
                   </a:ext>
                 </a:extLst>
               </a:tr>
@@ -3477,7 +4388,7 @@
                           <a:ea typeface="Calibri" pitchFamily="34" charset="-122"/>
                           <a:cs typeface="Calibri" pitchFamily="34" charset="-120"/>
                         </a:rPr>
-                        <a:t>9</a:t>
+                        <a:t>3</a:t>
                       </a:r>
                       <a:endParaRPr lang="en-US" sz="1100" dirty="0"/>
                     </a:p>
@@ -3538,7 +4449,7 @@
                           <a:ea typeface="Calibri" pitchFamily="34" charset="-122"/>
                           <a:cs typeface="Calibri" pitchFamily="34" charset="-120"/>
                         </a:rPr>
-                        <a:t>Interoperability review, 2025</a:t>
+                        <a:t>Mansour et al., 2026</a:t>
                       </a:r>
                       <a:endParaRPr lang="en-US" sz="1050" dirty="0"/>
                     </a:p>
@@ -3599,7 +4510,7 @@
                           <a:ea typeface="Calibri" pitchFamily="34" charset="-122"/>
                           <a:cs typeface="Calibri" pitchFamily="34" charset="-120"/>
                         </a:rPr>
-                        <a:t>A Critical Review of Health Data Interoperability Standards: FHIR, HL7 and Beyond</a:t>
+                        <a:t>AXE: Low-Cost Cross-Domain Web Structured Information Extraction — arXiv</a:t>
                       </a:r>
                       <a:endParaRPr lang="en-US" sz="1050" dirty="0"/>
                     </a:p>
@@ -3660,7 +4571,7 @@
                           <a:ea typeface="Calibri" pitchFamily="34" charset="-122"/>
                           <a:cs typeface="Calibri" pitchFamily="34" charset="-120"/>
                         </a:rPr>
-                        <a:t>Critical review of HL7 / FHIR and related standards</a:t>
+                        <a:t>DOM-tree pruning + Grounded XPath Resolution feeding a 0.6B LLM; zero-shot</a:t>
                       </a:r>
                       <a:endParaRPr lang="en-US" sz="1000" dirty="0"/>
                     </a:p>
@@ -3721,7 +4632,7 @@
                           <a:ea typeface="Calibri" pitchFamily="34" charset="-122"/>
                           <a:cs typeface="Calibri" pitchFamily="34" charset="-120"/>
                         </a:rPr>
-                        <a:t>Interoperability ≠ compliant extraction; standards are silent on lawful scraping</a:t>
+                        <a:t>F1 88.1% on SWDE at low cost; no compliance modelling, not applied to credentialed domains</a:t>
                       </a:r>
                       <a:endParaRPr lang="en-US" sz="1000" dirty="0"/>
                     </a:p>
@@ -3767,7 +4678,7 @@
                 </a:tc>
                 <a:extLst>
                   <a:ext uri="{0D108BD9-81ED-4DB2-BD59-A6C34878D82A}">
-                    <a16:rowId xmlns:a16="http://schemas.microsoft.com/office/drawing/2014/main" val="10001"/>
+                    <a16:rowId xmlns:a16="http://schemas.microsoft.com/office/drawing/2014/main" val="1656144425"/>
                   </a:ext>
                 </a:extLst>
               </a:tr>
@@ -3789,7 +4700,7 @@
                           <a:ea typeface="Calibri" pitchFamily="34" charset="-122"/>
                           <a:cs typeface="Calibri" pitchFamily="34" charset="-120"/>
                         </a:rPr>
-                        <a:t>10</a:t>
+                        <a:t>4</a:t>
                       </a:r>
                       <a:endParaRPr lang="en-US" sz="1100" dirty="0"/>
                     </a:p>
@@ -3850,7 +4761,7 @@
                           <a:ea typeface="Calibri" pitchFamily="34" charset="-122"/>
                           <a:cs typeface="Calibri" pitchFamily="34" charset="-120"/>
                         </a:rPr>
-                        <a:t>Discover Public Health, 2025</a:t>
+                        <a:t>Bohra et al., 2025</a:t>
                       </a:r>
                       <a:endParaRPr lang="en-US" sz="1050" dirty="0"/>
                     </a:p>
@@ -3911,7 +4822,7 @@
                           <a:ea typeface="Calibri" pitchFamily="34" charset="-122"/>
                           <a:cs typeface="Calibri" pitchFamily="34" charset="-120"/>
                         </a:rPr>
-                        <a:t>Significance of the DPDP Act 2023 for the Healthcare Industry</a:t>
+                        <a:t>WebLists: Structured Extraction from Interactive Sites (BardeenAgent) — arXiv</a:t>
                       </a:r>
                       <a:endParaRPr lang="en-US" sz="1050" dirty="0"/>
                     </a:p>
@@ -3972,7 +4883,7 @@
                           <a:ea typeface="Calibri" pitchFamily="34" charset="-122"/>
                           <a:cs typeface="Calibri" pitchFamily="34" charset="-120"/>
                         </a:rPr>
-                        <a:t>Doctrinal analysis of DPDP obligations for healthcare entities</a:t>
+                        <a:t>200-task benchmark; agent converts execution into replayable programs</a:t>
                       </a:r>
                       <a:endParaRPr lang="en-US" sz="1000" dirty="0"/>
                     </a:p>
@@ -4033,7 +4944,7 @@
                           <a:ea typeface="Calibri" pitchFamily="34" charset="-122"/>
                           <a:cs typeface="Calibri" pitchFamily="34" charset="-120"/>
                         </a:rPr>
-                        <a:t>Legal analysis only; no technical or measurable operationalisation</a:t>
+                        <a:t>Recall 31%→66%; regulated / enterprise contexts and privacy risk left unaddressed</a:t>
                       </a:r>
                       <a:endParaRPr lang="en-US" sz="1000" dirty="0"/>
                     </a:p>
@@ -4079,7 +4990,7 @@
                 </a:tc>
                 <a:extLst>
                   <a:ext uri="{0D108BD9-81ED-4DB2-BD59-A6C34878D82A}">
-                    <a16:rowId xmlns:a16="http://schemas.microsoft.com/office/drawing/2014/main" val="10001"/>
+                    <a16:rowId xmlns:a16="http://schemas.microsoft.com/office/drawing/2014/main" val="2196825833"/>
                   </a:ext>
                 </a:extLst>
               </a:tr>
@@ -4101,7 +5012,7 @@
                           <a:ea typeface="Calibri" pitchFamily="34" charset="-122"/>
                           <a:cs typeface="Calibri" pitchFamily="34" charset="-120"/>
                         </a:rPr>
-                        <a:t>11</a:t>
+                        <a:t>5</a:t>
                       </a:r>
                       <a:endParaRPr lang="en-US" sz="1100" dirty="0"/>
                     </a:p>
@@ -4162,7 +5073,7 @@
                           <a:ea typeface="Calibri" pitchFamily="34" charset="-122"/>
                           <a:cs typeface="Calibri" pitchFamily="34" charset="-120"/>
                         </a:rPr>
-                        <a:t>npj Digital Medicine, 2025</a:t>
+                        <a:t>Wang et al., 2026</a:t>
                       </a:r>
                       <a:endParaRPr lang="en-US" sz="1050" dirty="0"/>
                     </a:p>
@@ -4223,7 +5134,7 @@
                           <a:ea typeface="Calibri" pitchFamily="34" charset="-122"/>
                           <a:cs typeface="Calibri" pitchFamily="34" charset="-120"/>
                         </a:rPr>
-                        <a:t>Digital Data Protection in Indian Medical Research and Healthcare</a:t>
+                        <a:t>Co-Scraper: Query-Aware DOM Pruning and Reusable Scraper Synthesis — arXiv</a:t>
                       </a:r>
                       <a:endParaRPr lang="en-US" sz="1050" dirty="0"/>
                     </a:p>
@@ -4284,7 +5195,7 @@
                           <a:ea typeface="Calibri" pitchFamily="34" charset="-122"/>
                           <a:cs typeface="Calibri" pitchFamily="34" charset="-120"/>
                         </a:rPr>
-                        <a:t>Synthesis of challenges and recommendations</a:t>
+                        <a:t>Two-stage query-aware pruning + extraction-strategy induction</a:t>
                       </a:r>
                       <a:endParaRPr lang="en-US" sz="1000" dirty="0"/>
                     </a:p>
@@ -4345,7 +5256,7 @@
                           <a:ea typeface="Calibri" pitchFamily="34" charset="-122"/>
                           <a:cs typeface="Calibri" pitchFamily="34" charset="-120"/>
                         </a:rPr>
-                        <a:t>Recommendations not translated into checkable controls on data-collection pipelines</a:t>
+                        <a:t>F1 94.78% SWDE, ~90% reuse; optimises efficiency only — no purpose-limitation notion</a:t>
                       </a:r>
                       <a:endParaRPr lang="en-US" sz="1000" dirty="0"/>
                     </a:p>
@@ -4391,7 +5302,7 @@
                 </a:tc>
                 <a:extLst>
                   <a:ext uri="{0D108BD9-81ED-4DB2-BD59-A6C34878D82A}">
-                    <a16:rowId xmlns:a16="http://schemas.microsoft.com/office/drawing/2014/main" val="10001"/>
+                    <a16:rowId xmlns:a16="http://schemas.microsoft.com/office/drawing/2014/main" val="702514604"/>
                   </a:ext>
                 </a:extLst>
               </a:tr>
@@ -4413,7 +5324,7 @@
                           <a:ea typeface="Calibri" pitchFamily="34" charset="-122"/>
                           <a:cs typeface="Calibri" pitchFamily="34" charset="-120"/>
                         </a:rPr>
-                        <a:t>12</a:t>
+                        <a:t>6</a:t>
                       </a:r>
                       <a:endParaRPr lang="en-US" sz="1100" dirty="0"/>
                     </a:p>
@@ -4474,7 +5385,7 @@
                           <a:ea typeface="Calibri" pitchFamily="34" charset="-122"/>
                           <a:cs typeface="Calibri" pitchFamily="34" charset="-120"/>
                         </a:rPr>
-                        <a:t>Brown et al., 2025</a:t>
+                        <a:t>Gundelach et al., 2025</a:t>
                       </a:r>
                       <a:endParaRPr lang="en-US" sz="1050" dirty="0"/>
                     </a:p>
@@ -4535,7 +5446,7 @@
                           <a:ea typeface="Calibri" pitchFamily="34" charset="-122"/>
                           <a:cs typeface="Calibri" pitchFamily="34" charset="-120"/>
                         </a:rPr>
-                        <a:t>Web Scraping for Research: Legal, Ethical, Institutional and Scientific Considerations — Big Data &amp; Society</a:t>
+                        <a:t>Detecting Bot Detection: Prevalence, Techniques, Implications — arXiv</a:t>
                       </a:r>
                       <a:endParaRPr lang="en-US" sz="1050" dirty="0"/>
                     </a:p>
@@ -4596,7 +5507,7 @@
                           <a:ea typeface="Calibri" pitchFamily="34" charset="-122"/>
                           <a:cs typeface="Calibri" pitchFamily="34" charset="-120"/>
                         </a:rPr>
-                        <a:t>Multi-dimensional qualitative framework (contract, CFAA, IP, privacy, IRB, validity)</a:t>
+                        <a:t>Systematic review (2020–25) of bot-detection at top security / web venues</a:t>
                       </a:r>
                       <a:endParaRPr lang="en-US" sz="1000" dirty="0"/>
                     </a:p>
@@ -4657,7 +5568,7 @@
                           <a:ea typeface="Calibri" pitchFamily="34" charset="-122"/>
                           <a:cs typeface="Calibri" pitchFamily="34" charset="-120"/>
                         </a:rPr>
-                        <a:t>A checklist, not a scored per-technique benchmark</a:t>
+                        <a:t>Maps the detection landscape; authenticated / credentialed portal scraping under-studied</a:t>
                       </a:r>
                       <a:endParaRPr lang="en-US" sz="1000" dirty="0"/>
                     </a:p>
@@ -4703,7 +5614,7 @@
                 </a:tc>
                 <a:extLst>
                   <a:ext uri="{0D108BD9-81ED-4DB2-BD59-A6C34878D82A}">
-                    <a16:rowId xmlns:a16="http://schemas.microsoft.com/office/drawing/2014/main" val="10001"/>
+                    <a16:rowId xmlns:a16="http://schemas.microsoft.com/office/drawing/2014/main" val="604698533"/>
                   </a:ext>
                 </a:extLst>
               </a:tr>
@@ -4744,7 +5655,7 @@
                 <a:ea typeface="Calibri" pitchFamily="34" charset="-122"/>
                 <a:cs typeface="Calibri" pitchFamily="34" charset="-120"/>
               </a:rPr>
-              <a:t>Continued from previous slide. Full IEEE reference list on the References slide.</a:t>
+              <a:t>References [1]–[6] here; [7]–[12] on the next slide. Full IEEE list on the References slide.</a:t>
             </a:r>
             <a:endParaRPr lang="en-US" sz="1200" dirty="0"/>
           </a:p>
@@ -4758,9 +5669,9 @@
 </p:sld>
 </file>
 
-<file path=ppt/slides/slide2.xml><?xml version="1.0" encoding="utf-8"?>
+<file path=ppt/slides/slide4.xml><?xml version="1.0" encoding="utf-8"?>
 <p:sld xmlns:a="http://schemas.openxmlformats.org/drawingml/2006/main" xmlns:r="http://schemas.openxmlformats.org/officeDocument/2006/relationships" xmlns:p="http://schemas.openxmlformats.org/presentationml/2006/main">
-  <p:cSld name="Slide 2">
+  <p:cSld name="Slide 5b">
     <p:bg>
       <p:bgPr>
         <a:solidFill>
@@ -4816,840 +5727,7 @@
                 <a:ea typeface="Calibri" pitchFamily="34" charset="-122"/>
                 <a:cs typeface="Calibri" pitchFamily="34" charset="-120"/>
               </a:rPr>
-              <a:t>2</a:t>
-            </a:r>
-            <a:endParaRPr lang="en-US" sz="1000" dirty="0"/>
-          </a:p>
-        </p:txBody>
-      </p:sp>
-      <p:pic>
-        <p:nvPicPr>
-          <p:cNvPr id="3" name="Image 0" descr="logo.png"/>
-          <p:cNvPicPr>
-            <a:picLocks noChangeAspect="1"/>
-          </p:cNvPicPr>
-          <p:nvPr/>
-        </p:nvPicPr>
-        <p:blipFill>
-          <a:blip r:embed="rId3"/>
-          <a:stretch>
-            <a:fillRect/>
-          </a:stretch>
-        </p:blipFill>
-        <p:spPr>
-          <a:xfrm>
-            <a:off x="548640" y="365760"/>
-            <a:ext cx="2011680" cy="760828"/>
-          </a:xfrm>
-          <a:prstGeom prst="rect">
-            <a:avLst/>
-          </a:prstGeom>
-        </p:spPr>
-      </p:pic>
-      <p:sp>
-        <p:nvSpPr>
-          <p:cNvPr id="4" name="Text 1"/>
-          <p:cNvSpPr txBox="1"/>
-          <p:nvPr/>
-        </p:nvSpPr>
-        <p:spPr>
-          <a:xfrm>
-            <a:off x="5486400" y="411480"/>
-            <a:ext cx="6217920" cy="320040"/>
-          </a:xfrm>
-          <a:prstGeom prst="rect">
-            <a:avLst/>
-          </a:prstGeom>
-          <a:noFill/>
-          <a:ln/>
-        </p:spPr>
-        <p:txBody>
-          <a:bodyPr wrap="square" lIns="0" tIns="0" rIns="0" bIns="0" rtlCol="0" anchor="ctr"/>
-          <a:lstStyle/>
-          <a:p>
-            <a:pPr marL="0" indent="0" algn="r">
-              <a:buNone/>
-            </a:pPr>
-            <a:r>
-              <a:rPr lang="en-US" sz="1400" b="1" dirty="0">
-                <a:solidFill>
-                  <a:srgbClr val="1D2F82"/>
-                </a:solidFill>
-                <a:latin typeface="Calibri" pitchFamily="34" charset="0"/>
-                <a:ea typeface="Calibri" pitchFamily="34" charset="-122"/>
-                <a:cs typeface="Calibri" pitchFamily="34" charset="-120"/>
-              </a:rPr>
-              <a:t>School of Electronics Engineering (SENSE)</a:t>
-            </a:r>
-            <a:endParaRPr lang="en-US" sz="1400" dirty="0"/>
-          </a:p>
-        </p:txBody>
-      </p:sp>
-      <p:sp>
-        <p:nvSpPr>
-          <p:cNvPr id="5" name="Text 2"/>
-          <p:cNvSpPr txBox="1"/>
-          <p:nvPr/>
-        </p:nvSpPr>
-        <p:spPr>
-          <a:xfrm>
-            <a:off x="5486400" y="749808"/>
-            <a:ext cx="6217920" cy="274320"/>
-          </a:xfrm>
-          <a:prstGeom prst="rect">
-            <a:avLst/>
-          </a:prstGeom>
-          <a:noFill/>
-          <a:ln/>
-        </p:spPr>
-        <p:txBody>
-          <a:bodyPr wrap="square" lIns="0" tIns="0" rIns="0" bIns="0" rtlCol="0" anchor="ctr"/>
-          <a:lstStyle/>
-          <a:p>
-            <a:pPr marL="0" indent="0" algn="r">
-              <a:buNone/>
-            </a:pPr>
-            <a:r>
-              <a:rPr lang="en-US" sz="1200" dirty="0">
-                <a:solidFill>
-                  <a:srgbClr val="000000"/>
-                </a:solidFill>
-                <a:latin typeface="Calibri" pitchFamily="34" charset="0"/>
-                <a:ea typeface="Calibri" pitchFamily="34" charset="-122"/>
-                <a:cs typeface="Calibri" pitchFamily="34" charset="-120"/>
-              </a:rPr>
-              <a:t>Project-I (2026)</a:t>
-            </a:r>
-            <a:endParaRPr lang="en-US" sz="1200" dirty="0"/>
-          </a:p>
-        </p:txBody>
-      </p:sp>
-      <p:sp>
-        <p:nvSpPr>
-          <p:cNvPr id="6" name="Text 3"/>
-          <p:cNvSpPr txBox="1"/>
-          <p:nvPr/>
-        </p:nvSpPr>
-        <p:spPr>
-          <a:xfrm>
-            <a:off x="548640" y="1737360"/>
-            <a:ext cx="11091672" cy="914400"/>
-          </a:xfrm>
-          <a:prstGeom prst="rect">
-            <a:avLst/>
-          </a:prstGeom>
-          <a:noFill/>
-          <a:ln/>
-        </p:spPr>
-        <p:txBody>
-          <a:bodyPr wrap="square" lIns="0" tIns="0" rIns="0" bIns="0" rtlCol="0" anchor="ctr"/>
-          <a:lstStyle/>
-          <a:p>
-            <a:pPr marL="0" indent="0" algn="ctr">
-              <a:buNone/>
-            </a:pPr>
-            <a:r>
-              <a:rPr lang="en-US" sz="3200" b="1" dirty="0">
-                <a:solidFill>
-                  <a:srgbClr val="1D2F82"/>
-                </a:solidFill>
-                <a:latin typeface="Calibri" pitchFamily="34" charset="0"/>
-                <a:ea typeface="Calibri" pitchFamily="34" charset="-122"/>
-                <a:cs typeface="Calibri" pitchFamily="34" charset="-120"/>
-              </a:rPr>
-              <a:t>AI-Driven HIS Management Agent with DPDP-Compliant Web Scraping</a:t>
-            </a:r>
-            <a:endParaRPr lang="en-US" sz="3200" dirty="0"/>
-          </a:p>
-        </p:txBody>
-      </p:sp>
-      <p:sp>
-        <p:nvSpPr>
-          <p:cNvPr id="7" name="Text 4"/>
-          <p:cNvSpPr txBox="1"/>
-          <p:nvPr/>
-        </p:nvSpPr>
-        <p:spPr>
-          <a:xfrm>
-            <a:off x="822960" y="3063240"/>
-            <a:ext cx="2560320" cy="384048"/>
-          </a:xfrm>
-          <a:prstGeom prst="rect">
-            <a:avLst/>
-          </a:prstGeom>
-          <a:noFill/>
-          <a:ln/>
-        </p:spPr>
-        <p:txBody>
-          <a:bodyPr wrap="square" lIns="0" tIns="0" rIns="0" bIns="0" rtlCol="0" anchor="ctr"/>
-          <a:lstStyle/>
-          <a:p>
-            <a:pPr marL="0" indent="0">
-              <a:buNone/>
-            </a:pPr>
-            <a:r>
-              <a:rPr lang="en-US" sz="1400" b="1" dirty="0">
-                <a:solidFill>
-                  <a:srgbClr val="000000"/>
-                </a:solidFill>
-                <a:latin typeface="Calibri" pitchFamily="34" charset="0"/>
-                <a:ea typeface="Calibri" pitchFamily="34" charset="-122"/>
-                <a:cs typeface="Calibri" pitchFamily="34" charset="-120"/>
-              </a:rPr>
-              <a:t>Student Name(s):</a:t>
-            </a:r>
-            <a:endParaRPr lang="en-US" sz="1400" dirty="0"/>
-          </a:p>
-        </p:txBody>
-      </p:sp>
-      <p:sp>
-        <p:nvSpPr>
-          <p:cNvPr id="8" name="Text 5"/>
-          <p:cNvSpPr txBox="1"/>
-          <p:nvPr/>
-        </p:nvSpPr>
-        <p:spPr>
-          <a:xfrm>
-            <a:off x="3474720" y="3063240"/>
-            <a:ext cx="4023360" cy="384048"/>
-          </a:xfrm>
-          <a:prstGeom prst="rect">
-            <a:avLst/>
-          </a:prstGeom>
-          <a:noFill/>
-          <a:ln/>
-        </p:spPr>
-        <p:txBody>
-          <a:bodyPr wrap="square" lIns="0" tIns="0" rIns="0" bIns="0" rtlCol="0" anchor="ctr"/>
-          <a:lstStyle/>
-          <a:p>
-            <a:pPr marL="0" indent="0">
-              <a:buNone/>
-            </a:pPr>
-            <a:r>
-              <a:rPr lang="en-US" sz="1400" dirty="0">
-                <a:solidFill>
-                  <a:srgbClr val="000000"/>
-                </a:solidFill>
-                <a:latin typeface="Calibri" pitchFamily="34" charset="0"/>
-                <a:ea typeface="Calibri" pitchFamily="34" charset="-122"/>
-                <a:cs typeface="Calibri" pitchFamily="34" charset="-120"/>
-              </a:rPr>
-              <a:t>Avanindra (23BLC1089)  ·  Ananya (23BLC1017)</a:t>
-            </a:r>
-            <a:endParaRPr lang="en-US" sz="1400" dirty="0"/>
-          </a:p>
-        </p:txBody>
-      </p:sp>
-      <p:sp>
-        <p:nvSpPr>
-          <p:cNvPr id="9" name="Shape 6"/>
-          <p:cNvSpPr/>
-          <p:nvPr/>
-        </p:nvSpPr>
-        <p:spPr>
-          <a:xfrm>
-            <a:off x="3474720" y="3465576"/>
-            <a:ext cx="4023360" cy="0"/>
-          </a:xfrm>
-          <a:prstGeom prst="line">
-            <a:avLst/>
-          </a:prstGeom>
-          <a:noFill/>
-          <a:ln w="12700">
-            <a:solidFill>
-              <a:srgbClr val="BFBFBF"/>
-            </a:solidFill>
-            <a:prstDash val="solid"/>
-          </a:ln>
-        </p:spPr>
-        <p:txBody>
-          <a:bodyPr/>
-          <a:lstStyle/>
-          <a:p>
-            <a:endParaRPr lang="en-US"/>
-          </a:p>
-        </p:txBody>
-      </p:sp>
-      <p:sp>
-        <p:nvSpPr>
-          <p:cNvPr id="10" name="Text 7"/>
-          <p:cNvSpPr txBox="1"/>
-          <p:nvPr/>
-        </p:nvSpPr>
-        <p:spPr>
-          <a:xfrm>
-            <a:off x="822960" y="3657600"/>
-            <a:ext cx="2560320" cy="384048"/>
-          </a:xfrm>
-          <a:prstGeom prst="rect">
-            <a:avLst/>
-          </a:prstGeom>
-          <a:noFill/>
-          <a:ln/>
-        </p:spPr>
-        <p:txBody>
-          <a:bodyPr wrap="square" lIns="0" tIns="0" rIns="0" bIns="0" rtlCol="0" anchor="ctr"/>
-          <a:lstStyle/>
-          <a:p>
-            <a:pPr marL="0" indent="0">
-              <a:buNone/>
-            </a:pPr>
-            <a:r>
-              <a:rPr lang="en-US" sz="1400" b="1" dirty="0">
-                <a:solidFill>
-                  <a:srgbClr val="000000"/>
-                </a:solidFill>
-                <a:latin typeface="Calibri" pitchFamily="34" charset="0"/>
-                <a:ea typeface="Calibri" pitchFamily="34" charset="-122"/>
-                <a:cs typeface="Calibri" pitchFamily="34" charset="-120"/>
-              </a:rPr>
-              <a:t>Guide:</a:t>
-            </a:r>
-            <a:endParaRPr lang="en-US" sz="1400" dirty="0"/>
-          </a:p>
-        </p:txBody>
-      </p:sp>
-      <p:sp>
-        <p:nvSpPr>
-          <p:cNvPr id="11" name="Text 8"/>
-          <p:cNvSpPr txBox="1"/>
-          <p:nvPr/>
-        </p:nvSpPr>
-        <p:spPr>
-          <a:xfrm>
-            <a:off x="3474720" y="3657600"/>
-            <a:ext cx="4023360" cy="384048"/>
-          </a:xfrm>
-          <a:prstGeom prst="rect">
-            <a:avLst/>
-          </a:prstGeom>
-          <a:noFill/>
-          <a:ln/>
-        </p:spPr>
-        <p:txBody>
-          <a:bodyPr wrap="square" lIns="0" tIns="0" rIns="0" bIns="0" rtlCol="0" anchor="ctr"/>
-          <a:lstStyle/>
-          <a:p>
-            <a:pPr marL="0" indent="0">
-              <a:buNone/>
-            </a:pPr>
-            <a:r>
-              <a:rPr lang="en-US" sz="1400" dirty="0">
-                <a:solidFill>
-                  <a:srgbClr val="000000"/>
-                </a:solidFill>
-                <a:latin typeface="Calibri" pitchFamily="34" charset="0"/>
-                <a:ea typeface="Calibri" pitchFamily="34" charset="-122"/>
-                <a:cs typeface="Calibri" pitchFamily="34" charset="-120"/>
-              </a:rPr>
-              <a:t>Dr. Manoj Kumar, SENSE</a:t>
-            </a:r>
-            <a:endParaRPr lang="en-US" sz="1400" dirty="0"/>
-          </a:p>
-        </p:txBody>
-      </p:sp>
-      <p:sp>
-        <p:nvSpPr>
-          <p:cNvPr id="12" name="Shape 9"/>
-          <p:cNvSpPr/>
-          <p:nvPr/>
-        </p:nvSpPr>
-        <p:spPr>
-          <a:xfrm>
-            <a:off x="3474720" y="4059936"/>
-            <a:ext cx="4023360" cy="0"/>
-          </a:xfrm>
-          <a:prstGeom prst="line">
-            <a:avLst/>
-          </a:prstGeom>
-          <a:noFill/>
-          <a:ln w="12700">
-            <a:solidFill>
-              <a:srgbClr val="BFBFBF"/>
-            </a:solidFill>
-            <a:prstDash val="solid"/>
-          </a:ln>
-        </p:spPr>
-        <p:txBody>
-          <a:bodyPr/>
-          <a:lstStyle/>
-          <a:p>
-            <a:endParaRPr lang="en-US"/>
-          </a:p>
-        </p:txBody>
-      </p:sp>
-      <p:sp>
-        <p:nvSpPr>
-          <p:cNvPr id="13" name="Text 10"/>
-          <p:cNvSpPr txBox="1"/>
-          <p:nvPr/>
-        </p:nvSpPr>
-        <p:spPr>
-          <a:xfrm>
-            <a:off x="822960" y="4251960"/>
-            <a:ext cx="2560320" cy="384048"/>
-          </a:xfrm>
-          <a:prstGeom prst="rect">
-            <a:avLst/>
-          </a:prstGeom>
-          <a:noFill/>
-          <a:ln/>
-        </p:spPr>
-        <p:txBody>
-          <a:bodyPr wrap="square" lIns="0" tIns="0" rIns="0" bIns="0" rtlCol="0" anchor="ctr"/>
-          <a:lstStyle/>
-          <a:p>
-            <a:pPr marL="0" indent="0">
-              <a:buNone/>
-            </a:pPr>
-            <a:r>
-              <a:rPr lang="en-US" sz="1400" b="1" dirty="0">
-                <a:solidFill>
-                  <a:srgbClr val="000000"/>
-                </a:solidFill>
-                <a:latin typeface="Calibri" pitchFamily="34" charset="0"/>
-                <a:ea typeface="Calibri" pitchFamily="34" charset="-122"/>
-                <a:cs typeface="Calibri" pitchFamily="34" charset="-120"/>
-              </a:rPr>
-              <a:t>Programme / School:</a:t>
-            </a:r>
-            <a:endParaRPr lang="en-US" sz="1400" dirty="0"/>
-          </a:p>
-        </p:txBody>
-      </p:sp>
-      <p:sp>
-        <p:nvSpPr>
-          <p:cNvPr id="14" name="Text 11"/>
-          <p:cNvSpPr txBox="1"/>
-          <p:nvPr/>
-        </p:nvSpPr>
-        <p:spPr>
-          <a:xfrm>
-            <a:off x="3474720" y="4251960"/>
-            <a:ext cx="4023360" cy="384048"/>
-          </a:xfrm>
-          <a:prstGeom prst="rect">
-            <a:avLst/>
-          </a:prstGeom>
-          <a:noFill/>
-          <a:ln/>
-        </p:spPr>
-        <p:txBody>
-          <a:bodyPr wrap="square" lIns="0" tIns="0" rIns="0" bIns="0" rtlCol="0" anchor="ctr"/>
-          <a:lstStyle/>
-          <a:p>
-            <a:pPr marL="0" indent="0">
-              <a:buNone/>
-            </a:pPr>
-            <a:r>
-              <a:rPr lang="en-US" sz="1400" dirty="0">
-                <a:solidFill>
-                  <a:srgbClr val="000000"/>
-                </a:solidFill>
-                <a:latin typeface="Calibri" pitchFamily="34" charset="0"/>
-                <a:ea typeface="Calibri" pitchFamily="34" charset="-122"/>
-                <a:cs typeface="Calibri" pitchFamily="34" charset="-120"/>
-              </a:rPr>
-              <a:t>B.Tech — SENSE, VIT Chennai</a:t>
-            </a:r>
-            <a:endParaRPr lang="en-US" sz="1400" dirty="0"/>
-          </a:p>
-        </p:txBody>
-      </p:sp>
-      <p:sp>
-        <p:nvSpPr>
-          <p:cNvPr id="15" name="Shape 12"/>
-          <p:cNvSpPr/>
-          <p:nvPr/>
-        </p:nvSpPr>
-        <p:spPr>
-          <a:xfrm>
-            <a:off x="3474720" y="4654296"/>
-            <a:ext cx="4023360" cy="0"/>
-          </a:xfrm>
-          <a:prstGeom prst="line">
-            <a:avLst/>
-          </a:prstGeom>
-          <a:noFill/>
-          <a:ln w="12700">
-            <a:solidFill>
-              <a:srgbClr val="BFBFBF"/>
-            </a:solidFill>
-            <a:prstDash val="solid"/>
-          </a:ln>
-        </p:spPr>
-        <p:txBody>
-          <a:bodyPr/>
-          <a:lstStyle/>
-          <a:p>
-            <a:endParaRPr lang="en-US"/>
-          </a:p>
-        </p:txBody>
-      </p:sp>
-      <p:sp>
-        <p:nvSpPr>
-          <p:cNvPr id="16" name="Text 13"/>
-          <p:cNvSpPr txBox="1"/>
-          <p:nvPr/>
-        </p:nvSpPr>
-        <p:spPr>
-          <a:xfrm>
-            <a:off x="822960" y="4846320"/>
-            <a:ext cx="2560320" cy="384048"/>
-          </a:xfrm>
-          <a:prstGeom prst="rect">
-            <a:avLst/>
-          </a:prstGeom>
-          <a:noFill/>
-          <a:ln/>
-        </p:spPr>
-        <p:txBody>
-          <a:bodyPr wrap="square" lIns="0" tIns="0" rIns="0" bIns="0" rtlCol="0" anchor="ctr"/>
-          <a:lstStyle/>
-          <a:p>
-            <a:pPr marL="0" indent="0">
-              <a:buNone/>
-            </a:pPr>
-            <a:r>
-              <a:rPr lang="en-US" sz="1400" b="1" dirty="0">
-                <a:solidFill>
-                  <a:srgbClr val="000000"/>
-                </a:solidFill>
-                <a:latin typeface="Calibri" pitchFamily="34" charset="0"/>
-                <a:ea typeface="Calibri" pitchFamily="34" charset="-122"/>
-                <a:cs typeface="Calibri" pitchFamily="34" charset="-120"/>
-              </a:rPr>
-              <a:t>Review &amp; Date:</a:t>
-            </a:r>
-            <a:endParaRPr lang="en-US" sz="1400" dirty="0"/>
-          </a:p>
-        </p:txBody>
-      </p:sp>
-      <p:sp>
-        <p:nvSpPr>
-          <p:cNvPr id="17" name="Text 14"/>
-          <p:cNvSpPr txBox="1"/>
-          <p:nvPr/>
-        </p:nvSpPr>
-        <p:spPr>
-          <a:xfrm>
-            <a:off x="3474720" y="4846320"/>
-            <a:ext cx="4023360" cy="384048"/>
-          </a:xfrm>
-          <a:prstGeom prst="rect">
-            <a:avLst/>
-          </a:prstGeom>
-          <a:noFill/>
-          <a:ln/>
-        </p:spPr>
-        <p:txBody>
-          <a:bodyPr wrap="square" lIns="0" tIns="0" rIns="0" bIns="0" rtlCol="0" anchor="ctr"/>
-          <a:lstStyle/>
-          <a:p>
-            <a:pPr marL="0" indent="0">
-              <a:buNone/>
-            </a:pPr>
-            <a:r>
-              <a:rPr lang="en-US" sz="1400" dirty="0">
-                <a:solidFill>
-                  <a:srgbClr val="000000"/>
-                </a:solidFill>
-                <a:latin typeface="Calibri" pitchFamily="34" charset="0"/>
-                <a:ea typeface="Calibri" pitchFamily="34" charset="-122"/>
-                <a:cs typeface="Calibri" pitchFamily="34" charset="-120"/>
-              </a:rPr>
-              <a:t>Review-I  ·  02.09.2026 (Wednesday)</a:t>
-            </a:r>
-            <a:endParaRPr lang="en-US" sz="1400" dirty="0"/>
-          </a:p>
-        </p:txBody>
-      </p:sp>
-      <p:sp>
-        <p:nvSpPr>
-          <p:cNvPr id="18" name="Shape 15"/>
-          <p:cNvSpPr/>
-          <p:nvPr/>
-        </p:nvSpPr>
-        <p:spPr>
-          <a:xfrm>
-            <a:off x="3474720" y="5248656"/>
-            <a:ext cx="4023360" cy="0"/>
-          </a:xfrm>
-          <a:prstGeom prst="line">
-            <a:avLst/>
-          </a:prstGeom>
-          <a:noFill/>
-          <a:ln w="12700">
-            <a:solidFill>
-              <a:srgbClr val="BFBFBF"/>
-            </a:solidFill>
-            <a:prstDash val="solid"/>
-          </a:ln>
-        </p:spPr>
-        <p:txBody>
-          <a:bodyPr/>
-          <a:lstStyle/>
-          <a:p>
-            <a:endParaRPr lang="en-US"/>
-          </a:p>
-        </p:txBody>
-      </p:sp>
-      <p:sp>
-        <p:nvSpPr>
-          <p:cNvPr id="19" name="Shape 16"/>
-          <p:cNvSpPr/>
-          <p:nvPr/>
-        </p:nvSpPr>
-        <p:spPr>
-          <a:xfrm>
-            <a:off x="8046720" y="3063240"/>
-            <a:ext cx="3657600" cy="2194560"/>
-          </a:xfrm>
-          <a:prstGeom prst="rect">
-            <a:avLst/>
-          </a:prstGeom>
-          <a:solidFill>
-            <a:srgbClr val="FFFFFF"/>
-          </a:solidFill>
-          <a:ln w="15875">
-            <a:solidFill>
-              <a:srgbClr val="1D2F82"/>
-            </a:solidFill>
-            <a:prstDash val="solid"/>
-          </a:ln>
-        </p:spPr>
-        <p:txBody>
-          <a:bodyPr/>
-          <a:lstStyle/>
-          <a:p>
-            <a:endParaRPr lang="en-US"/>
-          </a:p>
-        </p:txBody>
-      </p:sp>
-      <p:sp>
-        <p:nvSpPr>
-          <p:cNvPr id="20" name="Text 17"/>
-          <p:cNvSpPr txBox="1"/>
-          <p:nvPr/>
-        </p:nvSpPr>
-        <p:spPr>
-          <a:xfrm>
-            <a:off x="8229600" y="3246120"/>
-            <a:ext cx="3291840" cy="365760"/>
-          </a:xfrm>
-          <a:prstGeom prst="rect">
-            <a:avLst/>
-          </a:prstGeom>
-          <a:noFill/>
-          <a:ln/>
-        </p:spPr>
-        <p:txBody>
-          <a:bodyPr wrap="square" lIns="0" tIns="0" rIns="0" bIns="0" rtlCol="0" anchor="ctr"/>
-          <a:lstStyle/>
-          <a:p>
-            <a:pPr marL="0" indent="0">
-              <a:buNone/>
-            </a:pPr>
-            <a:r>
-              <a:rPr lang="en-US" sz="1400" b="1" dirty="0">
-                <a:solidFill>
-                  <a:srgbClr val="1D2F82"/>
-                </a:solidFill>
-                <a:latin typeface="Calibri" pitchFamily="34" charset="0"/>
-                <a:ea typeface="Calibri" pitchFamily="34" charset="-122"/>
-                <a:cs typeface="Calibri" pitchFamily="34" charset="-120"/>
-              </a:rPr>
-              <a:t>Guide's Signature with Date</a:t>
-            </a:r>
-            <a:endParaRPr lang="en-US" sz="1400" dirty="0"/>
-          </a:p>
-        </p:txBody>
-      </p:sp>
-      <p:sp>
-        <p:nvSpPr>
-          <p:cNvPr id="21" name="Text 18"/>
-          <p:cNvSpPr txBox="1"/>
-          <p:nvPr/>
-        </p:nvSpPr>
-        <p:spPr>
-          <a:xfrm>
-            <a:off x="8229600" y="3886200"/>
-            <a:ext cx="3291840" cy="320040"/>
-          </a:xfrm>
-          <a:prstGeom prst="rect">
-            <a:avLst/>
-          </a:prstGeom>
-          <a:noFill/>
-          <a:ln/>
-        </p:spPr>
-        <p:txBody>
-          <a:bodyPr wrap="square" lIns="0" tIns="0" rIns="0" bIns="0" rtlCol="0" anchor="ctr"/>
-          <a:lstStyle/>
-          <a:p>
-            <a:pPr marL="0" indent="0">
-              <a:buNone/>
-            </a:pPr>
-            <a:r>
-              <a:rPr lang="en-US" sz="1300" dirty="0">
-                <a:solidFill>
-                  <a:srgbClr val="000000"/>
-                </a:solidFill>
-                <a:latin typeface="Calibri" pitchFamily="34" charset="0"/>
-                <a:ea typeface="Calibri" pitchFamily="34" charset="-122"/>
-                <a:cs typeface="Calibri" pitchFamily="34" charset="-120"/>
-              </a:rPr>
-              <a:t>Signature: _____________________</a:t>
-            </a:r>
-            <a:endParaRPr lang="en-US" sz="1300" dirty="0"/>
-          </a:p>
-        </p:txBody>
-      </p:sp>
-      <p:sp>
-        <p:nvSpPr>
-          <p:cNvPr id="22" name="Text 19"/>
-          <p:cNvSpPr txBox="1"/>
-          <p:nvPr/>
-        </p:nvSpPr>
-        <p:spPr>
-          <a:xfrm>
-            <a:off x="8229600" y="4434840"/>
-            <a:ext cx="3291840" cy="320040"/>
-          </a:xfrm>
-          <a:prstGeom prst="rect">
-            <a:avLst/>
-          </a:prstGeom>
-          <a:noFill/>
-          <a:ln/>
-        </p:spPr>
-        <p:txBody>
-          <a:bodyPr wrap="square" lIns="0" tIns="0" rIns="0" bIns="0" rtlCol="0" anchor="ctr"/>
-          <a:lstStyle/>
-          <a:p>
-            <a:pPr marL="0" indent="0">
-              <a:buNone/>
-            </a:pPr>
-            <a:r>
-              <a:rPr lang="en-US" sz="1300" dirty="0">
-                <a:solidFill>
-                  <a:srgbClr val="000000"/>
-                </a:solidFill>
-                <a:latin typeface="Calibri" pitchFamily="34" charset="0"/>
-                <a:ea typeface="Calibri" pitchFamily="34" charset="-122"/>
-                <a:cs typeface="Calibri" pitchFamily="34" charset="-120"/>
-              </a:rPr>
-              <a:t>Date: _________________________</a:t>
-            </a:r>
-            <a:endParaRPr lang="en-US" sz="1300" dirty="0"/>
-          </a:p>
-        </p:txBody>
-      </p:sp>
-      <p:sp>
-        <p:nvSpPr>
-          <p:cNvPr id="23" name="Text 20"/>
-          <p:cNvSpPr txBox="1"/>
-          <p:nvPr/>
-        </p:nvSpPr>
-        <p:spPr>
-          <a:xfrm>
-            <a:off x="822960" y="5760720"/>
-            <a:ext cx="10607040" cy="548640"/>
-          </a:xfrm>
-          <a:prstGeom prst="rect">
-            <a:avLst/>
-          </a:prstGeom>
-          <a:noFill/>
-          <a:ln/>
-        </p:spPr>
-        <p:txBody>
-          <a:bodyPr wrap="square" lIns="0" tIns="0" rIns="0" bIns="0" rtlCol="0" anchor="ctr"/>
-          <a:lstStyle/>
-          <a:p>
-            <a:pPr marL="0" indent="0">
-              <a:buNone/>
-            </a:pPr>
-            <a:r>
-              <a:rPr lang="en-US" sz="1200" i="1" dirty="0">
-                <a:solidFill>
-                  <a:srgbClr val="000000"/>
-                </a:solidFill>
-                <a:latin typeface="Calibri" pitchFamily="34" charset="0"/>
-                <a:ea typeface="Calibri" pitchFamily="34" charset="-122"/>
-                <a:cs typeface="Calibri" pitchFamily="34" charset="-120"/>
-              </a:rPr>
-              <a:t>Approval is mandatory before every review. After signing, scan this slide and keep the scanned copy as Slide 1 of the presentation.</a:t>
-            </a:r>
-            <a:endParaRPr lang="en-US" sz="1200" dirty="0"/>
-          </a:p>
-        </p:txBody>
-      </p:sp>
-    </p:spTree>
-  </p:cSld>
-  <p:clrMapOvr>
-    <a:masterClrMapping/>
-  </p:clrMapOvr>
-</p:sld>
-</file>
-
-<file path=ppt/slides/slide3.xml><?xml version="1.0" encoding="utf-8"?>
-<p:sld xmlns:a="http://schemas.openxmlformats.org/drawingml/2006/main" xmlns:r="http://schemas.openxmlformats.org/officeDocument/2006/relationships" xmlns:p="http://schemas.openxmlformats.org/presentationml/2006/main">
-  <p:cSld name="Slide 3">
-    <p:bg>
-      <p:bgPr>
-        <a:solidFill>
-          <a:srgbClr val="FFFFFF"/>
-        </a:solidFill>
-        <a:effectLst/>
-      </p:bgPr>
-    </p:bg>
-    <p:spTree>
-      <p:nvGrpSpPr>
-        <p:cNvPr id="1" name=""/>
-        <p:cNvGrpSpPr/>
-        <p:nvPr/>
-      </p:nvGrpSpPr>
-      <p:grpSpPr>
-        <a:xfrm>
-          <a:off x="0" y="0"/>
-          <a:ext cx="0" cy="0"/>
-          <a:chOff x="0" y="0"/>
-          <a:chExt cx="0" cy="0"/>
-        </a:xfrm>
-      </p:grpSpPr>
-      <p:sp>
-        <p:nvSpPr>
-          <p:cNvPr id="2" name="Text 0"/>
-          <p:cNvSpPr txBox="1"/>
-          <p:nvPr/>
-        </p:nvSpPr>
-        <p:spPr>
-          <a:xfrm>
-            <a:off x="11460175" y="6446520"/>
-            <a:ext cx="457200" cy="274320"/>
-          </a:xfrm>
-          <a:prstGeom prst="rect">
-            <a:avLst/>
-          </a:prstGeom>
-          <a:noFill/>
-          <a:ln/>
-        </p:spPr>
-        <p:txBody>
-          <a:bodyPr wrap="square" lIns="0" tIns="0" rIns="0" bIns="0" rtlCol="0" anchor="ctr"/>
-          <a:lstStyle/>
-          <a:p>
-            <a:pPr marL="0" indent="0" algn="r">
-              <a:buNone/>
-            </a:pPr>
-            <a:r>
-              <a:rPr lang="en-US" sz="1000" dirty="0">
-                <a:solidFill>
-                  <a:srgbClr val="808080"/>
-                </a:solidFill>
-                <a:latin typeface="Calibri" pitchFamily="34" charset="0"/>
-                <a:ea typeface="Calibri" pitchFamily="34" charset="-122"/>
-                <a:cs typeface="Calibri" pitchFamily="34" charset="-120"/>
-              </a:rPr>
-              <a:t>3</a:t>
+              <a:t>6</a:t>
             </a:r>
             <a:endParaRPr lang="en-US" sz="1000" dirty="0"/>
           </a:p>
@@ -5688,7 +5766,7 @@
                 <a:ea typeface="Calibri" pitchFamily="34" charset="-122"/>
                 <a:cs typeface="Calibri" pitchFamily="34" charset="-120"/>
               </a:rPr>
-              <a:t>Review-I — 02.09.2026 (5 Marks, 5%)</a:t>
+              <a:t>Literature Survey (contd.)</a:t>
             </a:r>
             <a:endParaRPr lang="en-US" sz="2800" dirty="0"/>
           </a:p>
@@ -5703,783 +5781,7 @@
           <p:nvPr/>
         </p:nvPicPr>
         <p:blipFill>
-          <a:blip r:embed="rId3"/>
-          <a:stretch>
-            <a:fillRect/>
-          </a:stretch>
-        </p:blipFill>
-        <p:spPr>
-          <a:xfrm>
-            <a:off x="10362895" y="320040"/>
-            <a:ext cx="1371600" cy="518746"/>
-          </a:xfrm>
-          <a:prstGeom prst="rect">
-            <a:avLst/>
-          </a:prstGeom>
-        </p:spPr>
-      </p:pic>
-      <p:sp>
-        <p:nvSpPr>
-          <p:cNvPr id="5" name="Text 2"/>
-          <p:cNvSpPr txBox="1"/>
-          <p:nvPr/>
-        </p:nvSpPr>
-        <p:spPr>
-          <a:xfrm>
-            <a:off x="640080" y="1325880"/>
-            <a:ext cx="10881360" cy="4937760"/>
-          </a:xfrm>
-          <a:prstGeom prst="rect">
-            <a:avLst/>
-          </a:prstGeom>
-          <a:noFill/>
-          <a:ln/>
-        </p:spPr>
-        <p:txBody>
-          <a:bodyPr wrap="square" lIns="0" tIns="0" rIns="0" bIns="0" rtlCol="0" anchor="t"/>
-          <a:lstStyle/>
-          <a:p>
-            <a:pPr marL="177800" indent="-177800">
-              <a:spcAft>
-                <a:spcPts val="800"/>
-              </a:spcAft>
-              <a:buSzPct val="100000"/>
-              <a:buChar char="•"/>
-            </a:pPr>
-            <a:r>
-              <a:rPr lang="en-US" sz="1500" dirty="0">
-                <a:solidFill>
-                  <a:srgbClr val="000000"/>
-                </a:solidFill>
-                <a:latin typeface="Calibri" pitchFamily="34" charset="0"/>
-                <a:ea typeface="Calibri" pitchFamily="34" charset="-122"/>
-                <a:cs typeface="Calibri" pitchFamily="34" charset="-120"/>
-              </a:rPr>
-              <a:t>Focus: Proposed Solution &amp; 50% Work Completion.</a:t>
-            </a:r>
-            <a:endParaRPr lang="en-US" sz="1500" dirty="0"/>
-          </a:p>
-          <a:p>
-            <a:pPr marL="177800" indent="-177800">
-              <a:spcAft>
-                <a:spcPts val="800"/>
-              </a:spcAft>
-              <a:buSzPct val="100000"/>
-              <a:buChar char="•"/>
-            </a:pPr>
-            <a:r>
-              <a:rPr lang="en-US" sz="1500" dirty="0">
-                <a:solidFill>
-                  <a:srgbClr val="000000"/>
-                </a:solidFill>
-                <a:latin typeface="Calibri" pitchFamily="34" charset="0"/>
-                <a:ea typeface="Calibri" pitchFamily="34" charset="-122"/>
-                <a:cs typeface="Calibri" pitchFamily="34" charset="-120"/>
-              </a:rPr>
-              <a:t>Duration: 8–10 minutes.</a:t>
-            </a:r>
-            <a:endParaRPr lang="en-US" sz="1500" dirty="0"/>
-          </a:p>
-          <a:p>
-            <a:pPr marL="177800" indent="-177800">
-              <a:spcAft>
-                <a:spcPts val="800"/>
-              </a:spcAft>
-              <a:buSzPct val="100000"/>
-              <a:buChar char="•"/>
-            </a:pPr>
-            <a:r>
-              <a:rPr lang="en-US" sz="1500" dirty="0">
-                <a:solidFill>
-                  <a:srgbClr val="000000"/>
-                </a:solidFill>
-                <a:latin typeface="Calibri" pitchFamily="34" charset="0"/>
-                <a:ea typeface="Calibri" pitchFamily="34" charset="-122"/>
-                <a:cs typeface="Calibri" pitchFamily="34" charset="-120"/>
-              </a:rPr>
-              <a:t>Presentation contents:</a:t>
-            </a:r>
-            <a:endParaRPr lang="en-US" sz="1500" dirty="0"/>
-          </a:p>
-          <a:p>
-            <a:pPr marL="355600" lvl="1" indent="-177800">
-              <a:spcAft>
-                <a:spcPts val="400"/>
-              </a:spcAft>
-              <a:buSzPct val="100000"/>
-              <a:buChar char="•"/>
-            </a:pPr>
-            <a:r>
-              <a:rPr lang="en-US" sz="1500" dirty="0">
-                <a:solidFill>
-                  <a:srgbClr val="000000"/>
-                </a:solidFill>
-                <a:latin typeface="Calibri" pitchFamily="34" charset="0"/>
-                <a:ea typeface="Calibri" pitchFamily="34" charset="-122"/>
-                <a:cs typeface="Calibri" pitchFamily="34" charset="-120"/>
-              </a:rPr>
-              <a:t>Signed &amp; scanned title slide (Slide 1)</a:t>
-            </a:r>
-            <a:endParaRPr lang="en-US" sz="1500" dirty="0"/>
-          </a:p>
-          <a:p>
-            <a:pPr marL="355600" lvl="1" indent="-177800">
-              <a:spcAft>
-                <a:spcPts val="400"/>
-              </a:spcAft>
-              <a:buSzPct val="100000"/>
-              <a:buChar char="•"/>
-            </a:pPr>
-            <a:r>
-              <a:rPr lang="en-US" sz="1500" dirty="0">
-                <a:solidFill>
-                  <a:srgbClr val="000000"/>
-                </a:solidFill>
-                <a:latin typeface="Calibri" pitchFamily="34" charset="0"/>
-                <a:ea typeface="Calibri" pitchFamily="34" charset="-122"/>
-                <a:cs typeface="Calibri" pitchFamily="34" charset="-120"/>
-              </a:rPr>
-              <a:t>Problem statement and background</a:t>
-            </a:r>
-            <a:endParaRPr lang="en-US" sz="1500" dirty="0"/>
-          </a:p>
-          <a:p>
-            <a:pPr marL="355600" lvl="1" indent="-177800">
-              <a:spcAft>
-                <a:spcPts val="400"/>
-              </a:spcAft>
-              <a:buSzPct val="100000"/>
-              <a:buChar char="•"/>
-            </a:pPr>
-            <a:r>
-              <a:rPr lang="en-US" sz="1500" dirty="0">
-                <a:solidFill>
-                  <a:srgbClr val="000000"/>
-                </a:solidFill>
-                <a:latin typeface="Calibri" pitchFamily="34" charset="0"/>
-                <a:ea typeface="Calibri" pitchFamily="34" charset="-122"/>
-                <a:cs typeface="Calibri" pitchFamily="34" charset="-120"/>
-              </a:rPr>
-              <a:t>Literature survey — minimum 8–10 recent references</a:t>
-            </a:r>
-            <a:endParaRPr lang="en-US" sz="1500" dirty="0"/>
-          </a:p>
-          <a:p>
-            <a:pPr marL="355600" lvl="1" indent="-177800">
-              <a:spcAft>
-                <a:spcPts val="400"/>
-              </a:spcAft>
-              <a:buSzPct val="100000"/>
-              <a:buChar char="•"/>
-            </a:pPr>
-            <a:r>
-              <a:rPr lang="en-US" sz="1500" dirty="0">
-                <a:solidFill>
-                  <a:srgbClr val="000000"/>
-                </a:solidFill>
-                <a:latin typeface="Calibri" pitchFamily="34" charset="0"/>
-                <a:ea typeface="Calibri" pitchFamily="34" charset="-122"/>
-                <a:cs typeface="Calibri" pitchFamily="34" charset="-120"/>
-              </a:rPr>
-              <a:t>Existing solutions and their limitations</a:t>
-            </a:r>
-            <a:endParaRPr lang="en-US" sz="1500" dirty="0"/>
-          </a:p>
-          <a:p>
-            <a:pPr marL="355600" lvl="1" indent="-177800">
-              <a:spcAft>
-                <a:spcPts val="400"/>
-              </a:spcAft>
-              <a:buSzPct val="100000"/>
-              <a:buChar char="•"/>
-            </a:pPr>
-            <a:r>
-              <a:rPr lang="en-US" sz="1500" dirty="0">
-                <a:solidFill>
-                  <a:srgbClr val="000000"/>
-                </a:solidFill>
-                <a:latin typeface="Calibri" pitchFamily="34" charset="0"/>
-                <a:ea typeface="Calibri" pitchFamily="34" charset="-122"/>
-                <a:cs typeface="Calibri" pitchFamily="34" charset="-120"/>
-              </a:rPr>
-              <a:t>Proposed solution, scope and methodology</a:t>
-            </a:r>
-            <a:endParaRPr lang="en-US" sz="1500" dirty="0"/>
-          </a:p>
-          <a:p>
-            <a:pPr marL="355600" lvl="1" indent="-177800">
-              <a:spcAft>
-                <a:spcPts val="400"/>
-              </a:spcAft>
-              <a:buSzPct val="100000"/>
-              <a:buChar char="•"/>
-            </a:pPr>
-            <a:r>
-              <a:rPr lang="en-US" sz="1500" dirty="0">
-                <a:solidFill>
-                  <a:srgbClr val="000000"/>
-                </a:solidFill>
-                <a:latin typeface="Calibri" pitchFamily="34" charset="0"/>
-                <a:ea typeface="Calibri" pitchFamily="34" charset="-122"/>
-                <a:cs typeface="Calibri" pitchFamily="34" charset="-120"/>
-              </a:rPr>
-              <a:t>50% work completed, timeline, tools &amp; technologies</a:t>
-            </a:r>
-            <a:endParaRPr lang="en-US" sz="1500" dirty="0"/>
-          </a:p>
-          <a:p>
-            <a:pPr marL="177800" indent="-177800">
-              <a:spcAft>
-                <a:spcPts val="800"/>
-              </a:spcAft>
-              <a:buSzPct val="100000"/>
-              <a:buChar char="•"/>
-            </a:pPr>
-            <a:r>
-              <a:rPr lang="en-US" sz="1500" dirty="0">
-                <a:solidFill>
-                  <a:srgbClr val="000000"/>
-                </a:solidFill>
-                <a:latin typeface="Calibri" pitchFamily="34" charset="0"/>
-                <a:ea typeface="Calibri" pitchFamily="34" charset="-122"/>
-                <a:cs typeface="Calibri" pitchFamily="34" charset="-120"/>
-              </a:rPr>
-              <a:t>Mark split-up: Problem clarity &amp; relevance (2), Literature survey quality (1), Proposed solution feasibility (1), Presentation quality (1).</a:t>
-            </a:r>
-            <a:endParaRPr lang="en-US" sz="1500" dirty="0"/>
-          </a:p>
-        </p:txBody>
-      </p:sp>
-    </p:spTree>
-  </p:cSld>
-  <p:clrMapOvr>
-    <a:masterClrMapping/>
-  </p:clrMapOvr>
-</p:sld>
-</file>
-
-<file path=ppt/slides/slide4.xml><?xml version="1.0" encoding="utf-8"?>
-<p:sld xmlns:a="http://schemas.openxmlformats.org/drawingml/2006/main" xmlns:r="http://schemas.openxmlformats.org/officeDocument/2006/relationships" xmlns:p="http://schemas.openxmlformats.org/presentationml/2006/main">
-  <p:cSld name="Slide 4">
-    <p:bg>
-      <p:bgPr>
-        <a:solidFill>
-          <a:srgbClr val="FFFFFF"/>
-        </a:solidFill>
-        <a:effectLst/>
-      </p:bgPr>
-    </p:bg>
-    <p:spTree>
-      <p:nvGrpSpPr>
-        <p:cNvPr id="1" name=""/>
-        <p:cNvGrpSpPr/>
-        <p:nvPr/>
-      </p:nvGrpSpPr>
-      <p:grpSpPr>
-        <a:xfrm>
-          <a:off x="0" y="0"/>
-          <a:ext cx="0" cy="0"/>
-          <a:chOff x="0" y="0"/>
-          <a:chExt cx="0" cy="0"/>
-        </a:xfrm>
-      </p:grpSpPr>
-      <p:sp>
-        <p:nvSpPr>
-          <p:cNvPr id="2" name="Text 0"/>
-          <p:cNvSpPr txBox="1"/>
-          <p:nvPr/>
-        </p:nvSpPr>
-        <p:spPr>
-          <a:xfrm>
-            <a:off x="11460175" y="6446520"/>
-            <a:ext cx="457200" cy="274320"/>
-          </a:xfrm>
-          <a:prstGeom prst="rect">
-            <a:avLst/>
-          </a:prstGeom>
-          <a:noFill/>
-          <a:ln/>
-        </p:spPr>
-        <p:txBody>
-          <a:bodyPr wrap="square" lIns="0" tIns="0" rIns="0" bIns="0" rtlCol="0" anchor="ctr"/>
-          <a:lstStyle/>
-          <a:p>
-            <a:pPr marL="0" indent="0" algn="r">
-              <a:buNone/>
-            </a:pPr>
-            <a:r>
-              <a:rPr lang="en-US" sz="1000" dirty="0">
-                <a:solidFill>
-                  <a:srgbClr val="808080"/>
-                </a:solidFill>
-                <a:latin typeface="Calibri" pitchFamily="34" charset="0"/>
-                <a:ea typeface="Calibri" pitchFamily="34" charset="-122"/>
-                <a:cs typeface="Calibri" pitchFamily="34" charset="-120"/>
-              </a:rPr>
-              <a:t>4</a:t>
-            </a:r>
-            <a:endParaRPr lang="en-US" sz="1000" dirty="0"/>
-          </a:p>
-        </p:txBody>
-      </p:sp>
-      <p:sp>
-        <p:nvSpPr>
-          <p:cNvPr id="3" name="Text 1"/>
-          <p:cNvSpPr txBox="1"/>
-          <p:nvPr/>
-        </p:nvSpPr>
-        <p:spPr>
-          <a:xfrm>
-            <a:off x="548640" y="320040"/>
-            <a:ext cx="9601200" cy="685800"/>
-          </a:xfrm>
-          <a:prstGeom prst="rect">
-            <a:avLst/>
-          </a:prstGeom>
-          <a:noFill/>
-          <a:ln/>
-        </p:spPr>
-        <p:txBody>
-          <a:bodyPr wrap="square" lIns="0" tIns="0" rIns="0" bIns="0" rtlCol="0" anchor="ctr"/>
-          <a:lstStyle/>
-          <a:p>
-            <a:pPr marL="0" indent="0">
-              <a:buNone/>
-            </a:pPr>
-            <a:r>
-              <a:rPr lang="en-US" sz="2800" b="1" dirty="0">
-                <a:solidFill>
-                  <a:srgbClr val="1D2F82"/>
-                </a:solidFill>
-                <a:latin typeface="Calibri" pitchFamily="34" charset="0"/>
-                <a:ea typeface="Calibri" pitchFamily="34" charset="-122"/>
-                <a:cs typeface="Calibri" pitchFamily="34" charset="-120"/>
-              </a:rPr>
-              <a:t>Problem Statement &amp; Background</a:t>
-            </a:r>
-            <a:endParaRPr lang="en-US" sz="2800" dirty="0"/>
-          </a:p>
-        </p:txBody>
-      </p:sp>
-      <p:pic>
-        <p:nvPicPr>
-          <p:cNvPr id="4" name="Image 0" descr="logo.png"/>
-          <p:cNvPicPr>
-            <a:picLocks noChangeAspect="1"/>
-          </p:cNvPicPr>
-          <p:nvPr/>
-        </p:nvPicPr>
-        <p:blipFill>
-          <a:blip r:embed="rId3"/>
-          <a:stretch>
-            <a:fillRect/>
-          </a:stretch>
-        </p:blipFill>
-        <p:spPr>
-          <a:xfrm>
-            <a:off x="10362895" y="320040"/>
-            <a:ext cx="1371600" cy="518746"/>
-          </a:xfrm>
-          <a:prstGeom prst="rect">
-            <a:avLst/>
-          </a:prstGeom>
-        </p:spPr>
-      </p:pic>
-      <p:sp>
-        <p:nvSpPr>
-          <p:cNvPr id="5" name="Text 2"/>
-          <p:cNvSpPr txBox="1"/>
-          <p:nvPr/>
-        </p:nvSpPr>
-        <p:spPr>
-          <a:xfrm>
-            <a:off x="640080" y="1325880"/>
-            <a:ext cx="10881360" cy="4937760"/>
-          </a:xfrm>
-          <a:prstGeom prst="rect">
-            <a:avLst/>
-          </a:prstGeom>
-          <a:noFill/>
-          <a:ln/>
-        </p:spPr>
-        <p:txBody>
-          <a:bodyPr wrap="square" lIns="0" tIns="0" rIns="0" bIns="0" rtlCol="0" anchor="t"/>
-          <a:lstStyle/>
-          <a:p>
-            <a:pPr marL="177800" indent="-177800">
-              <a:spcBef>
-                <a:spcPts val="700"/>
-              </a:spcBef>
-              <a:spcAft>
-                <a:spcPts val="300"/>
-              </a:spcAft>
-              <a:buSzPct val="100000"/>
-              <a:buChar char="•"/>
-            </a:pPr>
-            <a:r>
-              <a:rPr lang="en-US" sz="1500" b="1" dirty="0">
-                <a:solidFill>
-                  <a:srgbClr val="1D2F82"/>
-                </a:solidFill>
-                <a:latin typeface="Calibri" pitchFamily="34" charset="0"/>
-                <a:ea typeface="Calibri" pitchFamily="34" charset="-122"/>
-                <a:cs typeface="Calibri" pitchFamily="34" charset="-120"/>
-              </a:rPr>
-              <a:t>Problem Statement:</a:t>
-            </a:r>
-          </a:p>
-          <a:p>
-            <a:pPr marL="457200" lvl="1" indent="-228600">
-              <a:spcAft>
-                <a:spcPts val="500"/>
-              </a:spcAft>
-              <a:buSzPct val="90000"/>
-              <a:buChar char="–"/>
-            </a:pPr>
-            <a:r>
-              <a:rPr lang="en-US" sz="1250" dirty="0">
-                <a:solidFill>
-                  <a:srgbClr val="000000"/>
-                </a:solidFill>
-                <a:latin typeface="Calibri" pitchFamily="34" charset="0"/>
-                <a:ea typeface="Calibri" pitchFamily="34" charset="-122"/>
-                <a:cs typeface="Calibri" pitchFamily="34" charset="-120"/>
-              </a:rPr>
-              <a:t>Hospital Information Systems hold highly sensitive personal data, yet techniques for extracting data from HIS portals are judged only on speed, robustness and coverage.</a:t>
-            </a:r>
-          </a:p>
-          <a:p>
-            <a:pPr marL="457200" lvl="1" indent="-228600">
-              <a:spcAft>
-                <a:spcPts val="500"/>
-              </a:spcAft>
-              <a:buSzPct val="90000"/>
-              <a:buChar char="–"/>
-            </a:pPr>
-            <a:r>
-              <a:rPr lang="en-US" sz="1250" dirty="0">
-                <a:solidFill>
-                  <a:srgbClr val="000000"/>
-                </a:solidFill>
-                <a:latin typeface="Calibri" pitchFamily="34" charset="0"/>
-                <a:ea typeface="Calibri" pitchFamily="34" charset="-122"/>
-                <a:cs typeface="Calibri" pitchFamily="34" charset="-120"/>
-              </a:rPr>
-              <a:t>DPDP Act 2023 compliance is treated as a legal afterthought, never as a measurable property of the extraction technique itself.</a:t>
-            </a:r>
-          </a:p>
-          <a:p>
-            <a:pPr marL="177800" indent="-177800">
-              <a:spcBef>
-                <a:spcPts val="700"/>
-              </a:spcBef>
-              <a:spcAft>
-                <a:spcPts val="300"/>
-              </a:spcAft>
-              <a:buSzPct val="100000"/>
-              <a:buChar char="•"/>
-            </a:pPr>
-            <a:r>
-              <a:rPr lang="en-US" sz="1500" b="1" dirty="0">
-                <a:solidFill>
-                  <a:srgbClr val="1D2F82"/>
-                </a:solidFill>
-                <a:latin typeface="Calibri" pitchFamily="34" charset="0"/>
-                <a:ea typeface="Calibri" pitchFamily="34" charset="-122"/>
-                <a:cs typeface="Calibri" pitchFamily="34" charset="-120"/>
-              </a:rPr>
-              <a:t>Background &amp; Significance:</a:t>
-            </a:r>
-          </a:p>
-          <a:p>
-            <a:pPr marL="457200" lvl="1" indent="-228600">
-              <a:spcAft>
-                <a:spcPts val="500"/>
-              </a:spcAft>
-              <a:buSzPct val="90000"/>
-              <a:buChar char="–"/>
-            </a:pPr>
-            <a:r>
-              <a:rPr lang="en-US" sz="1250" dirty="0">
-                <a:solidFill>
-                  <a:srgbClr val="000000"/>
-                </a:solidFill>
-                <a:latin typeface="Calibri" pitchFamily="34" charset="0"/>
-                <a:ea typeface="Calibri" pitchFamily="34" charset="-122"/>
-                <a:cs typeface="Calibri" pitchFamily="34" charset="-120"/>
-              </a:rPr>
-              <a:t>HIS platforms are heterogeneous and frequently updated; staff-facing data access is credentialed and portal-based — Tier-2, headless-browser automation.</a:t>
-            </a:r>
-          </a:p>
-          <a:p>
-            <a:pPr marL="457200" lvl="1" indent="-228600">
-              <a:spcAft>
-                <a:spcPts val="500"/>
-              </a:spcAft>
-              <a:buSzPct val="90000"/>
-              <a:buChar char="–"/>
-            </a:pPr>
-            <a:r>
-              <a:rPr lang="en-US" sz="1250" dirty="0">
-                <a:solidFill>
-                  <a:srgbClr val="000000"/>
-                </a:solidFill>
-                <a:latin typeface="Calibri" pitchFamily="34" charset="0"/>
-                <a:ea typeface="Calibri" pitchFamily="34" charset="-122"/>
-                <a:cs typeface="Calibri" pitchFamily="34" charset="-120"/>
-              </a:rPr>
-              <a:t>The DPDP Act 2023 makes lawful basis, purpose limitation, data minimisation and security safeguards binding on any entity processing patient data in India.</a:t>
-            </a:r>
-          </a:p>
-          <a:p>
-            <a:pPr marL="177800" indent="-177800">
-              <a:spcBef>
-                <a:spcPts val="700"/>
-              </a:spcBef>
-              <a:spcAft>
-                <a:spcPts val="300"/>
-              </a:spcAft>
-              <a:buSzPct val="100000"/>
-              <a:buChar char="•"/>
-            </a:pPr>
-            <a:r>
-              <a:rPr lang="en-US" sz="1500" b="1" dirty="0">
-                <a:solidFill>
-                  <a:srgbClr val="1D2F82"/>
-                </a:solidFill>
-                <a:latin typeface="Calibri" pitchFamily="34" charset="0"/>
-                <a:ea typeface="Calibri" pitchFamily="34" charset="-122"/>
-                <a:cs typeface="Calibri" pitchFamily="34" charset="-120"/>
-              </a:rPr>
-              <a:t>Existing Solutions:</a:t>
-            </a:r>
-          </a:p>
-          <a:p>
-            <a:pPr marL="457200" lvl="1" indent="-228600">
-              <a:spcAft>
-                <a:spcPts val="500"/>
-              </a:spcAft>
-              <a:buSzPct val="90000"/>
-              <a:buChar char="–"/>
-            </a:pPr>
-            <a:r>
-              <a:rPr lang="en-US" sz="1250" dirty="0">
-                <a:solidFill>
-                  <a:srgbClr val="000000"/>
-                </a:solidFill>
-                <a:latin typeface="Calibri" pitchFamily="34" charset="0"/>
-                <a:ea typeface="Calibri" pitchFamily="34" charset="-122"/>
-                <a:cs typeface="Calibri" pitchFamily="34" charset="-120"/>
-              </a:rPr>
-              <a:t>Rule / wrapper scrapers (fast, brittle); headless-browser automation (handles auth and dynamic pages); LLM / agentic extractors — AutoScraper (EMNLP 2024), AXE (2026).</a:t>
-            </a:r>
-          </a:p>
-          <a:p>
-            <a:pPr marL="457200" lvl="1" indent="-228600">
-              <a:spcAft>
-                <a:spcPts val="500"/>
-              </a:spcAft>
-              <a:buSzPct val="90000"/>
-              <a:buChar char="–"/>
-            </a:pPr>
-            <a:r>
-              <a:rPr lang="en-US" sz="1250" dirty="0">
-                <a:solidFill>
-                  <a:srgbClr val="000000"/>
-                </a:solidFill>
-                <a:latin typeface="Calibri" pitchFamily="34" charset="0"/>
-                <a:ea typeface="Calibri" pitchFamily="34" charset="-122"/>
-                <a:cs typeface="Calibri" pitchFamily="34" charset="-120"/>
-              </a:rPr>
-              <a:t>Compliance guidance for scraping exists only as qualitative checklists (e.g. Web Scraping for Research, 2025).</a:t>
-            </a:r>
-          </a:p>
-          <a:p>
-            <a:pPr marL="177800" indent="-177800">
-              <a:spcBef>
-                <a:spcPts val="700"/>
-              </a:spcBef>
-              <a:spcAft>
-                <a:spcPts val="300"/>
-              </a:spcAft>
-              <a:buSzPct val="100000"/>
-              <a:buChar char="•"/>
-            </a:pPr>
-            <a:r>
-              <a:rPr lang="en-US" sz="1500" b="1" dirty="0">
-                <a:solidFill>
-                  <a:srgbClr val="1D2F82"/>
-                </a:solidFill>
-                <a:latin typeface="Calibri" pitchFamily="34" charset="0"/>
-                <a:ea typeface="Calibri" pitchFamily="34" charset="-122"/>
-                <a:cs typeface="Calibri" pitchFamily="34" charset="-120"/>
-              </a:rPr>
-              <a:t>Limitations / Research Gap:</a:t>
-            </a:r>
-          </a:p>
-          <a:p>
-            <a:pPr marL="457200" lvl="1" indent="-228600">
-              <a:spcAft>
-                <a:spcPts val="500"/>
-              </a:spcAft>
-              <a:buSzPct val="90000"/>
-              <a:buChar char="–"/>
-            </a:pPr>
-            <a:r>
-              <a:rPr lang="en-US" sz="1250" dirty="0">
-                <a:solidFill>
-                  <a:srgbClr val="000000"/>
-                </a:solidFill>
-                <a:latin typeface="Calibri" pitchFamily="34" charset="0"/>
-                <a:ea typeface="Calibri" pitchFamily="34" charset="-122"/>
-                <a:cs typeface="Calibri" pitchFamily="34" charset="-120"/>
-              </a:rPr>
-              <a:t>No existing technique reports a compliance score, so compliance cannot be compared across extraction methods.</a:t>
-            </a:r>
-          </a:p>
-          <a:p>
-            <a:pPr marL="457200" lvl="1" indent="-228600">
-              <a:spcAft>
-                <a:spcPts val="500"/>
-              </a:spcAft>
-              <a:buSzPct val="90000"/>
-              <a:buChar char="–"/>
-            </a:pPr>
-            <a:r>
-              <a:rPr lang="en-US" sz="1250" dirty="0">
-                <a:solidFill>
-                  <a:srgbClr val="000000"/>
-                </a:solidFill>
-                <a:latin typeface="Calibri" pitchFamily="34" charset="0"/>
-                <a:ea typeface="Calibri" pitchFamily="34" charset="-122"/>
-                <a:cs typeface="Calibri" pitchFamily="34" charset="-120"/>
-              </a:rPr>
-              <a:t>Our gap: make DPDP compliance a benchmarkable, per-technique number produced by one shared harness.</a:t>
-            </a:r>
-          </a:p>
-        </p:txBody>
-      </p:sp>
-    </p:spTree>
-  </p:cSld>
-  <p:clrMapOvr>
-    <a:masterClrMapping/>
-  </p:clrMapOvr>
-</p:sld>
-</file>
-
-<file path=ppt/slides/slide5.xml><?xml version="1.0" encoding="utf-8"?>
-<p:sld xmlns:a="http://schemas.openxmlformats.org/drawingml/2006/main" xmlns:r="http://schemas.openxmlformats.org/officeDocument/2006/relationships" xmlns:p="http://schemas.openxmlformats.org/presentationml/2006/main">
-  <p:cSld name="Slide 5">
-    <p:bg>
-      <p:bgPr>
-        <a:solidFill>
-          <a:srgbClr val="FFFFFF"/>
-        </a:solidFill>
-        <a:effectLst/>
-      </p:bgPr>
-    </p:bg>
-    <p:spTree>
-      <p:nvGrpSpPr>
-        <p:cNvPr id="1" name=""/>
-        <p:cNvGrpSpPr/>
-        <p:nvPr/>
-      </p:nvGrpSpPr>
-      <p:grpSpPr>
-        <a:xfrm>
-          <a:off x="0" y="0"/>
-          <a:ext cx="0" cy="0"/>
-          <a:chOff x="0" y="0"/>
-          <a:chExt cx="0" cy="0"/>
-        </a:xfrm>
-      </p:grpSpPr>
-      <p:sp>
-        <p:nvSpPr>
-          <p:cNvPr id="2" name="Text 0"/>
-          <p:cNvSpPr txBox="1"/>
-          <p:nvPr/>
-        </p:nvSpPr>
-        <p:spPr>
-          <a:xfrm>
-            <a:off x="11460175" y="6446520"/>
-            <a:ext cx="457200" cy="274320"/>
-          </a:xfrm>
-          <a:prstGeom prst="rect">
-            <a:avLst/>
-          </a:prstGeom>
-          <a:noFill/>
-          <a:ln/>
-        </p:spPr>
-        <p:txBody>
-          <a:bodyPr wrap="square" lIns="0" tIns="0" rIns="0" bIns="0" rtlCol="0" anchor="ctr"/>
-          <a:lstStyle/>
-          <a:p>
-            <a:pPr marL="0" indent="0" algn="r">
-              <a:buNone/>
-            </a:pPr>
-            <a:r>
-              <a:rPr lang="en-US" sz="1000" dirty="0">
-                <a:solidFill>
-                  <a:srgbClr val="808080"/>
-                </a:solidFill>
-                <a:latin typeface="Calibri" pitchFamily="34" charset="0"/>
-                <a:ea typeface="Calibri" pitchFamily="34" charset="-122"/>
-                <a:cs typeface="Calibri" pitchFamily="34" charset="-120"/>
-              </a:rPr>
-              <a:t>5</a:t>
-            </a:r>
-            <a:endParaRPr lang="en-US" sz="1000" dirty="0"/>
-          </a:p>
-        </p:txBody>
-      </p:sp>
-      <p:sp>
-        <p:nvSpPr>
-          <p:cNvPr id="3" name="Text 1"/>
-          <p:cNvSpPr txBox="1"/>
-          <p:nvPr/>
-        </p:nvSpPr>
-        <p:spPr>
-          <a:xfrm>
-            <a:off x="548640" y="320040"/>
-            <a:ext cx="9601200" cy="685800"/>
-          </a:xfrm>
-          <a:prstGeom prst="rect">
-            <a:avLst/>
-          </a:prstGeom>
-          <a:noFill/>
-          <a:ln/>
-        </p:spPr>
-        <p:txBody>
-          <a:bodyPr wrap="square" lIns="0" tIns="0" rIns="0" bIns="0" rtlCol="0" anchor="ctr"/>
-          <a:lstStyle/>
-          <a:p>
-            <a:pPr marL="0" indent="0">
-              <a:buNone/>
-            </a:pPr>
-            <a:r>
-              <a:rPr lang="en-US" sz="2800" b="1" dirty="0">
-                <a:solidFill>
-                  <a:srgbClr val="1D2F82"/>
-                </a:solidFill>
-                <a:latin typeface="Calibri" pitchFamily="34" charset="0"/>
-                <a:ea typeface="Calibri" pitchFamily="34" charset="-122"/>
-                <a:cs typeface="Calibri" pitchFamily="34" charset="-120"/>
-              </a:rPr>
-              <a:t>Literature Survey</a:t>
-            </a:r>
-            <a:endParaRPr lang="en-US" sz="2800" dirty="0"/>
-          </a:p>
-        </p:txBody>
-      </p:sp>
-      <p:pic>
-        <p:nvPicPr>
-          <p:cNvPr id="4" name="Image 0" descr="logo.png"/>
-          <p:cNvPicPr>
-            <a:picLocks noChangeAspect="1"/>
-          </p:cNvPicPr>
-          <p:nvPr/>
-        </p:nvPicPr>
-        <p:blipFill>
-          <a:blip r:embed="rId3"/>
+          <a:blip r:embed="rId2"/>
           <a:stretch>
             <a:fillRect/>
           </a:stretch>
@@ -6918,7 +6220,7 @@
                           <a:ea typeface="Calibri" pitchFamily="34" charset="-122"/>
                           <a:cs typeface="Calibri" pitchFamily="34" charset="-120"/>
                         </a:rPr>
-                        <a:t>1</a:t>
+                        <a:t>7</a:t>
                       </a:r>
                       <a:endParaRPr lang="en-US" sz="1100" dirty="0"/>
                     </a:p>
@@ -6979,7 +6281,7 @@
                           <a:ea typeface="Calibri" pitchFamily="34" charset="-122"/>
                           <a:cs typeface="Calibri" pitchFamily="34" charset="-120"/>
                         </a:rPr>
-                        <a:t>Ruchitaa et al., 2023</a:t>
+                        <a:t>ACM IMC, 2025</a:t>
                       </a:r>
                       <a:endParaRPr lang="en-US" sz="1050" dirty="0"/>
                     </a:p>
@@ -7040,7 +6342,7 @@
                           <a:ea typeface="Calibri" pitchFamily="34" charset="-122"/>
                           <a:cs typeface="Calibri" pitchFamily="34" charset="-120"/>
                         </a:rPr>
-                        <a:t>Web Scraping Tools and Techniques: A Brief Survey — ICITIIT</a:t>
+                        <a:t>Scrapers Selectively Respect robots.txt Directives — large-scale study</a:t>
                       </a:r>
                       <a:endParaRPr lang="en-US" sz="1050" dirty="0"/>
                     </a:p>
@@ -7101,7 +6403,7 @@
                           <a:ea typeface="Calibri" pitchFamily="34" charset="-122"/>
                           <a:cs typeface="Calibri" pitchFamily="34" charset="-120"/>
                         </a:rPr>
-                        <a:t>Survey / taxonomy of scraping tools and methods</a:t>
+                        <a:t>Internet-scale measurement of robots.txt compliance in the wild</a:t>
                       </a:r>
                       <a:endParaRPr lang="en-US" sz="1000" dirty="0"/>
                     </a:p>
@@ -7162,7 +6464,7 @@
                           <a:ea typeface="Calibri" pitchFamily="34" charset="-122"/>
                           <a:cs typeface="Calibri" pitchFamily="34" charset="-120"/>
                         </a:rPr>
-                        <a:t>Broad catalogue; no domain-specific (HIS) use and no compliance axis</a:t>
+                        <a:t>Compliance observed after the fact, never designed into the technique</a:t>
                       </a:r>
                       <a:endParaRPr lang="en-US" sz="1000" dirty="0"/>
                     </a:p>
@@ -7230,7 +6532,7 @@
                           <a:ea typeface="Calibri" pitchFamily="34" charset="-122"/>
                           <a:cs typeface="Calibri" pitchFamily="34" charset="-120"/>
                         </a:rPr>
-                        <a:t>2</a:t>
+                        <a:t>8</a:t>
                       </a:r>
                       <a:endParaRPr lang="en-US" sz="1100" dirty="0"/>
                     </a:p>
@@ -7291,7 +6593,7 @@
                           <a:ea typeface="Calibri" pitchFamily="34" charset="-122"/>
                           <a:cs typeface="Calibri" pitchFamily="34" charset="-120"/>
                         </a:rPr>
-                        <a:t>Huang et al., 2024</a:t>
+                        <a:t>Purnawan &amp; Surendro, 2016</a:t>
                       </a:r>
                       <a:endParaRPr lang="en-US" sz="1050" dirty="0"/>
                     </a:p>
@@ -7352,7 +6654,7 @@
                           <a:ea typeface="Calibri" pitchFamily="34" charset="-122"/>
                           <a:cs typeface="Calibri" pitchFamily="34" charset="-120"/>
                         </a:rPr>
-                        <a:t>AutoScraper: A Progressive Understanding Web Agent — EMNLP</a:t>
+                        <a:t>Building Enterprise Architecture for Hospital Information System — ICoICT</a:t>
                       </a:r>
                       <a:endParaRPr lang="en-US" sz="1050" dirty="0"/>
                     </a:p>
@@ -7413,7 +6715,7 @@
                           <a:ea typeface="Calibri" pitchFamily="34" charset="-122"/>
                           <a:cs typeface="Calibri" pitchFamily="34" charset="-120"/>
                         </a:rPr>
-                        <a:t>Two-stage LLM agent using HTML hierarchy + cross-page similarity; executability metric</a:t>
+                        <a:t>Enterprise-architecture modelling of HIS structure</a:t>
                       </a:r>
                       <a:endParaRPr lang="en-US" sz="1000" dirty="0"/>
                     </a:p>
@@ -7474,7 +6776,7 @@
                           <a:ea typeface="Calibri" pitchFamily="34" charset="-122"/>
                           <a:cs typeface="Calibri" pitchFamily="34" charset="-120"/>
                         </a:rPr>
-                        <a:t>SOTA scraper generation, but evaluated only on executability / coverage — no data protection</a:t>
+                        <a:t>Useful layer model; predates LLM extraction, no data-egress / compliance view</a:t>
                       </a:r>
                       <a:endParaRPr lang="en-US" sz="1000" dirty="0"/>
                     </a:p>
@@ -7520,7 +6822,7 @@
                 </a:tc>
                 <a:extLst>
                   <a:ext uri="{0D108BD9-81ED-4DB2-BD59-A6C34878D82A}">
-                    <a16:rowId xmlns:a16="http://schemas.microsoft.com/office/drawing/2014/main" val="10001"/>
+                    <a16:rowId xmlns:a16="http://schemas.microsoft.com/office/drawing/2014/main" val="2406999311"/>
                   </a:ext>
                 </a:extLst>
               </a:tr>
@@ -7542,7 +6844,7 @@
                           <a:ea typeface="Calibri" pitchFamily="34" charset="-122"/>
                           <a:cs typeface="Calibri" pitchFamily="34" charset="-120"/>
                         </a:rPr>
-                        <a:t>3</a:t>
+                        <a:t>9</a:t>
                       </a:r>
                       <a:endParaRPr lang="en-US" sz="1100" dirty="0"/>
                     </a:p>
@@ -7603,7 +6905,7 @@
                           <a:ea typeface="Calibri" pitchFamily="34" charset="-122"/>
                           <a:cs typeface="Calibri" pitchFamily="34" charset="-120"/>
                         </a:rPr>
-                        <a:t>Mansour et al., 2026</a:t>
+                        <a:t>Interoperability review, 2025</a:t>
                       </a:r>
                       <a:endParaRPr lang="en-US" sz="1050" dirty="0"/>
                     </a:p>
@@ -7664,7 +6966,7 @@
                           <a:ea typeface="Calibri" pitchFamily="34" charset="-122"/>
                           <a:cs typeface="Calibri" pitchFamily="34" charset="-120"/>
                         </a:rPr>
-                        <a:t>AXE: Low-Cost Cross-Domain Web Structured Information Extraction — arXiv</a:t>
+                        <a:t>A Critical Review of Health Data Interoperability Standards: FHIR, HL7 and Beyond</a:t>
                       </a:r>
                       <a:endParaRPr lang="en-US" sz="1050" dirty="0"/>
                     </a:p>
@@ -7725,7 +7027,7 @@
                           <a:ea typeface="Calibri" pitchFamily="34" charset="-122"/>
                           <a:cs typeface="Calibri" pitchFamily="34" charset="-120"/>
                         </a:rPr>
-                        <a:t>DOM-tree pruning + Grounded XPath Resolution feeding a 0.6B LLM; zero-shot</a:t>
+                        <a:t>Critical review of HL7 / FHIR and related standards</a:t>
                       </a:r>
                       <a:endParaRPr lang="en-US" sz="1000" dirty="0"/>
                     </a:p>
@@ -7786,7 +7088,7 @@
                           <a:ea typeface="Calibri" pitchFamily="34" charset="-122"/>
                           <a:cs typeface="Calibri" pitchFamily="34" charset="-120"/>
                         </a:rPr>
-                        <a:t>F1 88.1% on SWDE at low cost; no compliance modelling, not applied to credentialed domains</a:t>
+                        <a:t>Interoperability ≠ compliant extraction; standards are silent on lawful scraping</a:t>
                       </a:r>
                       <a:endParaRPr lang="en-US" sz="1000" dirty="0"/>
                     </a:p>
@@ -7832,7 +7134,7 @@
                 </a:tc>
                 <a:extLst>
                   <a:ext uri="{0D108BD9-81ED-4DB2-BD59-A6C34878D82A}">
-                    <a16:rowId xmlns:a16="http://schemas.microsoft.com/office/drawing/2014/main" val="10001"/>
+                    <a16:rowId xmlns:a16="http://schemas.microsoft.com/office/drawing/2014/main" val="3719310596"/>
                   </a:ext>
                 </a:extLst>
               </a:tr>
@@ -7854,7 +7156,7 @@
                           <a:ea typeface="Calibri" pitchFamily="34" charset="-122"/>
                           <a:cs typeface="Calibri" pitchFamily="34" charset="-120"/>
                         </a:rPr>
-                        <a:t>4</a:t>
+                        <a:t>10</a:t>
                       </a:r>
                       <a:endParaRPr lang="en-US" sz="1100" dirty="0"/>
                     </a:p>
@@ -7915,7 +7217,7 @@
                           <a:ea typeface="Calibri" pitchFamily="34" charset="-122"/>
                           <a:cs typeface="Calibri" pitchFamily="34" charset="-120"/>
                         </a:rPr>
-                        <a:t>Bohra et al., 2025</a:t>
+                        <a:t>Discover Public Health, 2025</a:t>
                       </a:r>
                       <a:endParaRPr lang="en-US" sz="1050" dirty="0"/>
                     </a:p>
@@ -7976,7 +7278,7 @@
                           <a:ea typeface="Calibri" pitchFamily="34" charset="-122"/>
                           <a:cs typeface="Calibri" pitchFamily="34" charset="-120"/>
                         </a:rPr>
-                        <a:t>WebLists: Structured Extraction from Interactive Sites (BardeenAgent) — arXiv</a:t>
+                        <a:t>Significance of the DPDP Act 2023 for the Healthcare Industry</a:t>
                       </a:r>
                       <a:endParaRPr lang="en-US" sz="1050" dirty="0"/>
                     </a:p>
@@ -8037,7 +7339,7 @@
                           <a:ea typeface="Calibri" pitchFamily="34" charset="-122"/>
                           <a:cs typeface="Calibri" pitchFamily="34" charset="-120"/>
                         </a:rPr>
-                        <a:t>200-task benchmark; agent converts execution into replayable programs</a:t>
+                        <a:t>Doctrinal analysis of DPDP obligations for healthcare entities</a:t>
                       </a:r>
                       <a:endParaRPr lang="en-US" sz="1000" dirty="0"/>
                     </a:p>
@@ -8098,7 +7400,7 @@
                           <a:ea typeface="Calibri" pitchFamily="34" charset="-122"/>
                           <a:cs typeface="Calibri" pitchFamily="34" charset="-120"/>
                         </a:rPr>
-                        <a:t>Recall 31%→66%; regulated / enterprise contexts and privacy risk left unaddressed</a:t>
+                        <a:t>Legal analysis only; no technical or measurable operationalisation</a:t>
                       </a:r>
                       <a:endParaRPr lang="en-US" sz="1000" dirty="0"/>
                     </a:p>
@@ -8144,7 +7446,7 @@
                 </a:tc>
                 <a:extLst>
                   <a:ext uri="{0D108BD9-81ED-4DB2-BD59-A6C34878D82A}">
-                    <a16:rowId xmlns:a16="http://schemas.microsoft.com/office/drawing/2014/main" val="10001"/>
+                    <a16:rowId xmlns:a16="http://schemas.microsoft.com/office/drawing/2014/main" val="245685870"/>
                   </a:ext>
                 </a:extLst>
               </a:tr>
@@ -8166,7 +7468,7 @@
                           <a:ea typeface="Calibri" pitchFamily="34" charset="-122"/>
                           <a:cs typeface="Calibri" pitchFamily="34" charset="-120"/>
                         </a:rPr>
-                        <a:t>5</a:t>
+                        <a:t>11</a:t>
                       </a:r>
                       <a:endParaRPr lang="en-US" sz="1100" dirty="0"/>
                     </a:p>
@@ -8227,7 +7529,7 @@
                           <a:ea typeface="Calibri" pitchFamily="34" charset="-122"/>
                           <a:cs typeface="Calibri" pitchFamily="34" charset="-120"/>
                         </a:rPr>
-                        <a:t>Wang et al., 2026</a:t>
+                        <a:t>npj Digital Medicine, 2025</a:t>
                       </a:r>
                       <a:endParaRPr lang="en-US" sz="1050" dirty="0"/>
                     </a:p>
@@ -8288,7 +7590,7 @@
                           <a:ea typeface="Calibri" pitchFamily="34" charset="-122"/>
                           <a:cs typeface="Calibri" pitchFamily="34" charset="-120"/>
                         </a:rPr>
-                        <a:t>Co-Scraper: Query-Aware DOM Pruning and Reusable Scraper Synthesis — arXiv</a:t>
+                        <a:t>Digital Data Protection in Indian Medical Research and Healthcare</a:t>
                       </a:r>
                       <a:endParaRPr lang="en-US" sz="1050" dirty="0"/>
                     </a:p>
@@ -8349,7 +7651,7 @@
                           <a:ea typeface="Calibri" pitchFamily="34" charset="-122"/>
                           <a:cs typeface="Calibri" pitchFamily="34" charset="-120"/>
                         </a:rPr>
-                        <a:t>Two-stage query-aware pruning + extraction-strategy induction</a:t>
+                        <a:t>Synthesis of challenges and recommendations</a:t>
                       </a:r>
                       <a:endParaRPr lang="en-US" sz="1000" dirty="0"/>
                     </a:p>
@@ -8410,7 +7712,7 @@
                           <a:ea typeface="Calibri" pitchFamily="34" charset="-122"/>
                           <a:cs typeface="Calibri" pitchFamily="34" charset="-120"/>
                         </a:rPr>
-                        <a:t>F1 94.78% SWDE, ~90% reuse; optimises efficiency only — no purpose-limitation notion</a:t>
+                        <a:t>Recommendations not translated into checkable controls on data-collection pipelines</a:t>
                       </a:r>
                       <a:endParaRPr lang="en-US" sz="1000" dirty="0"/>
                     </a:p>
@@ -8456,7 +7758,7 @@
                 </a:tc>
                 <a:extLst>
                   <a:ext uri="{0D108BD9-81ED-4DB2-BD59-A6C34878D82A}">
-                    <a16:rowId xmlns:a16="http://schemas.microsoft.com/office/drawing/2014/main" val="10001"/>
+                    <a16:rowId xmlns:a16="http://schemas.microsoft.com/office/drawing/2014/main" val="3726751537"/>
                   </a:ext>
                 </a:extLst>
               </a:tr>
@@ -8478,7 +7780,7 @@
                           <a:ea typeface="Calibri" pitchFamily="34" charset="-122"/>
                           <a:cs typeface="Calibri" pitchFamily="34" charset="-120"/>
                         </a:rPr>
-                        <a:t>6</a:t>
+                        <a:t>12</a:t>
                       </a:r>
                       <a:endParaRPr lang="en-US" sz="1100" dirty="0"/>
                     </a:p>
@@ -8539,7 +7841,7 @@
                           <a:ea typeface="Calibri" pitchFamily="34" charset="-122"/>
                           <a:cs typeface="Calibri" pitchFamily="34" charset="-120"/>
                         </a:rPr>
-                        <a:t>Gundelach et al., 2025</a:t>
+                        <a:t>Brown et al., 2025</a:t>
                       </a:r>
                       <a:endParaRPr lang="en-US" sz="1050" dirty="0"/>
                     </a:p>
@@ -8600,7 +7902,7 @@
                           <a:ea typeface="Calibri" pitchFamily="34" charset="-122"/>
                           <a:cs typeface="Calibri" pitchFamily="34" charset="-120"/>
                         </a:rPr>
-                        <a:t>Detecting Bot Detection: Prevalence, Techniques, Implications — arXiv</a:t>
+                        <a:t>Web Scraping for Research: Legal, Ethical, Institutional and Scientific Considerations — Big Data &amp; Society</a:t>
                       </a:r>
                       <a:endParaRPr lang="en-US" sz="1050" dirty="0"/>
                     </a:p>
@@ -8661,7 +7963,7 @@
                           <a:ea typeface="Calibri" pitchFamily="34" charset="-122"/>
                           <a:cs typeface="Calibri" pitchFamily="34" charset="-120"/>
                         </a:rPr>
-                        <a:t>Systematic review (2020–25) of bot-detection at top security / web venues</a:t>
+                        <a:t>Multi-dimensional qualitative framework (contract, CFAA, IP, privacy, IRB, validity)</a:t>
                       </a:r>
                       <a:endParaRPr lang="en-US" sz="1000" dirty="0"/>
                     </a:p>
@@ -8722,7 +8024,7 @@
                           <a:ea typeface="Calibri" pitchFamily="34" charset="-122"/>
                           <a:cs typeface="Calibri" pitchFamily="34" charset="-120"/>
                         </a:rPr>
-                        <a:t>Maps the detection landscape; authenticated / credentialed portal scraping under-studied</a:t>
+                        <a:t>A checklist, not a scored per-technique benchmark</a:t>
                       </a:r>
                       <a:endParaRPr lang="en-US" sz="1000" dirty="0"/>
                     </a:p>
@@ -8768,7 +8070,7 @@
                 </a:tc>
                 <a:extLst>
                   <a:ext uri="{0D108BD9-81ED-4DB2-BD59-A6C34878D82A}">
-                    <a16:rowId xmlns:a16="http://schemas.microsoft.com/office/drawing/2014/main" val="10001"/>
+                    <a16:rowId xmlns:a16="http://schemas.microsoft.com/office/drawing/2014/main" val="987605250"/>
                   </a:ext>
                 </a:extLst>
               </a:tr>
@@ -8809,7 +8111,7 @@
                 <a:ea typeface="Calibri" pitchFamily="34" charset="-122"/>
                 <a:cs typeface="Calibri" pitchFamily="34" charset="-120"/>
               </a:rPr>
-              <a:t>References [1]–[6] here; [7]–[12] on the next slide. Full IEEE list on the References slide.</a:t>
+              <a:t>Continued from previous slide. Full IEEE reference list on the References slide.</a:t>
             </a:r>
             <a:endParaRPr lang="en-US" sz="1200" dirty="0"/>
           </a:p>
@@ -8823,7 +8125,7 @@
 </p:sld>
 </file>
 
-<file path=ppt/slides/slide6.xml><?xml version="1.0" encoding="utf-8"?>
+<file path=ppt/slides/slide5.xml><?xml version="1.0" encoding="utf-8"?>
 <p:sld xmlns:a="http://schemas.openxmlformats.org/drawingml/2006/main" xmlns:r="http://schemas.openxmlformats.org/officeDocument/2006/relationships" xmlns:p="http://schemas.openxmlformats.org/presentationml/2006/main">
   <p:cSld name="Slide 6">
     <p:bg>
@@ -9209,7 +8511,7 @@
 </p:sld>
 </file>
 
-<file path=ppt/slides/slide7.xml><?xml version="1.0" encoding="utf-8"?>
+<file path=ppt/slides/slide6.xml><?xml version="1.0" encoding="utf-8"?>
 <p:sld xmlns:a="http://schemas.openxmlformats.org/drawingml/2006/main" xmlns:r="http://schemas.openxmlformats.org/officeDocument/2006/relationships" xmlns:p="http://schemas.openxmlformats.org/presentationml/2006/main">
   <p:cSld name="Slide 7">
     <p:bg>
@@ -9615,7 +8917,7 @@
 </p:sld>
 </file>
 
-<file path=ppt/slides/slide8.xml><?xml version="1.0" encoding="utf-8"?>
+<file path=ppt/slides/slide7.xml><?xml version="1.0" encoding="utf-8"?>
 <p:sld xmlns:a="http://schemas.openxmlformats.org/drawingml/2006/main" xmlns:r="http://schemas.openxmlformats.org/officeDocument/2006/relationships" xmlns:p="http://schemas.openxmlformats.org/presentationml/2006/main">
   <p:cSld name="Slide 8">
     <p:bg>
@@ -9821,10 +9123,34 @@
             <a:tbl>
               <a:tblPr/>
               <a:tblGrid>
-                <a:gridCol w="2750000"/>
-                <a:gridCol w="1850000"/>
-                <a:gridCol w="1500000"/>
-                <a:gridCol w="4991672"/>
+                <a:gridCol w="2750000">
+                  <a:extLst>
+                    <a:ext uri="{9D8B030D-6E8A-4147-A177-3AD203B41FA5}">
+                      <a16:colId xmlns:a16="http://schemas.microsoft.com/office/drawing/2014/main" val="20000"/>
+                    </a:ext>
+                  </a:extLst>
+                </a:gridCol>
+                <a:gridCol w="1850000">
+                  <a:extLst>
+                    <a:ext uri="{9D8B030D-6E8A-4147-A177-3AD203B41FA5}">
+                      <a16:colId xmlns:a16="http://schemas.microsoft.com/office/drawing/2014/main" val="20001"/>
+                    </a:ext>
+                  </a:extLst>
+                </a:gridCol>
+                <a:gridCol w="1500000">
+                  <a:extLst>
+                    <a:ext uri="{9D8B030D-6E8A-4147-A177-3AD203B41FA5}">
+                      <a16:colId xmlns:a16="http://schemas.microsoft.com/office/drawing/2014/main" val="20002"/>
+                    </a:ext>
+                  </a:extLst>
+                </a:gridCol>
+                <a:gridCol w="4991672">
+                  <a:extLst>
+                    <a:ext uri="{9D8B030D-6E8A-4147-A177-3AD203B41FA5}">
+                      <a16:colId xmlns:a16="http://schemas.microsoft.com/office/drawing/2014/main" val="20003"/>
+                    </a:ext>
+                  </a:extLst>
+                </a:gridCol>
               </a:tblGrid>
               <a:tr h="600000">
                 <a:tc>
@@ -10336,7 +9662,7 @@
                 </a:tc>
                 <a:extLst>
                   <a:ext uri="{0D108BD9-81ED-4DB2-BD59-A6C34878D82A}">
-                    <a16:rowId xmlns:a16="http://schemas.microsoft.com/office/drawing/2014/main" val="10001"/>
+                    <a16:rowId xmlns:a16="http://schemas.microsoft.com/office/drawing/2014/main" val="2470677950"/>
                   </a:ext>
                 </a:extLst>
               </a:tr>
@@ -10587,7 +9913,7 @@
                 </a:tc>
                 <a:extLst>
                   <a:ext uri="{0D108BD9-81ED-4DB2-BD59-A6C34878D82A}">
-                    <a16:rowId xmlns:a16="http://schemas.microsoft.com/office/drawing/2014/main" val="10001"/>
+                    <a16:rowId xmlns:a16="http://schemas.microsoft.com/office/drawing/2014/main" val="3115254312"/>
                   </a:ext>
                 </a:extLst>
               </a:tr>
@@ -10838,7 +10164,7 @@
                 </a:tc>
                 <a:extLst>
                   <a:ext uri="{0D108BD9-81ED-4DB2-BD59-A6C34878D82A}">
-                    <a16:rowId xmlns:a16="http://schemas.microsoft.com/office/drawing/2014/main" val="10001"/>
+                    <a16:rowId xmlns:a16="http://schemas.microsoft.com/office/drawing/2014/main" val="2102328240"/>
                   </a:ext>
                 </a:extLst>
               </a:tr>
@@ -10916,7 +10242,7 @@
 </p:sld>
 </file>
 
-<file path=ppt/slides/slide9.xml><?xml version="1.0" encoding="utf-8"?>
+<file path=ppt/slides/slide8.xml><?xml version="1.0" encoding="utf-8"?>
 <p:sld xmlns:a="http://schemas.openxmlformats.org/drawingml/2006/main" xmlns:r="http://schemas.openxmlformats.org/officeDocument/2006/relationships" xmlns:p="http://schemas.openxmlformats.org/presentationml/2006/main">
   <p:cSld name="Slide 9">
     <p:bg>
@@ -11105,39 +10431,107 @@
           </a:p>
         </p:txBody>
       </p:sp>
+      <p:pic>
+        <p:nvPicPr>
+          <p:cNvPr id="6" name="Picture 5">
+            <a:extLst>
+              <a:ext uri="{FF2B5EF4-FFF2-40B4-BE49-F238E27FC236}">
+                <a16:creationId xmlns:a16="http://schemas.microsoft.com/office/drawing/2014/main" id="{6DAF0333-4B62-37AD-3E1B-5E54782CD6F2}"/>
+              </a:ext>
+            </a:extLst>
+          </p:cNvPr>
+          <p:cNvPicPr>
+            <a:picLocks noChangeAspect="1"/>
+          </p:cNvPicPr>
+          <p:nvPr/>
+        </p:nvPicPr>
+        <p:blipFill>
+          <a:blip r:embed="rId4"/>
+          <a:stretch>
+            <a:fillRect/>
+          </a:stretch>
+        </p:blipFill>
+        <p:spPr>
+          <a:xfrm>
+            <a:off x="923270" y="2988876"/>
+            <a:ext cx="9810540" cy="2030133"/>
+          </a:xfrm>
+          <a:prstGeom prst="rect">
+            <a:avLst/>
+          </a:prstGeom>
+        </p:spPr>
+      </p:pic>
+    </p:spTree>
+  </p:cSld>
+  <p:clrMapOvr>
+    <a:masterClrMapping/>
+  </p:clrMapOvr>
+</p:sld>
+</file>
+
+<file path=ppt/slides/slide9.xml><?xml version="1.0" encoding="utf-8"?>
+<p:sld xmlns:a="http://schemas.openxmlformats.org/drawingml/2006/main" xmlns:r="http://schemas.openxmlformats.org/officeDocument/2006/relationships" xmlns:p="http://schemas.openxmlformats.org/presentationml/2006/main">
+  <p:cSld>
+    <p:bg>
+      <p:bgPr>
+        <a:solidFill>
+          <a:srgbClr val="FFFFFF"/>
+        </a:solidFill>
+        <a:effectLst/>
+      </p:bgPr>
+    </p:bg>
+    <p:spTree>
+      <p:nvGrpSpPr>
+        <p:cNvPr id="1" name="">
+          <a:extLst>
+            <a:ext uri="{FF2B5EF4-FFF2-40B4-BE49-F238E27FC236}">
+              <a16:creationId xmlns:a16="http://schemas.microsoft.com/office/drawing/2014/main" id="{6FC344E8-FF77-B286-38F9-3CBB36A2545D}"/>
+            </a:ext>
+          </a:extLst>
+        </p:cNvPr>
+        <p:cNvGrpSpPr/>
+        <p:nvPr/>
+      </p:nvGrpSpPr>
+      <p:grpSpPr>
+        <a:xfrm>
+          <a:off x="0" y="0"/>
+          <a:ext cx="0" cy="0"/>
+          <a:chOff x="0" y="0"/>
+          <a:chExt cx="0" cy="0"/>
+        </a:xfrm>
+      </p:grpSpPr>
       <p:sp>
         <p:nvSpPr>
-          <p:cNvPr id="21" name="Screenshot Placeholder"/>
-          <p:cNvSpPr/>
+          <p:cNvPr id="2" name="Text 0">
+            <a:extLst>
+              <a:ext uri="{FF2B5EF4-FFF2-40B4-BE49-F238E27FC236}">
+                <a16:creationId xmlns:a16="http://schemas.microsoft.com/office/drawing/2014/main" id="{2D85B9BF-6755-C963-22E2-175FD4533DFC}"/>
+              </a:ext>
+            </a:extLst>
+          </p:cNvPr>
+          <p:cNvSpPr txBox="1"/>
           <p:nvPr/>
         </p:nvSpPr>
         <p:spPr>
           <a:xfrm>
-            <a:off x="1200000" y="2450000"/>
-            <a:ext cx="9792000" cy="2800000"/>
+            <a:off x="11460175" y="6446520"/>
+            <a:ext cx="457200" cy="274320"/>
           </a:xfrm>
           <a:prstGeom prst="rect">
             <a:avLst/>
           </a:prstGeom>
-          <a:solidFill>
-            <a:srgbClr val="FFFFFF"/>
-          </a:solidFill>
-          <a:ln w="15875">
-            <a:solidFill>
-              <a:srgbClr val="1D2F82"/>
-            </a:solidFill>
-            <a:prstDash val="dash"/>
-          </a:ln>
+          <a:noFill/>
+          <a:ln/>
         </p:spPr>
         <p:txBody>
-          <a:bodyPr wrap="square" lIns="91440" tIns="45720" rIns="91440" bIns="45720" rtlCol="0" anchor="ctr"/>
+          <a:bodyPr wrap="square" lIns="0" tIns="0" rIns="0" bIns="0" rtlCol="0" anchor="ctr"/>
           <a:lstStyle/>
           <a:p>
-            <a:pPr algn="ctr">
+            <a:pPr marL="0" indent="0" algn="r">
               <a:buNone/>
             </a:pPr>
             <a:r>
-              <a:rPr lang="en-US" sz="1300" dirty="0">
+              <a:rPr lang="en-US" sz="1000" dirty="0">
                 <a:solidFill>
                   <a:srgbClr val="808080"/>
                 </a:solidFill>
@@ -11145,21 +10539,93 @@
                 <a:ea typeface="Calibri" pitchFamily="34" charset="-122"/>
                 <a:cs typeface="Calibri" pitchFamily="34" charset="-120"/>
               </a:rPr>
-              <a:t>[ Screenshot: python scripts/score_extraction_run.py — per-rule breakdown ]</a:t>
+              <a:t>11</a:t>
             </a:r>
+            <a:endParaRPr lang="en-US" sz="1000" dirty="0"/>
           </a:p>
         </p:txBody>
       </p:sp>
       <p:sp>
         <p:nvSpPr>
-          <p:cNvPr id="22" name="Text 22"/>
+          <p:cNvPr id="3" name="Text 1">
+            <a:extLst>
+              <a:ext uri="{FF2B5EF4-FFF2-40B4-BE49-F238E27FC236}">
+                <a16:creationId xmlns:a16="http://schemas.microsoft.com/office/drawing/2014/main" id="{68C27DB9-0E08-CA8E-1475-DE17D83E42B3}"/>
+              </a:ext>
+            </a:extLst>
+          </p:cNvPr>
           <p:cNvSpPr txBox="1"/>
           <p:nvPr/>
         </p:nvSpPr>
         <p:spPr>
           <a:xfrm>
-            <a:off x="1200000" y="5380000"/>
-            <a:ext cx="9792000" cy="380000"/>
+            <a:off x="548640" y="320040"/>
+            <a:ext cx="9601200" cy="685800"/>
+          </a:xfrm>
+          <a:prstGeom prst="rect">
+            <a:avLst/>
+          </a:prstGeom>
+          <a:noFill/>
+          <a:ln/>
+        </p:spPr>
+        <p:txBody>
+          <a:bodyPr wrap="square" lIns="0" tIns="0" rIns="0" bIns="0" rtlCol="0" anchor="ctr"/>
+          <a:lstStyle/>
+          <a:p>
+            <a:r>
+              <a:rPr lang="en-IN" sz="2800" dirty="0"/>
+              <a:t>Results — One Patient, End to End</a:t>
+            </a:r>
+            <a:endParaRPr lang="en-US" sz="2800" dirty="0"/>
+          </a:p>
+        </p:txBody>
+      </p:sp>
+      <p:pic>
+        <p:nvPicPr>
+          <p:cNvPr id="4" name="Image 0" descr="logo.png">
+            <a:extLst>
+              <a:ext uri="{FF2B5EF4-FFF2-40B4-BE49-F238E27FC236}">
+                <a16:creationId xmlns:a16="http://schemas.microsoft.com/office/drawing/2014/main" id="{916227F1-668A-E5CE-03EE-FCFA4BA3063C}"/>
+              </a:ext>
+            </a:extLst>
+          </p:cNvPr>
+          <p:cNvPicPr>
+            <a:picLocks noChangeAspect="1"/>
+          </p:cNvPicPr>
+          <p:nvPr/>
+        </p:nvPicPr>
+        <p:blipFill>
+          <a:blip r:embed="rId3"/>
+          <a:stretch>
+            <a:fillRect/>
+          </a:stretch>
+        </p:blipFill>
+        <p:spPr>
+          <a:xfrm>
+            <a:off x="10362895" y="320040"/>
+            <a:ext cx="1371600" cy="518746"/>
+          </a:xfrm>
+          <a:prstGeom prst="rect">
+            <a:avLst/>
+          </a:prstGeom>
+        </p:spPr>
+      </p:pic>
+      <p:sp>
+        <p:nvSpPr>
+          <p:cNvPr id="20" name="Text 20">
+            <a:extLst>
+              <a:ext uri="{FF2B5EF4-FFF2-40B4-BE49-F238E27FC236}">
+                <a16:creationId xmlns:a16="http://schemas.microsoft.com/office/drawing/2014/main" id="{C10CA6AB-E420-29F4-8BB6-FDBE494F7F28}"/>
+              </a:ext>
+            </a:extLst>
+          </p:cNvPr>
+          <p:cNvSpPr txBox="1"/>
+          <p:nvPr/>
+        </p:nvSpPr>
+        <p:spPr>
+          <a:xfrm>
+            <a:off x="640080" y="1200000"/>
+            <a:ext cx="10900000" cy="1100000"/>
           </a:xfrm>
           <a:prstGeom prst="rect">
             <a:avLst/>
@@ -11171,24 +10637,92 @@
           <a:bodyPr wrap="square" lIns="0" tIns="0" rIns="0" bIns="0" rtlCol="0" anchor="t"/>
           <a:lstStyle/>
           <a:p>
-            <a:pPr algn="ctr">
-              <a:buNone/>
+            <a:pPr lvl="0"/>
+            <a:r>
+              <a:rPr lang="en-IN" sz="1400" dirty="0"/>
+              <a:t>The six fields the baseline takes that no care-coordination purpose permits are an email address, a street address, and four billing fields — including an insurance policy number. None of them serve the clinical task that was asked for.</a:t>
+            </a:r>
+          </a:p>
+          <a:p>
+            <a:pPr lvl="0"/>
+            <a:endParaRPr lang="en-IN" sz="1400" dirty="0"/>
+          </a:p>
+          <a:p>
+            <a:pPr lvl="0"/>
+            <a:r>
+              <a:rPr lang="en-IN" sz="1400" dirty="0"/>
+              <a:t>Same patient, same source, same seven rules. The </a:t>
+            </a:r>
+            <a:r>
+              <a:rPr lang="en-IN" sz="1400" b="1" dirty="0"/>
+              <a:t>0.869 gap is traceable to specific fields taken and specific paperwork missing; </a:t>
+            </a:r>
+            <a:r>
+              <a:rPr lang="en-IN" sz="1400" dirty="0"/>
+              <a:t>not to speed, coverage, or how much data was pulled.</a:t>
+            </a:r>
+          </a:p>
+          <a:p>
+            <a:br>
+              <a:rPr lang="en-IN" sz="1400" dirty="0"/>
+            </a:br>
+            <a:endParaRPr lang="en-IN" sz="1400" dirty="0"/>
+          </a:p>
+          <a:p>
+            <a:pPr marL="177800" indent="-177800">
+              <a:spcAft>
+                <a:spcPts val="400"/>
+              </a:spcAft>
+              <a:buSzPct val="100000"/>
+              <a:buChar char="•"/>
             </a:pPr>
-            <a:r>
-              <a:rPr lang="en-US" sz="1100" i="1" dirty="0">
-                <a:solidFill>
-                  <a:srgbClr val="000000"/>
-                </a:solidFill>
-                <a:latin typeface="Calibri" pitchFamily="34" charset="0"/>
-                <a:ea typeface="Calibri" pitchFamily="34" charset="-122"/>
-                <a:cs typeface="Calibri" pitchFamily="34" charset="-120"/>
-              </a:rPr>
-              <a:t>Figure 1. Per-rule findings for one run. Screenshot to be inserted.</a:t>
-            </a:r>
+            <a:endParaRPr lang="en-US" sz="1250" dirty="0">
+              <a:solidFill>
+                <a:srgbClr val="000000"/>
+              </a:solidFill>
+              <a:latin typeface="Calibri" pitchFamily="34" charset="0"/>
+              <a:ea typeface="Calibri" pitchFamily="34" charset="-122"/>
+              <a:cs typeface="Calibri" pitchFamily="34" charset="-120"/>
+            </a:endParaRPr>
           </a:p>
         </p:txBody>
       </p:sp>
+      <p:pic>
+        <p:nvPicPr>
+          <p:cNvPr id="7" name="Picture 6">
+            <a:extLst>
+              <a:ext uri="{FF2B5EF4-FFF2-40B4-BE49-F238E27FC236}">
+                <a16:creationId xmlns:a16="http://schemas.microsoft.com/office/drawing/2014/main" id="{66530355-1EDB-0921-D609-BA70BCCCB7E2}"/>
+              </a:ext>
+            </a:extLst>
+          </p:cNvPr>
+          <p:cNvPicPr>
+            <a:picLocks noChangeAspect="1"/>
+          </p:cNvPicPr>
+          <p:nvPr/>
+        </p:nvPicPr>
+        <p:blipFill>
+          <a:blip r:embed="rId4"/>
+          <a:stretch>
+            <a:fillRect/>
+          </a:stretch>
+        </p:blipFill>
+        <p:spPr>
+          <a:xfrm>
+            <a:off x="1169520" y="2760645"/>
+            <a:ext cx="9841120" cy="3892082"/>
+          </a:xfrm>
+          <a:prstGeom prst="rect">
+            <a:avLst/>
+          </a:prstGeom>
+        </p:spPr>
+      </p:pic>
     </p:spTree>
+    <p:extLst>
+      <p:ext uri="{BB962C8B-B14F-4D97-AF65-F5344CB8AC3E}">
+        <p14:creationId xmlns:p14="http://schemas.microsoft.com/office/powerpoint/2010/main" val="1883206486"/>
+      </p:ext>
+    </p:extLst>
   </p:cSld>
   <p:clrMapOvr>
     <a:masterClrMapping/>

--- a/Review-I.pptx
+++ b/Review-I.pptx
@@ -8,11 +8,13 @@
     <p:notesMasterId r:id="rId13"/>
   </p:notesMasterIdLst>
   <p:sldIdLst>
-    <p:sldId id="257" r:id="rId2"/>
+    <p:sldId id="270" r:id="rId2"/>
     <p:sldId id="259" r:id="rId3"/>
     <p:sldId id="260" r:id="rId4"/>
     <p:sldId id="267" r:id="rId5"/>
     <p:sldId id="261" r:id="rId6"/>
+    <p:sldId id="271" r:id="rId18"/>
+    <p:sldId id="272" r:id="rId19"/>
     <p:sldId id="262" r:id="rId7"/>
     <p:sldId id="263" r:id="rId8"/>
     <p:sldId id="264" r:id="rId9"/>
@@ -312,91 +314,7 @@
           <a:p>
             <a:fld id="{F7021451-1387-4CA6-816F-3879F97B5CBC}" type="slidenum">
               <a:rPr lang="en-US"/>
-              <a:t>1</a:t>
-            </a:fld>
-            <a:endParaRPr lang="en-US"/>
-          </a:p>
-        </p:txBody>
-      </p:sp>
-    </p:spTree>
-    <p:extLst>
-      <p:ext uri="{BB962C8B-B14F-4D97-AF65-F5344CB8AC3E}">
-        <p14:creationId xmlns:p14="http://schemas.microsoft.com/office/powerpoint/2010/main" val="1024086991"/>
-      </p:ext>
-    </p:extLst>
-  </p:cSld>
-  <p:clrMapOvr>
-    <a:masterClrMapping/>
-  </p:clrMapOvr>
-</p:notes>
-</file>
-
-<file path=ppt/notesSlides/notesSlide10.xml><?xml version="1.0" encoding="utf-8"?>
-<p:notes xmlns:a="http://schemas.openxmlformats.org/drawingml/2006/main" xmlns:r="http://schemas.openxmlformats.org/officeDocument/2006/relationships" xmlns:p="http://schemas.openxmlformats.org/presentationml/2006/main">
-  <p:cSld>
-    <p:spTree>
-      <p:nvGrpSpPr>
-        <p:cNvPr id="1" name=""/>
-        <p:cNvGrpSpPr/>
-        <p:nvPr/>
-      </p:nvGrpSpPr>
-      <p:grpSpPr>
-        <a:xfrm>
-          <a:off x="0" y="0"/>
-          <a:ext cx="0" cy="0"/>
-          <a:chOff x="0" y="0"/>
-          <a:chExt cx="0" cy="0"/>
-        </a:xfrm>
-      </p:grpSpPr>
-      <p:sp>
-        <p:nvSpPr>
-          <p:cNvPr id="2" name="Slide Image Placeholder 1"/>
-          <p:cNvSpPr>
-            <a:spLocks noGrp="1" noRot="1" noChangeAspect="1"/>
-          </p:cNvSpPr>
-          <p:nvPr>
-            <p:ph type="sldImg"/>
-          </p:nvPr>
-        </p:nvSpPr>
-        <p:spPr/>
-      </p:sp>
-      <p:sp>
-        <p:nvSpPr>
-          <p:cNvPr id="3" name="Notes Placeholder 2"/>
-          <p:cNvSpPr>
-            <a:spLocks noGrp="1"/>
-          </p:cNvSpPr>
-          <p:nvPr>
-            <p:ph type="body" idx="1"/>
-          </p:nvPr>
-        </p:nvSpPr>
-        <p:spPr/>
-        <p:txBody>
-          <a:bodyPr/>
-          <a:lstStyle/>
-          <a:p>
-            <a:endParaRPr lang="en-US" dirty="0"/>
-          </a:p>
-        </p:txBody>
-      </p:sp>
-      <p:sp>
-        <p:nvSpPr>
-          <p:cNvPr id="4" name="Slide Number Placeholder 3"/>
-          <p:cNvSpPr>
-            <a:spLocks noGrp="1"/>
-          </p:cNvSpPr>
-          <p:nvPr>
-            <p:ph type="sldNum" sz="quarter" idx="10"/>
-          </p:nvPr>
-        </p:nvSpPr>
-        <p:spPr/>
-        <p:txBody>
-          <a:bodyPr/>
-          <a:lstStyle/>
-          <a:p>
-            <a:fld id="{F7021451-1387-4CA6-816F-3879F97B5CBC}" type="slidenum">
-              <a:rPr lang="en-US"/>
-              <a:t>11</a:t>
+              <a:t>2</a:t>
             </a:fld>
             <a:endParaRPr lang="en-US"/>
           </a:p>
@@ -480,7 +398,7 @@
           <a:p>
             <a:fld id="{F7021451-1387-4CA6-816F-3879F97B5CBC}" type="slidenum">
               <a:rPr lang="en-US"/>
-              <a:t>2</a:t>
+              <a:t>3</a:t>
             </a:fld>
             <a:endParaRPr lang="en-US"/>
           </a:p>
@@ -564,7 +482,7 @@
           <a:p>
             <a:fld id="{F7021451-1387-4CA6-816F-3879F97B5CBC}" type="slidenum">
               <a:rPr lang="en-US"/>
-              <a:t>3</a:t>
+              <a:t>5</a:t>
             </a:fld>
             <a:endParaRPr lang="en-US"/>
           </a:p>
@@ -648,7 +566,7 @@
           <a:p>
             <a:fld id="{F7021451-1387-4CA6-816F-3879F97B5CBC}" type="slidenum">
               <a:rPr lang="en-US"/>
-              <a:t>5</a:t>
+              <a:t>6</a:t>
             </a:fld>
             <a:endParaRPr lang="en-US"/>
           </a:p>
@@ -711,7 +629,10 @@
           <a:bodyPr/>
           <a:lstStyle/>
           <a:p>
-            <a:endParaRPr lang="en-US" dirty="0"/>
+            <a:r>
+              <a:rPr lang="en-US" dirty="0"/>
+              <a:t>Add your results here — graphs, tables, screenshots or outputs.</a:t>
+            </a:r>
           </a:p>
         </p:txBody>
       </p:sp>
@@ -732,7 +653,7 @@
           <a:p>
             <a:fld id="{F7021451-1387-4CA6-816F-3879F97B5CBC}" type="slidenum">
               <a:rPr lang="en-US"/>
-              <a:t>6</a:t>
+              <a:t>7</a:t>
             </a:fld>
             <a:endParaRPr lang="en-US"/>
           </a:p>
@@ -819,7 +740,7 @@
           <a:p>
             <a:fld id="{F7021451-1387-4CA6-816F-3879F97B5CBC}" type="slidenum">
               <a:rPr lang="en-US"/>
-              <a:t>7</a:t>
+              <a:t>8</a:t>
             </a:fld>
             <a:endParaRPr lang="en-US"/>
           </a:p>
@@ -839,93 +760,6 @@
 </file>
 
 <file path=ppt/notesSlides/notesSlide7.xml><?xml version="1.0" encoding="utf-8"?>
-<p:notes xmlns:a="http://schemas.openxmlformats.org/drawingml/2006/main" xmlns:r="http://schemas.openxmlformats.org/officeDocument/2006/relationships" xmlns:p="http://schemas.openxmlformats.org/presentationml/2006/main">
-  <p:cSld>
-    <p:spTree>
-      <p:nvGrpSpPr>
-        <p:cNvPr id="1" name=""/>
-        <p:cNvGrpSpPr/>
-        <p:nvPr/>
-      </p:nvGrpSpPr>
-      <p:grpSpPr>
-        <a:xfrm>
-          <a:off x="0" y="0"/>
-          <a:ext cx="0" cy="0"/>
-          <a:chOff x="0" y="0"/>
-          <a:chExt cx="0" cy="0"/>
-        </a:xfrm>
-      </p:grpSpPr>
-      <p:sp>
-        <p:nvSpPr>
-          <p:cNvPr id="2" name="Slide Image Placeholder 1"/>
-          <p:cNvSpPr>
-            <a:spLocks noGrp="1" noRot="1" noChangeAspect="1"/>
-          </p:cNvSpPr>
-          <p:nvPr>
-            <p:ph type="sldImg"/>
-          </p:nvPr>
-        </p:nvSpPr>
-        <p:spPr/>
-      </p:sp>
-      <p:sp>
-        <p:nvSpPr>
-          <p:cNvPr id="3" name="Notes Placeholder 2"/>
-          <p:cNvSpPr>
-            <a:spLocks noGrp="1"/>
-          </p:cNvSpPr>
-          <p:nvPr>
-            <p:ph type="body" idx="1"/>
-          </p:nvPr>
-        </p:nvSpPr>
-        <p:spPr/>
-        <p:txBody>
-          <a:bodyPr/>
-          <a:lstStyle/>
-          <a:p>
-            <a:r>
-              <a:rPr lang="en-US" dirty="0"/>
-              <a:t>Add your results here — graphs, tables, screenshots or outputs.</a:t>
-            </a:r>
-          </a:p>
-        </p:txBody>
-      </p:sp>
-      <p:sp>
-        <p:nvSpPr>
-          <p:cNvPr id="4" name="Slide Number Placeholder 3"/>
-          <p:cNvSpPr>
-            <a:spLocks noGrp="1"/>
-          </p:cNvSpPr>
-          <p:nvPr>
-            <p:ph type="sldNum" sz="quarter" idx="10"/>
-          </p:nvPr>
-        </p:nvSpPr>
-        <p:spPr/>
-        <p:txBody>
-          <a:bodyPr/>
-          <a:lstStyle/>
-          <a:p>
-            <a:fld id="{F7021451-1387-4CA6-816F-3879F97B5CBC}" type="slidenum">
-              <a:rPr lang="en-US"/>
-              <a:t>8</a:t>
-            </a:fld>
-            <a:endParaRPr lang="en-US"/>
-          </a:p>
-        </p:txBody>
-      </p:sp>
-    </p:spTree>
-    <p:extLst>
-      <p:ext uri="{BB962C8B-B14F-4D97-AF65-F5344CB8AC3E}">
-        <p14:creationId xmlns:p14="http://schemas.microsoft.com/office/powerpoint/2010/main" val="1024086991"/>
-      </p:ext>
-    </p:extLst>
-  </p:cSld>
-  <p:clrMapOvr>
-    <a:masterClrMapping/>
-  </p:clrMapOvr>
-</p:notes>
-</file>
-
-<file path=ppt/notesSlides/notesSlide8.xml><?xml version="1.0" encoding="utf-8"?>
 <p:notes xmlns:a="http://schemas.openxmlformats.org/drawingml/2006/main" xmlns:r="http://schemas.openxmlformats.org/officeDocument/2006/relationships" xmlns:p="http://schemas.openxmlformats.org/presentationml/2006/main">
   <p:cSld>
     <p:spTree>
@@ -1036,6 +870,90 @@
 </p:notes>
 </file>
 
+<file path=ppt/notesSlides/notesSlide8.xml><?xml version="1.0" encoding="utf-8"?>
+<p:notes xmlns:a="http://schemas.openxmlformats.org/drawingml/2006/main" xmlns:r="http://schemas.openxmlformats.org/officeDocument/2006/relationships" xmlns:p="http://schemas.openxmlformats.org/presentationml/2006/main">
+  <p:cSld>
+    <p:spTree>
+      <p:nvGrpSpPr>
+        <p:cNvPr id="1" name=""/>
+        <p:cNvGrpSpPr/>
+        <p:nvPr/>
+      </p:nvGrpSpPr>
+      <p:grpSpPr>
+        <a:xfrm>
+          <a:off x="0" y="0"/>
+          <a:ext cx="0" cy="0"/>
+          <a:chOff x="0" y="0"/>
+          <a:chExt cx="0" cy="0"/>
+        </a:xfrm>
+      </p:grpSpPr>
+      <p:sp>
+        <p:nvSpPr>
+          <p:cNvPr id="2" name="Slide Image Placeholder 1"/>
+          <p:cNvSpPr>
+            <a:spLocks noGrp="1" noRot="1" noChangeAspect="1"/>
+          </p:cNvSpPr>
+          <p:nvPr>
+            <p:ph type="sldImg"/>
+          </p:nvPr>
+        </p:nvSpPr>
+        <p:spPr/>
+      </p:sp>
+      <p:sp>
+        <p:nvSpPr>
+          <p:cNvPr id="3" name="Notes Placeholder 2"/>
+          <p:cNvSpPr>
+            <a:spLocks noGrp="1"/>
+          </p:cNvSpPr>
+          <p:nvPr>
+            <p:ph type="body" idx="1"/>
+          </p:nvPr>
+        </p:nvSpPr>
+        <p:spPr/>
+        <p:txBody>
+          <a:bodyPr/>
+          <a:lstStyle/>
+          <a:p>
+            <a:endParaRPr lang="en-US" dirty="0"/>
+          </a:p>
+        </p:txBody>
+      </p:sp>
+      <p:sp>
+        <p:nvSpPr>
+          <p:cNvPr id="4" name="Slide Number Placeholder 3"/>
+          <p:cNvSpPr>
+            <a:spLocks noGrp="1"/>
+          </p:cNvSpPr>
+          <p:nvPr>
+            <p:ph type="sldNum" sz="quarter" idx="10"/>
+          </p:nvPr>
+        </p:nvSpPr>
+        <p:spPr/>
+        <p:txBody>
+          <a:bodyPr/>
+          <a:lstStyle/>
+          <a:p>
+            <a:fld id="{F7021451-1387-4CA6-816F-3879F97B5CBC}" type="slidenum">
+              <a:rPr lang="en-US"/>
+              <a:t>10</a:t>
+            </a:fld>
+            <a:endParaRPr lang="en-US"/>
+          </a:p>
+        </p:txBody>
+      </p:sp>
+    </p:spTree>
+    <p:extLst>
+      <p:ext uri="{BB962C8B-B14F-4D97-AF65-F5344CB8AC3E}">
+        <p14:creationId xmlns:p14="http://schemas.microsoft.com/office/powerpoint/2010/main" val="1024086991"/>
+      </p:ext>
+    </p:extLst>
+  </p:cSld>
+  <p:clrMapOvr>
+    <a:masterClrMapping/>
+  </p:clrMapOvr>
+</p:notes>
+</file>
+
 <file path=ppt/notesSlides/notesSlide9.xml><?xml version="1.0" encoding="utf-8"?>
 <p:notes xmlns:a="http://schemas.openxmlformats.org/drawingml/2006/main" xmlns:r="http://schemas.openxmlformats.org/officeDocument/2006/relationships" xmlns:p="http://schemas.openxmlformats.org/presentationml/2006/main">
   <p:cSld>
@@ -1101,7 +1019,7 @@
           <a:p>
             <a:fld id="{F7021451-1387-4CA6-816F-3879F97B5CBC}" type="slidenum">
               <a:rPr lang="en-US"/>
-              <a:t>10</a:t>
+              <a:t>11</a:t>
             </a:fld>
             <a:endParaRPr lang="en-US"/>
           </a:p>
@@ -1434,15 +1352,7 @@
 
 <file path=ppt/slides/slide1.xml><?xml version="1.0" encoding="utf-8"?>
 <p:sld xmlns:a="http://schemas.openxmlformats.org/drawingml/2006/main" xmlns:r="http://schemas.openxmlformats.org/officeDocument/2006/relationships" xmlns:p="http://schemas.openxmlformats.org/presentationml/2006/main">
-  <p:cSld name="Slide 2">
-    <p:bg>
-      <p:bgPr>
-        <a:solidFill>
-          <a:srgbClr val="FFFFFF"/>
-        </a:solidFill>
-        <a:effectLst/>
-      </p:bgPr>
-    </p:bg>
+  <p:cSld>
     <p:spTree>
       <p:nvGrpSpPr>
         <p:cNvPr id="1" name=""/>
@@ -1457,814 +1367,42 @@
           <a:chExt cx="0" cy="0"/>
         </a:xfrm>
       </p:grpSpPr>
-      <p:sp>
-        <p:nvSpPr>
-          <p:cNvPr id="2" name="Text 0"/>
-          <p:cNvSpPr txBox="1"/>
-          <p:nvPr/>
-        </p:nvSpPr>
-        <p:spPr>
-          <a:xfrm>
-            <a:off x="11460175" y="6446520"/>
-            <a:ext cx="457200" cy="274320"/>
-          </a:xfrm>
-          <a:prstGeom prst="rect">
-            <a:avLst/>
-          </a:prstGeom>
-          <a:noFill/>
-          <a:ln/>
-        </p:spPr>
-        <p:txBody>
-          <a:bodyPr wrap="square" lIns="0" tIns="0" rIns="0" bIns="0" rtlCol="0" anchor="ctr"/>
-          <a:lstStyle/>
-          <a:p>
-            <a:pPr marL="0" indent="0" algn="r">
-              <a:buNone/>
-            </a:pPr>
-            <a:r>
-              <a:rPr lang="en-US" sz="1000" dirty="0">
-                <a:solidFill>
-                  <a:srgbClr val="808080"/>
-                </a:solidFill>
-                <a:latin typeface="Calibri" pitchFamily="34" charset="0"/>
-                <a:ea typeface="Calibri" pitchFamily="34" charset="-122"/>
-                <a:cs typeface="Calibri" pitchFamily="34" charset="-120"/>
-              </a:rPr>
-              <a:t>2</a:t>
-            </a:r>
-            <a:endParaRPr lang="en-US" sz="1000" dirty="0"/>
-          </a:p>
-        </p:txBody>
-      </p:sp>
       <p:pic>
         <p:nvPicPr>
-          <p:cNvPr id="3" name="Image 0" descr="logo.png"/>
+          <p:cNvPr id="3" name="Picture 2">
+            <a:extLst>
+              <a:ext uri="{FF2B5EF4-FFF2-40B4-BE49-F238E27FC236}">
+                <a16:creationId xmlns:a16="http://schemas.microsoft.com/office/drawing/2014/main" id="{401867FB-CA76-9BBB-DBAE-E787CCF3D1BA}"/>
+              </a:ext>
+            </a:extLst>
+          </p:cNvPr>
           <p:cNvPicPr>
             <a:picLocks noChangeAspect="1"/>
           </p:cNvPicPr>
           <p:nvPr/>
         </p:nvPicPr>
         <p:blipFill>
-          <a:blip r:embed="rId3"/>
+          <a:blip r:embed="rId2"/>
           <a:stretch>
             <a:fillRect/>
           </a:stretch>
         </p:blipFill>
         <p:spPr>
           <a:xfrm>
-            <a:off x="548640" y="365760"/>
-            <a:ext cx="2011680" cy="760828"/>
+            <a:off x="0" y="0"/>
+            <a:ext cx="12192000" cy="6858000"/>
           </a:xfrm>
           <a:prstGeom prst="rect">
             <a:avLst/>
           </a:prstGeom>
         </p:spPr>
       </p:pic>
-      <p:sp>
-        <p:nvSpPr>
-          <p:cNvPr id="4" name="Text 1"/>
-          <p:cNvSpPr txBox="1"/>
-          <p:nvPr/>
-        </p:nvSpPr>
-        <p:spPr>
-          <a:xfrm>
-            <a:off x="5486400" y="411480"/>
-            <a:ext cx="6217920" cy="320040"/>
-          </a:xfrm>
-          <a:prstGeom prst="rect">
-            <a:avLst/>
-          </a:prstGeom>
-          <a:noFill/>
-          <a:ln/>
-        </p:spPr>
-        <p:txBody>
-          <a:bodyPr wrap="square" lIns="0" tIns="0" rIns="0" bIns="0" rtlCol="0" anchor="ctr"/>
-          <a:lstStyle/>
-          <a:p>
-            <a:pPr marL="0" indent="0" algn="r">
-              <a:buNone/>
-            </a:pPr>
-            <a:r>
-              <a:rPr lang="en-US" sz="1400" b="1" dirty="0">
-                <a:solidFill>
-                  <a:srgbClr val="1D2F82"/>
-                </a:solidFill>
-                <a:latin typeface="Calibri" pitchFamily="34" charset="0"/>
-                <a:ea typeface="Calibri" pitchFamily="34" charset="-122"/>
-                <a:cs typeface="Calibri" pitchFamily="34" charset="-120"/>
-              </a:rPr>
-              <a:t>School of Electronics Engineering (SENSE)</a:t>
-            </a:r>
-            <a:endParaRPr lang="en-US" sz="1400" dirty="0"/>
-          </a:p>
-        </p:txBody>
-      </p:sp>
-      <p:sp>
-        <p:nvSpPr>
-          <p:cNvPr id="5" name="Text 2"/>
-          <p:cNvSpPr txBox="1"/>
-          <p:nvPr/>
-        </p:nvSpPr>
-        <p:spPr>
-          <a:xfrm>
-            <a:off x="5486400" y="749808"/>
-            <a:ext cx="6217920" cy="274320"/>
-          </a:xfrm>
-          <a:prstGeom prst="rect">
-            <a:avLst/>
-          </a:prstGeom>
-          <a:noFill/>
-          <a:ln/>
-        </p:spPr>
-        <p:txBody>
-          <a:bodyPr wrap="square" lIns="0" tIns="0" rIns="0" bIns="0" rtlCol="0" anchor="ctr"/>
-          <a:lstStyle/>
-          <a:p>
-            <a:pPr marL="0" indent="0" algn="r">
-              <a:buNone/>
-            </a:pPr>
-            <a:r>
-              <a:rPr lang="en-US" sz="1200" dirty="0">
-                <a:solidFill>
-                  <a:srgbClr val="000000"/>
-                </a:solidFill>
-                <a:latin typeface="Calibri" pitchFamily="34" charset="0"/>
-                <a:ea typeface="Calibri" pitchFamily="34" charset="-122"/>
-                <a:cs typeface="Calibri" pitchFamily="34" charset="-120"/>
-              </a:rPr>
-              <a:t>Project-I (2026)</a:t>
-            </a:r>
-            <a:endParaRPr lang="en-US" sz="1200" dirty="0"/>
-          </a:p>
-        </p:txBody>
-      </p:sp>
-      <p:sp>
-        <p:nvSpPr>
-          <p:cNvPr id="6" name="Text 3"/>
-          <p:cNvSpPr txBox="1"/>
-          <p:nvPr/>
-        </p:nvSpPr>
-        <p:spPr>
-          <a:xfrm>
-            <a:off x="548640" y="1737360"/>
-            <a:ext cx="11091672" cy="914400"/>
-          </a:xfrm>
-          <a:prstGeom prst="rect">
-            <a:avLst/>
-          </a:prstGeom>
-          <a:noFill/>
-          <a:ln/>
-        </p:spPr>
-        <p:txBody>
-          <a:bodyPr wrap="square" lIns="0" tIns="0" rIns="0" bIns="0" rtlCol="0" anchor="ctr"/>
-          <a:lstStyle/>
-          <a:p>
-            <a:pPr algn="ctr"/>
-            <a:r>
-              <a:rPr lang="en-IN" sz="3200" b="1" dirty="0">
-                <a:solidFill>
-                  <a:srgbClr val="1D2F82"/>
-                </a:solidFill>
-                <a:latin typeface="Calibri" pitchFamily="34" charset="0"/>
-                <a:ea typeface="Calibri" pitchFamily="34" charset="-122"/>
-                <a:cs typeface="Calibri" pitchFamily="34" charset="-120"/>
-              </a:rPr>
-              <a:t>Data Extraction Techniques for HIS Towards DPDP Compliance</a:t>
-            </a:r>
-            <a:endParaRPr lang="en-US" sz="3200" b="1" dirty="0">
-              <a:solidFill>
-                <a:srgbClr val="1D2F82"/>
-              </a:solidFill>
-              <a:latin typeface="Calibri" pitchFamily="34" charset="0"/>
-              <a:ea typeface="Calibri" pitchFamily="34" charset="-122"/>
-              <a:cs typeface="Calibri" pitchFamily="34" charset="-120"/>
-            </a:endParaRPr>
-          </a:p>
-        </p:txBody>
-      </p:sp>
-      <p:sp>
-        <p:nvSpPr>
-          <p:cNvPr id="7" name="Text 4"/>
-          <p:cNvSpPr txBox="1"/>
-          <p:nvPr/>
-        </p:nvSpPr>
-        <p:spPr>
-          <a:xfrm>
-            <a:off x="822960" y="3063240"/>
-            <a:ext cx="2560320" cy="384048"/>
-          </a:xfrm>
-          <a:prstGeom prst="rect">
-            <a:avLst/>
-          </a:prstGeom>
-          <a:noFill/>
-          <a:ln/>
-        </p:spPr>
-        <p:txBody>
-          <a:bodyPr wrap="square" lIns="0" tIns="0" rIns="0" bIns="0" rtlCol="0" anchor="ctr"/>
-          <a:lstStyle/>
-          <a:p>
-            <a:pPr marL="0" indent="0">
-              <a:buNone/>
-            </a:pPr>
-            <a:r>
-              <a:rPr lang="en-US" sz="1400" b="1" dirty="0">
-                <a:solidFill>
-                  <a:srgbClr val="000000"/>
-                </a:solidFill>
-                <a:latin typeface="Calibri" pitchFamily="34" charset="0"/>
-                <a:ea typeface="Calibri" pitchFamily="34" charset="-122"/>
-                <a:cs typeface="Calibri" pitchFamily="34" charset="-120"/>
-              </a:rPr>
-              <a:t>Student Name(s):</a:t>
-            </a:r>
-            <a:endParaRPr lang="en-US" sz="1400" dirty="0"/>
-          </a:p>
-        </p:txBody>
-      </p:sp>
-      <p:sp>
-        <p:nvSpPr>
-          <p:cNvPr id="8" name="Text 5"/>
-          <p:cNvSpPr txBox="1"/>
-          <p:nvPr/>
-        </p:nvSpPr>
-        <p:spPr>
-          <a:xfrm>
-            <a:off x="3474720" y="3063240"/>
-            <a:ext cx="4023360" cy="384048"/>
-          </a:xfrm>
-          <a:prstGeom prst="rect">
-            <a:avLst/>
-          </a:prstGeom>
-          <a:noFill/>
-          <a:ln/>
-        </p:spPr>
-        <p:txBody>
-          <a:bodyPr wrap="square" lIns="0" tIns="0" rIns="0" bIns="0" rtlCol="0" anchor="ctr"/>
-          <a:lstStyle/>
-          <a:p>
-            <a:pPr marL="0" indent="0">
-              <a:buNone/>
-            </a:pPr>
-            <a:r>
-              <a:rPr lang="en-US" sz="1400" dirty="0">
-                <a:solidFill>
-                  <a:srgbClr val="000000"/>
-                </a:solidFill>
-                <a:latin typeface="Calibri" pitchFamily="34" charset="0"/>
-                <a:ea typeface="Calibri" pitchFamily="34" charset="-122"/>
-                <a:cs typeface="Calibri" pitchFamily="34" charset="-120"/>
-              </a:rPr>
-              <a:t>Ananya Karmakar          (23BLC1017)</a:t>
-            </a:r>
-          </a:p>
-          <a:p>
-            <a:r>
-              <a:rPr lang="en-US" sz="1400" dirty="0">
-                <a:solidFill>
-                  <a:srgbClr val="000000"/>
-                </a:solidFill>
-                <a:latin typeface="Calibri" pitchFamily="34" charset="0"/>
-                <a:ea typeface="Calibri" pitchFamily="34" charset="-122"/>
-                <a:cs typeface="Calibri" pitchFamily="34" charset="-120"/>
-              </a:rPr>
-              <a:t>Avanindra S Kushwah   (23BLC1089)</a:t>
-            </a:r>
-            <a:endParaRPr lang="en-US" sz="1400" dirty="0"/>
-          </a:p>
-        </p:txBody>
-      </p:sp>
-      <p:sp>
-        <p:nvSpPr>
-          <p:cNvPr id="9" name="Shape 6"/>
-          <p:cNvSpPr/>
-          <p:nvPr/>
-        </p:nvSpPr>
-        <p:spPr>
-          <a:xfrm>
-            <a:off x="3474720" y="3465576"/>
-            <a:ext cx="4023360" cy="0"/>
-          </a:xfrm>
-          <a:prstGeom prst="line">
-            <a:avLst/>
-          </a:prstGeom>
-          <a:noFill/>
-          <a:ln w="12700">
-            <a:solidFill>
-              <a:srgbClr val="BFBFBF"/>
-            </a:solidFill>
-            <a:prstDash val="solid"/>
-          </a:ln>
-        </p:spPr>
-        <p:txBody>
-          <a:bodyPr/>
-          <a:lstStyle/>
-          <a:p>
-            <a:endParaRPr lang="en-US"/>
-          </a:p>
-        </p:txBody>
-      </p:sp>
-      <p:sp>
-        <p:nvSpPr>
-          <p:cNvPr id="10" name="Text 7"/>
-          <p:cNvSpPr txBox="1"/>
-          <p:nvPr/>
-        </p:nvSpPr>
-        <p:spPr>
-          <a:xfrm>
-            <a:off x="822960" y="3657600"/>
-            <a:ext cx="2560320" cy="384048"/>
-          </a:xfrm>
-          <a:prstGeom prst="rect">
-            <a:avLst/>
-          </a:prstGeom>
-          <a:noFill/>
-          <a:ln/>
-        </p:spPr>
-        <p:txBody>
-          <a:bodyPr wrap="square" lIns="0" tIns="0" rIns="0" bIns="0" rtlCol="0" anchor="ctr"/>
-          <a:lstStyle/>
-          <a:p>
-            <a:pPr marL="0" indent="0">
-              <a:buNone/>
-            </a:pPr>
-            <a:r>
-              <a:rPr lang="en-US" sz="1400" b="1" dirty="0">
-                <a:solidFill>
-                  <a:srgbClr val="000000"/>
-                </a:solidFill>
-                <a:latin typeface="Calibri" pitchFamily="34" charset="0"/>
-                <a:ea typeface="Calibri" pitchFamily="34" charset="-122"/>
-                <a:cs typeface="Calibri" pitchFamily="34" charset="-120"/>
-              </a:rPr>
-              <a:t>Guide:</a:t>
-            </a:r>
-            <a:endParaRPr lang="en-US" sz="1400" dirty="0"/>
-          </a:p>
-        </p:txBody>
-      </p:sp>
-      <p:sp>
-        <p:nvSpPr>
-          <p:cNvPr id="11" name="Text 8"/>
-          <p:cNvSpPr txBox="1"/>
-          <p:nvPr/>
-        </p:nvSpPr>
-        <p:spPr>
-          <a:xfrm>
-            <a:off x="3474720" y="3657600"/>
-            <a:ext cx="4023360" cy="384048"/>
-          </a:xfrm>
-          <a:prstGeom prst="rect">
-            <a:avLst/>
-          </a:prstGeom>
-          <a:noFill/>
-          <a:ln/>
-        </p:spPr>
-        <p:txBody>
-          <a:bodyPr wrap="square" lIns="0" tIns="0" rIns="0" bIns="0" rtlCol="0" anchor="ctr"/>
-          <a:lstStyle/>
-          <a:p>
-            <a:pPr marL="0" indent="0">
-              <a:buNone/>
-            </a:pPr>
-            <a:r>
-              <a:rPr lang="en-US" sz="1400" dirty="0">
-                <a:solidFill>
-                  <a:srgbClr val="000000"/>
-                </a:solidFill>
-                <a:latin typeface="Calibri" pitchFamily="34" charset="0"/>
-                <a:ea typeface="Calibri" pitchFamily="34" charset="-122"/>
-                <a:cs typeface="Calibri" pitchFamily="34" charset="-120"/>
-              </a:rPr>
-              <a:t>Dr. Manoj Kumar, SENSE</a:t>
-            </a:r>
-            <a:endParaRPr lang="en-US" sz="1400" dirty="0"/>
-          </a:p>
-        </p:txBody>
-      </p:sp>
-      <p:sp>
-        <p:nvSpPr>
-          <p:cNvPr id="12" name="Shape 9"/>
-          <p:cNvSpPr/>
-          <p:nvPr/>
-        </p:nvSpPr>
-        <p:spPr>
-          <a:xfrm>
-            <a:off x="3474720" y="4059936"/>
-            <a:ext cx="4023360" cy="0"/>
-          </a:xfrm>
-          <a:prstGeom prst="line">
-            <a:avLst/>
-          </a:prstGeom>
-          <a:noFill/>
-          <a:ln w="12700">
-            <a:solidFill>
-              <a:srgbClr val="BFBFBF"/>
-            </a:solidFill>
-            <a:prstDash val="solid"/>
-          </a:ln>
-        </p:spPr>
-        <p:txBody>
-          <a:bodyPr/>
-          <a:lstStyle/>
-          <a:p>
-            <a:endParaRPr lang="en-US"/>
-          </a:p>
-        </p:txBody>
-      </p:sp>
-      <p:sp>
-        <p:nvSpPr>
-          <p:cNvPr id="13" name="Text 10"/>
-          <p:cNvSpPr txBox="1"/>
-          <p:nvPr/>
-        </p:nvSpPr>
-        <p:spPr>
-          <a:xfrm>
-            <a:off x="822960" y="4251960"/>
-            <a:ext cx="2560320" cy="384048"/>
-          </a:xfrm>
-          <a:prstGeom prst="rect">
-            <a:avLst/>
-          </a:prstGeom>
-          <a:noFill/>
-          <a:ln/>
-        </p:spPr>
-        <p:txBody>
-          <a:bodyPr wrap="square" lIns="0" tIns="0" rIns="0" bIns="0" rtlCol="0" anchor="ctr"/>
-          <a:lstStyle/>
-          <a:p>
-            <a:pPr marL="0" indent="0">
-              <a:buNone/>
-            </a:pPr>
-            <a:r>
-              <a:rPr lang="en-US" sz="1400" b="1" dirty="0">
-                <a:solidFill>
-                  <a:srgbClr val="000000"/>
-                </a:solidFill>
-                <a:latin typeface="Calibri" pitchFamily="34" charset="0"/>
-                <a:ea typeface="Calibri" pitchFamily="34" charset="-122"/>
-                <a:cs typeface="Calibri" pitchFamily="34" charset="-120"/>
-              </a:rPr>
-              <a:t>Programme / School:</a:t>
-            </a:r>
-            <a:endParaRPr lang="en-US" sz="1400" dirty="0"/>
-          </a:p>
-        </p:txBody>
-      </p:sp>
-      <p:sp>
-        <p:nvSpPr>
-          <p:cNvPr id="14" name="Text 11"/>
-          <p:cNvSpPr txBox="1"/>
-          <p:nvPr/>
-        </p:nvSpPr>
-        <p:spPr>
-          <a:xfrm>
-            <a:off x="3474720" y="4251960"/>
-            <a:ext cx="4023360" cy="384048"/>
-          </a:xfrm>
-          <a:prstGeom prst="rect">
-            <a:avLst/>
-          </a:prstGeom>
-          <a:noFill/>
-          <a:ln/>
-        </p:spPr>
-        <p:txBody>
-          <a:bodyPr wrap="square" lIns="0" tIns="0" rIns="0" bIns="0" rtlCol="0" anchor="ctr"/>
-          <a:lstStyle/>
-          <a:p>
-            <a:pPr marL="0" indent="0">
-              <a:buNone/>
-            </a:pPr>
-            <a:r>
-              <a:rPr lang="en-US" sz="1400" dirty="0">
-                <a:solidFill>
-                  <a:srgbClr val="000000"/>
-                </a:solidFill>
-                <a:latin typeface="Calibri" pitchFamily="34" charset="0"/>
-                <a:ea typeface="Calibri" pitchFamily="34" charset="-122"/>
-                <a:cs typeface="Calibri" pitchFamily="34" charset="-120"/>
-              </a:rPr>
-              <a:t>B.Tech — SENSE, VIT Chennai</a:t>
-            </a:r>
-            <a:endParaRPr lang="en-US" sz="1400" dirty="0"/>
-          </a:p>
-        </p:txBody>
-      </p:sp>
-      <p:sp>
-        <p:nvSpPr>
-          <p:cNvPr id="15" name="Shape 12"/>
-          <p:cNvSpPr/>
-          <p:nvPr/>
-        </p:nvSpPr>
-        <p:spPr>
-          <a:xfrm>
-            <a:off x="3474720" y="4654296"/>
-            <a:ext cx="4023360" cy="0"/>
-          </a:xfrm>
-          <a:prstGeom prst="line">
-            <a:avLst/>
-          </a:prstGeom>
-          <a:noFill/>
-          <a:ln w="12700">
-            <a:solidFill>
-              <a:srgbClr val="BFBFBF"/>
-            </a:solidFill>
-            <a:prstDash val="solid"/>
-          </a:ln>
-        </p:spPr>
-        <p:txBody>
-          <a:bodyPr/>
-          <a:lstStyle/>
-          <a:p>
-            <a:endParaRPr lang="en-US"/>
-          </a:p>
-        </p:txBody>
-      </p:sp>
-      <p:sp>
-        <p:nvSpPr>
-          <p:cNvPr id="16" name="Text 13"/>
-          <p:cNvSpPr txBox="1"/>
-          <p:nvPr/>
-        </p:nvSpPr>
-        <p:spPr>
-          <a:xfrm>
-            <a:off x="822960" y="4846320"/>
-            <a:ext cx="2560320" cy="384048"/>
-          </a:xfrm>
-          <a:prstGeom prst="rect">
-            <a:avLst/>
-          </a:prstGeom>
-          <a:noFill/>
-          <a:ln/>
-        </p:spPr>
-        <p:txBody>
-          <a:bodyPr wrap="square" lIns="0" tIns="0" rIns="0" bIns="0" rtlCol="0" anchor="ctr"/>
-          <a:lstStyle/>
-          <a:p>
-            <a:pPr marL="0" indent="0">
-              <a:buNone/>
-            </a:pPr>
-            <a:r>
-              <a:rPr lang="en-US" sz="1400" b="1" dirty="0">
-                <a:solidFill>
-                  <a:srgbClr val="000000"/>
-                </a:solidFill>
-                <a:latin typeface="Calibri" pitchFamily="34" charset="0"/>
-                <a:ea typeface="Calibri" pitchFamily="34" charset="-122"/>
-                <a:cs typeface="Calibri" pitchFamily="34" charset="-120"/>
-              </a:rPr>
-              <a:t>Review &amp; Date:</a:t>
-            </a:r>
-            <a:endParaRPr lang="en-US" sz="1400" dirty="0"/>
-          </a:p>
-        </p:txBody>
-      </p:sp>
-      <p:sp>
-        <p:nvSpPr>
-          <p:cNvPr id="17" name="Text 14"/>
-          <p:cNvSpPr txBox="1"/>
-          <p:nvPr/>
-        </p:nvSpPr>
-        <p:spPr>
-          <a:xfrm>
-            <a:off x="3474720" y="4846320"/>
-            <a:ext cx="4023360" cy="384048"/>
-          </a:xfrm>
-          <a:prstGeom prst="rect">
-            <a:avLst/>
-          </a:prstGeom>
-          <a:noFill/>
-          <a:ln/>
-        </p:spPr>
-        <p:txBody>
-          <a:bodyPr wrap="square" lIns="0" tIns="0" rIns="0" bIns="0" rtlCol="0" anchor="ctr"/>
-          <a:lstStyle/>
-          <a:p>
-            <a:pPr marL="0" indent="0">
-              <a:buNone/>
-            </a:pPr>
-            <a:r>
-              <a:rPr lang="en-US" sz="1400" dirty="0">
-                <a:solidFill>
-                  <a:srgbClr val="000000"/>
-                </a:solidFill>
-                <a:latin typeface="Calibri" pitchFamily="34" charset="0"/>
-                <a:ea typeface="Calibri" pitchFamily="34" charset="-122"/>
-                <a:cs typeface="Calibri" pitchFamily="34" charset="-120"/>
-              </a:rPr>
-              <a:t>Review-I  ·  02.09.2026 (Wednesday)</a:t>
-            </a:r>
-            <a:endParaRPr lang="en-US" sz="1400" dirty="0"/>
-          </a:p>
-        </p:txBody>
-      </p:sp>
-      <p:sp>
-        <p:nvSpPr>
-          <p:cNvPr id="18" name="Shape 15"/>
-          <p:cNvSpPr/>
-          <p:nvPr/>
-        </p:nvSpPr>
-        <p:spPr>
-          <a:xfrm>
-            <a:off x="3474720" y="5248656"/>
-            <a:ext cx="4023360" cy="0"/>
-          </a:xfrm>
-          <a:prstGeom prst="line">
-            <a:avLst/>
-          </a:prstGeom>
-          <a:noFill/>
-          <a:ln w="12700">
-            <a:solidFill>
-              <a:srgbClr val="BFBFBF"/>
-            </a:solidFill>
-            <a:prstDash val="solid"/>
-          </a:ln>
-        </p:spPr>
-        <p:txBody>
-          <a:bodyPr/>
-          <a:lstStyle/>
-          <a:p>
-            <a:endParaRPr lang="en-US"/>
-          </a:p>
-        </p:txBody>
-      </p:sp>
-      <p:sp>
-        <p:nvSpPr>
-          <p:cNvPr id="19" name="Shape 16"/>
-          <p:cNvSpPr/>
-          <p:nvPr/>
-        </p:nvSpPr>
-        <p:spPr>
-          <a:xfrm>
-            <a:off x="8046720" y="3063240"/>
-            <a:ext cx="3657600" cy="2194560"/>
-          </a:xfrm>
-          <a:prstGeom prst="rect">
-            <a:avLst/>
-          </a:prstGeom>
-          <a:solidFill>
-            <a:srgbClr val="FFFFFF"/>
-          </a:solidFill>
-          <a:ln w="15875">
-            <a:solidFill>
-              <a:srgbClr val="1D2F82"/>
-            </a:solidFill>
-            <a:prstDash val="solid"/>
-          </a:ln>
-        </p:spPr>
-        <p:txBody>
-          <a:bodyPr/>
-          <a:lstStyle/>
-          <a:p>
-            <a:endParaRPr lang="en-US"/>
-          </a:p>
-        </p:txBody>
-      </p:sp>
-      <p:sp>
-        <p:nvSpPr>
-          <p:cNvPr id="20" name="Text 17"/>
-          <p:cNvSpPr txBox="1"/>
-          <p:nvPr/>
-        </p:nvSpPr>
-        <p:spPr>
-          <a:xfrm>
-            <a:off x="8229600" y="3246120"/>
-            <a:ext cx="3291840" cy="365760"/>
-          </a:xfrm>
-          <a:prstGeom prst="rect">
-            <a:avLst/>
-          </a:prstGeom>
-          <a:noFill/>
-          <a:ln/>
-        </p:spPr>
-        <p:txBody>
-          <a:bodyPr wrap="square" lIns="0" tIns="0" rIns="0" bIns="0" rtlCol="0" anchor="ctr"/>
-          <a:lstStyle/>
-          <a:p>
-            <a:pPr marL="0" indent="0">
-              <a:buNone/>
-            </a:pPr>
-            <a:r>
-              <a:rPr lang="en-US" sz="1400" b="1" dirty="0">
-                <a:solidFill>
-                  <a:srgbClr val="1D2F82"/>
-                </a:solidFill>
-                <a:latin typeface="Calibri" pitchFamily="34" charset="0"/>
-                <a:ea typeface="Calibri" pitchFamily="34" charset="-122"/>
-                <a:cs typeface="Calibri" pitchFamily="34" charset="-120"/>
-              </a:rPr>
-              <a:t>Guide's Signature with Date</a:t>
-            </a:r>
-            <a:endParaRPr lang="en-US" sz="1400" dirty="0"/>
-          </a:p>
-        </p:txBody>
-      </p:sp>
-      <p:sp>
-        <p:nvSpPr>
-          <p:cNvPr id="21" name="Text 18"/>
-          <p:cNvSpPr txBox="1"/>
-          <p:nvPr/>
-        </p:nvSpPr>
-        <p:spPr>
-          <a:xfrm>
-            <a:off x="8229600" y="3886200"/>
-            <a:ext cx="3291840" cy="320040"/>
-          </a:xfrm>
-          <a:prstGeom prst="rect">
-            <a:avLst/>
-          </a:prstGeom>
-          <a:noFill/>
-          <a:ln/>
-        </p:spPr>
-        <p:txBody>
-          <a:bodyPr wrap="square" lIns="0" tIns="0" rIns="0" bIns="0" rtlCol="0" anchor="ctr"/>
-          <a:lstStyle/>
-          <a:p>
-            <a:pPr marL="0" indent="0">
-              <a:buNone/>
-            </a:pPr>
-            <a:r>
-              <a:rPr lang="en-US" sz="1300" dirty="0">
-                <a:solidFill>
-                  <a:srgbClr val="000000"/>
-                </a:solidFill>
-                <a:latin typeface="Calibri" pitchFamily="34" charset="0"/>
-                <a:ea typeface="Calibri" pitchFamily="34" charset="-122"/>
-                <a:cs typeface="Calibri" pitchFamily="34" charset="-120"/>
-              </a:rPr>
-              <a:t>Signature: _____________________</a:t>
-            </a:r>
-            <a:endParaRPr lang="en-US" sz="1300" dirty="0"/>
-          </a:p>
-        </p:txBody>
-      </p:sp>
-      <p:sp>
-        <p:nvSpPr>
-          <p:cNvPr id="22" name="Text 19"/>
-          <p:cNvSpPr txBox="1"/>
-          <p:nvPr/>
-        </p:nvSpPr>
-        <p:spPr>
-          <a:xfrm>
-            <a:off x="8229600" y="4434840"/>
-            <a:ext cx="3291840" cy="320040"/>
-          </a:xfrm>
-          <a:prstGeom prst="rect">
-            <a:avLst/>
-          </a:prstGeom>
-          <a:noFill/>
-          <a:ln/>
-        </p:spPr>
-        <p:txBody>
-          <a:bodyPr wrap="square" lIns="0" tIns="0" rIns="0" bIns="0" rtlCol="0" anchor="ctr"/>
-          <a:lstStyle/>
-          <a:p>
-            <a:pPr marL="0" indent="0">
-              <a:buNone/>
-            </a:pPr>
-            <a:r>
-              <a:rPr lang="en-US" sz="1300" dirty="0">
-                <a:solidFill>
-                  <a:srgbClr val="000000"/>
-                </a:solidFill>
-                <a:latin typeface="Calibri" pitchFamily="34" charset="0"/>
-                <a:ea typeface="Calibri" pitchFamily="34" charset="-122"/>
-                <a:cs typeface="Calibri" pitchFamily="34" charset="-120"/>
-              </a:rPr>
-              <a:t>Date: _________________________</a:t>
-            </a:r>
-            <a:endParaRPr lang="en-US" sz="1300" dirty="0"/>
-          </a:p>
-        </p:txBody>
-      </p:sp>
-      <p:sp>
-        <p:nvSpPr>
-          <p:cNvPr id="23" name="Text 20"/>
-          <p:cNvSpPr txBox="1"/>
-          <p:nvPr/>
-        </p:nvSpPr>
-        <p:spPr>
-          <a:xfrm>
-            <a:off x="822960" y="5760720"/>
-            <a:ext cx="10607040" cy="548640"/>
-          </a:xfrm>
-          <a:prstGeom prst="rect">
-            <a:avLst/>
-          </a:prstGeom>
-          <a:noFill/>
-          <a:ln/>
-        </p:spPr>
-        <p:txBody>
-          <a:bodyPr wrap="square" lIns="0" tIns="0" rIns="0" bIns="0" rtlCol="0" anchor="ctr"/>
-          <a:lstStyle/>
-          <a:p>
-            <a:pPr marL="0" indent="0">
-              <a:buNone/>
-            </a:pPr>
-            <a:endParaRPr lang="en-US" sz="1200" dirty="0"/>
-          </a:p>
-        </p:txBody>
-      </p:sp>
     </p:spTree>
+    <p:extLst>
+      <p:ext uri="{BB962C8B-B14F-4D97-AF65-F5344CB8AC3E}">
+        <p14:creationId xmlns:p14="http://schemas.microsoft.com/office/powerpoint/2010/main" val="2365276052"/>
+      </p:ext>
+    </p:extLst>
   </p:cSld>
   <p:clrMapOvr>
     <a:masterClrMapping/>
@@ -2804,6 +1942,2266 @@
 </p:sld>
 </file>
 
+<file path=ppt/slides/slide12.xml><?xml version="1.0" encoding="utf-8"?>
+<p:sld xmlns:a="http://schemas.openxmlformats.org/drawingml/2006/main" xmlns:r="http://schemas.openxmlformats.org/officeDocument/2006/relationships" xmlns:p="http://schemas.openxmlformats.org/presentationml/2006/main">
+  <p:cSld name="Slide 6">
+    <p:bg>
+      <p:bgPr>
+        <a:solidFill>
+          <a:srgbClr val="FFFFFF"/>
+        </a:solidFill>
+        <a:effectLst/>
+      </p:bgPr>
+    </p:bg>
+    <p:spTree>
+      <p:nvGrpSpPr>
+        <p:cNvPr id="1" name=""/>
+        <p:cNvGrpSpPr/>
+        <p:nvPr/>
+      </p:nvGrpSpPr>
+      <p:grpSpPr>
+        <a:xfrm>
+          <a:off x="0" y="0"/>
+          <a:ext cx="0" cy="0"/>
+          <a:chOff x="0" y="0"/>
+          <a:chExt cx="0" cy="0"/>
+        </a:xfrm>
+      </p:grpSpPr>
+      <p:sp>
+        <p:nvSpPr>
+          <p:cNvPr id="2" name="Text 0"/>
+          <p:cNvSpPr txBox="1"/>
+          <p:nvPr/>
+        </p:nvSpPr>
+        <p:spPr>
+          <a:xfrm>
+            <a:off x="11460175" y="6446520"/>
+            <a:ext cx="457200" cy="274320"/>
+          </a:xfrm>
+          <a:prstGeom prst="rect">
+            <a:avLst/>
+          </a:prstGeom>
+          <a:noFill/>
+          <a:ln/>
+        </p:spPr>
+        <p:txBody>
+          <a:bodyPr wrap="square" lIns="0" tIns="0" rIns="0" bIns="0" rtlCol="0" anchor="ctr"/>
+          <a:lstStyle/>
+          <a:p>
+            <a:pPr marL="0" indent="0" algn="r">
+              <a:buNone/>
+            </a:pPr>
+            <a:r>
+              <a:rPr lang="en-US" sz="1000" dirty="0">
+                <a:solidFill>
+                  <a:srgbClr val="808080"/>
+                </a:solidFill>
+                <a:latin typeface="Calibri" pitchFamily="34" charset="0"/>
+                <a:ea typeface="Calibri" pitchFamily="34" charset="-122"/>
+                <a:cs typeface="Calibri" pitchFamily="34" charset="-120"/>
+              </a:rPr>
+              <a:t>6</a:t>
+            </a:r>
+            <a:endParaRPr lang="en-US" sz="1000" dirty="0"/>
+          </a:p>
+        </p:txBody>
+      </p:sp>
+      <p:sp>
+        <p:nvSpPr>
+          <p:cNvPr id="3" name="Text 1"/>
+          <p:cNvSpPr txBox="1"/>
+          <p:nvPr/>
+        </p:nvSpPr>
+        <p:spPr>
+          <a:xfrm>
+            <a:off x="548640" y="320040"/>
+            <a:ext cx="9601200" cy="685800"/>
+          </a:xfrm>
+          <a:prstGeom prst="rect">
+            <a:avLst/>
+          </a:prstGeom>
+          <a:noFill/>
+          <a:ln/>
+        </p:spPr>
+        <p:txBody>
+          <a:bodyPr wrap="square" lIns="0" tIns="0" rIns="0" bIns="0" rtlCol="0" anchor="ctr"/>
+          <a:lstStyle/>
+          <a:p>
+            <a:pPr marL="0" indent="0">
+              <a:buNone/>
+            </a:pPr>
+            <a:r>
+              <a:rPr lang="en-US" sz="2800" b="1" dirty="0">
+                <a:solidFill>
+                  <a:srgbClr val="1D2F82"/>
+                </a:solidFill>
+                <a:latin typeface="Calibri" pitchFamily="34" charset="0"/>
+                <a:ea typeface="Calibri" pitchFamily="34" charset="-122"/>
+                <a:cs typeface="Calibri" pitchFamily="34" charset="-120"/>
+              </a:rPr>
+              <a:t>Methodology — Rules, Scoring &amp; Extraction</a:t>
+            </a:r>
+            <a:endParaRPr lang="en-US" sz="2800" dirty="0"/>
+          </a:p>
+        </p:txBody>
+      </p:sp>
+      <p:pic>
+        <p:nvPicPr>
+          <p:cNvPr id="4" name="Image 0" descr="logo.png"/>
+          <p:cNvPicPr>
+            <a:picLocks noChangeAspect="1"/>
+          </p:cNvPicPr>
+          <p:nvPr/>
+        </p:nvPicPr>
+        <p:blipFill>
+          <a:blip r:embed="rId3"/>
+          <a:stretch>
+            <a:fillRect/>
+          </a:stretch>
+        </p:blipFill>
+        <p:spPr>
+          <a:xfrm>
+            <a:off x="10362895" y="320040"/>
+            <a:ext cx="1371600" cy="518746"/>
+          </a:xfrm>
+          <a:prstGeom prst="rect">
+            <a:avLst/>
+          </a:prstGeom>
+        </p:spPr>
+      </p:pic>
+      <p:sp>
+        <p:nvSpPr>
+          <p:cNvPr id="5" name="Text 2"/>
+          <p:cNvSpPr txBox="1"/>
+          <p:nvPr/>
+        </p:nvSpPr>
+        <p:spPr>
+          <a:xfrm>
+            <a:off x="640080" y="1325880"/>
+            <a:ext cx="10881360" cy="4937760"/>
+          </a:xfrm>
+          <a:prstGeom prst="rect">
+            <a:avLst/>
+          </a:prstGeom>
+          <a:noFill/>
+          <a:ln/>
+        </p:spPr>
+        <p:txBody>
+          <a:bodyPr wrap="square" lIns="0" tIns="0" rIns="0" bIns="0" rtlCol="0" anchor="t"/>
+          <a:lstStyle/>
+          <a:p>
+            <a:pPr marL="177800" indent="-177800">
+              <a:spcBef>
+                <a:spcPts val="600"/>
+              </a:spcBef>
+              <a:spcAft>
+                <a:spcPts val="250"/>
+              </a:spcAft>
+              <a:buSzPct val="100000"/>
+              <a:buChar char="•"/>
+            </a:pPr>
+            <a:r>
+              <a:rPr lang="en-US" sz="1400" b="1" dirty="0">
+                <a:solidFill>
+                  <a:srgbClr val="1D2F82"/>
+                </a:solidFill>
+                <a:latin typeface="Calibri" pitchFamily="34" charset="0"/>
+                <a:ea typeface="Calibri" pitchFamily="34" charset="-122"/>
+                <a:cs typeface="Calibri" pitchFamily="34" charset="-120"/>
+              </a:rPr>
+              <a:t>Seven executable DPDP rules, each a distinct check:</a:t>
+            </a:r>
+          </a:p>
+          <a:p>
+            <a:pPr marL="457200" lvl="1" indent="-228600">
+              <a:spcAft>
+                <a:spcPts val="360"/>
+              </a:spcAft>
+              <a:buSzPct val="90000"/>
+              <a:buChar char="–"/>
+            </a:pPr>
+            <a:r>
+              <a:rPr lang="en-US" sz="1150" dirty="0">
+                <a:solidFill>
+                  <a:srgbClr val="000000"/>
+                </a:solidFill>
+                <a:latin typeface="Calibri" pitchFamily="34" charset="0"/>
+                <a:ea typeface="Calibri" pitchFamily="34" charset="-122"/>
+                <a:cs typeface="Calibri" pitchFamily="34" charset="-120"/>
+              </a:rPr>
+              <a:t>DM-01 data minimisation — extracted categories must sit inside the purpose policy; score = 1 − excess / total.</a:t>
+            </a:r>
+          </a:p>
+          <a:p>
+            <a:pPr marL="457200" lvl="1" indent="-228600">
+              <a:spcAft>
+                <a:spcPts val="360"/>
+              </a:spcAft>
+              <a:buSzPct val="90000"/>
+              <a:buChar char="–"/>
+            </a:pPr>
+            <a:r>
+              <a:rPr lang="en-US" sz="1150" dirty="0">
+                <a:solidFill>
+                  <a:srgbClr val="000000"/>
+                </a:solidFill>
+                <a:latin typeface="Calibri" pitchFamily="34" charset="0"/>
+                <a:ea typeface="Calibri" pitchFamily="34" charset="-122"/>
+                <a:cs typeface="Calibri" pitchFamily="34" charset="-120"/>
+              </a:rPr>
+              <a:t>LB-01 lawful basis — a basis is declared, recognised, and carries a specific reference.</a:t>
+            </a:r>
+          </a:p>
+          <a:p>
+            <a:pPr marL="457200" lvl="1" indent="-228600">
+              <a:spcAft>
+                <a:spcPts val="360"/>
+              </a:spcAft>
+              <a:buSzPct val="90000"/>
+              <a:buChar char="–"/>
+            </a:pPr>
+            <a:r>
+              <a:rPr lang="en-US" sz="1150" dirty="0">
+                <a:solidFill>
+                  <a:srgbClr val="000000"/>
+                </a:solidFill>
+                <a:latin typeface="Calibri" pitchFamily="34" charset="0"/>
+                <a:ea typeface="Calibri" pitchFamily="34" charset="-122"/>
+                <a:cs typeface="Calibri" pitchFamily="34" charset="-120"/>
+              </a:rPr>
+              <a:t>SL-01 storage limitation — retention declared and within the ceiling, plus a stated deletion mechanism.</a:t>
+            </a:r>
+          </a:p>
+          <a:p>
+            <a:pPr marL="457200" lvl="1" indent="-228600">
+              <a:spcAft>
+                <a:spcPts val="360"/>
+              </a:spcAft>
+              <a:buSzPct val="90000"/>
+              <a:buChar char="–"/>
+            </a:pPr>
+            <a:r>
+              <a:rPr lang="en-US" sz="1150" dirty="0">
+                <a:solidFill>
+                  <a:srgbClr val="000000"/>
+                </a:solidFill>
+                <a:latin typeface="Calibri" pitchFamily="34" charset="0"/>
+                <a:ea typeface="Calibri" pitchFamily="34" charset="-122"/>
+                <a:cs typeface="Calibri" pitchFamily="34" charset="-120"/>
+              </a:rPr>
+              <a:t>SS-01 security safeguards — fraction of TLS, encryption at rest, access control and pseudonymisation in place.</a:t>
+            </a:r>
+          </a:p>
+          <a:p>
+            <a:pPr marL="457200" lvl="1" indent="-228600">
+              <a:spcAft>
+                <a:spcPts val="360"/>
+              </a:spcAft>
+              <a:buSzPct val="90000"/>
+              <a:buChar char="–"/>
+            </a:pPr>
+            <a:r>
+              <a:rPr lang="en-US" sz="1150" dirty="0">
+                <a:solidFill>
+                  <a:srgbClr val="000000"/>
+                </a:solidFill>
+                <a:latin typeface="Calibri" pitchFamily="34" charset="0"/>
+                <a:ea typeface="Calibri" pitchFamily="34" charset="-122"/>
+                <a:cs typeface="Calibri" pitchFamily="34" charset="-120"/>
+              </a:rPr>
+              <a:t>PL-01 purpose limitation — a single specific purpose, with no undeclared onward use.</a:t>
+            </a:r>
+          </a:p>
+          <a:p>
+            <a:pPr marL="457200" lvl="1" indent="-228600">
+              <a:spcAft>
+                <a:spcPts val="360"/>
+              </a:spcAft>
+              <a:buSzPct val="90000"/>
+              <a:buChar char="–"/>
+            </a:pPr>
+            <a:r>
+              <a:rPr lang="en-US" sz="1150" dirty="0">
+                <a:solidFill>
+                  <a:srgbClr val="000000"/>
+                </a:solidFill>
+                <a:latin typeface="Calibri" pitchFamily="34" charset="0"/>
+                <a:ea typeface="Calibri" pitchFamily="34" charset="-122"/>
+                <a:cs typeface="Calibri" pitchFamily="34" charset="-120"/>
+              </a:rPr>
+              <a:t>NT-01 transparency / notice — a privacy notice is on record and covers the stated purpose.</a:t>
+            </a:r>
+          </a:p>
+          <a:p>
+            <a:pPr marL="457200" lvl="1" indent="-228600">
+              <a:spcAft>
+                <a:spcPts val="360"/>
+              </a:spcAft>
+              <a:buSzPct val="90000"/>
+              <a:buChar char="–"/>
+            </a:pPr>
+            <a:r>
+              <a:rPr lang="en-US" sz="1150" dirty="0">
+                <a:solidFill>
+                  <a:srgbClr val="000000"/>
+                </a:solidFill>
+                <a:latin typeface="Calibri" pitchFamily="34" charset="0"/>
+                <a:ea typeface="Calibri" pitchFamily="34" charset="-122"/>
+                <a:cs typeface="Calibri" pitchFamily="34" charset="-120"/>
+              </a:rPr>
+              <a:t>AC-01 accountability — audit logging, a named accountable party, and a retained record of processing.</a:t>
+            </a:r>
+          </a:p>
+          <a:p>
+            <a:pPr marL="177800" indent="-177800">
+              <a:spcBef>
+                <a:spcPts val="600"/>
+              </a:spcBef>
+              <a:spcAft>
+                <a:spcPts val="250"/>
+              </a:spcAft>
+              <a:buSzPct val="100000"/>
+              <a:buChar char="•"/>
+            </a:pPr>
+            <a:r>
+              <a:rPr lang="en-US" sz="1400" b="1" dirty="0">
+                <a:solidFill>
+                  <a:srgbClr val="1D2F82"/>
+                </a:solidFill>
+                <a:latin typeface="Calibri" pitchFamily="34" charset="0"/>
+                <a:ea typeface="Calibri" pitchFamily="34" charset="-122"/>
+                <a:cs typeface="Calibri" pitchFamily="34" charset="-120"/>
+              </a:rPr>
+              <a:t>Scoring:</a:t>
+            </a:r>
+          </a:p>
+          <a:p>
+            <a:pPr marL="457200" lvl="1" indent="-228600">
+              <a:spcAft>
+                <a:spcPts val="360"/>
+              </a:spcAft>
+              <a:buSzPct val="90000"/>
+              <a:buChar char="–"/>
+            </a:pPr>
+            <a:r>
+              <a:rPr lang="en-US" sz="1150" dirty="0">
+                <a:solidFill>
+                  <a:srgbClr val="000000"/>
+                </a:solidFill>
+                <a:latin typeface="Calibri" pitchFamily="34" charset="0"/>
+                <a:ea typeface="Calibri" pitchFamily="34" charset="-122"/>
+                <a:cs typeface="Calibri" pitchFamily="34" charset="-120"/>
+              </a:rPr>
+              <a:t>Every rule returns pass / fail / not-applicable, a 0–1 score and plain-language findings; the overall score is the weighted mean of applicable rules, with equal weights until a weighting can be justified.</a:t>
+            </a:r>
+          </a:p>
+          <a:p>
+            <a:pPr marL="457200" lvl="1" indent="-228600">
+              <a:spcAft>
+                <a:spcPts val="360"/>
+              </a:spcAft>
+              <a:buSzPct val="90000"/>
+              <a:buChar char="–"/>
+            </a:pPr>
+            <a:r>
+              <a:rPr lang="en-US" sz="1150" dirty="0">
+                <a:solidFill>
+                  <a:srgbClr val="000000"/>
+                </a:solidFill>
+                <a:latin typeface="Calibri" pitchFamily="34" charset="0"/>
+                <a:ea typeface="Calibri" pitchFamily="34" charset="-122"/>
+                <a:cs typeface="Calibri" pitchFamily="34" charset="-120"/>
+              </a:rPr>
+              <a:t>Partial credit is deliberate — it lets the harness rank techniques rather than merely reject them, which is what makes it a benchmark and not a checklist.</a:t>
+            </a:r>
+          </a:p>
+          <a:p>
+            <a:pPr marL="177800" indent="-177800">
+              <a:spcBef>
+                <a:spcPts val="600"/>
+              </a:spcBef>
+              <a:spcAft>
+                <a:spcPts val="250"/>
+              </a:spcAft>
+              <a:buSzPct val="100000"/>
+              <a:buChar char="•"/>
+            </a:pPr>
+            <a:r>
+              <a:rPr lang="en-US" sz="1400" b="1" dirty="0">
+                <a:solidFill>
+                  <a:srgbClr val="1D2F82"/>
+                </a:solidFill>
+                <a:latin typeface="Calibri" pitchFamily="34" charset="0"/>
+                <a:ea typeface="Calibri" pitchFamily="34" charset="-122"/>
+                <a:cs typeface="Calibri" pitchFamily="34" charset="-120"/>
+              </a:rPr>
+              <a:t>Extraction and HIS heterogeneity:</a:t>
+            </a:r>
+          </a:p>
+          <a:p>
+            <a:pPr marL="457200" lvl="1" indent="-228600">
+              <a:spcAft>
+                <a:spcPts val="360"/>
+              </a:spcAft>
+              <a:buSzPct val="90000"/>
+              <a:buChar char="–"/>
+            </a:pPr>
+            <a:r>
+              <a:rPr lang="en-US" sz="1150" dirty="0">
+                <a:solidFill>
+                  <a:srgbClr val="000000"/>
+                </a:solidFill>
+                <a:latin typeface="Calibri" pitchFamily="34" charset="0"/>
+                <a:ea typeface="Calibri" pitchFamily="34" charset="-122"/>
+                <a:cs typeface="Calibri" pitchFamily="34" charset="-120"/>
+              </a:rPr>
+              <a:t>A pluggable HISDataSource adapter: the synthetic generator now, a credentialed live HIS later, with no downstream change.</a:t>
+            </a:r>
+          </a:p>
+          <a:p>
+            <a:pPr marL="457200" lvl="1" indent="-228600">
+              <a:spcAft>
+                <a:spcPts val="360"/>
+              </a:spcAft>
+              <a:buSzPct val="90000"/>
+              <a:buChar char="–"/>
+            </a:pPr>
+            <a:r>
+              <a:rPr lang="en-US" sz="1150" dirty="0">
+                <a:solidFill>
+                  <a:srgbClr val="000000"/>
+                </a:solidFill>
+                <a:latin typeface="Calibri" pitchFamily="34" charset="0"/>
+                <a:ea typeface="Calibri" pitchFamily="34" charset="-122"/>
+                <a:cs typeface="Calibri" pitchFamily="34" charset="-120"/>
+              </a:rPr>
+              <a:t>Heterogeneity is absorbed twice — once at the adapter, and again by scoring data categories instead of vendor field names.</a:t>
+            </a:r>
+          </a:p>
+          <a:p>
+            <a:pPr marL="177800" indent="-177800">
+              <a:spcBef>
+                <a:spcPts val="600"/>
+              </a:spcBef>
+              <a:spcAft>
+                <a:spcPts val="250"/>
+              </a:spcAft>
+              <a:buSzPct val="100000"/>
+              <a:buChar char="•"/>
+            </a:pPr>
+            <a:r>
+              <a:rPr lang="en-US" sz="1400" b="1" dirty="0">
+                <a:solidFill>
+                  <a:srgbClr val="1D2F82"/>
+                </a:solidFill>
+                <a:latin typeface="Calibri" pitchFamily="34" charset="0"/>
+                <a:ea typeface="Calibri" pitchFamily="34" charset="-122"/>
+                <a:cs typeface="Calibri" pitchFamily="34" charset="-120"/>
+              </a:rPr>
+              <a:t>The extraction agent (build step 6, not yet started):</a:t>
+            </a:r>
+          </a:p>
+          <a:p>
+            <a:pPr marL="457200" lvl="1" indent="-228600">
+              <a:spcAft>
+                <a:spcPts val="360"/>
+              </a:spcAft>
+              <a:buSzPct val="90000"/>
+              <a:buChar char="–"/>
+            </a:pPr>
+            <a:r>
+              <a:rPr lang="en-US" sz="1150" dirty="0">
+                <a:solidFill>
+                  <a:srgbClr val="000000"/>
+                </a:solidFill>
+                <a:latin typeface="Calibri" pitchFamily="34" charset="0"/>
+                <a:ea typeface="Calibri" pitchFamily="34" charset="-122"/>
+                <a:cs typeface="Calibri" pitchFamily="34" charset="-120"/>
+              </a:rPr>
+              <a:t>An off-the-shelf LLM driven agentically, AXE-method inspired: prompt design, tool design and evaluation against synthetic data — no fine-tuning and no training set. The scorer stays deterministic so the benchmark is reproducible.</a:t>
+            </a:r>
+          </a:p>
+        </p:txBody>
+      </p:sp>
+    </p:spTree>
+  </p:cSld>
+  <p:clrMapOvr>
+    <a:masterClrMapping/>
+  </p:clrMapOvr>
+</p:sld>
+</file>
+
+<file path=ppt/slides/slide13.xml><?xml version="1.0" encoding="utf-8"?>
+<p:sld xmlns:a="http://schemas.openxmlformats.org/drawingml/2006/main" xmlns:r="http://schemas.openxmlformats.org/officeDocument/2006/relationships" xmlns:p="http://schemas.openxmlformats.org/presentationml/2006/main">
+  <p:cSld name="Slide 6">
+    <p:bg>
+      <p:bgPr>
+        <a:solidFill>
+          <a:srgbClr val="FFFFFF"/>
+        </a:solidFill>
+        <a:effectLst/>
+      </p:bgPr>
+    </p:bg>
+    <p:spTree>
+      <p:nvGrpSpPr>
+        <p:cNvPr id="1" name=""/>
+        <p:cNvGrpSpPr/>
+        <p:nvPr/>
+      </p:nvGrpSpPr>
+      <p:grpSpPr>
+        <a:xfrm>
+          <a:off x="0" y="0"/>
+          <a:ext cx="0" cy="0"/>
+          <a:chOff x="0" y="0"/>
+          <a:chExt cx="0" cy="0"/>
+        </a:xfrm>
+      </p:grpSpPr>
+      <p:sp>
+        <p:nvSpPr>
+          <p:cNvPr id="2" name="Text 0"/>
+          <p:cNvSpPr txBox="1"/>
+          <p:nvPr/>
+        </p:nvSpPr>
+        <p:spPr>
+          <a:xfrm>
+            <a:off x="11460175" y="6446520"/>
+            <a:ext cx="457200" cy="274320"/>
+          </a:xfrm>
+          <a:prstGeom prst="rect">
+            <a:avLst/>
+          </a:prstGeom>
+          <a:noFill/>
+          <a:ln/>
+        </p:spPr>
+        <p:txBody>
+          <a:bodyPr wrap="square" lIns="0" tIns="0" rIns="0" bIns="0" rtlCol="0" anchor="ctr"/>
+          <a:lstStyle/>
+          <a:p>
+            <a:pPr marL="0" indent="0" algn="r">
+              <a:buNone/>
+            </a:pPr>
+            <a:r>
+              <a:rPr lang="en-US" sz="1000" dirty="0">
+                <a:solidFill>
+                  <a:srgbClr val="808080"/>
+                </a:solidFill>
+                <a:latin typeface="Calibri" pitchFamily="34" charset="0"/>
+                <a:ea typeface="Calibri" pitchFamily="34" charset="-122"/>
+                <a:cs typeface="Calibri" pitchFamily="34" charset="-120"/>
+              </a:rPr>
+              <a:t>7</a:t>
+            </a:r>
+            <a:endParaRPr lang="en-US" sz="1000" dirty="0"/>
+          </a:p>
+        </p:txBody>
+      </p:sp>
+      <p:sp>
+        <p:nvSpPr>
+          <p:cNvPr id="3" name="Text 1"/>
+          <p:cNvSpPr txBox="1"/>
+          <p:nvPr/>
+        </p:nvSpPr>
+        <p:spPr>
+          <a:xfrm>
+            <a:off x="548640" y="320040"/>
+            <a:ext cx="9601200" cy="685800"/>
+          </a:xfrm>
+          <a:prstGeom prst="rect">
+            <a:avLst/>
+          </a:prstGeom>
+          <a:noFill/>
+          <a:ln/>
+        </p:spPr>
+        <p:txBody>
+          <a:bodyPr wrap="square" lIns="0" tIns="0" rIns="0" bIns="0" rtlCol="0" anchor="ctr"/>
+          <a:lstStyle/>
+          <a:p>
+            <a:pPr marL="0" indent="0">
+              <a:buNone/>
+            </a:pPr>
+            <a:r>
+              <a:rPr lang="en-US" sz="2800" b="1" dirty="0">
+                <a:solidFill>
+                  <a:srgbClr val="1D2F82"/>
+                </a:solidFill>
+                <a:latin typeface="Calibri" pitchFamily="34" charset="0"/>
+                <a:ea typeface="Calibri" pitchFamily="34" charset="-122"/>
+                <a:cs typeface="Calibri" pitchFamily="34" charset="-120"/>
+              </a:rPr>
+              <a:t>Tools &amp; Technologies</a:t>
+            </a:r>
+            <a:endParaRPr lang="en-US" sz="2800" dirty="0"/>
+          </a:p>
+        </p:txBody>
+      </p:sp>
+      <p:pic>
+        <p:nvPicPr>
+          <p:cNvPr id="4" name="Image 0" descr="logo.png"/>
+          <p:cNvPicPr>
+            <a:picLocks noChangeAspect="1"/>
+          </p:cNvPicPr>
+          <p:nvPr/>
+        </p:nvPicPr>
+        <p:blipFill>
+          <a:blip r:embed="rId3"/>
+          <a:stretch>
+            <a:fillRect/>
+          </a:stretch>
+        </p:blipFill>
+        <p:spPr>
+          <a:xfrm>
+            <a:off x="10362895" y="320040"/>
+            <a:ext cx="1371600" cy="518746"/>
+          </a:xfrm>
+          <a:prstGeom prst="rect">
+            <a:avLst/>
+          </a:prstGeom>
+        </p:spPr>
+      </p:pic>
+      <p:graphicFrame>
+        <p:nvGraphicFramePr>
+          <p:cNvPr id="40" name="Tools Table"/>
+          <p:cNvGraphicFramePr>
+            <a:graphicFrameLocks noGrp="1"/>
+          </p:cNvGraphicFramePr>
+          <p:nvPr/>
+        </p:nvGraphicFramePr>
+        <p:xfrm>
+          <a:off x="548640" y="1230000"/>
+          <a:ext cx="11091672" cy="3520000"/>
+        </p:xfrm>
+        <a:graphic>
+          <a:graphicData uri="http://schemas.openxmlformats.org/drawingml/2006/table">
+            <a:tbl>
+              <a:tblPr/>
+              <a:tblGrid>
+                <a:gridCol w="2300000"/>
+                <a:gridCol w="3300000"/>
+                <a:gridCol w="5491672"/>
+              </a:tblGrid>
+              <a:tr h="440000">
+                <a:tc>
+                  <a:txBody>
+                    <a:bodyPr/>
+                    <a:lstStyle/>
+                    <a:p>
+                      <a:pPr marL="0" indent="0">
+                        <a:buNone/>
+                      </a:pPr>
+                      <a:r>
+                        <a:rPr lang="en-US" sz="1100" b="1" dirty="0">
+                          <a:solidFill>
+                            <a:srgbClr val="FFFFFF"/>
+                          </a:solidFill>
+                          <a:latin typeface="Calibri" pitchFamily="34" charset="0"/>
+                          <a:ea typeface="Calibri" pitchFamily="34" charset="-122"/>
+                          <a:cs typeface="Calibri" pitchFamily="34" charset="-120"/>
+                        </a:rPr>
+                        <a:t>Technology</a:t>
+                      </a:r>
+                      <a:endParaRPr lang="en-US" sz="1100" dirty="0"/>
+                    </a:p>
+                  </a:txBody>
+                  <a:tcPr marL="54864" marR="54864" marT="54864" marB="54864" anchor="ctr">
+                    <a:lnL w="9525" cap="flat" cmpd="sng" algn="ctr">
+                      <a:solidFill>
+                        <a:srgbClr val="BFBFBF"/>
+                      </a:solidFill>
+                      <a:prstDash val="solid"/>
+                      <a:round/>
+                      <a:headEnd type="none" w="med" len="med"/>
+                      <a:tailEnd type="none" w="med" len="med"/>
+                    </a:lnL>
+                    <a:lnR w="9525" cap="flat" cmpd="sng" algn="ctr">
+                      <a:solidFill>
+                        <a:srgbClr val="BFBFBF"/>
+                      </a:solidFill>
+                      <a:prstDash val="solid"/>
+                      <a:round/>
+                      <a:headEnd type="none" w="med" len="med"/>
+                      <a:tailEnd type="none" w="med" len="med"/>
+                    </a:lnR>
+                    <a:lnT w="9525" cap="flat" cmpd="sng" algn="ctr">
+                      <a:solidFill>
+                        <a:srgbClr val="BFBFBF"/>
+                      </a:solidFill>
+                      <a:prstDash val="solid"/>
+                      <a:round/>
+                      <a:headEnd type="none" w="med" len="med"/>
+                      <a:tailEnd type="none" w="med" len="med"/>
+                    </a:lnT>
+                    <a:lnB w="9525" cap="flat" cmpd="sng" algn="ctr">
+                      <a:solidFill>
+                        <a:srgbClr val="BFBFBF"/>
+                      </a:solidFill>
+                      <a:prstDash val="solid"/>
+                      <a:round/>
+                      <a:headEnd type="none" w="med" len="med"/>
+                      <a:tailEnd type="none" w="med" len="med"/>
+                    </a:lnB>
+                    <a:solidFill>
+                      <a:srgbClr val="1D2F82"/>
+                    </a:solidFill>
+                  </a:tcPr>
+                </a:tc>
+                <a:tc>
+                  <a:txBody>
+                    <a:bodyPr/>
+                    <a:lstStyle/>
+                    <a:p>
+                      <a:pPr marL="0" indent="0">
+                        <a:buNone/>
+                      </a:pPr>
+                      <a:r>
+                        <a:rPr lang="en-US" sz="1100" b="1" dirty="0">
+                          <a:solidFill>
+                            <a:srgbClr val="FFFFFF"/>
+                          </a:solidFill>
+                          <a:latin typeface="Calibri" pitchFamily="34" charset="0"/>
+                          <a:ea typeface="Calibri" pitchFamily="34" charset="-122"/>
+                          <a:cs typeface="Calibri" pitchFamily="34" charset="-120"/>
+                        </a:rPr>
+                        <a:t>Where it is used</a:t>
+                      </a:r>
+                      <a:endParaRPr lang="en-US" sz="1100" dirty="0"/>
+                    </a:p>
+                  </a:txBody>
+                  <a:tcPr marL="54864" marR="54864" marT="54864" marB="54864" anchor="ctr">
+                    <a:lnL w="9525" cap="flat" cmpd="sng" algn="ctr">
+                      <a:solidFill>
+                        <a:srgbClr val="BFBFBF"/>
+                      </a:solidFill>
+                      <a:prstDash val="solid"/>
+                      <a:round/>
+                      <a:headEnd type="none" w="med" len="med"/>
+                      <a:tailEnd type="none" w="med" len="med"/>
+                    </a:lnL>
+                    <a:lnR w="9525" cap="flat" cmpd="sng" algn="ctr">
+                      <a:solidFill>
+                        <a:srgbClr val="BFBFBF"/>
+                      </a:solidFill>
+                      <a:prstDash val="solid"/>
+                      <a:round/>
+                      <a:headEnd type="none" w="med" len="med"/>
+                      <a:tailEnd type="none" w="med" len="med"/>
+                    </a:lnR>
+                    <a:lnT w="9525" cap="flat" cmpd="sng" algn="ctr">
+                      <a:solidFill>
+                        <a:srgbClr val="BFBFBF"/>
+                      </a:solidFill>
+                      <a:prstDash val="solid"/>
+                      <a:round/>
+                      <a:headEnd type="none" w="med" len="med"/>
+                      <a:tailEnd type="none" w="med" len="med"/>
+                    </a:lnT>
+                    <a:lnB w="9525" cap="flat" cmpd="sng" algn="ctr">
+                      <a:solidFill>
+                        <a:srgbClr val="BFBFBF"/>
+                      </a:solidFill>
+                      <a:prstDash val="solid"/>
+                      <a:round/>
+                      <a:headEnd type="none" w="med" len="med"/>
+                      <a:tailEnd type="none" w="med" len="med"/>
+                    </a:lnB>
+                    <a:solidFill>
+                      <a:srgbClr val="1D2F82"/>
+                    </a:solidFill>
+                  </a:tcPr>
+                </a:tc>
+                <a:tc>
+                  <a:txBody>
+                    <a:bodyPr/>
+                    <a:lstStyle/>
+                    <a:p>
+                      <a:pPr marL="0" indent="0">
+                        <a:buNone/>
+                      </a:pPr>
+                      <a:r>
+                        <a:rPr lang="en-US" sz="1100" b="1" dirty="0">
+                          <a:solidFill>
+                            <a:srgbClr val="FFFFFF"/>
+                          </a:solidFill>
+                          <a:latin typeface="Calibri" pitchFamily="34" charset="0"/>
+                          <a:ea typeface="Calibri" pitchFamily="34" charset="-122"/>
+                          <a:cs typeface="Calibri" pitchFamily="34" charset="-120"/>
+                        </a:rPr>
+                        <a:t>Why this choice</a:t>
+                      </a:r>
+                      <a:endParaRPr lang="en-US" sz="1100" dirty="0"/>
+                    </a:p>
+                  </a:txBody>
+                  <a:tcPr marL="54864" marR="54864" marT="54864" marB="54864" anchor="ctr">
+                    <a:lnL w="9525" cap="flat" cmpd="sng" algn="ctr">
+                      <a:solidFill>
+                        <a:srgbClr val="BFBFBF"/>
+                      </a:solidFill>
+                      <a:prstDash val="solid"/>
+                      <a:round/>
+                      <a:headEnd type="none" w="med" len="med"/>
+                      <a:tailEnd type="none" w="med" len="med"/>
+                    </a:lnL>
+                    <a:lnR w="9525" cap="flat" cmpd="sng" algn="ctr">
+                      <a:solidFill>
+                        <a:srgbClr val="BFBFBF"/>
+                      </a:solidFill>
+                      <a:prstDash val="solid"/>
+                      <a:round/>
+                      <a:headEnd type="none" w="med" len="med"/>
+                      <a:tailEnd type="none" w="med" len="med"/>
+                    </a:lnR>
+                    <a:lnT w="9525" cap="flat" cmpd="sng" algn="ctr">
+                      <a:solidFill>
+                        <a:srgbClr val="BFBFBF"/>
+                      </a:solidFill>
+                      <a:prstDash val="solid"/>
+                      <a:round/>
+                      <a:headEnd type="none" w="med" len="med"/>
+                      <a:tailEnd type="none" w="med" len="med"/>
+                    </a:lnT>
+                    <a:lnB w="9525" cap="flat" cmpd="sng" algn="ctr">
+                      <a:solidFill>
+                        <a:srgbClr val="BFBFBF"/>
+                      </a:solidFill>
+                      <a:prstDash val="solid"/>
+                      <a:round/>
+                      <a:headEnd type="none" w="med" len="med"/>
+                      <a:tailEnd type="none" w="med" len="med"/>
+                    </a:lnB>
+                    <a:solidFill>
+                      <a:srgbClr val="1D2F82"/>
+                    </a:solidFill>
+                  </a:tcPr>
+                </a:tc>
+                <a:extLst>
+                  <a:ext uri="{0D108BD9-81ED-4DB2-BD59-A6C34878D82A}">
+                    <a16:rowId xmlns:a16="http://schemas.microsoft.com/office/drawing/2014/main" val="10001"/>
+                  </a:ext>
+                </a:extLst>
+              </a:tr>
+              <a:tr h="440000">
+                <a:tc>
+                  <a:txBody>
+                    <a:bodyPr/>
+                    <a:lstStyle/>
+                    <a:p>
+                      <a:pPr marL="0" indent="0">
+                        <a:buNone/>
+                      </a:pPr>
+                      <a:r>
+                        <a:rPr lang="en-US" sz="1000" b="1" dirty="0">
+                          <a:solidFill>
+                            <a:srgbClr val="000000"/>
+                          </a:solidFill>
+                          <a:latin typeface="Calibri" pitchFamily="34" charset="0"/>
+                          <a:ea typeface="Calibri" pitchFamily="34" charset="-122"/>
+                          <a:cs typeface="Calibri" pitchFamily="34" charset="-120"/>
+                        </a:rPr>
+                        <a:t>Python 3.10+</a:t>
+                      </a:r>
+                      <a:endParaRPr lang="en-US" sz="1000" dirty="0"/>
+                    </a:p>
+                  </a:txBody>
+                  <a:tcPr marL="54864" marR="54864" marT="54864" marB="54864" anchor="ctr">
+                    <a:lnL w="9525" cap="flat" cmpd="sng" algn="ctr">
+                      <a:solidFill>
+                        <a:srgbClr val="BFBFBF"/>
+                      </a:solidFill>
+                      <a:prstDash val="solid"/>
+                      <a:round/>
+                      <a:headEnd type="none" w="med" len="med"/>
+                      <a:tailEnd type="none" w="med" len="med"/>
+                    </a:lnL>
+                    <a:lnR w="9525" cap="flat" cmpd="sng" algn="ctr">
+                      <a:solidFill>
+                        <a:srgbClr val="BFBFBF"/>
+                      </a:solidFill>
+                      <a:prstDash val="solid"/>
+                      <a:round/>
+                      <a:headEnd type="none" w="med" len="med"/>
+                      <a:tailEnd type="none" w="med" len="med"/>
+                    </a:lnR>
+                    <a:lnT w="9525" cap="flat" cmpd="sng" algn="ctr">
+                      <a:solidFill>
+                        <a:srgbClr val="BFBFBF"/>
+                      </a:solidFill>
+                      <a:prstDash val="solid"/>
+                      <a:round/>
+                      <a:headEnd type="none" w="med" len="med"/>
+                      <a:tailEnd type="none" w="med" len="med"/>
+                    </a:lnT>
+                    <a:lnB w="9525" cap="flat" cmpd="sng" algn="ctr">
+                      <a:solidFill>
+                        <a:srgbClr val="BFBFBF"/>
+                      </a:solidFill>
+                      <a:prstDash val="solid"/>
+                      <a:round/>
+                      <a:headEnd type="none" w="med" len="med"/>
+                      <a:tailEnd type="none" w="med" len="med"/>
+                    </a:lnB>
+                  </a:tcPr>
+                </a:tc>
+                <a:tc>
+                  <a:txBody>
+                    <a:bodyPr/>
+                    <a:lstStyle/>
+                    <a:p>
+                      <a:pPr marL="0" indent="0">
+                        <a:buNone/>
+                      </a:pPr>
+                      <a:r>
+                        <a:rPr lang="en-US" sz="1000" dirty="0">
+                          <a:solidFill>
+                            <a:srgbClr val="000000"/>
+                          </a:solidFill>
+                          <a:latin typeface="Calibri" pitchFamily="34" charset="0"/>
+                          <a:ea typeface="Calibri" pitchFamily="34" charset="-122"/>
+                          <a:cs typeface="Calibri" pitchFamily="34" charset="-120"/>
+                        </a:rPr>
+                        <a:t>The entire pipeline — data generation, extraction, rules, benchmark</a:t>
+                      </a:r>
+                      <a:endParaRPr lang="en-US" sz="1000" dirty="0"/>
+                    </a:p>
+                  </a:txBody>
+                  <a:tcPr marL="54864" marR="54864" marT="54864" marB="54864" anchor="ctr">
+                    <a:lnL w="9525" cap="flat" cmpd="sng" algn="ctr">
+                      <a:solidFill>
+                        <a:srgbClr val="BFBFBF"/>
+                      </a:solidFill>
+                      <a:prstDash val="solid"/>
+                      <a:round/>
+                      <a:headEnd type="none" w="med" len="med"/>
+                      <a:tailEnd type="none" w="med" len="med"/>
+                    </a:lnL>
+                    <a:lnR w="9525" cap="flat" cmpd="sng" algn="ctr">
+                      <a:solidFill>
+                        <a:srgbClr val="BFBFBF"/>
+                      </a:solidFill>
+                      <a:prstDash val="solid"/>
+                      <a:round/>
+                      <a:headEnd type="none" w="med" len="med"/>
+                      <a:tailEnd type="none" w="med" len="med"/>
+                    </a:lnR>
+                    <a:lnT w="9525" cap="flat" cmpd="sng" algn="ctr">
+                      <a:solidFill>
+                        <a:srgbClr val="BFBFBF"/>
+                      </a:solidFill>
+                      <a:prstDash val="solid"/>
+                      <a:round/>
+                      <a:headEnd type="none" w="med" len="med"/>
+                      <a:tailEnd type="none" w="med" len="med"/>
+                    </a:lnT>
+                    <a:lnB w="9525" cap="flat" cmpd="sng" algn="ctr">
+                      <a:solidFill>
+                        <a:srgbClr val="BFBFBF"/>
+                      </a:solidFill>
+                      <a:prstDash val="solid"/>
+                      <a:round/>
+                      <a:headEnd type="none" w="med" len="med"/>
+                      <a:tailEnd type="none" w="med" len="med"/>
+                    </a:lnB>
+                  </a:tcPr>
+                </a:tc>
+                <a:tc>
+                  <a:txBody>
+                    <a:bodyPr/>
+                    <a:lstStyle/>
+                    <a:p>
+                      <a:pPr marL="0" indent="0">
+                        <a:buNone/>
+                      </a:pPr>
+                      <a:r>
+                        <a:rPr lang="en-US" sz="950" dirty="0">
+                          <a:solidFill>
+                            <a:srgbClr val="000000"/>
+                          </a:solidFill>
+                          <a:latin typeface="Calibri" pitchFamily="34" charset="0"/>
+                          <a:ea typeface="Calibri" pitchFamily="34" charset="-122"/>
+                          <a:cs typeface="Calibri" pitchFamily="34" charset="-120"/>
+                        </a:rPr>
+                        <a:t>Standard for research and scraping work; the libraries this project needs already live here</a:t>
+                      </a:r>
+                      <a:endParaRPr lang="en-US" sz="950" dirty="0"/>
+                    </a:p>
+                  </a:txBody>
+                  <a:tcPr marL="54864" marR="54864" marT="54864" marB="54864" anchor="ctr">
+                    <a:lnL w="9525" cap="flat" cmpd="sng" algn="ctr">
+                      <a:solidFill>
+                        <a:srgbClr val="BFBFBF"/>
+                      </a:solidFill>
+                      <a:prstDash val="solid"/>
+                      <a:round/>
+                      <a:headEnd type="none" w="med" len="med"/>
+                      <a:tailEnd type="none" w="med" len="med"/>
+                    </a:lnL>
+                    <a:lnR w="9525" cap="flat" cmpd="sng" algn="ctr">
+                      <a:solidFill>
+                        <a:srgbClr val="BFBFBF"/>
+                      </a:solidFill>
+                      <a:prstDash val="solid"/>
+                      <a:round/>
+                      <a:headEnd type="none" w="med" len="med"/>
+                      <a:tailEnd type="none" w="med" len="med"/>
+                    </a:lnR>
+                    <a:lnT w="9525" cap="flat" cmpd="sng" algn="ctr">
+                      <a:solidFill>
+                        <a:srgbClr val="BFBFBF"/>
+                      </a:solidFill>
+                      <a:prstDash val="solid"/>
+                      <a:round/>
+                      <a:headEnd type="none" w="med" len="med"/>
+                      <a:tailEnd type="none" w="med" len="med"/>
+                    </a:lnT>
+                    <a:lnB w="9525" cap="flat" cmpd="sng" algn="ctr">
+                      <a:solidFill>
+                        <a:srgbClr val="BFBFBF"/>
+                      </a:solidFill>
+                      <a:prstDash val="solid"/>
+                      <a:round/>
+                      <a:headEnd type="none" w="med" len="med"/>
+                      <a:tailEnd type="none" w="med" len="med"/>
+                    </a:lnB>
+                  </a:tcPr>
+                </a:tc>
+                <a:extLst>
+                  <a:ext uri="{0D108BD9-81ED-4DB2-BD59-A6C34878D82A}">
+                    <a16:rowId xmlns:a16="http://schemas.microsoft.com/office/drawing/2014/main" val="10001"/>
+                  </a:ext>
+                </a:extLst>
+              </a:tr>
+              <a:tr h="440000">
+                <a:tc>
+                  <a:txBody>
+                    <a:bodyPr/>
+                    <a:lstStyle/>
+                    <a:p>
+                      <a:pPr marL="0" indent="0">
+                        <a:buNone/>
+                      </a:pPr>
+                      <a:r>
+                        <a:rPr lang="en-US" sz="1000" b="1" dirty="0">
+                          <a:solidFill>
+                            <a:srgbClr val="000000"/>
+                          </a:solidFill>
+                          <a:latin typeface="Calibri" pitchFamily="34" charset="0"/>
+                          <a:ea typeface="Calibri" pitchFamily="34" charset="-122"/>
+                          <a:cs typeface="Calibri" pitchFamily="34" charset="-120"/>
+                        </a:rPr>
+                        <a:t>Pydantic v2</a:t>
+                      </a:r>
+                      <a:endParaRPr lang="en-US" sz="1000" dirty="0"/>
+                    </a:p>
+                  </a:txBody>
+                  <a:tcPr marL="54864" marR="54864" marT="54864" marB="54864" anchor="ctr">
+                    <a:lnL w="9525" cap="flat" cmpd="sng" algn="ctr">
+                      <a:solidFill>
+                        <a:srgbClr val="BFBFBF"/>
+                      </a:solidFill>
+                      <a:prstDash val="solid"/>
+                      <a:round/>
+                      <a:headEnd type="none" w="med" len="med"/>
+                      <a:tailEnd type="none" w="med" len="med"/>
+                    </a:lnL>
+                    <a:lnR w="9525" cap="flat" cmpd="sng" algn="ctr">
+                      <a:solidFill>
+                        <a:srgbClr val="BFBFBF"/>
+                      </a:solidFill>
+                      <a:prstDash val="solid"/>
+                      <a:round/>
+                      <a:headEnd type="none" w="med" len="med"/>
+                      <a:tailEnd type="none" w="med" len="med"/>
+                    </a:lnR>
+                    <a:lnT w="9525" cap="flat" cmpd="sng" algn="ctr">
+                      <a:solidFill>
+                        <a:srgbClr val="BFBFBF"/>
+                      </a:solidFill>
+                      <a:prstDash val="solid"/>
+                      <a:round/>
+                      <a:headEnd type="none" w="med" len="med"/>
+                      <a:tailEnd type="none" w="med" len="med"/>
+                    </a:lnT>
+                    <a:lnB w="9525" cap="flat" cmpd="sng" algn="ctr">
+                      <a:solidFill>
+                        <a:srgbClr val="BFBFBF"/>
+                      </a:solidFill>
+                      <a:prstDash val="solid"/>
+                      <a:round/>
+                      <a:headEnd type="none" w="med" len="med"/>
+                      <a:tailEnd type="none" w="med" len="med"/>
+                    </a:lnB>
+                  </a:tcPr>
+                </a:tc>
+                <a:tc>
+                  <a:txBody>
+                    <a:bodyPr/>
+                    <a:lstStyle/>
+                    <a:p>
+                      <a:pPr marL="0" indent="0">
+                        <a:buNone/>
+                      </a:pPr>
+                      <a:r>
+                        <a:rPr lang="en-US" sz="1000" dirty="0">
+                          <a:solidFill>
+                            <a:srgbClr val="000000"/>
+                          </a:solidFill>
+                          <a:latin typeface="Calibri" pitchFamily="34" charset="0"/>
+                          <a:ea typeface="Calibri" pitchFamily="34" charset="-122"/>
+                          <a:cs typeface="Calibri" pitchFamily="34" charset="-120"/>
+                        </a:rPr>
+                        <a:t>Compliance manifest, the seven rules, HIS record shapes</a:t>
+                      </a:r>
+                      <a:endParaRPr lang="en-US" sz="1000" dirty="0"/>
+                    </a:p>
+                  </a:txBody>
+                  <a:tcPr marL="54864" marR="54864" marT="54864" marB="54864" anchor="ctr">
+                    <a:lnL w="9525" cap="flat" cmpd="sng" algn="ctr">
+                      <a:solidFill>
+                        <a:srgbClr val="BFBFBF"/>
+                      </a:solidFill>
+                      <a:prstDash val="solid"/>
+                      <a:round/>
+                      <a:headEnd type="none" w="med" len="med"/>
+                      <a:tailEnd type="none" w="med" len="med"/>
+                    </a:lnL>
+                    <a:lnR w="9525" cap="flat" cmpd="sng" algn="ctr">
+                      <a:solidFill>
+                        <a:srgbClr val="BFBFBF"/>
+                      </a:solidFill>
+                      <a:prstDash val="solid"/>
+                      <a:round/>
+                      <a:headEnd type="none" w="med" len="med"/>
+                      <a:tailEnd type="none" w="med" len="med"/>
+                    </a:lnR>
+                    <a:lnT w="9525" cap="flat" cmpd="sng" algn="ctr">
+                      <a:solidFill>
+                        <a:srgbClr val="BFBFBF"/>
+                      </a:solidFill>
+                      <a:prstDash val="solid"/>
+                      <a:round/>
+                      <a:headEnd type="none" w="med" len="med"/>
+                      <a:tailEnd type="none" w="med" len="med"/>
+                    </a:lnT>
+                    <a:lnB w="9525" cap="flat" cmpd="sng" algn="ctr">
+                      <a:solidFill>
+                        <a:srgbClr val="BFBFBF"/>
+                      </a:solidFill>
+                      <a:prstDash val="solid"/>
+                      <a:round/>
+                      <a:headEnd type="none" w="med" len="med"/>
+                      <a:tailEnd type="none" w="med" len="med"/>
+                    </a:lnB>
+                  </a:tcPr>
+                </a:tc>
+                <a:tc>
+                  <a:txBody>
+                    <a:bodyPr/>
+                    <a:lstStyle/>
+                    <a:p>
+                      <a:pPr marL="0" indent="0">
+                        <a:buNone/>
+                      </a:pPr>
+                      <a:r>
+                        <a:rPr lang="en-US" sz="950" dirty="0">
+                          <a:solidFill>
+                            <a:srgbClr val="000000"/>
+                          </a:solidFill>
+                          <a:latin typeface="Calibri" pitchFamily="34" charset="0"/>
+                          <a:ea typeface="Calibri" pitchFamily="34" charset="-122"/>
+                          <a:cs typeface="Calibri" pitchFamily="34" charset="-120"/>
+                        </a:rPr>
+                        <a:t>Rejects a malformed manifest at the boundary and serialises every report to JSON</a:t>
+                      </a:r>
+                      <a:endParaRPr lang="en-US" sz="950" dirty="0"/>
+                    </a:p>
+                  </a:txBody>
+                  <a:tcPr marL="54864" marR="54864" marT="54864" marB="54864" anchor="ctr">
+                    <a:lnL w="9525" cap="flat" cmpd="sng" algn="ctr">
+                      <a:solidFill>
+                        <a:srgbClr val="BFBFBF"/>
+                      </a:solidFill>
+                      <a:prstDash val="solid"/>
+                      <a:round/>
+                      <a:headEnd type="none" w="med" len="med"/>
+                      <a:tailEnd type="none" w="med" len="med"/>
+                    </a:lnL>
+                    <a:lnR w="9525" cap="flat" cmpd="sng" algn="ctr">
+                      <a:solidFill>
+                        <a:srgbClr val="BFBFBF"/>
+                      </a:solidFill>
+                      <a:prstDash val="solid"/>
+                      <a:round/>
+                      <a:headEnd type="none" w="med" len="med"/>
+                      <a:tailEnd type="none" w="med" len="med"/>
+                    </a:lnR>
+                    <a:lnT w="9525" cap="flat" cmpd="sng" algn="ctr">
+                      <a:solidFill>
+                        <a:srgbClr val="BFBFBF"/>
+                      </a:solidFill>
+                      <a:prstDash val="solid"/>
+                      <a:round/>
+                      <a:headEnd type="none" w="med" len="med"/>
+                      <a:tailEnd type="none" w="med" len="med"/>
+                    </a:lnT>
+                    <a:lnB w="9525" cap="flat" cmpd="sng" algn="ctr">
+                      <a:solidFill>
+                        <a:srgbClr val="BFBFBF"/>
+                      </a:solidFill>
+                      <a:prstDash val="solid"/>
+                      <a:round/>
+                      <a:headEnd type="none" w="med" len="med"/>
+                      <a:tailEnd type="none" w="med" len="med"/>
+                    </a:lnB>
+                  </a:tcPr>
+                </a:tc>
+                <a:extLst>
+                  <a:ext uri="{0D108BD9-81ED-4DB2-BD59-A6C34878D82A}">
+                    <a16:rowId xmlns:a16="http://schemas.microsoft.com/office/drawing/2014/main" val="10001"/>
+                  </a:ext>
+                </a:extLst>
+              </a:tr>
+              <a:tr h="440000">
+                <a:tc>
+                  <a:txBody>
+                    <a:bodyPr/>
+                    <a:lstStyle/>
+                    <a:p>
+                      <a:pPr marL="0" indent="0">
+                        <a:buNone/>
+                      </a:pPr>
+                      <a:r>
+                        <a:rPr lang="en-US" sz="1000" b="1" dirty="0">
+                          <a:solidFill>
+                            <a:srgbClr val="000000"/>
+                          </a:solidFill>
+                          <a:latin typeface="Calibri" pitchFamily="34" charset="0"/>
+                          <a:ea typeface="Calibri" pitchFamily="34" charset="-122"/>
+                          <a:cs typeface="Calibri" pitchFamily="34" charset="-120"/>
+                        </a:rPr>
+                        <a:t>Faker</a:t>
+                      </a:r>
+                      <a:endParaRPr lang="en-US" sz="1000" dirty="0"/>
+                    </a:p>
+                  </a:txBody>
+                  <a:tcPr marL="54864" marR="54864" marT="54864" marB="54864" anchor="ctr">
+                    <a:lnL w="9525" cap="flat" cmpd="sng" algn="ctr">
+                      <a:solidFill>
+                        <a:srgbClr val="BFBFBF"/>
+                      </a:solidFill>
+                      <a:prstDash val="solid"/>
+                      <a:round/>
+                      <a:headEnd type="none" w="med" len="med"/>
+                      <a:tailEnd type="none" w="med" len="med"/>
+                    </a:lnL>
+                    <a:lnR w="9525" cap="flat" cmpd="sng" algn="ctr">
+                      <a:solidFill>
+                        <a:srgbClr val="BFBFBF"/>
+                      </a:solidFill>
+                      <a:prstDash val="solid"/>
+                      <a:round/>
+                      <a:headEnd type="none" w="med" len="med"/>
+                      <a:tailEnd type="none" w="med" len="med"/>
+                    </a:lnR>
+                    <a:lnT w="9525" cap="flat" cmpd="sng" algn="ctr">
+                      <a:solidFill>
+                        <a:srgbClr val="BFBFBF"/>
+                      </a:solidFill>
+                      <a:prstDash val="solid"/>
+                      <a:round/>
+                      <a:headEnd type="none" w="med" len="med"/>
+                      <a:tailEnd type="none" w="med" len="med"/>
+                    </a:lnT>
+                    <a:lnB w="9525" cap="flat" cmpd="sng" algn="ctr">
+                      <a:solidFill>
+                        <a:srgbClr val="BFBFBF"/>
+                      </a:solidFill>
+                      <a:prstDash val="solid"/>
+                      <a:round/>
+                      <a:headEnd type="none" w="med" len="med"/>
+                      <a:tailEnd type="none" w="med" len="med"/>
+                    </a:lnB>
+                  </a:tcPr>
+                </a:tc>
+                <a:tc>
+                  <a:txBody>
+                    <a:bodyPr/>
+                    <a:lstStyle/>
+                    <a:p>
+                      <a:pPr marL="0" indent="0">
+                        <a:buNone/>
+                      </a:pPr>
+                      <a:r>
+                        <a:rPr lang="en-US" sz="1000" dirty="0">
+                          <a:solidFill>
+                            <a:srgbClr val="000000"/>
+                          </a:solidFill>
+                          <a:latin typeface="Calibri" pitchFamily="34" charset="0"/>
+                          <a:ea typeface="Calibri" pitchFamily="34" charset="-122"/>
+                          <a:cs typeface="Calibri" pitchFamily="34" charset="-120"/>
+                        </a:rPr>
+                        <a:t>Synthetic HIS record generation</a:t>
+                      </a:r>
+                      <a:endParaRPr lang="en-US" sz="1000" dirty="0"/>
+                    </a:p>
+                  </a:txBody>
+                  <a:tcPr marL="54864" marR="54864" marT="54864" marB="54864" anchor="ctr">
+                    <a:lnL w="9525" cap="flat" cmpd="sng" algn="ctr">
+                      <a:solidFill>
+                        <a:srgbClr val="BFBFBF"/>
+                      </a:solidFill>
+                      <a:prstDash val="solid"/>
+                      <a:round/>
+                      <a:headEnd type="none" w="med" len="med"/>
+                      <a:tailEnd type="none" w="med" len="med"/>
+                    </a:lnL>
+                    <a:lnR w="9525" cap="flat" cmpd="sng" algn="ctr">
+                      <a:solidFill>
+                        <a:srgbClr val="BFBFBF"/>
+                      </a:solidFill>
+                      <a:prstDash val="solid"/>
+                      <a:round/>
+                      <a:headEnd type="none" w="med" len="med"/>
+                      <a:tailEnd type="none" w="med" len="med"/>
+                    </a:lnR>
+                    <a:lnT w="9525" cap="flat" cmpd="sng" algn="ctr">
+                      <a:solidFill>
+                        <a:srgbClr val="BFBFBF"/>
+                      </a:solidFill>
+                      <a:prstDash val="solid"/>
+                      <a:round/>
+                      <a:headEnd type="none" w="med" len="med"/>
+                      <a:tailEnd type="none" w="med" len="med"/>
+                    </a:lnT>
+                    <a:lnB w="9525" cap="flat" cmpd="sng" algn="ctr">
+                      <a:solidFill>
+                        <a:srgbClr val="BFBFBF"/>
+                      </a:solidFill>
+                      <a:prstDash val="solid"/>
+                      <a:round/>
+                      <a:headEnd type="none" w="med" len="med"/>
+                      <a:tailEnd type="none" w="med" len="med"/>
+                    </a:lnB>
+                  </a:tcPr>
+                </a:tc>
+                <a:tc>
+                  <a:txBody>
+                    <a:bodyPr/>
+                    <a:lstStyle/>
+                    <a:p>
+                      <a:pPr marL="0" indent="0">
+                        <a:buNone/>
+                      </a:pPr>
+                      <a:r>
+                        <a:rPr lang="en-US" sz="950" dirty="0">
+                          <a:solidFill>
+                            <a:srgbClr val="000000"/>
+                          </a:solidFill>
+                          <a:latin typeface="Calibri" pitchFamily="34" charset="0"/>
+                          <a:ea typeface="Calibri" pitchFamily="34" charset="-122"/>
+                          <a:cs typeface="Calibri" pitchFamily="34" charset="-120"/>
+                        </a:rPr>
+                        <a:t>Realistic values with no real patient; seeded, so every demo run reproduces exactly</a:t>
+                      </a:r>
+                      <a:endParaRPr lang="en-US" sz="950" dirty="0"/>
+                    </a:p>
+                  </a:txBody>
+                  <a:tcPr marL="54864" marR="54864" marT="54864" marB="54864" anchor="ctr">
+                    <a:lnL w="9525" cap="flat" cmpd="sng" algn="ctr">
+                      <a:solidFill>
+                        <a:srgbClr val="BFBFBF"/>
+                      </a:solidFill>
+                      <a:prstDash val="solid"/>
+                      <a:round/>
+                      <a:headEnd type="none" w="med" len="med"/>
+                      <a:tailEnd type="none" w="med" len="med"/>
+                    </a:lnL>
+                    <a:lnR w="9525" cap="flat" cmpd="sng" algn="ctr">
+                      <a:solidFill>
+                        <a:srgbClr val="BFBFBF"/>
+                      </a:solidFill>
+                      <a:prstDash val="solid"/>
+                      <a:round/>
+                      <a:headEnd type="none" w="med" len="med"/>
+                      <a:tailEnd type="none" w="med" len="med"/>
+                    </a:lnR>
+                    <a:lnT w="9525" cap="flat" cmpd="sng" algn="ctr">
+                      <a:solidFill>
+                        <a:srgbClr val="BFBFBF"/>
+                      </a:solidFill>
+                      <a:prstDash val="solid"/>
+                      <a:round/>
+                      <a:headEnd type="none" w="med" len="med"/>
+                      <a:tailEnd type="none" w="med" len="med"/>
+                    </a:lnT>
+                    <a:lnB w="9525" cap="flat" cmpd="sng" algn="ctr">
+                      <a:solidFill>
+                        <a:srgbClr val="BFBFBF"/>
+                      </a:solidFill>
+                      <a:prstDash val="solid"/>
+                      <a:round/>
+                      <a:headEnd type="none" w="med" len="med"/>
+                      <a:tailEnd type="none" w="med" len="med"/>
+                    </a:lnB>
+                  </a:tcPr>
+                </a:tc>
+                <a:extLst>
+                  <a:ext uri="{0D108BD9-81ED-4DB2-BD59-A6C34878D82A}">
+                    <a16:rowId xmlns:a16="http://schemas.microsoft.com/office/drawing/2014/main" val="10001"/>
+                  </a:ext>
+                </a:extLst>
+              </a:tr>
+              <a:tr h="440000">
+                <a:tc>
+                  <a:txBody>
+                    <a:bodyPr/>
+                    <a:lstStyle/>
+                    <a:p>
+                      <a:pPr marL="0" indent="0">
+                        <a:buNone/>
+                      </a:pPr>
+                      <a:r>
+                        <a:rPr lang="en-US" sz="1000" b="1" dirty="0">
+                          <a:solidFill>
+                            <a:srgbClr val="000000"/>
+                          </a:solidFill>
+                          <a:latin typeface="Calibri" pitchFamily="34" charset="0"/>
+                          <a:ea typeface="Calibri" pitchFamily="34" charset="-122"/>
+                          <a:cs typeface="Calibri" pitchFamily="34" charset="-120"/>
+                        </a:rPr>
+                        <a:t>pytest</a:t>
+                      </a:r>
+                      <a:endParaRPr lang="en-US" sz="1000" dirty="0"/>
+                    </a:p>
+                  </a:txBody>
+                  <a:tcPr marL="54864" marR="54864" marT="54864" marB="54864" anchor="ctr">
+                    <a:lnL w="9525" cap="flat" cmpd="sng" algn="ctr">
+                      <a:solidFill>
+                        <a:srgbClr val="BFBFBF"/>
+                      </a:solidFill>
+                      <a:prstDash val="solid"/>
+                      <a:round/>
+                      <a:headEnd type="none" w="med" len="med"/>
+                      <a:tailEnd type="none" w="med" len="med"/>
+                    </a:lnL>
+                    <a:lnR w="9525" cap="flat" cmpd="sng" algn="ctr">
+                      <a:solidFill>
+                        <a:srgbClr val="BFBFBF"/>
+                      </a:solidFill>
+                      <a:prstDash val="solid"/>
+                      <a:round/>
+                      <a:headEnd type="none" w="med" len="med"/>
+                      <a:tailEnd type="none" w="med" len="med"/>
+                    </a:lnR>
+                    <a:lnT w="9525" cap="flat" cmpd="sng" algn="ctr">
+                      <a:solidFill>
+                        <a:srgbClr val="BFBFBF"/>
+                      </a:solidFill>
+                      <a:prstDash val="solid"/>
+                      <a:round/>
+                      <a:headEnd type="none" w="med" len="med"/>
+                      <a:tailEnd type="none" w="med" len="med"/>
+                    </a:lnT>
+                    <a:lnB w="9525" cap="flat" cmpd="sng" algn="ctr">
+                      <a:solidFill>
+                        <a:srgbClr val="BFBFBF"/>
+                      </a:solidFill>
+                      <a:prstDash val="solid"/>
+                      <a:round/>
+                      <a:headEnd type="none" w="med" len="med"/>
+                      <a:tailEnd type="none" w="med" len="med"/>
+                    </a:lnB>
+                  </a:tcPr>
+                </a:tc>
+                <a:tc>
+                  <a:txBody>
+                    <a:bodyPr/>
+                    <a:lstStyle/>
+                    <a:p>
+                      <a:pPr marL="0" indent="0">
+                        <a:buNone/>
+                      </a:pPr>
+                      <a:r>
+                        <a:rPr lang="en-US" sz="1000" dirty="0">
+                          <a:solidFill>
+                            <a:srgbClr val="000000"/>
+                          </a:solidFill>
+                          <a:latin typeface="Calibri" pitchFamily="34" charset="0"/>
+                          <a:ea typeface="Calibri" pitchFamily="34" charset="-122"/>
+                          <a:cs typeface="Calibri" pitchFamily="34" charset="-120"/>
+                        </a:rPr>
+                        <a:t>91 tests across rules, techniques and adapters</a:t>
+                      </a:r>
+                      <a:endParaRPr lang="en-US" sz="1000" dirty="0"/>
+                    </a:p>
+                  </a:txBody>
+                  <a:tcPr marL="54864" marR="54864" marT="54864" marB="54864" anchor="ctr">
+                    <a:lnL w="9525" cap="flat" cmpd="sng" algn="ctr">
+                      <a:solidFill>
+                        <a:srgbClr val="BFBFBF"/>
+                      </a:solidFill>
+                      <a:prstDash val="solid"/>
+                      <a:round/>
+                      <a:headEnd type="none" w="med" len="med"/>
+                      <a:tailEnd type="none" w="med" len="med"/>
+                    </a:lnL>
+                    <a:lnR w="9525" cap="flat" cmpd="sng" algn="ctr">
+                      <a:solidFill>
+                        <a:srgbClr val="BFBFBF"/>
+                      </a:solidFill>
+                      <a:prstDash val="solid"/>
+                      <a:round/>
+                      <a:headEnd type="none" w="med" len="med"/>
+                      <a:tailEnd type="none" w="med" len="med"/>
+                    </a:lnR>
+                    <a:lnT w="9525" cap="flat" cmpd="sng" algn="ctr">
+                      <a:solidFill>
+                        <a:srgbClr val="BFBFBF"/>
+                      </a:solidFill>
+                      <a:prstDash val="solid"/>
+                      <a:round/>
+                      <a:headEnd type="none" w="med" len="med"/>
+                      <a:tailEnd type="none" w="med" len="med"/>
+                    </a:lnT>
+                    <a:lnB w="9525" cap="flat" cmpd="sng" algn="ctr">
+                      <a:solidFill>
+                        <a:srgbClr val="BFBFBF"/>
+                      </a:solidFill>
+                      <a:prstDash val="solid"/>
+                      <a:round/>
+                      <a:headEnd type="none" w="med" len="med"/>
+                      <a:tailEnd type="none" w="med" len="med"/>
+                    </a:lnB>
+                  </a:tcPr>
+                </a:tc>
+                <a:tc>
+                  <a:txBody>
+                    <a:bodyPr/>
+                    <a:lstStyle/>
+                    <a:p>
+                      <a:pPr marL="0" indent="0">
+                        <a:buNone/>
+                      </a:pPr>
+                      <a:r>
+                        <a:rPr lang="en-US" sz="950" dirty="0">
+                          <a:solidFill>
+                            <a:srgbClr val="000000"/>
+                          </a:solidFill>
+                          <a:latin typeface="Calibri" pitchFamily="34" charset="0"/>
+                          <a:ea typeface="Calibri" pitchFamily="34" charset="-122"/>
+                          <a:cs typeface="Calibri" pitchFamily="34" charset="-120"/>
+                        </a:rPr>
+                        <a:t>The rules are the contribution, so they are pinned by tests rather than asserted</a:t>
+                      </a:r>
+                      <a:endParaRPr lang="en-US" sz="950" dirty="0"/>
+                    </a:p>
+                  </a:txBody>
+                  <a:tcPr marL="54864" marR="54864" marT="54864" marB="54864" anchor="ctr">
+                    <a:lnL w="9525" cap="flat" cmpd="sng" algn="ctr">
+                      <a:solidFill>
+                        <a:srgbClr val="BFBFBF"/>
+                      </a:solidFill>
+                      <a:prstDash val="solid"/>
+                      <a:round/>
+                      <a:headEnd type="none" w="med" len="med"/>
+                      <a:tailEnd type="none" w="med" len="med"/>
+                    </a:lnL>
+                    <a:lnR w="9525" cap="flat" cmpd="sng" algn="ctr">
+                      <a:solidFill>
+                        <a:srgbClr val="BFBFBF"/>
+                      </a:solidFill>
+                      <a:prstDash val="solid"/>
+                      <a:round/>
+                      <a:headEnd type="none" w="med" len="med"/>
+                      <a:tailEnd type="none" w="med" len="med"/>
+                    </a:lnR>
+                    <a:lnT w="9525" cap="flat" cmpd="sng" algn="ctr">
+                      <a:solidFill>
+                        <a:srgbClr val="BFBFBF"/>
+                      </a:solidFill>
+                      <a:prstDash val="solid"/>
+                      <a:round/>
+                      <a:headEnd type="none" w="med" len="med"/>
+                      <a:tailEnd type="none" w="med" len="med"/>
+                    </a:lnT>
+                    <a:lnB w="9525" cap="flat" cmpd="sng" algn="ctr">
+                      <a:solidFill>
+                        <a:srgbClr val="BFBFBF"/>
+                      </a:solidFill>
+                      <a:prstDash val="solid"/>
+                      <a:round/>
+                      <a:headEnd type="none" w="med" len="med"/>
+                      <a:tailEnd type="none" w="med" len="med"/>
+                    </a:lnB>
+                  </a:tcPr>
+                </a:tc>
+                <a:extLst>
+                  <a:ext uri="{0D108BD9-81ED-4DB2-BD59-A6C34878D82A}">
+                    <a16:rowId xmlns:a16="http://schemas.microsoft.com/office/drawing/2014/main" val="10001"/>
+                  </a:ext>
+                </a:extLst>
+              </a:tr>
+              <a:tr h="440000">
+                <a:tc>
+                  <a:txBody>
+                    <a:bodyPr/>
+                    <a:lstStyle/>
+                    <a:p>
+                      <a:pPr marL="0" indent="0">
+                        <a:buNone/>
+                      </a:pPr>
+                      <a:r>
+                        <a:rPr lang="en-US" sz="1000" b="1" dirty="0">
+                          <a:solidFill>
+                            <a:srgbClr val="000000"/>
+                          </a:solidFill>
+                          <a:latin typeface="Calibri" pitchFamily="34" charset="0"/>
+                          <a:ea typeface="Calibri" pitchFamily="34" charset="-122"/>
+                          <a:cs typeface="Calibri" pitchFamily="34" charset="-120"/>
+                        </a:rPr>
+                        <a:t>Playwright</a:t>
+                      </a:r>
+                      <a:endParaRPr lang="en-US" sz="1000" dirty="0"/>
+                    </a:p>
+                  </a:txBody>
+                  <a:tcPr marL="54864" marR="54864" marT="54864" marB="54864" anchor="ctr">
+                    <a:lnL w="9525" cap="flat" cmpd="sng" algn="ctr">
+                      <a:solidFill>
+                        <a:srgbClr val="BFBFBF"/>
+                      </a:solidFill>
+                      <a:prstDash val="solid"/>
+                      <a:round/>
+                      <a:headEnd type="none" w="med" len="med"/>
+                      <a:tailEnd type="none" w="med" len="med"/>
+                    </a:lnL>
+                    <a:lnR w="9525" cap="flat" cmpd="sng" algn="ctr">
+                      <a:solidFill>
+                        <a:srgbClr val="BFBFBF"/>
+                      </a:solidFill>
+                      <a:prstDash val="solid"/>
+                      <a:round/>
+                      <a:headEnd type="none" w="med" len="med"/>
+                      <a:tailEnd type="none" w="med" len="med"/>
+                    </a:lnR>
+                    <a:lnT w="9525" cap="flat" cmpd="sng" algn="ctr">
+                      <a:solidFill>
+                        <a:srgbClr val="BFBFBF"/>
+                      </a:solidFill>
+                      <a:prstDash val="solid"/>
+                      <a:round/>
+                      <a:headEnd type="none" w="med" len="med"/>
+                      <a:tailEnd type="none" w="med" len="med"/>
+                    </a:lnT>
+                    <a:lnB w="9525" cap="flat" cmpd="sng" algn="ctr">
+                      <a:solidFill>
+                        <a:srgbClr val="BFBFBF"/>
+                      </a:solidFill>
+                      <a:prstDash val="solid"/>
+                      <a:round/>
+                      <a:headEnd type="none" w="med" len="med"/>
+                      <a:tailEnd type="none" w="med" len="med"/>
+                    </a:lnB>
+                  </a:tcPr>
+                </a:tc>
+                <a:tc>
+                  <a:txBody>
+                    <a:bodyPr/>
+                    <a:lstStyle/>
+                    <a:p>
+                      <a:pPr marL="0" indent="0">
+                        <a:buNone/>
+                      </a:pPr>
+                      <a:r>
+                        <a:rPr lang="en-US" sz="1000" dirty="0">
+                          <a:solidFill>
+                            <a:srgbClr val="000000"/>
+                          </a:solidFill>
+                          <a:latin typeface="Calibri" pitchFamily="34" charset="0"/>
+                          <a:ea typeface="Calibri" pitchFamily="34" charset="-122"/>
+                          <a:cs typeface="Calibri" pitchFamily="34" charset="-120"/>
+                        </a:rPr>
+                        <a:t>Tier-2 credentialed portal scraping</a:t>
+                      </a:r>
+                      <a:endParaRPr lang="en-US" sz="1000" dirty="0"/>
+                    </a:p>
+                  </a:txBody>
+                  <a:tcPr marL="54864" marR="54864" marT="54864" marB="54864" anchor="ctr">
+                    <a:lnL w="9525" cap="flat" cmpd="sng" algn="ctr">
+                      <a:solidFill>
+                        <a:srgbClr val="BFBFBF"/>
+                      </a:solidFill>
+                      <a:prstDash val="solid"/>
+                      <a:round/>
+                      <a:headEnd type="none" w="med" len="med"/>
+                      <a:tailEnd type="none" w="med" len="med"/>
+                    </a:lnL>
+                    <a:lnR w="9525" cap="flat" cmpd="sng" algn="ctr">
+                      <a:solidFill>
+                        <a:srgbClr val="BFBFBF"/>
+                      </a:solidFill>
+                      <a:prstDash val="solid"/>
+                      <a:round/>
+                      <a:headEnd type="none" w="med" len="med"/>
+                      <a:tailEnd type="none" w="med" len="med"/>
+                    </a:lnR>
+                    <a:lnT w="9525" cap="flat" cmpd="sng" algn="ctr">
+                      <a:solidFill>
+                        <a:srgbClr val="BFBFBF"/>
+                      </a:solidFill>
+                      <a:prstDash val="solid"/>
+                      <a:round/>
+                      <a:headEnd type="none" w="med" len="med"/>
+                      <a:tailEnd type="none" w="med" len="med"/>
+                    </a:lnT>
+                    <a:lnB w="9525" cap="flat" cmpd="sng" algn="ctr">
+                      <a:solidFill>
+                        <a:srgbClr val="BFBFBF"/>
+                      </a:solidFill>
+                      <a:prstDash val="solid"/>
+                      <a:round/>
+                      <a:headEnd type="none" w="med" len="med"/>
+                      <a:tailEnd type="none" w="med" len="med"/>
+                    </a:lnB>
+                  </a:tcPr>
+                </a:tc>
+                <a:tc>
+                  <a:txBody>
+                    <a:bodyPr/>
+                    <a:lstStyle/>
+                    <a:p>
+                      <a:pPr marL="0" indent="0">
+                        <a:buNone/>
+                      </a:pPr>
+                      <a:r>
+                        <a:rPr lang="en-US" sz="950" dirty="0">
+                          <a:solidFill>
+                            <a:srgbClr val="000000"/>
+                          </a:solidFill>
+                          <a:latin typeface="Calibri" pitchFamily="34" charset="0"/>
+                          <a:ea typeface="Calibri" pitchFamily="34" charset="-122"/>
+                          <a:cs typeface="Calibri" pitchFamily="34" charset="-120"/>
+                        </a:rPr>
+                        <a:t>Hospital portals need login, session persistence and JavaScript rendering. Stubbed until access</a:t>
+                      </a:r>
+                      <a:endParaRPr lang="en-US" sz="950" dirty="0"/>
+                    </a:p>
+                  </a:txBody>
+                  <a:tcPr marL="54864" marR="54864" marT="54864" marB="54864" anchor="ctr">
+                    <a:lnL w="9525" cap="flat" cmpd="sng" algn="ctr">
+                      <a:solidFill>
+                        <a:srgbClr val="BFBFBF"/>
+                      </a:solidFill>
+                      <a:prstDash val="solid"/>
+                      <a:round/>
+                      <a:headEnd type="none" w="med" len="med"/>
+                      <a:tailEnd type="none" w="med" len="med"/>
+                    </a:lnL>
+                    <a:lnR w="9525" cap="flat" cmpd="sng" algn="ctr">
+                      <a:solidFill>
+                        <a:srgbClr val="BFBFBF"/>
+                      </a:solidFill>
+                      <a:prstDash val="solid"/>
+                      <a:round/>
+                      <a:headEnd type="none" w="med" len="med"/>
+                      <a:tailEnd type="none" w="med" len="med"/>
+                    </a:lnR>
+                    <a:lnT w="9525" cap="flat" cmpd="sng" algn="ctr">
+                      <a:solidFill>
+                        <a:srgbClr val="BFBFBF"/>
+                      </a:solidFill>
+                      <a:prstDash val="solid"/>
+                      <a:round/>
+                      <a:headEnd type="none" w="med" len="med"/>
+                      <a:tailEnd type="none" w="med" len="med"/>
+                    </a:lnT>
+                    <a:lnB w="9525" cap="flat" cmpd="sng" algn="ctr">
+                      <a:solidFill>
+                        <a:srgbClr val="BFBFBF"/>
+                      </a:solidFill>
+                      <a:prstDash val="solid"/>
+                      <a:round/>
+                      <a:headEnd type="none" w="med" len="med"/>
+                      <a:tailEnd type="none" w="med" len="med"/>
+                    </a:lnB>
+                  </a:tcPr>
+                </a:tc>
+                <a:extLst>
+                  <a:ext uri="{0D108BD9-81ED-4DB2-BD59-A6C34878D82A}">
+                    <a16:rowId xmlns:a16="http://schemas.microsoft.com/office/drawing/2014/main" val="10001"/>
+                  </a:ext>
+                </a:extLst>
+              </a:tr>
+              <a:tr h="440000">
+                <a:tc>
+                  <a:txBody>
+                    <a:bodyPr/>
+                    <a:lstStyle/>
+                    <a:p>
+                      <a:pPr marL="0" indent="0">
+                        <a:buNone/>
+                      </a:pPr>
+                      <a:r>
+                        <a:rPr lang="en-US" sz="1000" b="1" dirty="0">
+                          <a:solidFill>
+                            <a:srgbClr val="000000"/>
+                          </a:solidFill>
+                          <a:latin typeface="Calibri" pitchFamily="34" charset="0"/>
+                          <a:ea typeface="Calibri" pitchFamily="34" charset="-122"/>
+                          <a:cs typeface="Calibri" pitchFamily="34" charset="-120"/>
+                        </a:rPr>
+                        <a:t>Anthropic Claude API</a:t>
+                      </a:r>
+                      <a:endParaRPr lang="en-US" sz="1000" dirty="0"/>
+                    </a:p>
+                  </a:txBody>
+                  <a:tcPr marL="54864" marR="54864" marT="54864" marB="54864" anchor="ctr">
+                    <a:lnL w="9525" cap="flat" cmpd="sng" algn="ctr">
+                      <a:solidFill>
+                        <a:srgbClr val="BFBFBF"/>
+                      </a:solidFill>
+                      <a:prstDash val="solid"/>
+                      <a:round/>
+                      <a:headEnd type="none" w="med" len="med"/>
+                      <a:tailEnd type="none" w="med" len="med"/>
+                    </a:lnL>
+                    <a:lnR w="9525" cap="flat" cmpd="sng" algn="ctr">
+                      <a:solidFill>
+                        <a:srgbClr val="BFBFBF"/>
+                      </a:solidFill>
+                      <a:prstDash val="solid"/>
+                      <a:round/>
+                      <a:headEnd type="none" w="med" len="med"/>
+                      <a:tailEnd type="none" w="med" len="med"/>
+                    </a:lnR>
+                    <a:lnT w="9525" cap="flat" cmpd="sng" algn="ctr">
+                      <a:solidFill>
+                        <a:srgbClr val="BFBFBF"/>
+                      </a:solidFill>
+                      <a:prstDash val="solid"/>
+                      <a:round/>
+                      <a:headEnd type="none" w="med" len="med"/>
+                      <a:tailEnd type="none" w="med" len="med"/>
+                    </a:lnT>
+                    <a:lnB w="9525" cap="flat" cmpd="sng" algn="ctr">
+                      <a:solidFill>
+                        <a:srgbClr val="BFBFBF"/>
+                      </a:solidFill>
+                      <a:prstDash val="solid"/>
+                      <a:round/>
+                      <a:headEnd type="none" w="med" len="med"/>
+                      <a:tailEnd type="none" w="med" len="med"/>
+                    </a:lnB>
+                  </a:tcPr>
+                </a:tc>
+                <a:tc>
+                  <a:txBody>
+                    <a:bodyPr/>
+                    <a:lstStyle/>
+                    <a:p>
+                      <a:pPr marL="0" indent="0">
+                        <a:buNone/>
+                      </a:pPr>
+                      <a:r>
+                        <a:rPr lang="en-US" sz="1000" dirty="0">
+                          <a:solidFill>
+                            <a:srgbClr val="000000"/>
+                          </a:solidFill>
+                          <a:latin typeface="Calibri" pitchFamily="34" charset="0"/>
+                          <a:ea typeface="Calibri" pitchFamily="34" charset="-122"/>
+                          <a:cs typeface="Calibri" pitchFamily="34" charset="-120"/>
+                        </a:rPr>
+                        <a:t>The extraction agent (build step 6)</a:t>
+                      </a:r>
+                      <a:endParaRPr lang="en-US" sz="1000" dirty="0"/>
+                    </a:p>
+                  </a:txBody>
+                  <a:tcPr marL="54864" marR="54864" marT="54864" marB="54864" anchor="ctr">
+                    <a:lnL w="9525" cap="flat" cmpd="sng" algn="ctr">
+                      <a:solidFill>
+                        <a:srgbClr val="BFBFBF"/>
+                      </a:solidFill>
+                      <a:prstDash val="solid"/>
+                      <a:round/>
+                      <a:headEnd type="none" w="med" len="med"/>
+                      <a:tailEnd type="none" w="med" len="med"/>
+                    </a:lnL>
+                    <a:lnR w="9525" cap="flat" cmpd="sng" algn="ctr">
+                      <a:solidFill>
+                        <a:srgbClr val="BFBFBF"/>
+                      </a:solidFill>
+                      <a:prstDash val="solid"/>
+                      <a:round/>
+                      <a:headEnd type="none" w="med" len="med"/>
+                      <a:tailEnd type="none" w="med" len="med"/>
+                    </a:lnR>
+                    <a:lnT w="9525" cap="flat" cmpd="sng" algn="ctr">
+                      <a:solidFill>
+                        <a:srgbClr val="BFBFBF"/>
+                      </a:solidFill>
+                      <a:prstDash val="solid"/>
+                      <a:round/>
+                      <a:headEnd type="none" w="med" len="med"/>
+                      <a:tailEnd type="none" w="med" len="med"/>
+                    </a:lnT>
+                    <a:lnB w="9525" cap="flat" cmpd="sng" algn="ctr">
+                      <a:solidFill>
+                        <a:srgbClr val="BFBFBF"/>
+                      </a:solidFill>
+                      <a:prstDash val="solid"/>
+                      <a:round/>
+                      <a:headEnd type="none" w="med" len="med"/>
+                      <a:tailEnd type="none" w="med" len="med"/>
+                    </a:lnB>
+                  </a:tcPr>
+                </a:tc>
+                <a:tc>
+                  <a:txBody>
+                    <a:bodyPr/>
+                    <a:lstStyle/>
+                    <a:p>
+                      <a:pPr marL="0" indent="0">
+                        <a:buNone/>
+                      </a:pPr>
+                      <a:r>
+                        <a:rPr lang="en-US" sz="950" dirty="0">
+                          <a:solidFill>
+                            <a:srgbClr val="000000"/>
+                          </a:solidFill>
+                          <a:latin typeface="Calibri" pitchFamily="34" charset="0"/>
+                          <a:ea typeface="Calibri" pitchFamily="34" charset="-122"/>
+                          <a:cs typeface="Calibri" pitchFamily="34" charset="-120"/>
+                        </a:rPr>
+                        <a:t>Off-the-shelf, no fine-tuning; chosen for structured output and tool use. Not yet called</a:t>
+                      </a:r>
+                      <a:endParaRPr lang="en-US" sz="950" dirty="0"/>
+                    </a:p>
+                  </a:txBody>
+                  <a:tcPr marL="54864" marR="54864" marT="54864" marB="54864" anchor="ctr">
+                    <a:lnL w="9525" cap="flat" cmpd="sng" algn="ctr">
+                      <a:solidFill>
+                        <a:srgbClr val="BFBFBF"/>
+                      </a:solidFill>
+                      <a:prstDash val="solid"/>
+                      <a:round/>
+                      <a:headEnd type="none" w="med" len="med"/>
+                      <a:tailEnd type="none" w="med" len="med"/>
+                    </a:lnL>
+                    <a:lnR w="9525" cap="flat" cmpd="sng" algn="ctr">
+                      <a:solidFill>
+                        <a:srgbClr val="BFBFBF"/>
+                      </a:solidFill>
+                      <a:prstDash val="solid"/>
+                      <a:round/>
+                      <a:headEnd type="none" w="med" len="med"/>
+                      <a:tailEnd type="none" w="med" len="med"/>
+                    </a:lnR>
+                    <a:lnT w="9525" cap="flat" cmpd="sng" algn="ctr">
+                      <a:solidFill>
+                        <a:srgbClr val="BFBFBF"/>
+                      </a:solidFill>
+                      <a:prstDash val="solid"/>
+                      <a:round/>
+                      <a:headEnd type="none" w="med" len="med"/>
+                      <a:tailEnd type="none" w="med" len="med"/>
+                    </a:lnT>
+                    <a:lnB w="9525" cap="flat" cmpd="sng" algn="ctr">
+                      <a:solidFill>
+                        <a:srgbClr val="BFBFBF"/>
+                      </a:solidFill>
+                      <a:prstDash val="solid"/>
+                      <a:round/>
+                      <a:headEnd type="none" w="med" len="med"/>
+                      <a:tailEnd type="none" w="med" len="med"/>
+                    </a:lnB>
+                  </a:tcPr>
+                </a:tc>
+                <a:extLst>
+                  <a:ext uri="{0D108BD9-81ED-4DB2-BD59-A6C34878D82A}">
+                    <a16:rowId xmlns:a16="http://schemas.microsoft.com/office/drawing/2014/main" val="10001"/>
+                  </a:ext>
+                </a:extLst>
+              </a:tr>
+              <a:tr h="440000">
+                <a:tc>
+                  <a:txBody>
+                    <a:bodyPr/>
+                    <a:lstStyle/>
+                    <a:p>
+                      <a:pPr marL="0" indent="0">
+                        <a:buNone/>
+                      </a:pPr>
+                      <a:r>
+                        <a:rPr lang="en-US" sz="1000" b="1" dirty="0">
+                          <a:solidFill>
+                            <a:srgbClr val="000000"/>
+                          </a:solidFill>
+                          <a:latin typeface="Calibri" pitchFamily="34" charset="0"/>
+                          <a:ea typeface="Calibri" pitchFamily="34" charset="-122"/>
+                          <a:cs typeface="Calibri" pitchFamily="34" charset="-120"/>
+                        </a:rPr>
+                        <a:t>HL7 / FHIR / DICOM / ISO-IEEE 11073</a:t>
+                      </a:r>
+                      <a:endParaRPr lang="en-US" sz="1000" dirty="0"/>
+                    </a:p>
+                  </a:txBody>
+                  <a:tcPr marL="54864" marR="54864" marT="54864" marB="54864" anchor="ctr">
+                    <a:lnL w="9525" cap="flat" cmpd="sng" algn="ctr">
+                      <a:solidFill>
+                        <a:srgbClr val="BFBFBF"/>
+                      </a:solidFill>
+                      <a:prstDash val="solid"/>
+                      <a:round/>
+                      <a:headEnd type="none" w="med" len="med"/>
+                      <a:tailEnd type="none" w="med" len="med"/>
+                    </a:lnL>
+                    <a:lnR w="9525" cap="flat" cmpd="sng" algn="ctr">
+                      <a:solidFill>
+                        <a:srgbClr val="BFBFBF"/>
+                      </a:solidFill>
+                      <a:prstDash val="solid"/>
+                      <a:round/>
+                      <a:headEnd type="none" w="med" len="med"/>
+                      <a:tailEnd type="none" w="med" len="med"/>
+                    </a:lnR>
+                    <a:lnT w="9525" cap="flat" cmpd="sng" algn="ctr">
+                      <a:solidFill>
+                        <a:srgbClr val="BFBFBF"/>
+                      </a:solidFill>
+                      <a:prstDash val="solid"/>
+                      <a:round/>
+                      <a:headEnd type="none" w="med" len="med"/>
+                      <a:tailEnd type="none" w="med" len="med"/>
+                    </a:lnT>
+                    <a:lnB w="9525" cap="flat" cmpd="sng" algn="ctr">
+                      <a:solidFill>
+                        <a:srgbClr val="BFBFBF"/>
+                      </a:solidFill>
+                      <a:prstDash val="solid"/>
+                      <a:round/>
+                      <a:headEnd type="none" w="med" len="med"/>
+                      <a:tailEnd type="none" w="med" len="med"/>
+                    </a:lnB>
+                  </a:tcPr>
+                </a:tc>
+                <a:tc>
+                  <a:txBody>
+                    <a:bodyPr/>
+                    <a:lstStyle/>
+                    <a:p>
+                      <a:pPr marL="0" indent="0">
+                        <a:buNone/>
+                      </a:pPr>
+                      <a:r>
+                        <a:rPr lang="en-US" sz="1000" dirty="0">
+                          <a:solidFill>
+                            <a:srgbClr val="000000"/>
+                          </a:solidFill>
+                          <a:latin typeface="Calibri" pitchFamily="34" charset="0"/>
+                          <a:ea typeface="Calibri" pitchFamily="34" charset="-122"/>
+                          <a:cs typeface="Calibri" pitchFamily="34" charset="-120"/>
+                        </a:rPr>
+                        <a:t>Interoperability shaping per HIS layer</a:t>
+                      </a:r>
+                      <a:endParaRPr lang="en-US" sz="1000" dirty="0"/>
+                    </a:p>
+                  </a:txBody>
+                  <a:tcPr marL="54864" marR="54864" marT="54864" marB="54864" anchor="ctr">
+                    <a:lnL w="9525" cap="flat" cmpd="sng" algn="ctr">
+                      <a:solidFill>
+                        <a:srgbClr val="BFBFBF"/>
+                      </a:solidFill>
+                      <a:prstDash val="solid"/>
+                      <a:round/>
+                      <a:headEnd type="none" w="med" len="med"/>
+                      <a:tailEnd type="none" w="med" len="med"/>
+                    </a:lnL>
+                    <a:lnR w="9525" cap="flat" cmpd="sng" algn="ctr">
+                      <a:solidFill>
+                        <a:srgbClr val="BFBFBF"/>
+                      </a:solidFill>
+                      <a:prstDash val="solid"/>
+                      <a:round/>
+                      <a:headEnd type="none" w="med" len="med"/>
+                      <a:tailEnd type="none" w="med" len="med"/>
+                    </a:lnR>
+                    <a:lnT w="9525" cap="flat" cmpd="sng" algn="ctr">
+                      <a:solidFill>
+                        <a:srgbClr val="BFBFBF"/>
+                      </a:solidFill>
+                      <a:prstDash val="solid"/>
+                      <a:round/>
+                      <a:headEnd type="none" w="med" len="med"/>
+                      <a:tailEnd type="none" w="med" len="med"/>
+                    </a:lnT>
+                    <a:lnB w="9525" cap="flat" cmpd="sng" algn="ctr">
+                      <a:solidFill>
+                        <a:srgbClr val="BFBFBF"/>
+                      </a:solidFill>
+                      <a:prstDash val="solid"/>
+                      <a:round/>
+                      <a:headEnd type="none" w="med" len="med"/>
+                      <a:tailEnd type="none" w="med" len="med"/>
+                    </a:lnB>
+                  </a:tcPr>
+                </a:tc>
+                <a:tc>
+                  <a:txBody>
+                    <a:bodyPr/>
+                    <a:lstStyle/>
+                    <a:p>
+                      <a:pPr marL="0" indent="0">
+                        <a:buNone/>
+                      </a:pPr>
+                      <a:r>
+                        <a:rPr lang="en-US" sz="950" dirty="0">
+                          <a:solidFill>
+                            <a:srgbClr val="000000"/>
+                          </a:solidFill>
+                          <a:latin typeface="Calibri" pitchFamily="34" charset="0"/>
+                          <a:ea typeface="Calibri" pitchFamily="34" charset="-122"/>
+                          <a:cs typeface="Calibri" pitchFamily="34" charset="-120"/>
+                        </a:rPr>
+                        <a:t>Hand-rolled lightweight shapers — no vendor libraries and no vendor names in core logic</a:t>
+                      </a:r>
+                      <a:endParaRPr lang="en-US" sz="950" dirty="0"/>
+                    </a:p>
+                  </a:txBody>
+                  <a:tcPr marL="54864" marR="54864" marT="54864" marB="54864" anchor="ctr">
+                    <a:lnL w="9525" cap="flat" cmpd="sng" algn="ctr">
+                      <a:solidFill>
+                        <a:srgbClr val="BFBFBF"/>
+                      </a:solidFill>
+                      <a:prstDash val="solid"/>
+                      <a:round/>
+                      <a:headEnd type="none" w="med" len="med"/>
+                      <a:tailEnd type="none" w="med" len="med"/>
+                    </a:lnL>
+                    <a:lnR w="9525" cap="flat" cmpd="sng" algn="ctr">
+                      <a:solidFill>
+                        <a:srgbClr val="BFBFBF"/>
+                      </a:solidFill>
+                      <a:prstDash val="solid"/>
+                      <a:round/>
+                      <a:headEnd type="none" w="med" len="med"/>
+                      <a:tailEnd type="none" w="med" len="med"/>
+                    </a:lnR>
+                    <a:lnT w="9525" cap="flat" cmpd="sng" algn="ctr">
+                      <a:solidFill>
+                        <a:srgbClr val="BFBFBF"/>
+                      </a:solidFill>
+                      <a:prstDash val="solid"/>
+                      <a:round/>
+                      <a:headEnd type="none" w="med" len="med"/>
+                      <a:tailEnd type="none" w="med" len="med"/>
+                    </a:lnT>
+                    <a:lnB w="9525" cap="flat" cmpd="sng" algn="ctr">
+                      <a:solidFill>
+                        <a:srgbClr val="BFBFBF"/>
+                      </a:solidFill>
+                      <a:prstDash val="solid"/>
+                      <a:round/>
+                      <a:headEnd type="none" w="med" len="med"/>
+                      <a:tailEnd type="none" w="med" len="med"/>
+                    </a:lnB>
+                  </a:tcPr>
+                </a:tc>
+                <a:extLst>
+                  <a:ext uri="{0D108BD9-81ED-4DB2-BD59-A6C34878D82A}">
+                    <a16:rowId xmlns:a16="http://schemas.microsoft.com/office/drawing/2014/main" val="10001"/>
+                  </a:ext>
+                </a:extLst>
+              </a:tr>
+            </a:tbl>
+          </a:graphicData>
+        </a:graphic>
+      </p:graphicFrame>
+      <p:sp>
+        <p:nvSpPr>
+          <p:cNvPr id="41" name="Text 41"/>
+          <p:cNvSpPr txBox="1"/>
+          <p:nvPr/>
+        </p:nvSpPr>
+        <p:spPr>
+          <a:xfrm>
+            <a:off x="640080" y="4900000"/>
+            <a:ext cx="10900000" cy="1500000"/>
+          </a:xfrm>
+          <a:prstGeom prst="rect">
+            <a:avLst/>
+          </a:prstGeom>
+          <a:noFill/>
+          <a:ln/>
+        </p:spPr>
+        <p:txBody>
+          <a:bodyPr wrap="square" lIns="0" tIns="0" rIns="0" bIns="0" rtlCol="0" anchor="t"/>
+          <a:lstStyle/>
+          <a:p>
+            <a:pPr marL="177800" indent="-177800">
+              <a:spcAft>
+                <a:spcPts val="380"/>
+              </a:spcAft>
+              <a:buSzPct val="100000"/>
+              <a:buChar char="•"/>
+            </a:pPr>
+            <a:r>
+              <a:rPr lang="en-US" sz="1100" dirty="0">
+                <a:solidFill>
+                  <a:srgbClr val="000000"/>
+                </a:solidFill>
+                <a:latin typeface="Calibri" pitchFamily="34" charset="0"/>
+                <a:ea typeface="Calibri" pitchFamily="34" charset="-122"/>
+                <a:cs typeface="Calibri" pitchFamily="34" charset="-120"/>
+              </a:rPr>
+              <a:t>Where this runs: everything executes locally on project machines against self-generated synthetic data — 50 records per layer across four HIS layers, seeded. No network calls, no cloud service, no connection to any hospital system.</a:t>
+            </a:r>
+          </a:p>
+          <a:p>
+            <a:pPr marL="177800" indent="-177800">
+              <a:spcAft>
+                <a:spcPts val="380"/>
+              </a:spcAft>
+              <a:buSzPct val="100000"/>
+              <a:buChar char="•"/>
+            </a:pPr>
+            <a:r>
+              <a:rPr lang="en-US" sz="1100" dirty="0">
+                <a:solidFill>
+                  <a:srgbClr val="000000"/>
+                </a:solidFill>
+                <a:latin typeface="Calibri" pitchFamily="34" charset="0"/>
+                <a:ea typeface="Calibri" pitchFamily="34" charset="-122"/>
+                <a:cs typeface="Calibri" pitchFamily="34" charset="-120"/>
+              </a:rPr>
+              <a:t>Code, the seven rules, the benchmarking harness and three runnable demos live in one Git repository; every result is written out as JSON and Markdown so the report can cite the artifact rather than a screenshot.</a:t>
+            </a:r>
+          </a:p>
+          <a:p>
+            <a:pPr marL="177800" indent="-177800">
+              <a:spcAft>
+                <a:spcPts val="380"/>
+              </a:spcAft>
+              <a:buSzPct val="100000"/>
+              <a:buChar char="•"/>
+            </a:pPr>
+            <a:r>
+              <a:rPr lang="en-US" sz="1100" dirty="0">
+                <a:solidFill>
+                  <a:srgbClr val="000000"/>
+                </a:solidFill>
+                <a:latin typeface="Calibri" pitchFamily="34" charset="0"/>
+                <a:ea typeface="Calibri" pitchFamily="34" charset="-122"/>
+                <a:cs typeface="Calibri" pitchFamily="34" charset="-120"/>
+              </a:rPr>
+              <a:t>Live HIS access, when it opens, changes exactly one thing: the adapter behind the HISDataSource interface (build step 7).</a:t>
+            </a:r>
+          </a:p>
+        </p:txBody>
+      </p:sp>
+    </p:spTree>
+  </p:cSld>
+  <p:clrMapOvr>
+    <a:masterClrMapping/>
+  </p:clrMapOvr>
+</p:sld>
+</file>
+
 <file path=ppt/slides/slide2.xml><?xml version="1.0" encoding="utf-8"?>
 <p:sld xmlns:a="http://schemas.openxmlformats.org/drawingml/2006/main" xmlns:r="http://schemas.openxmlformats.org/officeDocument/2006/relationships" xmlns:p="http://schemas.openxmlformats.org/presentationml/2006/main">
   <p:cSld name="Slide 4">
@@ -2862,7 +4260,7 @@
                 <a:ea typeface="Calibri" pitchFamily="34" charset="-122"/>
                 <a:cs typeface="Calibri" pitchFamily="34" charset="-120"/>
               </a:rPr>
-              <a:t>4</a:t>
+              <a:t>2</a:t>
             </a:r>
             <a:endParaRPr lang="en-US" sz="1000" dirty="0"/>
           </a:p>
@@ -3271,7 +4669,7 @@
                 <a:ea typeface="Calibri" pitchFamily="34" charset="-122"/>
                 <a:cs typeface="Calibri" pitchFamily="34" charset="-120"/>
               </a:rPr>
-              <a:t>5</a:t>
+              <a:t>3</a:t>
             </a:r>
             <a:endParaRPr lang="en-US" sz="1000" dirty="0"/>
           </a:p>
@@ -5727,7 +7125,7 @@
                 <a:ea typeface="Calibri" pitchFamily="34" charset="-122"/>
                 <a:cs typeface="Calibri" pitchFamily="34" charset="-120"/>
               </a:rPr>
-              <a:t>6</a:t>
+              <a:t>4</a:t>
             </a:r>
             <a:endParaRPr lang="en-US" sz="1000" dirty="0"/>
           </a:p>
@@ -8183,7 +9581,7 @@
                 <a:ea typeface="Calibri" pitchFamily="34" charset="-122"/>
                 <a:cs typeface="Calibri" pitchFamily="34" charset="-120"/>
               </a:rPr>
-              <a:t>7</a:t>
+              <a:t>5</a:t>
             </a:r>
             <a:endParaRPr lang="en-US" sz="1000" dirty="0"/>
           </a:p>
@@ -8275,16 +9673,16 @@
           <a:p>
             <a:pPr marL="177800" indent="-177800">
               <a:spcBef>
-                <a:spcPts val="700"/>
+                <a:spcPts val="600"/>
               </a:spcBef>
               <a:spcAft>
-                <a:spcPts val="300"/>
+                <a:spcPts val="250"/>
               </a:spcAft>
               <a:buSzPct val="100000"/>
               <a:buChar char="•"/>
             </a:pPr>
             <a:r>
-              <a:rPr lang="en-US" sz="1500" b="1" dirty="0">
+              <a:rPr lang="en-US" sz="1400" b="1" dirty="0">
                 <a:solidFill>
                   <a:srgbClr val="1D2F82"/>
                 </a:solidFill>
@@ -8298,13 +9696,13 @@
           <a:p>
             <a:pPr marL="457200" lvl="1" indent="-228600">
               <a:spcAft>
-                <a:spcPts val="500"/>
+                <a:spcPts val="360"/>
               </a:spcAft>
               <a:buSzPct val="90000"/>
               <a:buChar char="–"/>
             </a:pPr>
             <a:r>
-              <a:rPr lang="en-US" sz="1250" dirty="0">
+              <a:rPr lang="en-US" sz="1150" dirty="0">
                 <a:solidFill>
                   <a:srgbClr val="000000"/>
                 </a:solidFill>
@@ -8312,19 +9710,19 @@
                 <a:ea typeface="Calibri" pitchFamily="34" charset="-122"/>
                 <a:cs typeface="Calibri" pitchFamily="34" charset="-120"/>
               </a:rPr>
-              <a:t>A DPDP-compliance benchmarking harness that scores any HIS extraction run against data-protection criteria and returns one 0–1 compliance score plus a per-rule breakdown.</a:t>
+              <a:t>A DPDP-compliance benchmarking harness that scores any HIS extraction run against seven data-protection principles and returns one 0–1 score with a written reason for every mark lost.</a:t>
             </a:r>
           </a:p>
           <a:p>
             <a:pPr marL="457200" lvl="1" indent="-228600">
               <a:spcAft>
-                <a:spcPts val="500"/>
+                <a:spcPts val="360"/>
               </a:spcAft>
               <a:buSzPct val="90000"/>
               <a:buChar char="–"/>
             </a:pPr>
             <a:r>
-              <a:rPr lang="en-US" sz="1250" dirty="0">
+              <a:rPr lang="en-US" sz="1150" dirty="0">
                 <a:solidFill>
                   <a:srgbClr val="000000"/>
                 </a:solidFill>
@@ -8332,22 +9730,22 @@
                 <a:ea typeface="Calibri" pitchFamily="34" charset="-122"/>
                 <a:cs typeface="Calibri" pitchFamily="34" charset="-120"/>
               </a:rPr>
-              <a:t>The same harness scores every technique — including baselines such as AutoScraper — so extraction methods become directly comparable on compliance.</a:t>
+              <a:t>The same harness scores every technique, making extraction methods directly comparable on compliance — a fourth evaluation axis alongside speed, coverage and robustness.</a:t>
             </a:r>
           </a:p>
           <a:p>
             <a:pPr marL="177800" indent="-177800">
               <a:spcBef>
-                <a:spcPts val="700"/>
+                <a:spcPts val="600"/>
               </a:spcBef>
               <a:spcAft>
-                <a:spcPts val="300"/>
+                <a:spcPts val="250"/>
               </a:spcAft>
               <a:buSzPct val="100000"/>
               <a:buChar char="•"/>
             </a:pPr>
             <a:r>
-              <a:rPr lang="en-US" sz="1500" b="1" dirty="0">
+              <a:rPr lang="en-US" sz="1400" b="1" dirty="0">
                 <a:solidFill>
                   <a:srgbClr val="1D2F82"/>
                 </a:solidFill>
@@ -8355,19 +9753,19 @@
                 <a:ea typeface="Calibri" pitchFamily="34" charset="-122"/>
                 <a:cs typeface="Calibri" pitchFamily="34" charset="-120"/>
               </a:rPr>
-              <a:t>Methodology / Approach:</a:t>
+              <a:t>Representing an extraction run as data:</a:t>
             </a:r>
           </a:p>
           <a:p>
             <a:pPr marL="457200" lvl="1" indent="-228600">
               <a:spcAft>
-                <a:spcPts val="500"/>
+                <a:spcPts val="360"/>
               </a:spcAft>
               <a:buSzPct val="90000"/>
               <a:buChar char="–"/>
             </a:pPr>
             <a:r>
-              <a:rPr lang="en-US" sz="1250" dirty="0">
+              <a:rPr lang="en-US" sz="1150" dirty="0">
                 <a:solidFill>
                   <a:srgbClr val="000000"/>
                 </a:solidFill>
@@ -8375,19 +9773,19 @@
                 <a:ea typeface="Calibri" pitchFamily="34" charset="-122"/>
                 <a:cs typeface="Calibri" pitchFamily="34" charset="-120"/>
               </a:rPr>
-              <a:t>A run is represented as data: a manifest (purpose, lawful basis, retention, deletion, security posture) + records tagged only by field category — no personal values enter the benchmark.</a:t>
+              <a:t>ExtractionRun — the manifest a technique declares about itself: processing purpose, lawful basis and its reference, retention period, deletion mechanism, security posture, notice and governance.</a:t>
             </a:r>
           </a:p>
           <a:p>
             <a:pPr marL="457200" lvl="1" indent="-228600">
               <a:spcAft>
-                <a:spcPts val="500"/>
+                <a:spcPts val="360"/>
               </a:spcAft>
               <a:buSzPct val="90000"/>
               <a:buChar char="–"/>
             </a:pPr>
             <a:r>
-              <a:rPr lang="en-US" sz="1250" dirty="0">
+              <a:rPr lang="en-US" sz="1150" dirty="0">
                 <a:solidFill>
                   <a:srgbClr val="000000"/>
                 </a:solidFill>
@@ -8395,19 +9793,19 @@
                 <a:ea typeface="Calibri" pitchFamily="34" charset="-122"/>
                 <a:cs typeface="Calibri" pitchFamily="34" charset="-120"/>
               </a:rPr>
-              <a:t>Seven executable rules — data minimisation, lawful basis, storage limitation, security safeguards, purpose limitation, transparency/notice, accountability — each returns pass/fail, a 0–1 score and plain findings; overall = mean of applicable rules.</a:t>
+              <a:t>ExtractedRecord — a record tagged only by DPDP field category (direct identifier, quasi-identifier, clinical, financial, administrative, contact). No values are carried, so no personal data enters the benchmark.</a:t>
             </a:r>
           </a:p>
           <a:p>
             <a:pPr marL="457200" lvl="1" indent="-228600">
               <a:spcAft>
-                <a:spcPts val="500"/>
+                <a:spcPts val="360"/>
               </a:spcAft>
               <a:buSzPct val="90000"/>
               <a:buChar char="–"/>
             </a:pPr>
             <a:r>
-              <a:rPr lang="en-US" sz="1250" dirty="0">
+              <a:rPr lang="en-US" sz="1150" dirty="0">
                 <a:solidFill>
                   <a:srgbClr val="000000"/>
                 </a:solidFill>
@@ -8415,19 +9813,42 @@
                 <a:ea typeface="Calibri" pitchFamily="34" charset="-122"/>
                 <a:cs typeface="Calibri" pitchFamily="34" charset="-120"/>
               </a:rPr>
-              <a:t>Pluggable data source (adapter pattern): synthetic HIS generator now, live credentialed HIS later, no downstream change. HIS heterogeneity is absorbed here and by scoring categories, not vendor fields.</a:t>
+              <a:t>A field catalogue maps every HIS field name to its category, so the rules reason about categories and never about vendor-specific field names.</a:t>
+            </a:r>
+          </a:p>
+          <a:p>
+            <a:pPr marL="177800" indent="-177800">
+              <a:spcBef>
+                <a:spcPts val="600"/>
+              </a:spcBef>
+              <a:spcAft>
+                <a:spcPts val="250"/>
+              </a:spcAft>
+              <a:buSzPct val="100000"/>
+              <a:buChar char="•"/>
+            </a:pPr>
+            <a:r>
+              <a:rPr lang="en-US" sz="1400" b="1" dirty="0">
+                <a:solidFill>
+                  <a:srgbClr val="1D2F82"/>
+                </a:solidFill>
+                <a:latin typeface="Calibri" pitchFamily="34" charset="0"/>
+                <a:ea typeface="Calibri" pitchFamily="34" charset="-122"/>
+                <a:cs typeface="Calibri" pitchFamily="34" charset="-120"/>
+              </a:rPr>
+              <a:t>The purpose policy — the auditable rulebook:</a:t>
             </a:r>
           </a:p>
           <a:p>
             <a:pPr marL="457200" lvl="1" indent="-228600">
               <a:spcAft>
-                <a:spcPts val="500"/>
+                <a:spcPts val="360"/>
               </a:spcAft>
               <a:buSzPct val="90000"/>
               <a:buChar char="–"/>
             </a:pPr>
             <a:r>
-              <a:rPr lang="en-US" sz="1250" dirty="0">
+              <a:rPr lang="en-US" sz="1150" dirty="0">
                 <a:solidFill>
                   <a:srgbClr val="000000"/>
                 </a:solidFill>
@@ -8435,42 +9856,19 @@
                 <a:ea typeface="Calibri" pitchFamily="34" charset="-122"/>
                 <a:cs typeface="Calibri" pitchFamily="34" charset="-120"/>
               </a:rPr>
-              <a:t>Extraction agent = an off-the-shelf LLM driven agentically (AXE-method-inspired): prompt and tool design plus evaluation on synthetic data — no model fine-tuning.</a:t>
-            </a:r>
-          </a:p>
-          <a:p>
-            <a:pPr marL="177800" indent="-177800">
-              <a:spcBef>
-                <a:spcPts val="700"/>
-              </a:spcBef>
-              <a:spcAft>
-                <a:spcPts val="300"/>
-              </a:spcAft>
-              <a:buSzPct val="100000"/>
-              <a:buChar char="•"/>
-            </a:pPr>
-            <a:r>
-              <a:rPr lang="en-US" sz="1500" b="1" dirty="0">
-                <a:solidFill>
-                  <a:srgbClr val="1D2F82"/>
-                </a:solidFill>
-                <a:latin typeface="Calibri" pitchFamily="34" charset="0"/>
-                <a:ea typeface="Calibri" pitchFamily="34" charset="-122"/>
-                <a:cs typeface="Calibri" pitchFamily="34" charset="-120"/>
-              </a:rPr>
-              <a:t>Project Scope (in scope / out of scope):</a:t>
+              <a:t>One declarative table states, per processing purpose, which categories are necessary, the retention ceiling, and whether direct identifiers must be pseudonymised.</a:t>
             </a:r>
           </a:p>
           <a:p>
             <a:pPr marL="457200" lvl="1" indent="-228600">
               <a:spcAft>
-                <a:spcPts val="500"/>
+                <a:spcPts val="360"/>
               </a:spcAft>
               <a:buSzPct val="90000"/>
               <a:buChar char="–"/>
             </a:pPr>
             <a:r>
-              <a:rPr lang="en-US" sz="1250" dirty="0">
+              <a:rPr lang="en-US" sz="1150" dirty="0">
                 <a:solidFill>
                   <a:srgbClr val="000000"/>
                 </a:solidFill>
@@ -8478,27 +9876,7 @@
                 <a:ea typeface="Calibri" pitchFamily="34" charset="-122"/>
                 <a:cs typeface="Calibri" pitchFamily="34" charset="-120"/>
               </a:rPr>
-              <a:t>In scope: Tier-2 headless-browser extraction, the compliance rule set and harness, synthetic HIS data, benchmarking against baseline techniques, and the project report.</a:t>
-            </a:r>
-          </a:p>
-          <a:p>
-            <a:pPr marL="457200" lvl="1" indent="-228600">
-              <a:spcAft>
-                <a:spcPts val="500"/>
-              </a:spcAft>
-              <a:buSzPct val="90000"/>
-              <a:buChar char="–"/>
-            </a:pPr>
-            <a:r>
-              <a:rPr lang="en-US" sz="1250" dirty="0">
-                <a:solidFill>
-                  <a:srgbClr val="000000"/>
-                </a:solidFill>
-                <a:latin typeface="Calibri" pitchFamily="34" charset="0"/>
-                <a:ea typeface="Calibri" pitchFamily="34" charset="-122"/>
-                <a:cs typeface="Calibri" pitchFamily="34" charset="-120"/>
-              </a:rPr>
-              <a:t>Out of scope: production deployment; live-HIS runs until credentialed data access is enabled.</a:t>
+              <a:t>Tuning the compliance envelope is a configuration edit, not a change to rule code — a clinician or data protection officer can inspect and challenge it without reading the implementation.</a:t>
             </a:r>
           </a:p>
         </p:txBody>
@@ -8608,7 +9986,7 @@
                 <a:ea typeface="Calibri" pitchFamily="34" charset="-122"/>
                 <a:cs typeface="Calibri" pitchFamily="34" charset="-120"/>
               </a:rPr>
-              <a:t>Work Completed, Timeline &amp; Tools</a:t>
+              <a:t>Work Completed &amp; Timeline</a:t>
             </a:r>
             <a:endParaRPr lang="en-US" sz="2800" dirty="0"/>
           </a:p>
@@ -8661,16 +10039,16 @@
           <a:p>
             <a:pPr marL="177800" indent="-177800">
               <a:spcBef>
-                <a:spcPts val="700"/>
+                <a:spcPts val="600"/>
               </a:spcBef>
               <a:spcAft>
-                <a:spcPts val="300"/>
+                <a:spcPts val="250"/>
               </a:spcAft>
               <a:buSzPct val="100000"/>
               <a:buChar char="•"/>
             </a:pPr>
             <a:r>
-              <a:rPr lang="en-US" sz="1500" b="1" dirty="0">
+              <a:rPr lang="en-US" sz="1400" b="1" dirty="0">
                 <a:solidFill>
                   <a:srgbClr val="1D2F82"/>
                 </a:solidFill>
@@ -8684,13 +10062,13 @@
           <a:p>
             <a:pPr marL="457200" lvl="1" indent="-228600">
               <a:spcAft>
-                <a:spcPts val="500"/>
+                <a:spcPts val="360"/>
               </a:spcAft>
               <a:buSzPct val="90000"/>
               <a:buChar char="–"/>
             </a:pPr>
             <a:r>
-              <a:rPr lang="en-US" sz="1250" dirty="0">
+              <a:rPr lang="en-US" sz="1150" dirty="0">
                 <a:solidFill>
                   <a:srgbClr val="000000"/>
                 </a:solidFill>
@@ -8704,13 +10082,13 @@
           <a:p>
             <a:pPr marL="457200" lvl="1" indent="-228600">
               <a:spcAft>
-                <a:spcPts val="500"/>
+                <a:spcPts val="360"/>
               </a:spcAft>
               <a:buSzPct val="90000"/>
               <a:buChar char="–"/>
             </a:pPr>
             <a:r>
-              <a:rPr lang="en-US" sz="1250" dirty="0">
+              <a:rPr lang="en-US" sz="1150" dirty="0">
                 <a:solidFill>
                   <a:srgbClr val="000000"/>
                 </a:solidFill>
@@ -8724,13 +10102,13 @@
           <a:p>
             <a:pPr marL="457200" lvl="1" indent="-228600">
               <a:spcAft>
-                <a:spcPts val="500"/>
+                <a:spcPts val="360"/>
               </a:spcAft>
               <a:buSzPct val="90000"/>
               <a:buChar char="–"/>
             </a:pPr>
             <a:r>
-              <a:rPr lang="en-US" sz="1250" dirty="0">
+              <a:rPr lang="en-US" sz="1150" dirty="0">
                 <a:solidFill>
                   <a:srgbClr val="000000"/>
                 </a:solidFill>
@@ -8744,13 +10122,13 @@
           <a:p>
             <a:pPr marL="457200" lvl="1" indent="-228600">
               <a:spcAft>
-                <a:spcPts val="500"/>
+                <a:spcPts val="360"/>
               </a:spcAft>
               <a:buSzPct val="90000"/>
               <a:buChar char="–"/>
             </a:pPr>
             <a:r>
-              <a:rPr lang="en-US" sz="1250" dirty="0">
+              <a:rPr lang="en-US" sz="1150" dirty="0">
                 <a:solidFill>
                   <a:srgbClr val="000000"/>
                 </a:solidFill>
@@ -8764,16 +10142,16 @@
           <a:p>
             <a:pPr marL="177800" indent="-177800">
               <a:spcBef>
-                <a:spcPts val="700"/>
+                <a:spcPts val="600"/>
               </a:spcBef>
               <a:spcAft>
-                <a:spcPts val="300"/>
+                <a:spcPts val="250"/>
               </a:spcAft>
               <a:buSzPct val="100000"/>
               <a:buChar char="•"/>
             </a:pPr>
             <a:r>
-              <a:rPr lang="en-US" sz="1500" b="1" dirty="0">
+              <a:rPr lang="en-US" sz="1400" b="1" dirty="0">
                 <a:solidFill>
                   <a:srgbClr val="1D2F82"/>
                 </a:solidFill>
@@ -8787,13 +10165,13 @@
           <a:p>
             <a:pPr marL="457200" lvl="1" indent="-228600">
               <a:spcAft>
-                <a:spcPts val="500"/>
+                <a:spcPts val="360"/>
               </a:spcAft>
               <a:buSzPct val="90000"/>
               <a:buChar char="–"/>
             </a:pPr>
             <a:r>
-              <a:rPr lang="en-US" sz="1250" dirty="0">
+              <a:rPr lang="en-US" sz="1150" dirty="0">
                 <a:solidFill>
                   <a:srgbClr val="000000"/>
                 </a:solidFill>
@@ -8807,13 +10185,13 @@
           <a:p>
             <a:pPr marL="457200" lvl="1" indent="-228600">
               <a:spcAft>
-                <a:spcPts val="500"/>
+                <a:spcPts val="360"/>
               </a:spcAft>
               <a:buSzPct val="90000"/>
               <a:buChar char="–"/>
             </a:pPr>
             <a:r>
-              <a:rPr lang="en-US" sz="1250" dirty="0">
+              <a:rPr lang="en-US" sz="1150" dirty="0">
                 <a:solidFill>
                   <a:srgbClr val="000000"/>
                 </a:solidFill>
@@ -8827,13 +10205,13 @@
           <a:p>
             <a:pPr marL="457200" lvl="1" indent="-228600">
               <a:spcAft>
-                <a:spcPts val="500"/>
+                <a:spcPts val="360"/>
               </a:spcAft>
               <a:buSzPct val="90000"/>
               <a:buChar char="–"/>
             </a:pPr>
             <a:r>
-              <a:rPr lang="en-US" sz="1250" dirty="0">
+              <a:rPr lang="en-US" sz="1150" dirty="0">
                 <a:solidFill>
                   <a:srgbClr val="000000"/>
                 </a:solidFill>
@@ -8842,69 +10220,6 @@
                 <a:cs typeface="Calibri" pitchFamily="34" charset="-120"/>
               </a:rPr>
               <a:t>Review-III (100%): full benchmarking across techniques, complete project report and publication-ready manuscript.</a:t>
-            </a:r>
-          </a:p>
-          <a:p>
-            <a:pPr marL="177800" indent="-177800">
-              <a:spcBef>
-                <a:spcPts val="700"/>
-              </a:spcBef>
-              <a:spcAft>
-                <a:spcPts val="300"/>
-              </a:spcAft>
-              <a:buSzPct val="100000"/>
-              <a:buChar char="•"/>
-            </a:pPr>
-            <a:r>
-              <a:rPr lang="en-US" sz="1500" b="1" dirty="0">
-                <a:solidFill>
-                  <a:srgbClr val="1D2F82"/>
-                </a:solidFill>
-                <a:latin typeface="Calibri" pitchFamily="34" charset="0"/>
-                <a:ea typeface="Calibri" pitchFamily="34" charset="-122"/>
-                <a:cs typeface="Calibri" pitchFamily="34" charset="-120"/>
-              </a:rPr>
-              <a:t>Tools &amp; technologies (software / hardware / datasets):</a:t>
-            </a:r>
-          </a:p>
-          <a:p>
-            <a:pPr marL="457200" lvl="1" indent="-228600">
-              <a:spcAft>
-                <a:spcPts val="500"/>
-              </a:spcAft>
-              <a:buSzPct val="90000"/>
-              <a:buChar char="–"/>
-            </a:pPr>
-            <a:r>
-              <a:rPr lang="en-US" sz="1250" dirty="0">
-                <a:solidFill>
-                  <a:srgbClr val="000000"/>
-                </a:solidFill>
-                <a:latin typeface="Calibri" pitchFamily="34" charset="0"/>
-                <a:ea typeface="Calibri" pitchFamily="34" charset="-122"/>
-                <a:cs typeface="Calibri" pitchFamily="34" charset="-120"/>
-              </a:rPr>
-              <a:t>Python, pytest; Faker / pandas for synthetic records; Selenium / Playwright for Tier-2 (stubbed until data access); Anthropic Claude API for the AXE-inspired agent; HL7 / FHIR-shaped schemas.</a:t>
-            </a:r>
-          </a:p>
-          <a:p>
-            <a:pPr marL="457200" lvl="1" indent="-228600">
-              <a:spcAft>
-                <a:spcPts val="500"/>
-              </a:spcAft>
-              <a:buSzPct val="90000"/>
-              <a:buChar char="–"/>
-            </a:pPr>
-            <a:r>
-              <a:rPr lang="en-US" sz="1250" dirty="0">
-                <a:solidFill>
-                  <a:srgbClr val="000000"/>
-                </a:solidFill>
-                <a:latin typeface="Calibri" pitchFamily="34" charset="0"/>
-                <a:ea typeface="Calibri" pitchFamily="34" charset="-122"/>
-                <a:cs typeface="Calibri" pitchFamily="34" charset="-120"/>
-              </a:rPr>
-              <a:t>Data: self-generated synthetic HIS records only — no personal data. Credentialed live-HIS access is secured but not yet usable.</a:t>
             </a:r>
           </a:p>
         </p:txBody>
@@ -10573,7 +11888,14 @@
           <a:lstStyle/>
           <a:p>
             <a:r>
-              <a:rPr lang="en-IN" sz="2800" dirty="0"/>
+              <a:rPr lang="en-US" sz="2800" b="1" dirty="0">
+                <a:solidFill>
+                  <a:srgbClr val="1D2F82"/>
+                </a:solidFill>
+                <a:latin typeface="Calibri" pitchFamily="34" charset="0"/>
+                <a:ea typeface="Calibri" pitchFamily="34" charset="-122"/>
+                <a:cs typeface="Calibri" pitchFamily="34" charset="-120"/>
+              </a:rPr>
               <a:t>Results — One Patient, End to End</a:t>
             </a:r>
             <a:endParaRPr lang="en-US" sz="2800" dirty="0"/>

--- a/Review-I.pptx
+++ b/Review-I.pptx
@@ -5,7 +5,7 @@
     <p:sldMasterId id="2147483648" r:id="rId1"/>
   </p:sldMasterIdLst>
   <p:notesMasterIdLst>
-    <p:notesMasterId r:id="rId13"/>
+    <p:notesMasterId r:id="rId15"/>
   </p:notesMasterIdLst>
   <p:sldIdLst>
     <p:sldId id="270" r:id="rId2"/>
@@ -13,14 +13,14 @@
     <p:sldId id="260" r:id="rId4"/>
     <p:sldId id="267" r:id="rId5"/>
     <p:sldId id="261" r:id="rId6"/>
-    <p:sldId id="271" r:id="rId18"/>
-    <p:sldId id="272" r:id="rId19"/>
-    <p:sldId id="262" r:id="rId7"/>
-    <p:sldId id="263" r:id="rId8"/>
-    <p:sldId id="264" r:id="rId9"/>
-    <p:sldId id="269" r:id="rId10"/>
-    <p:sldId id="265" r:id="rId11"/>
-    <p:sldId id="266" r:id="rId12"/>
+    <p:sldId id="271" r:id="rId7"/>
+    <p:sldId id="272" r:id="rId8"/>
+    <p:sldId id="262" r:id="rId9"/>
+    <p:sldId id="263" r:id="rId10"/>
+    <p:sldId id="264" r:id="rId11"/>
+    <p:sldId id="269" r:id="rId12"/>
+    <p:sldId id="265" r:id="rId13"/>
+    <p:sldId id="266" r:id="rId14"/>
   </p:sldIdLst>
   <p:sldSz cx="12192000" cy="6858000"/>
   <p:notesSz cx="6858000" cy="12192000"/>
@@ -566,7 +566,7 @@
           <a:p>
             <a:fld id="{F7021451-1387-4CA6-816F-3879F97B5CBC}" type="slidenum">
               <a:rPr lang="en-US"/>
-              <a:t>6</a:t>
+              <a:t>8</a:t>
             </a:fld>
             <a:endParaRPr lang="en-US"/>
           </a:p>
@@ -653,7 +653,7 @@
           <a:p>
             <a:fld id="{F7021451-1387-4CA6-816F-3879F97B5CBC}" type="slidenum">
               <a:rPr lang="en-US"/>
-              <a:t>7</a:t>
+              <a:t>9</a:t>
             </a:fld>
             <a:endParaRPr lang="en-US"/>
           </a:p>
@@ -740,7 +740,7 @@
           <a:p>
             <a:fld id="{F7021451-1387-4CA6-816F-3879F97B5CBC}" type="slidenum">
               <a:rPr lang="en-US"/>
-              <a:t>8</a:t>
+              <a:t>10</a:t>
             </a:fld>
             <a:endParaRPr lang="en-US"/>
           </a:p>
@@ -851,7 +851,7 @@
           <a:p>
             <a:fld id="{F7021451-1387-4CA6-816F-3879F97B5CBC}" type="slidenum">
               <a:rPr lang="en-US"/>
-              <a:t>9</a:t>
+              <a:t>11</a:t>
             </a:fld>
             <a:endParaRPr lang="en-US"/>
           </a:p>
@@ -935,7 +935,7 @@
           <a:p>
             <a:fld id="{F7021451-1387-4CA6-816F-3879F97B5CBC}" type="slidenum">
               <a:rPr lang="en-US"/>
-              <a:t>10</a:t>
+              <a:t>12</a:t>
             </a:fld>
             <a:endParaRPr lang="en-US"/>
           </a:p>
@@ -1019,7 +1019,7 @@
           <a:p>
             <a:fld id="{F7021451-1387-4CA6-816F-3879F97B5CBC}" type="slidenum">
               <a:rPr lang="en-US"/>
-              <a:t>11</a:t>
+              <a:t>13</a:t>
             </a:fld>
             <a:endParaRPr lang="en-US"/>
           </a:p>
@@ -1411,6 +1411,501 @@
 </file>
 
 <file path=ppt/slides/slide10.xml><?xml version="1.0" encoding="utf-8"?>
+<p:sld xmlns:a="http://schemas.openxmlformats.org/drawingml/2006/main" xmlns:r="http://schemas.openxmlformats.org/officeDocument/2006/relationships" xmlns:p="http://schemas.openxmlformats.org/presentationml/2006/main">
+  <p:cSld name="Slide 9">
+    <p:bg>
+      <p:bgPr>
+        <a:solidFill>
+          <a:srgbClr val="FFFFFF"/>
+        </a:solidFill>
+        <a:effectLst/>
+      </p:bgPr>
+    </p:bg>
+    <p:spTree>
+      <p:nvGrpSpPr>
+        <p:cNvPr id="1" name=""/>
+        <p:cNvGrpSpPr/>
+        <p:nvPr/>
+      </p:nvGrpSpPr>
+      <p:grpSpPr>
+        <a:xfrm>
+          <a:off x="0" y="0"/>
+          <a:ext cx="0" cy="0"/>
+          <a:chOff x="0" y="0"/>
+          <a:chExt cx="0" cy="0"/>
+        </a:xfrm>
+      </p:grpSpPr>
+      <p:sp>
+        <p:nvSpPr>
+          <p:cNvPr id="2" name="Text 0"/>
+          <p:cNvSpPr txBox="1"/>
+          <p:nvPr/>
+        </p:nvSpPr>
+        <p:spPr>
+          <a:xfrm>
+            <a:off x="11460175" y="6446520"/>
+            <a:ext cx="457200" cy="274320"/>
+          </a:xfrm>
+          <a:prstGeom prst="rect">
+            <a:avLst/>
+          </a:prstGeom>
+          <a:noFill/>
+          <a:ln/>
+        </p:spPr>
+        <p:txBody>
+          <a:bodyPr wrap="square" lIns="0" tIns="0" rIns="0" bIns="0" rtlCol="0" anchor="ctr"/>
+          <a:lstStyle/>
+          <a:p>
+            <a:pPr marL="0" indent="0" algn="r">
+              <a:buNone/>
+            </a:pPr>
+            <a:r>
+              <a:rPr lang="en-US" sz="1000" dirty="0">
+                <a:solidFill>
+                  <a:srgbClr val="808080"/>
+                </a:solidFill>
+                <a:latin typeface="Calibri" pitchFamily="34" charset="0"/>
+                <a:ea typeface="Calibri" pitchFamily="34" charset="-122"/>
+                <a:cs typeface="Calibri" pitchFamily="34" charset="-120"/>
+              </a:rPr>
+              <a:t>10</a:t>
+            </a:r>
+            <a:endParaRPr lang="en-US" sz="1000" dirty="0"/>
+          </a:p>
+        </p:txBody>
+      </p:sp>
+      <p:sp>
+        <p:nvSpPr>
+          <p:cNvPr id="3" name="Text 1"/>
+          <p:cNvSpPr txBox="1"/>
+          <p:nvPr/>
+        </p:nvSpPr>
+        <p:spPr>
+          <a:xfrm>
+            <a:off x="548640" y="320040"/>
+            <a:ext cx="9601200" cy="685800"/>
+          </a:xfrm>
+          <a:prstGeom prst="rect">
+            <a:avLst/>
+          </a:prstGeom>
+          <a:noFill/>
+          <a:ln/>
+        </p:spPr>
+        <p:txBody>
+          <a:bodyPr wrap="square" lIns="0" tIns="0" rIns="0" bIns="0" rtlCol="0" anchor="ctr"/>
+          <a:lstStyle/>
+          <a:p>
+            <a:pPr marL="0" indent="0">
+              <a:buNone/>
+            </a:pPr>
+            <a:r>
+              <a:rPr lang="en-US" sz="2800" b="1" dirty="0">
+                <a:solidFill>
+                  <a:srgbClr val="1D2F82"/>
+                </a:solidFill>
+                <a:latin typeface="Calibri" pitchFamily="34" charset="0"/>
+                <a:ea typeface="Calibri" pitchFamily="34" charset="-122"/>
+                <a:cs typeface="Calibri" pitchFamily="34" charset="-120"/>
+              </a:rPr>
+              <a:t>Results (contd.)</a:t>
+            </a:r>
+            <a:endParaRPr lang="en-US" sz="2800" dirty="0"/>
+          </a:p>
+        </p:txBody>
+      </p:sp>
+      <p:pic>
+        <p:nvPicPr>
+          <p:cNvPr id="4" name="Image 0" descr="logo.png"/>
+          <p:cNvPicPr>
+            <a:picLocks noChangeAspect="1"/>
+          </p:cNvPicPr>
+          <p:nvPr/>
+        </p:nvPicPr>
+        <p:blipFill>
+          <a:blip r:embed="rId3"/>
+          <a:stretch>
+            <a:fillRect/>
+          </a:stretch>
+        </p:blipFill>
+        <p:spPr>
+          <a:xfrm>
+            <a:off x="10362895" y="320040"/>
+            <a:ext cx="1371600" cy="518746"/>
+          </a:xfrm>
+          <a:prstGeom prst="rect">
+            <a:avLst/>
+          </a:prstGeom>
+        </p:spPr>
+      </p:pic>
+      <p:sp>
+        <p:nvSpPr>
+          <p:cNvPr id="20" name="Text 20"/>
+          <p:cNvSpPr txBox="1"/>
+          <p:nvPr/>
+        </p:nvSpPr>
+        <p:spPr>
+          <a:xfrm>
+            <a:off x="640080" y="1200000"/>
+            <a:ext cx="10900000" cy="1100000"/>
+          </a:xfrm>
+          <a:prstGeom prst="rect">
+            <a:avLst/>
+          </a:prstGeom>
+          <a:noFill/>
+          <a:ln/>
+        </p:spPr>
+        <p:txBody>
+          <a:bodyPr wrap="square" lIns="0" tIns="0" rIns="0" bIns="0" rtlCol="0" anchor="t"/>
+          <a:lstStyle/>
+          <a:p>
+            <a:pPr marL="177800" indent="-177800">
+              <a:spcAft>
+                <a:spcPts val="400"/>
+              </a:spcAft>
+              <a:buSzPct val="100000"/>
+              <a:buChar char="•"/>
+            </a:pPr>
+            <a:r>
+              <a:rPr lang="en-US" sz="1250" dirty="0">
+                <a:solidFill>
+                  <a:srgbClr val="000000"/>
+                </a:solidFill>
+                <a:latin typeface="Calibri" pitchFamily="34" charset="0"/>
+                <a:ea typeface="Calibri" pitchFamily="34" charset="-122"/>
+                <a:cs typeface="Calibri" pitchFamily="34" charset="-120"/>
+              </a:rPr>
+              <a:t>Every deduction is explained in words, not just scored — “no lawful basis declared”, “1/4 required safeguards in place”.</a:t>
+            </a:r>
+          </a:p>
+          <a:p>
+            <a:pPr marL="177800" indent="-177800">
+              <a:spcAft>
+                <a:spcPts val="400"/>
+              </a:spcAft>
+              <a:buSzPct val="100000"/>
+              <a:buChar char="•"/>
+            </a:pPr>
+            <a:r>
+              <a:rPr lang="en-US" sz="1250" dirty="0">
+                <a:solidFill>
+                  <a:srgbClr val="000000"/>
+                </a:solidFill>
+                <a:latin typeface="Calibri" pitchFamily="34" charset="0"/>
+                <a:ea typeface="Calibri" pitchFamily="34" charset="-122"/>
+                <a:cs typeface="Calibri" pitchFamily="34" charset="-120"/>
+              </a:rPr>
+              <a:t>This is what makes the score auditable rather than arbitrary, and why the scorer is deterministic code and not a language model.</a:t>
+            </a:r>
+          </a:p>
+        </p:txBody>
+      </p:sp>
+      <p:pic>
+        <p:nvPicPr>
+          <p:cNvPr id="6" name="Picture 5">
+            <a:extLst>
+              <a:ext uri="{FF2B5EF4-FFF2-40B4-BE49-F238E27FC236}">
+                <a16:creationId xmlns:a16="http://schemas.microsoft.com/office/drawing/2014/main" id="{6DAF0333-4B62-37AD-3E1B-5E54782CD6F2}"/>
+              </a:ext>
+            </a:extLst>
+          </p:cNvPr>
+          <p:cNvPicPr>
+            <a:picLocks noChangeAspect="1"/>
+          </p:cNvPicPr>
+          <p:nvPr/>
+        </p:nvPicPr>
+        <p:blipFill>
+          <a:blip r:embed="rId4"/>
+          <a:stretch>
+            <a:fillRect/>
+          </a:stretch>
+        </p:blipFill>
+        <p:spPr>
+          <a:xfrm>
+            <a:off x="923270" y="2988876"/>
+            <a:ext cx="9810540" cy="2030133"/>
+          </a:xfrm>
+          <a:prstGeom prst="rect">
+            <a:avLst/>
+          </a:prstGeom>
+        </p:spPr>
+      </p:pic>
+    </p:spTree>
+  </p:cSld>
+  <p:clrMapOvr>
+    <a:masterClrMapping/>
+  </p:clrMapOvr>
+</p:sld>
+</file>
+
+<file path=ppt/slides/slide11.xml><?xml version="1.0" encoding="utf-8"?>
+<p:sld xmlns:a="http://schemas.openxmlformats.org/drawingml/2006/main" xmlns:r="http://schemas.openxmlformats.org/officeDocument/2006/relationships" xmlns:p="http://schemas.openxmlformats.org/presentationml/2006/main">
+  <p:cSld>
+    <p:bg>
+      <p:bgPr>
+        <a:solidFill>
+          <a:srgbClr val="FFFFFF"/>
+        </a:solidFill>
+        <a:effectLst/>
+      </p:bgPr>
+    </p:bg>
+    <p:spTree>
+      <p:nvGrpSpPr>
+        <p:cNvPr id="1" name="">
+          <a:extLst>
+            <a:ext uri="{FF2B5EF4-FFF2-40B4-BE49-F238E27FC236}">
+              <a16:creationId xmlns:a16="http://schemas.microsoft.com/office/drawing/2014/main" id="{6FC344E8-FF77-B286-38F9-3CBB36A2545D}"/>
+            </a:ext>
+          </a:extLst>
+        </p:cNvPr>
+        <p:cNvGrpSpPr/>
+        <p:nvPr/>
+      </p:nvGrpSpPr>
+      <p:grpSpPr>
+        <a:xfrm>
+          <a:off x="0" y="0"/>
+          <a:ext cx="0" cy="0"/>
+          <a:chOff x="0" y="0"/>
+          <a:chExt cx="0" cy="0"/>
+        </a:xfrm>
+      </p:grpSpPr>
+      <p:sp>
+        <p:nvSpPr>
+          <p:cNvPr id="2" name="Text 0">
+            <a:extLst>
+              <a:ext uri="{FF2B5EF4-FFF2-40B4-BE49-F238E27FC236}">
+                <a16:creationId xmlns:a16="http://schemas.microsoft.com/office/drawing/2014/main" id="{2D85B9BF-6755-C963-22E2-175FD4533DFC}"/>
+              </a:ext>
+            </a:extLst>
+          </p:cNvPr>
+          <p:cNvSpPr txBox="1"/>
+          <p:nvPr/>
+        </p:nvSpPr>
+        <p:spPr>
+          <a:xfrm>
+            <a:off x="11460175" y="6446520"/>
+            <a:ext cx="457200" cy="274320"/>
+          </a:xfrm>
+          <a:prstGeom prst="rect">
+            <a:avLst/>
+          </a:prstGeom>
+          <a:noFill/>
+          <a:ln/>
+        </p:spPr>
+        <p:txBody>
+          <a:bodyPr wrap="square" lIns="0" tIns="0" rIns="0" bIns="0" rtlCol="0" anchor="ctr"/>
+          <a:lstStyle/>
+          <a:p>
+            <a:pPr marL="0" indent="0" algn="r">
+              <a:buNone/>
+            </a:pPr>
+            <a:r>
+              <a:rPr lang="en-US" sz="1000" dirty="0">
+                <a:solidFill>
+                  <a:srgbClr val="808080"/>
+                </a:solidFill>
+                <a:latin typeface="Calibri" pitchFamily="34" charset="0"/>
+                <a:ea typeface="Calibri" pitchFamily="34" charset="-122"/>
+                <a:cs typeface="Calibri" pitchFamily="34" charset="-120"/>
+              </a:rPr>
+              <a:t>11</a:t>
+            </a:r>
+            <a:endParaRPr lang="en-US" sz="1000" dirty="0"/>
+          </a:p>
+        </p:txBody>
+      </p:sp>
+      <p:sp>
+        <p:nvSpPr>
+          <p:cNvPr id="3" name="Text 1">
+            <a:extLst>
+              <a:ext uri="{FF2B5EF4-FFF2-40B4-BE49-F238E27FC236}">
+                <a16:creationId xmlns:a16="http://schemas.microsoft.com/office/drawing/2014/main" id="{68C27DB9-0E08-CA8E-1475-DE17D83E42B3}"/>
+              </a:ext>
+            </a:extLst>
+          </p:cNvPr>
+          <p:cNvSpPr txBox="1"/>
+          <p:nvPr/>
+        </p:nvSpPr>
+        <p:spPr>
+          <a:xfrm>
+            <a:off x="548640" y="320040"/>
+            <a:ext cx="9601200" cy="685800"/>
+          </a:xfrm>
+          <a:prstGeom prst="rect">
+            <a:avLst/>
+          </a:prstGeom>
+          <a:noFill/>
+          <a:ln/>
+        </p:spPr>
+        <p:txBody>
+          <a:bodyPr wrap="square" lIns="0" tIns="0" rIns="0" bIns="0" rtlCol="0" anchor="ctr"/>
+          <a:lstStyle/>
+          <a:p>
+            <a:r>
+              <a:rPr lang="en-US" sz="2800" b="1" dirty="0">
+                <a:solidFill>
+                  <a:srgbClr val="1D2F82"/>
+                </a:solidFill>
+                <a:latin typeface="Calibri" pitchFamily="34" charset="0"/>
+                <a:ea typeface="Calibri" pitchFamily="34" charset="-122"/>
+                <a:cs typeface="Calibri" pitchFamily="34" charset="-120"/>
+              </a:rPr>
+              <a:t>Results — One Patient, End to End</a:t>
+            </a:r>
+            <a:endParaRPr lang="en-US" sz="2800" dirty="0"/>
+          </a:p>
+        </p:txBody>
+      </p:sp>
+      <p:pic>
+        <p:nvPicPr>
+          <p:cNvPr id="4" name="Image 0" descr="logo.png">
+            <a:extLst>
+              <a:ext uri="{FF2B5EF4-FFF2-40B4-BE49-F238E27FC236}">
+                <a16:creationId xmlns:a16="http://schemas.microsoft.com/office/drawing/2014/main" id="{916227F1-668A-E5CE-03EE-FCFA4BA3063C}"/>
+              </a:ext>
+            </a:extLst>
+          </p:cNvPr>
+          <p:cNvPicPr>
+            <a:picLocks noChangeAspect="1"/>
+          </p:cNvPicPr>
+          <p:nvPr/>
+        </p:nvPicPr>
+        <p:blipFill>
+          <a:blip r:embed="rId3"/>
+          <a:stretch>
+            <a:fillRect/>
+          </a:stretch>
+        </p:blipFill>
+        <p:spPr>
+          <a:xfrm>
+            <a:off x="10362895" y="320040"/>
+            <a:ext cx="1371600" cy="518746"/>
+          </a:xfrm>
+          <a:prstGeom prst="rect">
+            <a:avLst/>
+          </a:prstGeom>
+        </p:spPr>
+      </p:pic>
+      <p:sp>
+        <p:nvSpPr>
+          <p:cNvPr id="20" name="Text 20">
+            <a:extLst>
+              <a:ext uri="{FF2B5EF4-FFF2-40B4-BE49-F238E27FC236}">
+                <a16:creationId xmlns:a16="http://schemas.microsoft.com/office/drawing/2014/main" id="{C10CA6AB-E420-29F4-8BB6-FDBE494F7F28}"/>
+              </a:ext>
+            </a:extLst>
+          </p:cNvPr>
+          <p:cNvSpPr txBox="1"/>
+          <p:nvPr/>
+        </p:nvSpPr>
+        <p:spPr>
+          <a:xfrm>
+            <a:off x="640080" y="1200000"/>
+            <a:ext cx="10900000" cy="1100000"/>
+          </a:xfrm>
+          <a:prstGeom prst="rect">
+            <a:avLst/>
+          </a:prstGeom>
+          <a:noFill/>
+          <a:ln/>
+        </p:spPr>
+        <p:txBody>
+          <a:bodyPr wrap="square" lIns="0" tIns="0" rIns="0" bIns="0" rtlCol="0" anchor="t"/>
+          <a:lstStyle/>
+          <a:p>
+            <a:pPr lvl="0"/>
+            <a:r>
+              <a:rPr lang="en-IN" sz="1400" dirty="0"/>
+              <a:t>The six fields the baseline takes that no care-coordination purpose permits are an email address, a street address, and four billing fields — including an insurance policy number. None of them serve the clinical task that was asked for.</a:t>
+            </a:r>
+          </a:p>
+          <a:p>
+            <a:pPr lvl="0"/>
+            <a:endParaRPr lang="en-IN" sz="1400" dirty="0"/>
+          </a:p>
+          <a:p>
+            <a:pPr lvl="0"/>
+            <a:r>
+              <a:rPr lang="en-IN" sz="1400" dirty="0"/>
+              <a:t>Same patient, same source, same seven rules. The </a:t>
+            </a:r>
+            <a:r>
+              <a:rPr lang="en-IN" sz="1400" b="1" dirty="0"/>
+              <a:t>0.869 gap is traceable to specific fields taken and specific paperwork missing; </a:t>
+            </a:r>
+            <a:r>
+              <a:rPr lang="en-IN" sz="1400" dirty="0"/>
+              <a:t>not to speed, coverage, or how much data was pulled.</a:t>
+            </a:r>
+          </a:p>
+          <a:p>
+            <a:br>
+              <a:rPr lang="en-IN" sz="1400" dirty="0"/>
+            </a:br>
+            <a:endParaRPr lang="en-IN" sz="1400" dirty="0"/>
+          </a:p>
+          <a:p>
+            <a:pPr marL="177800" indent="-177800">
+              <a:spcAft>
+                <a:spcPts val="400"/>
+              </a:spcAft>
+              <a:buSzPct val="100000"/>
+              <a:buChar char="•"/>
+            </a:pPr>
+            <a:endParaRPr lang="en-US" sz="1250" dirty="0">
+              <a:solidFill>
+                <a:srgbClr val="000000"/>
+              </a:solidFill>
+              <a:latin typeface="Calibri" pitchFamily="34" charset="0"/>
+              <a:ea typeface="Calibri" pitchFamily="34" charset="-122"/>
+              <a:cs typeface="Calibri" pitchFamily="34" charset="-120"/>
+            </a:endParaRPr>
+          </a:p>
+        </p:txBody>
+      </p:sp>
+      <p:pic>
+        <p:nvPicPr>
+          <p:cNvPr id="7" name="Picture 6">
+            <a:extLst>
+              <a:ext uri="{FF2B5EF4-FFF2-40B4-BE49-F238E27FC236}">
+                <a16:creationId xmlns:a16="http://schemas.microsoft.com/office/drawing/2014/main" id="{66530355-1EDB-0921-D609-BA70BCCCB7E2}"/>
+              </a:ext>
+            </a:extLst>
+          </p:cNvPr>
+          <p:cNvPicPr>
+            <a:picLocks noChangeAspect="1"/>
+          </p:cNvPicPr>
+          <p:nvPr/>
+        </p:nvPicPr>
+        <p:blipFill>
+          <a:blip r:embed="rId4"/>
+          <a:stretch>
+            <a:fillRect/>
+          </a:stretch>
+        </p:blipFill>
+        <p:spPr>
+          <a:xfrm>
+            <a:off x="1169520" y="2760645"/>
+            <a:ext cx="9841120" cy="3892082"/>
+          </a:xfrm>
+          <a:prstGeom prst="rect">
+            <a:avLst/>
+          </a:prstGeom>
+        </p:spPr>
+      </p:pic>
+    </p:spTree>
+    <p:extLst>
+      <p:ext uri="{BB962C8B-B14F-4D97-AF65-F5344CB8AC3E}">
+        <p14:creationId xmlns:p14="http://schemas.microsoft.com/office/powerpoint/2010/main" val="1883206486"/>
+      </p:ext>
+    </p:extLst>
+  </p:cSld>
+  <p:clrMapOvr>
+    <a:masterClrMapping/>
+  </p:clrMapOvr>
+</p:sld>
+</file>
+
+<file path=ppt/slides/slide12.xml><?xml version="1.0" encoding="utf-8"?>
 <p:sld xmlns:a="http://schemas.openxmlformats.org/drawingml/2006/main" xmlns:r="http://schemas.openxmlformats.org/officeDocument/2006/relationships" xmlns:p="http://schemas.openxmlformats.org/presentationml/2006/main">
   <p:cSld name="Slide 10">
     <p:bg>
@@ -1807,7 +2302,7 @@
 </p:sld>
 </file>
 
-<file path=ppt/slides/slide11.xml><?xml version="1.0" encoding="utf-8"?>
+<file path=ppt/slides/slide13.xml><?xml version="1.0" encoding="utf-8"?>
 <p:sld xmlns:a="http://schemas.openxmlformats.org/drawingml/2006/main" xmlns:r="http://schemas.openxmlformats.org/officeDocument/2006/relationships" xmlns:p="http://schemas.openxmlformats.org/presentationml/2006/main">
   <p:cSld name="Slide 11">
     <p:bg>
@@ -1931,2266 +2426,6 @@
               <a:t>Thank You</a:t>
             </a:r>
             <a:endParaRPr lang="en-US" sz="4000" dirty="0"/>
-          </a:p>
-        </p:txBody>
-      </p:sp>
-    </p:spTree>
-  </p:cSld>
-  <p:clrMapOvr>
-    <a:masterClrMapping/>
-  </p:clrMapOvr>
-</p:sld>
-</file>
-
-<file path=ppt/slides/slide12.xml><?xml version="1.0" encoding="utf-8"?>
-<p:sld xmlns:a="http://schemas.openxmlformats.org/drawingml/2006/main" xmlns:r="http://schemas.openxmlformats.org/officeDocument/2006/relationships" xmlns:p="http://schemas.openxmlformats.org/presentationml/2006/main">
-  <p:cSld name="Slide 6">
-    <p:bg>
-      <p:bgPr>
-        <a:solidFill>
-          <a:srgbClr val="FFFFFF"/>
-        </a:solidFill>
-        <a:effectLst/>
-      </p:bgPr>
-    </p:bg>
-    <p:spTree>
-      <p:nvGrpSpPr>
-        <p:cNvPr id="1" name=""/>
-        <p:cNvGrpSpPr/>
-        <p:nvPr/>
-      </p:nvGrpSpPr>
-      <p:grpSpPr>
-        <a:xfrm>
-          <a:off x="0" y="0"/>
-          <a:ext cx="0" cy="0"/>
-          <a:chOff x="0" y="0"/>
-          <a:chExt cx="0" cy="0"/>
-        </a:xfrm>
-      </p:grpSpPr>
-      <p:sp>
-        <p:nvSpPr>
-          <p:cNvPr id="2" name="Text 0"/>
-          <p:cNvSpPr txBox="1"/>
-          <p:nvPr/>
-        </p:nvSpPr>
-        <p:spPr>
-          <a:xfrm>
-            <a:off x="11460175" y="6446520"/>
-            <a:ext cx="457200" cy="274320"/>
-          </a:xfrm>
-          <a:prstGeom prst="rect">
-            <a:avLst/>
-          </a:prstGeom>
-          <a:noFill/>
-          <a:ln/>
-        </p:spPr>
-        <p:txBody>
-          <a:bodyPr wrap="square" lIns="0" tIns="0" rIns="0" bIns="0" rtlCol="0" anchor="ctr"/>
-          <a:lstStyle/>
-          <a:p>
-            <a:pPr marL="0" indent="0" algn="r">
-              <a:buNone/>
-            </a:pPr>
-            <a:r>
-              <a:rPr lang="en-US" sz="1000" dirty="0">
-                <a:solidFill>
-                  <a:srgbClr val="808080"/>
-                </a:solidFill>
-                <a:latin typeface="Calibri" pitchFamily="34" charset="0"/>
-                <a:ea typeface="Calibri" pitchFamily="34" charset="-122"/>
-                <a:cs typeface="Calibri" pitchFamily="34" charset="-120"/>
-              </a:rPr>
-              <a:t>6</a:t>
-            </a:r>
-            <a:endParaRPr lang="en-US" sz="1000" dirty="0"/>
-          </a:p>
-        </p:txBody>
-      </p:sp>
-      <p:sp>
-        <p:nvSpPr>
-          <p:cNvPr id="3" name="Text 1"/>
-          <p:cNvSpPr txBox="1"/>
-          <p:nvPr/>
-        </p:nvSpPr>
-        <p:spPr>
-          <a:xfrm>
-            <a:off x="548640" y="320040"/>
-            <a:ext cx="9601200" cy="685800"/>
-          </a:xfrm>
-          <a:prstGeom prst="rect">
-            <a:avLst/>
-          </a:prstGeom>
-          <a:noFill/>
-          <a:ln/>
-        </p:spPr>
-        <p:txBody>
-          <a:bodyPr wrap="square" lIns="0" tIns="0" rIns="0" bIns="0" rtlCol="0" anchor="ctr"/>
-          <a:lstStyle/>
-          <a:p>
-            <a:pPr marL="0" indent="0">
-              <a:buNone/>
-            </a:pPr>
-            <a:r>
-              <a:rPr lang="en-US" sz="2800" b="1" dirty="0">
-                <a:solidFill>
-                  <a:srgbClr val="1D2F82"/>
-                </a:solidFill>
-                <a:latin typeface="Calibri" pitchFamily="34" charset="0"/>
-                <a:ea typeface="Calibri" pitchFamily="34" charset="-122"/>
-                <a:cs typeface="Calibri" pitchFamily="34" charset="-120"/>
-              </a:rPr>
-              <a:t>Methodology — Rules, Scoring &amp; Extraction</a:t>
-            </a:r>
-            <a:endParaRPr lang="en-US" sz="2800" dirty="0"/>
-          </a:p>
-        </p:txBody>
-      </p:sp>
-      <p:pic>
-        <p:nvPicPr>
-          <p:cNvPr id="4" name="Image 0" descr="logo.png"/>
-          <p:cNvPicPr>
-            <a:picLocks noChangeAspect="1"/>
-          </p:cNvPicPr>
-          <p:nvPr/>
-        </p:nvPicPr>
-        <p:blipFill>
-          <a:blip r:embed="rId3"/>
-          <a:stretch>
-            <a:fillRect/>
-          </a:stretch>
-        </p:blipFill>
-        <p:spPr>
-          <a:xfrm>
-            <a:off x="10362895" y="320040"/>
-            <a:ext cx="1371600" cy="518746"/>
-          </a:xfrm>
-          <a:prstGeom prst="rect">
-            <a:avLst/>
-          </a:prstGeom>
-        </p:spPr>
-      </p:pic>
-      <p:sp>
-        <p:nvSpPr>
-          <p:cNvPr id="5" name="Text 2"/>
-          <p:cNvSpPr txBox="1"/>
-          <p:nvPr/>
-        </p:nvSpPr>
-        <p:spPr>
-          <a:xfrm>
-            <a:off x="640080" y="1325880"/>
-            <a:ext cx="10881360" cy="4937760"/>
-          </a:xfrm>
-          <a:prstGeom prst="rect">
-            <a:avLst/>
-          </a:prstGeom>
-          <a:noFill/>
-          <a:ln/>
-        </p:spPr>
-        <p:txBody>
-          <a:bodyPr wrap="square" lIns="0" tIns="0" rIns="0" bIns="0" rtlCol="0" anchor="t"/>
-          <a:lstStyle/>
-          <a:p>
-            <a:pPr marL="177800" indent="-177800">
-              <a:spcBef>
-                <a:spcPts val="600"/>
-              </a:spcBef>
-              <a:spcAft>
-                <a:spcPts val="250"/>
-              </a:spcAft>
-              <a:buSzPct val="100000"/>
-              <a:buChar char="•"/>
-            </a:pPr>
-            <a:r>
-              <a:rPr lang="en-US" sz="1400" b="1" dirty="0">
-                <a:solidFill>
-                  <a:srgbClr val="1D2F82"/>
-                </a:solidFill>
-                <a:latin typeface="Calibri" pitchFamily="34" charset="0"/>
-                <a:ea typeface="Calibri" pitchFamily="34" charset="-122"/>
-                <a:cs typeface="Calibri" pitchFamily="34" charset="-120"/>
-              </a:rPr>
-              <a:t>Seven executable DPDP rules, each a distinct check:</a:t>
-            </a:r>
-          </a:p>
-          <a:p>
-            <a:pPr marL="457200" lvl="1" indent="-228600">
-              <a:spcAft>
-                <a:spcPts val="360"/>
-              </a:spcAft>
-              <a:buSzPct val="90000"/>
-              <a:buChar char="–"/>
-            </a:pPr>
-            <a:r>
-              <a:rPr lang="en-US" sz="1150" dirty="0">
-                <a:solidFill>
-                  <a:srgbClr val="000000"/>
-                </a:solidFill>
-                <a:latin typeface="Calibri" pitchFamily="34" charset="0"/>
-                <a:ea typeface="Calibri" pitchFamily="34" charset="-122"/>
-                <a:cs typeface="Calibri" pitchFamily="34" charset="-120"/>
-              </a:rPr>
-              <a:t>DM-01 data minimisation — extracted categories must sit inside the purpose policy; score = 1 − excess / total.</a:t>
-            </a:r>
-          </a:p>
-          <a:p>
-            <a:pPr marL="457200" lvl="1" indent="-228600">
-              <a:spcAft>
-                <a:spcPts val="360"/>
-              </a:spcAft>
-              <a:buSzPct val="90000"/>
-              <a:buChar char="–"/>
-            </a:pPr>
-            <a:r>
-              <a:rPr lang="en-US" sz="1150" dirty="0">
-                <a:solidFill>
-                  <a:srgbClr val="000000"/>
-                </a:solidFill>
-                <a:latin typeface="Calibri" pitchFamily="34" charset="0"/>
-                <a:ea typeface="Calibri" pitchFamily="34" charset="-122"/>
-                <a:cs typeface="Calibri" pitchFamily="34" charset="-120"/>
-              </a:rPr>
-              <a:t>LB-01 lawful basis — a basis is declared, recognised, and carries a specific reference.</a:t>
-            </a:r>
-          </a:p>
-          <a:p>
-            <a:pPr marL="457200" lvl="1" indent="-228600">
-              <a:spcAft>
-                <a:spcPts val="360"/>
-              </a:spcAft>
-              <a:buSzPct val="90000"/>
-              <a:buChar char="–"/>
-            </a:pPr>
-            <a:r>
-              <a:rPr lang="en-US" sz="1150" dirty="0">
-                <a:solidFill>
-                  <a:srgbClr val="000000"/>
-                </a:solidFill>
-                <a:latin typeface="Calibri" pitchFamily="34" charset="0"/>
-                <a:ea typeface="Calibri" pitchFamily="34" charset="-122"/>
-                <a:cs typeface="Calibri" pitchFamily="34" charset="-120"/>
-              </a:rPr>
-              <a:t>SL-01 storage limitation — retention declared and within the ceiling, plus a stated deletion mechanism.</a:t>
-            </a:r>
-          </a:p>
-          <a:p>
-            <a:pPr marL="457200" lvl="1" indent="-228600">
-              <a:spcAft>
-                <a:spcPts val="360"/>
-              </a:spcAft>
-              <a:buSzPct val="90000"/>
-              <a:buChar char="–"/>
-            </a:pPr>
-            <a:r>
-              <a:rPr lang="en-US" sz="1150" dirty="0">
-                <a:solidFill>
-                  <a:srgbClr val="000000"/>
-                </a:solidFill>
-                <a:latin typeface="Calibri" pitchFamily="34" charset="0"/>
-                <a:ea typeface="Calibri" pitchFamily="34" charset="-122"/>
-                <a:cs typeface="Calibri" pitchFamily="34" charset="-120"/>
-              </a:rPr>
-              <a:t>SS-01 security safeguards — fraction of TLS, encryption at rest, access control and pseudonymisation in place.</a:t>
-            </a:r>
-          </a:p>
-          <a:p>
-            <a:pPr marL="457200" lvl="1" indent="-228600">
-              <a:spcAft>
-                <a:spcPts val="360"/>
-              </a:spcAft>
-              <a:buSzPct val="90000"/>
-              <a:buChar char="–"/>
-            </a:pPr>
-            <a:r>
-              <a:rPr lang="en-US" sz="1150" dirty="0">
-                <a:solidFill>
-                  <a:srgbClr val="000000"/>
-                </a:solidFill>
-                <a:latin typeface="Calibri" pitchFamily="34" charset="0"/>
-                <a:ea typeface="Calibri" pitchFamily="34" charset="-122"/>
-                <a:cs typeface="Calibri" pitchFamily="34" charset="-120"/>
-              </a:rPr>
-              <a:t>PL-01 purpose limitation — a single specific purpose, with no undeclared onward use.</a:t>
-            </a:r>
-          </a:p>
-          <a:p>
-            <a:pPr marL="457200" lvl="1" indent="-228600">
-              <a:spcAft>
-                <a:spcPts val="360"/>
-              </a:spcAft>
-              <a:buSzPct val="90000"/>
-              <a:buChar char="–"/>
-            </a:pPr>
-            <a:r>
-              <a:rPr lang="en-US" sz="1150" dirty="0">
-                <a:solidFill>
-                  <a:srgbClr val="000000"/>
-                </a:solidFill>
-                <a:latin typeface="Calibri" pitchFamily="34" charset="0"/>
-                <a:ea typeface="Calibri" pitchFamily="34" charset="-122"/>
-                <a:cs typeface="Calibri" pitchFamily="34" charset="-120"/>
-              </a:rPr>
-              <a:t>NT-01 transparency / notice — a privacy notice is on record and covers the stated purpose.</a:t>
-            </a:r>
-          </a:p>
-          <a:p>
-            <a:pPr marL="457200" lvl="1" indent="-228600">
-              <a:spcAft>
-                <a:spcPts val="360"/>
-              </a:spcAft>
-              <a:buSzPct val="90000"/>
-              <a:buChar char="–"/>
-            </a:pPr>
-            <a:r>
-              <a:rPr lang="en-US" sz="1150" dirty="0">
-                <a:solidFill>
-                  <a:srgbClr val="000000"/>
-                </a:solidFill>
-                <a:latin typeface="Calibri" pitchFamily="34" charset="0"/>
-                <a:ea typeface="Calibri" pitchFamily="34" charset="-122"/>
-                <a:cs typeface="Calibri" pitchFamily="34" charset="-120"/>
-              </a:rPr>
-              <a:t>AC-01 accountability — audit logging, a named accountable party, and a retained record of processing.</a:t>
-            </a:r>
-          </a:p>
-          <a:p>
-            <a:pPr marL="177800" indent="-177800">
-              <a:spcBef>
-                <a:spcPts val="600"/>
-              </a:spcBef>
-              <a:spcAft>
-                <a:spcPts val="250"/>
-              </a:spcAft>
-              <a:buSzPct val="100000"/>
-              <a:buChar char="•"/>
-            </a:pPr>
-            <a:r>
-              <a:rPr lang="en-US" sz="1400" b="1" dirty="0">
-                <a:solidFill>
-                  <a:srgbClr val="1D2F82"/>
-                </a:solidFill>
-                <a:latin typeface="Calibri" pitchFamily="34" charset="0"/>
-                <a:ea typeface="Calibri" pitchFamily="34" charset="-122"/>
-                <a:cs typeface="Calibri" pitchFamily="34" charset="-120"/>
-              </a:rPr>
-              <a:t>Scoring:</a:t>
-            </a:r>
-          </a:p>
-          <a:p>
-            <a:pPr marL="457200" lvl="1" indent="-228600">
-              <a:spcAft>
-                <a:spcPts val="360"/>
-              </a:spcAft>
-              <a:buSzPct val="90000"/>
-              <a:buChar char="–"/>
-            </a:pPr>
-            <a:r>
-              <a:rPr lang="en-US" sz="1150" dirty="0">
-                <a:solidFill>
-                  <a:srgbClr val="000000"/>
-                </a:solidFill>
-                <a:latin typeface="Calibri" pitchFamily="34" charset="0"/>
-                <a:ea typeface="Calibri" pitchFamily="34" charset="-122"/>
-                <a:cs typeface="Calibri" pitchFamily="34" charset="-120"/>
-              </a:rPr>
-              <a:t>Every rule returns pass / fail / not-applicable, a 0–1 score and plain-language findings; the overall score is the weighted mean of applicable rules, with equal weights until a weighting can be justified.</a:t>
-            </a:r>
-          </a:p>
-          <a:p>
-            <a:pPr marL="457200" lvl="1" indent="-228600">
-              <a:spcAft>
-                <a:spcPts val="360"/>
-              </a:spcAft>
-              <a:buSzPct val="90000"/>
-              <a:buChar char="–"/>
-            </a:pPr>
-            <a:r>
-              <a:rPr lang="en-US" sz="1150" dirty="0">
-                <a:solidFill>
-                  <a:srgbClr val="000000"/>
-                </a:solidFill>
-                <a:latin typeface="Calibri" pitchFamily="34" charset="0"/>
-                <a:ea typeface="Calibri" pitchFamily="34" charset="-122"/>
-                <a:cs typeface="Calibri" pitchFamily="34" charset="-120"/>
-              </a:rPr>
-              <a:t>Partial credit is deliberate — it lets the harness rank techniques rather than merely reject them, which is what makes it a benchmark and not a checklist.</a:t>
-            </a:r>
-          </a:p>
-          <a:p>
-            <a:pPr marL="177800" indent="-177800">
-              <a:spcBef>
-                <a:spcPts val="600"/>
-              </a:spcBef>
-              <a:spcAft>
-                <a:spcPts val="250"/>
-              </a:spcAft>
-              <a:buSzPct val="100000"/>
-              <a:buChar char="•"/>
-            </a:pPr>
-            <a:r>
-              <a:rPr lang="en-US" sz="1400" b="1" dirty="0">
-                <a:solidFill>
-                  <a:srgbClr val="1D2F82"/>
-                </a:solidFill>
-                <a:latin typeface="Calibri" pitchFamily="34" charset="0"/>
-                <a:ea typeface="Calibri" pitchFamily="34" charset="-122"/>
-                <a:cs typeface="Calibri" pitchFamily="34" charset="-120"/>
-              </a:rPr>
-              <a:t>Extraction and HIS heterogeneity:</a:t>
-            </a:r>
-          </a:p>
-          <a:p>
-            <a:pPr marL="457200" lvl="1" indent="-228600">
-              <a:spcAft>
-                <a:spcPts val="360"/>
-              </a:spcAft>
-              <a:buSzPct val="90000"/>
-              <a:buChar char="–"/>
-            </a:pPr>
-            <a:r>
-              <a:rPr lang="en-US" sz="1150" dirty="0">
-                <a:solidFill>
-                  <a:srgbClr val="000000"/>
-                </a:solidFill>
-                <a:latin typeface="Calibri" pitchFamily="34" charset="0"/>
-                <a:ea typeface="Calibri" pitchFamily="34" charset="-122"/>
-                <a:cs typeface="Calibri" pitchFamily="34" charset="-120"/>
-              </a:rPr>
-              <a:t>A pluggable HISDataSource adapter: the synthetic generator now, a credentialed live HIS later, with no downstream change.</a:t>
-            </a:r>
-          </a:p>
-          <a:p>
-            <a:pPr marL="457200" lvl="1" indent="-228600">
-              <a:spcAft>
-                <a:spcPts val="360"/>
-              </a:spcAft>
-              <a:buSzPct val="90000"/>
-              <a:buChar char="–"/>
-            </a:pPr>
-            <a:r>
-              <a:rPr lang="en-US" sz="1150" dirty="0">
-                <a:solidFill>
-                  <a:srgbClr val="000000"/>
-                </a:solidFill>
-                <a:latin typeface="Calibri" pitchFamily="34" charset="0"/>
-                <a:ea typeface="Calibri" pitchFamily="34" charset="-122"/>
-                <a:cs typeface="Calibri" pitchFamily="34" charset="-120"/>
-              </a:rPr>
-              <a:t>Heterogeneity is absorbed twice — once at the adapter, and again by scoring data categories instead of vendor field names.</a:t>
-            </a:r>
-          </a:p>
-          <a:p>
-            <a:pPr marL="177800" indent="-177800">
-              <a:spcBef>
-                <a:spcPts val="600"/>
-              </a:spcBef>
-              <a:spcAft>
-                <a:spcPts val="250"/>
-              </a:spcAft>
-              <a:buSzPct val="100000"/>
-              <a:buChar char="•"/>
-            </a:pPr>
-            <a:r>
-              <a:rPr lang="en-US" sz="1400" b="1" dirty="0">
-                <a:solidFill>
-                  <a:srgbClr val="1D2F82"/>
-                </a:solidFill>
-                <a:latin typeface="Calibri" pitchFamily="34" charset="0"/>
-                <a:ea typeface="Calibri" pitchFamily="34" charset="-122"/>
-                <a:cs typeface="Calibri" pitchFamily="34" charset="-120"/>
-              </a:rPr>
-              <a:t>The extraction agent (build step 6, not yet started):</a:t>
-            </a:r>
-          </a:p>
-          <a:p>
-            <a:pPr marL="457200" lvl="1" indent="-228600">
-              <a:spcAft>
-                <a:spcPts val="360"/>
-              </a:spcAft>
-              <a:buSzPct val="90000"/>
-              <a:buChar char="–"/>
-            </a:pPr>
-            <a:r>
-              <a:rPr lang="en-US" sz="1150" dirty="0">
-                <a:solidFill>
-                  <a:srgbClr val="000000"/>
-                </a:solidFill>
-                <a:latin typeface="Calibri" pitchFamily="34" charset="0"/>
-                <a:ea typeface="Calibri" pitchFamily="34" charset="-122"/>
-                <a:cs typeface="Calibri" pitchFamily="34" charset="-120"/>
-              </a:rPr>
-              <a:t>An off-the-shelf LLM driven agentically, AXE-method inspired: prompt design, tool design and evaluation against synthetic data — no fine-tuning and no training set. The scorer stays deterministic so the benchmark is reproducible.</a:t>
-            </a:r>
-          </a:p>
-        </p:txBody>
-      </p:sp>
-    </p:spTree>
-  </p:cSld>
-  <p:clrMapOvr>
-    <a:masterClrMapping/>
-  </p:clrMapOvr>
-</p:sld>
-</file>
-
-<file path=ppt/slides/slide13.xml><?xml version="1.0" encoding="utf-8"?>
-<p:sld xmlns:a="http://schemas.openxmlformats.org/drawingml/2006/main" xmlns:r="http://schemas.openxmlformats.org/officeDocument/2006/relationships" xmlns:p="http://schemas.openxmlformats.org/presentationml/2006/main">
-  <p:cSld name="Slide 6">
-    <p:bg>
-      <p:bgPr>
-        <a:solidFill>
-          <a:srgbClr val="FFFFFF"/>
-        </a:solidFill>
-        <a:effectLst/>
-      </p:bgPr>
-    </p:bg>
-    <p:spTree>
-      <p:nvGrpSpPr>
-        <p:cNvPr id="1" name=""/>
-        <p:cNvGrpSpPr/>
-        <p:nvPr/>
-      </p:nvGrpSpPr>
-      <p:grpSpPr>
-        <a:xfrm>
-          <a:off x="0" y="0"/>
-          <a:ext cx="0" cy="0"/>
-          <a:chOff x="0" y="0"/>
-          <a:chExt cx="0" cy="0"/>
-        </a:xfrm>
-      </p:grpSpPr>
-      <p:sp>
-        <p:nvSpPr>
-          <p:cNvPr id="2" name="Text 0"/>
-          <p:cNvSpPr txBox="1"/>
-          <p:nvPr/>
-        </p:nvSpPr>
-        <p:spPr>
-          <a:xfrm>
-            <a:off x="11460175" y="6446520"/>
-            <a:ext cx="457200" cy="274320"/>
-          </a:xfrm>
-          <a:prstGeom prst="rect">
-            <a:avLst/>
-          </a:prstGeom>
-          <a:noFill/>
-          <a:ln/>
-        </p:spPr>
-        <p:txBody>
-          <a:bodyPr wrap="square" lIns="0" tIns="0" rIns="0" bIns="0" rtlCol="0" anchor="ctr"/>
-          <a:lstStyle/>
-          <a:p>
-            <a:pPr marL="0" indent="0" algn="r">
-              <a:buNone/>
-            </a:pPr>
-            <a:r>
-              <a:rPr lang="en-US" sz="1000" dirty="0">
-                <a:solidFill>
-                  <a:srgbClr val="808080"/>
-                </a:solidFill>
-                <a:latin typeface="Calibri" pitchFamily="34" charset="0"/>
-                <a:ea typeface="Calibri" pitchFamily="34" charset="-122"/>
-                <a:cs typeface="Calibri" pitchFamily="34" charset="-120"/>
-              </a:rPr>
-              <a:t>7</a:t>
-            </a:r>
-            <a:endParaRPr lang="en-US" sz="1000" dirty="0"/>
-          </a:p>
-        </p:txBody>
-      </p:sp>
-      <p:sp>
-        <p:nvSpPr>
-          <p:cNvPr id="3" name="Text 1"/>
-          <p:cNvSpPr txBox="1"/>
-          <p:nvPr/>
-        </p:nvSpPr>
-        <p:spPr>
-          <a:xfrm>
-            <a:off x="548640" y="320040"/>
-            <a:ext cx="9601200" cy="685800"/>
-          </a:xfrm>
-          <a:prstGeom prst="rect">
-            <a:avLst/>
-          </a:prstGeom>
-          <a:noFill/>
-          <a:ln/>
-        </p:spPr>
-        <p:txBody>
-          <a:bodyPr wrap="square" lIns="0" tIns="0" rIns="0" bIns="0" rtlCol="0" anchor="ctr"/>
-          <a:lstStyle/>
-          <a:p>
-            <a:pPr marL="0" indent="0">
-              <a:buNone/>
-            </a:pPr>
-            <a:r>
-              <a:rPr lang="en-US" sz="2800" b="1" dirty="0">
-                <a:solidFill>
-                  <a:srgbClr val="1D2F82"/>
-                </a:solidFill>
-                <a:latin typeface="Calibri" pitchFamily="34" charset="0"/>
-                <a:ea typeface="Calibri" pitchFamily="34" charset="-122"/>
-                <a:cs typeface="Calibri" pitchFamily="34" charset="-120"/>
-              </a:rPr>
-              <a:t>Tools &amp; Technologies</a:t>
-            </a:r>
-            <a:endParaRPr lang="en-US" sz="2800" dirty="0"/>
-          </a:p>
-        </p:txBody>
-      </p:sp>
-      <p:pic>
-        <p:nvPicPr>
-          <p:cNvPr id="4" name="Image 0" descr="logo.png"/>
-          <p:cNvPicPr>
-            <a:picLocks noChangeAspect="1"/>
-          </p:cNvPicPr>
-          <p:nvPr/>
-        </p:nvPicPr>
-        <p:blipFill>
-          <a:blip r:embed="rId3"/>
-          <a:stretch>
-            <a:fillRect/>
-          </a:stretch>
-        </p:blipFill>
-        <p:spPr>
-          <a:xfrm>
-            <a:off x="10362895" y="320040"/>
-            <a:ext cx="1371600" cy="518746"/>
-          </a:xfrm>
-          <a:prstGeom prst="rect">
-            <a:avLst/>
-          </a:prstGeom>
-        </p:spPr>
-      </p:pic>
-      <p:graphicFrame>
-        <p:nvGraphicFramePr>
-          <p:cNvPr id="40" name="Tools Table"/>
-          <p:cNvGraphicFramePr>
-            <a:graphicFrameLocks noGrp="1"/>
-          </p:cNvGraphicFramePr>
-          <p:nvPr/>
-        </p:nvGraphicFramePr>
-        <p:xfrm>
-          <a:off x="548640" y="1230000"/>
-          <a:ext cx="11091672" cy="3520000"/>
-        </p:xfrm>
-        <a:graphic>
-          <a:graphicData uri="http://schemas.openxmlformats.org/drawingml/2006/table">
-            <a:tbl>
-              <a:tblPr/>
-              <a:tblGrid>
-                <a:gridCol w="2300000"/>
-                <a:gridCol w="3300000"/>
-                <a:gridCol w="5491672"/>
-              </a:tblGrid>
-              <a:tr h="440000">
-                <a:tc>
-                  <a:txBody>
-                    <a:bodyPr/>
-                    <a:lstStyle/>
-                    <a:p>
-                      <a:pPr marL="0" indent="0">
-                        <a:buNone/>
-                      </a:pPr>
-                      <a:r>
-                        <a:rPr lang="en-US" sz="1100" b="1" dirty="0">
-                          <a:solidFill>
-                            <a:srgbClr val="FFFFFF"/>
-                          </a:solidFill>
-                          <a:latin typeface="Calibri" pitchFamily="34" charset="0"/>
-                          <a:ea typeface="Calibri" pitchFamily="34" charset="-122"/>
-                          <a:cs typeface="Calibri" pitchFamily="34" charset="-120"/>
-                        </a:rPr>
-                        <a:t>Technology</a:t>
-                      </a:r>
-                      <a:endParaRPr lang="en-US" sz="1100" dirty="0"/>
-                    </a:p>
-                  </a:txBody>
-                  <a:tcPr marL="54864" marR="54864" marT="54864" marB="54864" anchor="ctr">
-                    <a:lnL w="9525" cap="flat" cmpd="sng" algn="ctr">
-                      <a:solidFill>
-                        <a:srgbClr val="BFBFBF"/>
-                      </a:solidFill>
-                      <a:prstDash val="solid"/>
-                      <a:round/>
-                      <a:headEnd type="none" w="med" len="med"/>
-                      <a:tailEnd type="none" w="med" len="med"/>
-                    </a:lnL>
-                    <a:lnR w="9525" cap="flat" cmpd="sng" algn="ctr">
-                      <a:solidFill>
-                        <a:srgbClr val="BFBFBF"/>
-                      </a:solidFill>
-                      <a:prstDash val="solid"/>
-                      <a:round/>
-                      <a:headEnd type="none" w="med" len="med"/>
-                      <a:tailEnd type="none" w="med" len="med"/>
-                    </a:lnR>
-                    <a:lnT w="9525" cap="flat" cmpd="sng" algn="ctr">
-                      <a:solidFill>
-                        <a:srgbClr val="BFBFBF"/>
-                      </a:solidFill>
-                      <a:prstDash val="solid"/>
-                      <a:round/>
-                      <a:headEnd type="none" w="med" len="med"/>
-                      <a:tailEnd type="none" w="med" len="med"/>
-                    </a:lnT>
-                    <a:lnB w="9525" cap="flat" cmpd="sng" algn="ctr">
-                      <a:solidFill>
-                        <a:srgbClr val="BFBFBF"/>
-                      </a:solidFill>
-                      <a:prstDash val="solid"/>
-                      <a:round/>
-                      <a:headEnd type="none" w="med" len="med"/>
-                      <a:tailEnd type="none" w="med" len="med"/>
-                    </a:lnB>
-                    <a:solidFill>
-                      <a:srgbClr val="1D2F82"/>
-                    </a:solidFill>
-                  </a:tcPr>
-                </a:tc>
-                <a:tc>
-                  <a:txBody>
-                    <a:bodyPr/>
-                    <a:lstStyle/>
-                    <a:p>
-                      <a:pPr marL="0" indent="0">
-                        <a:buNone/>
-                      </a:pPr>
-                      <a:r>
-                        <a:rPr lang="en-US" sz="1100" b="1" dirty="0">
-                          <a:solidFill>
-                            <a:srgbClr val="FFFFFF"/>
-                          </a:solidFill>
-                          <a:latin typeface="Calibri" pitchFamily="34" charset="0"/>
-                          <a:ea typeface="Calibri" pitchFamily="34" charset="-122"/>
-                          <a:cs typeface="Calibri" pitchFamily="34" charset="-120"/>
-                        </a:rPr>
-                        <a:t>Where it is used</a:t>
-                      </a:r>
-                      <a:endParaRPr lang="en-US" sz="1100" dirty="0"/>
-                    </a:p>
-                  </a:txBody>
-                  <a:tcPr marL="54864" marR="54864" marT="54864" marB="54864" anchor="ctr">
-                    <a:lnL w="9525" cap="flat" cmpd="sng" algn="ctr">
-                      <a:solidFill>
-                        <a:srgbClr val="BFBFBF"/>
-                      </a:solidFill>
-                      <a:prstDash val="solid"/>
-                      <a:round/>
-                      <a:headEnd type="none" w="med" len="med"/>
-                      <a:tailEnd type="none" w="med" len="med"/>
-                    </a:lnL>
-                    <a:lnR w="9525" cap="flat" cmpd="sng" algn="ctr">
-                      <a:solidFill>
-                        <a:srgbClr val="BFBFBF"/>
-                      </a:solidFill>
-                      <a:prstDash val="solid"/>
-                      <a:round/>
-                      <a:headEnd type="none" w="med" len="med"/>
-                      <a:tailEnd type="none" w="med" len="med"/>
-                    </a:lnR>
-                    <a:lnT w="9525" cap="flat" cmpd="sng" algn="ctr">
-                      <a:solidFill>
-                        <a:srgbClr val="BFBFBF"/>
-                      </a:solidFill>
-                      <a:prstDash val="solid"/>
-                      <a:round/>
-                      <a:headEnd type="none" w="med" len="med"/>
-                      <a:tailEnd type="none" w="med" len="med"/>
-                    </a:lnT>
-                    <a:lnB w="9525" cap="flat" cmpd="sng" algn="ctr">
-                      <a:solidFill>
-                        <a:srgbClr val="BFBFBF"/>
-                      </a:solidFill>
-                      <a:prstDash val="solid"/>
-                      <a:round/>
-                      <a:headEnd type="none" w="med" len="med"/>
-                      <a:tailEnd type="none" w="med" len="med"/>
-                    </a:lnB>
-                    <a:solidFill>
-                      <a:srgbClr val="1D2F82"/>
-                    </a:solidFill>
-                  </a:tcPr>
-                </a:tc>
-                <a:tc>
-                  <a:txBody>
-                    <a:bodyPr/>
-                    <a:lstStyle/>
-                    <a:p>
-                      <a:pPr marL="0" indent="0">
-                        <a:buNone/>
-                      </a:pPr>
-                      <a:r>
-                        <a:rPr lang="en-US" sz="1100" b="1" dirty="0">
-                          <a:solidFill>
-                            <a:srgbClr val="FFFFFF"/>
-                          </a:solidFill>
-                          <a:latin typeface="Calibri" pitchFamily="34" charset="0"/>
-                          <a:ea typeface="Calibri" pitchFamily="34" charset="-122"/>
-                          <a:cs typeface="Calibri" pitchFamily="34" charset="-120"/>
-                        </a:rPr>
-                        <a:t>Why this choice</a:t>
-                      </a:r>
-                      <a:endParaRPr lang="en-US" sz="1100" dirty="0"/>
-                    </a:p>
-                  </a:txBody>
-                  <a:tcPr marL="54864" marR="54864" marT="54864" marB="54864" anchor="ctr">
-                    <a:lnL w="9525" cap="flat" cmpd="sng" algn="ctr">
-                      <a:solidFill>
-                        <a:srgbClr val="BFBFBF"/>
-                      </a:solidFill>
-                      <a:prstDash val="solid"/>
-                      <a:round/>
-                      <a:headEnd type="none" w="med" len="med"/>
-                      <a:tailEnd type="none" w="med" len="med"/>
-                    </a:lnL>
-                    <a:lnR w="9525" cap="flat" cmpd="sng" algn="ctr">
-                      <a:solidFill>
-                        <a:srgbClr val="BFBFBF"/>
-                      </a:solidFill>
-                      <a:prstDash val="solid"/>
-                      <a:round/>
-                      <a:headEnd type="none" w="med" len="med"/>
-                      <a:tailEnd type="none" w="med" len="med"/>
-                    </a:lnR>
-                    <a:lnT w="9525" cap="flat" cmpd="sng" algn="ctr">
-                      <a:solidFill>
-                        <a:srgbClr val="BFBFBF"/>
-                      </a:solidFill>
-                      <a:prstDash val="solid"/>
-                      <a:round/>
-                      <a:headEnd type="none" w="med" len="med"/>
-                      <a:tailEnd type="none" w="med" len="med"/>
-                    </a:lnT>
-                    <a:lnB w="9525" cap="flat" cmpd="sng" algn="ctr">
-                      <a:solidFill>
-                        <a:srgbClr val="BFBFBF"/>
-                      </a:solidFill>
-                      <a:prstDash val="solid"/>
-                      <a:round/>
-                      <a:headEnd type="none" w="med" len="med"/>
-                      <a:tailEnd type="none" w="med" len="med"/>
-                    </a:lnB>
-                    <a:solidFill>
-                      <a:srgbClr val="1D2F82"/>
-                    </a:solidFill>
-                  </a:tcPr>
-                </a:tc>
-                <a:extLst>
-                  <a:ext uri="{0D108BD9-81ED-4DB2-BD59-A6C34878D82A}">
-                    <a16:rowId xmlns:a16="http://schemas.microsoft.com/office/drawing/2014/main" val="10001"/>
-                  </a:ext>
-                </a:extLst>
-              </a:tr>
-              <a:tr h="440000">
-                <a:tc>
-                  <a:txBody>
-                    <a:bodyPr/>
-                    <a:lstStyle/>
-                    <a:p>
-                      <a:pPr marL="0" indent="0">
-                        <a:buNone/>
-                      </a:pPr>
-                      <a:r>
-                        <a:rPr lang="en-US" sz="1000" b="1" dirty="0">
-                          <a:solidFill>
-                            <a:srgbClr val="000000"/>
-                          </a:solidFill>
-                          <a:latin typeface="Calibri" pitchFamily="34" charset="0"/>
-                          <a:ea typeface="Calibri" pitchFamily="34" charset="-122"/>
-                          <a:cs typeface="Calibri" pitchFamily="34" charset="-120"/>
-                        </a:rPr>
-                        <a:t>Python 3.10+</a:t>
-                      </a:r>
-                      <a:endParaRPr lang="en-US" sz="1000" dirty="0"/>
-                    </a:p>
-                  </a:txBody>
-                  <a:tcPr marL="54864" marR="54864" marT="54864" marB="54864" anchor="ctr">
-                    <a:lnL w="9525" cap="flat" cmpd="sng" algn="ctr">
-                      <a:solidFill>
-                        <a:srgbClr val="BFBFBF"/>
-                      </a:solidFill>
-                      <a:prstDash val="solid"/>
-                      <a:round/>
-                      <a:headEnd type="none" w="med" len="med"/>
-                      <a:tailEnd type="none" w="med" len="med"/>
-                    </a:lnL>
-                    <a:lnR w="9525" cap="flat" cmpd="sng" algn="ctr">
-                      <a:solidFill>
-                        <a:srgbClr val="BFBFBF"/>
-                      </a:solidFill>
-                      <a:prstDash val="solid"/>
-                      <a:round/>
-                      <a:headEnd type="none" w="med" len="med"/>
-                      <a:tailEnd type="none" w="med" len="med"/>
-                    </a:lnR>
-                    <a:lnT w="9525" cap="flat" cmpd="sng" algn="ctr">
-                      <a:solidFill>
-                        <a:srgbClr val="BFBFBF"/>
-                      </a:solidFill>
-                      <a:prstDash val="solid"/>
-                      <a:round/>
-                      <a:headEnd type="none" w="med" len="med"/>
-                      <a:tailEnd type="none" w="med" len="med"/>
-                    </a:lnT>
-                    <a:lnB w="9525" cap="flat" cmpd="sng" algn="ctr">
-                      <a:solidFill>
-                        <a:srgbClr val="BFBFBF"/>
-                      </a:solidFill>
-                      <a:prstDash val="solid"/>
-                      <a:round/>
-                      <a:headEnd type="none" w="med" len="med"/>
-                      <a:tailEnd type="none" w="med" len="med"/>
-                    </a:lnB>
-                  </a:tcPr>
-                </a:tc>
-                <a:tc>
-                  <a:txBody>
-                    <a:bodyPr/>
-                    <a:lstStyle/>
-                    <a:p>
-                      <a:pPr marL="0" indent="0">
-                        <a:buNone/>
-                      </a:pPr>
-                      <a:r>
-                        <a:rPr lang="en-US" sz="1000" dirty="0">
-                          <a:solidFill>
-                            <a:srgbClr val="000000"/>
-                          </a:solidFill>
-                          <a:latin typeface="Calibri" pitchFamily="34" charset="0"/>
-                          <a:ea typeface="Calibri" pitchFamily="34" charset="-122"/>
-                          <a:cs typeface="Calibri" pitchFamily="34" charset="-120"/>
-                        </a:rPr>
-                        <a:t>The entire pipeline — data generation, extraction, rules, benchmark</a:t>
-                      </a:r>
-                      <a:endParaRPr lang="en-US" sz="1000" dirty="0"/>
-                    </a:p>
-                  </a:txBody>
-                  <a:tcPr marL="54864" marR="54864" marT="54864" marB="54864" anchor="ctr">
-                    <a:lnL w="9525" cap="flat" cmpd="sng" algn="ctr">
-                      <a:solidFill>
-                        <a:srgbClr val="BFBFBF"/>
-                      </a:solidFill>
-                      <a:prstDash val="solid"/>
-                      <a:round/>
-                      <a:headEnd type="none" w="med" len="med"/>
-                      <a:tailEnd type="none" w="med" len="med"/>
-                    </a:lnL>
-                    <a:lnR w="9525" cap="flat" cmpd="sng" algn="ctr">
-                      <a:solidFill>
-                        <a:srgbClr val="BFBFBF"/>
-                      </a:solidFill>
-                      <a:prstDash val="solid"/>
-                      <a:round/>
-                      <a:headEnd type="none" w="med" len="med"/>
-                      <a:tailEnd type="none" w="med" len="med"/>
-                    </a:lnR>
-                    <a:lnT w="9525" cap="flat" cmpd="sng" algn="ctr">
-                      <a:solidFill>
-                        <a:srgbClr val="BFBFBF"/>
-                      </a:solidFill>
-                      <a:prstDash val="solid"/>
-                      <a:round/>
-                      <a:headEnd type="none" w="med" len="med"/>
-                      <a:tailEnd type="none" w="med" len="med"/>
-                    </a:lnT>
-                    <a:lnB w="9525" cap="flat" cmpd="sng" algn="ctr">
-                      <a:solidFill>
-                        <a:srgbClr val="BFBFBF"/>
-                      </a:solidFill>
-                      <a:prstDash val="solid"/>
-                      <a:round/>
-                      <a:headEnd type="none" w="med" len="med"/>
-                      <a:tailEnd type="none" w="med" len="med"/>
-                    </a:lnB>
-                  </a:tcPr>
-                </a:tc>
-                <a:tc>
-                  <a:txBody>
-                    <a:bodyPr/>
-                    <a:lstStyle/>
-                    <a:p>
-                      <a:pPr marL="0" indent="0">
-                        <a:buNone/>
-                      </a:pPr>
-                      <a:r>
-                        <a:rPr lang="en-US" sz="950" dirty="0">
-                          <a:solidFill>
-                            <a:srgbClr val="000000"/>
-                          </a:solidFill>
-                          <a:latin typeface="Calibri" pitchFamily="34" charset="0"/>
-                          <a:ea typeface="Calibri" pitchFamily="34" charset="-122"/>
-                          <a:cs typeface="Calibri" pitchFamily="34" charset="-120"/>
-                        </a:rPr>
-                        <a:t>Standard for research and scraping work; the libraries this project needs already live here</a:t>
-                      </a:r>
-                      <a:endParaRPr lang="en-US" sz="950" dirty="0"/>
-                    </a:p>
-                  </a:txBody>
-                  <a:tcPr marL="54864" marR="54864" marT="54864" marB="54864" anchor="ctr">
-                    <a:lnL w="9525" cap="flat" cmpd="sng" algn="ctr">
-                      <a:solidFill>
-                        <a:srgbClr val="BFBFBF"/>
-                      </a:solidFill>
-                      <a:prstDash val="solid"/>
-                      <a:round/>
-                      <a:headEnd type="none" w="med" len="med"/>
-                      <a:tailEnd type="none" w="med" len="med"/>
-                    </a:lnL>
-                    <a:lnR w="9525" cap="flat" cmpd="sng" algn="ctr">
-                      <a:solidFill>
-                        <a:srgbClr val="BFBFBF"/>
-                      </a:solidFill>
-                      <a:prstDash val="solid"/>
-                      <a:round/>
-                      <a:headEnd type="none" w="med" len="med"/>
-                      <a:tailEnd type="none" w="med" len="med"/>
-                    </a:lnR>
-                    <a:lnT w="9525" cap="flat" cmpd="sng" algn="ctr">
-                      <a:solidFill>
-                        <a:srgbClr val="BFBFBF"/>
-                      </a:solidFill>
-                      <a:prstDash val="solid"/>
-                      <a:round/>
-                      <a:headEnd type="none" w="med" len="med"/>
-                      <a:tailEnd type="none" w="med" len="med"/>
-                    </a:lnT>
-                    <a:lnB w="9525" cap="flat" cmpd="sng" algn="ctr">
-                      <a:solidFill>
-                        <a:srgbClr val="BFBFBF"/>
-                      </a:solidFill>
-                      <a:prstDash val="solid"/>
-                      <a:round/>
-                      <a:headEnd type="none" w="med" len="med"/>
-                      <a:tailEnd type="none" w="med" len="med"/>
-                    </a:lnB>
-                  </a:tcPr>
-                </a:tc>
-                <a:extLst>
-                  <a:ext uri="{0D108BD9-81ED-4DB2-BD59-A6C34878D82A}">
-                    <a16:rowId xmlns:a16="http://schemas.microsoft.com/office/drawing/2014/main" val="10001"/>
-                  </a:ext>
-                </a:extLst>
-              </a:tr>
-              <a:tr h="440000">
-                <a:tc>
-                  <a:txBody>
-                    <a:bodyPr/>
-                    <a:lstStyle/>
-                    <a:p>
-                      <a:pPr marL="0" indent="0">
-                        <a:buNone/>
-                      </a:pPr>
-                      <a:r>
-                        <a:rPr lang="en-US" sz="1000" b="1" dirty="0">
-                          <a:solidFill>
-                            <a:srgbClr val="000000"/>
-                          </a:solidFill>
-                          <a:latin typeface="Calibri" pitchFamily="34" charset="0"/>
-                          <a:ea typeface="Calibri" pitchFamily="34" charset="-122"/>
-                          <a:cs typeface="Calibri" pitchFamily="34" charset="-120"/>
-                        </a:rPr>
-                        <a:t>Pydantic v2</a:t>
-                      </a:r>
-                      <a:endParaRPr lang="en-US" sz="1000" dirty="0"/>
-                    </a:p>
-                  </a:txBody>
-                  <a:tcPr marL="54864" marR="54864" marT="54864" marB="54864" anchor="ctr">
-                    <a:lnL w="9525" cap="flat" cmpd="sng" algn="ctr">
-                      <a:solidFill>
-                        <a:srgbClr val="BFBFBF"/>
-                      </a:solidFill>
-                      <a:prstDash val="solid"/>
-                      <a:round/>
-                      <a:headEnd type="none" w="med" len="med"/>
-                      <a:tailEnd type="none" w="med" len="med"/>
-                    </a:lnL>
-                    <a:lnR w="9525" cap="flat" cmpd="sng" algn="ctr">
-                      <a:solidFill>
-                        <a:srgbClr val="BFBFBF"/>
-                      </a:solidFill>
-                      <a:prstDash val="solid"/>
-                      <a:round/>
-                      <a:headEnd type="none" w="med" len="med"/>
-                      <a:tailEnd type="none" w="med" len="med"/>
-                    </a:lnR>
-                    <a:lnT w="9525" cap="flat" cmpd="sng" algn="ctr">
-                      <a:solidFill>
-                        <a:srgbClr val="BFBFBF"/>
-                      </a:solidFill>
-                      <a:prstDash val="solid"/>
-                      <a:round/>
-                      <a:headEnd type="none" w="med" len="med"/>
-                      <a:tailEnd type="none" w="med" len="med"/>
-                    </a:lnT>
-                    <a:lnB w="9525" cap="flat" cmpd="sng" algn="ctr">
-                      <a:solidFill>
-                        <a:srgbClr val="BFBFBF"/>
-                      </a:solidFill>
-                      <a:prstDash val="solid"/>
-                      <a:round/>
-                      <a:headEnd type="none" w="med" len="med"/>
-                      <a:tailEnd type="none" w="med" len="med"/>
-                    </a:lnB>
-                  </a:tcPr>
-                </a:tc>
-                <a:tc>
-                  <a:txBody>
-                    <a:bodyPr/>
-                    <a:lstStyle/>
-                    <a:p>
-                      <a:pPr marL="0" indent="0">
-                        <a:buNone/>
-                      </a:pPr>
-                      <a:r>
-                        <a:rPr lang="en-US" sz="1000" dirty="0">
-                          <a:solidFill>
-                            <a:srgbClr val="000000"/>
-                          </a:solidFill>
-                          <a:latin typeface="Calibri" pitchFamily="34" charset="0"/>
-                          <a:ea typeface="Calibri" pitchFamily="34" charset="-122"/>
-                          <a:cs typeface="Calibri" pitchFamily="34" charset="-120"/>
-                        </a:rPr>
-                        <a:t>Compliance manifest, the seven rules, HIS record shapes</a:t>
-                      </a:r>
-                      <a:endParaRPr lang="en-US" sz="1000" dirty="0"/>
-                    </a:p>
-                  </a:txBody>
-                  <a:tcPr marL="54864" marR="54864" marT="54864" marB="54864" anchor="ctr">
-                    <a:lnL w="9525" cap="flat" cmpd="sng" algn="ctr">
-                      <a:solidFill>
-                        <a:srgbClr val="BFBFBF"/>
-                      </a:solidFill>
-                      <a:prstDash val="solid"/>
-                      <a:round/>
-                      <a:headEnd type="none" w="med" len="med"/>
-                      <a:tailEnd type="none" w="med" len="med"/>
-                    </a:lnL>
-                    <a:lnR w="9525" cap="flat" cmpd="sng" algn="ctr">
-                      <a:solidFill>
-                        <a:srgbClr val="BFBFBF"/>
-                      </a:solidFill>
-                      <a:prstDash val="solid"/>
-                      <a:round/>
-                      <a:headEnd type="none" w="med" len="med"/>
-                      <a:tailEnd type="none" w="med" len="med"/>
-                    </a:lnR>
-                    <a:lnT w="9525" cap="flat" cmpd="sng" algn="ctr">
-                      <a:solidFill>
-                        <a:srgbClr val="BFBFBF"/>
-                      </a:solidFill>
-                      <a:prstDash val="solid"/>
-                      <a:round/>
-                      <a:headEnd type="none" w="med" len="med"/>
-                      <a:tailEnd type="none" w="med" len="med"/>
-                    </a:lnT>
-                    <a:lnB w="9525" cap="flat" cmpd="sng" algn="ctr">
-                      <a:solidFill>
-                        <a:srgbClr val="BFBFBF"/>
-                      </a:solidFill>
-                      <a:prstDash val="solid"/>
-                      <a:round/>
-                      <a:headEnd type="none" w="med" len="med"/>
-                      <a:tailEnd type="none" w="med" len="med"/>
-                    </a:lnB>
-                  </a:tcPr>
-                </a:tc>
-                <a:tc>
-                  <a:txBody>
-                    <a:bodyPr/>
-                    <a:lstStyle/>
-                    <a:p>
-                      <a:pPr marL="0" indent="0">
-                        <a:buNone/>
-                      </a:pPr>
-                      <a:r>
-                        <a:rPr lang="en-US" sz="950" dirty="0">
-                          <a:solidFill>
-                            <a:srgbClr val="000000"/>
-                          </a:solidFill>
-                          <a:latin typeface="Calibri" pitchFamily="34" charset="0"/>
-                          <a:ea typeface="Calibri" pitchFamily="34" charset="-122"/>
-                          <a:cs typeface="Calibri" pitchFamily="34" charset="-120"/>
-                        </a:rPr>
-                        <a:t>Rejects a malformed manifest at the boundary and serialises every report to JSON</a:t>
-                      </a:r>
-                      <a:endParaRPr lang="en-US" sz="950" dirty="0"/>
-                    </a:p>
-                  </a:txBody>
-                  <a:tcPr marL="54864" marR="54864" marT="54864" marB="54864" anchor="ctr">
-                    <a:lnL w="9525" cap="flat" cmpd="sng" algn="ctr">
-                      <a:solidFill>
-                        <a:srgbClr val="BFBFBF"/>
-                      </a:solidFill>
-                      <a:prstDash val="solid"/>
-                      <a:round/>
-                      <a:headEnd type="none" w="med" len="med"/>
-                      <a:tailEnd type="none" w="med" len="med"/>
-                    </a:lnL>
-                    <a:lnR w="9525" cap="flat" cmpd="sng" algn="ctr">
-                      <a:solidFill>
-                        <a:srgbClr val="BFBFBF"/>
-                      </a:solidFill>
-                      <a:prstDash val="solid"/>
-                      <a:round/>
-                      <a:headEnd type="none" w="med" len="med"/>
-                      <a:tailEnd type="none" w="med" len="med"/>
-                    </a:lnR>
-                    <a:lnT w="9525" cap="flat" cmpd="sng" algn="ctr">
-                      <a:solidFill>
-                        <a:srgbClr val="BFBFBF"/>
-                      </a:solidFill>
-                      <a:prstDash val="solid"/>
-                      <a:round/>
-                      <a:headEnd type="none" w="med" len="med"/>
-                      <a:tailEnd type="none" w="med" len="med"/>
-                    </a:lnT>
-                    <a:lnB w="9525" cap="flat" cmpd="sng" algn="ctr">
-                      <a:solidFill>
-                        <a:srgbClr val="BFBFBF"/>
-                      </a:solidFill>
-                      <a:prstDash val="solid"/>
-                      <a:round/>
-                      <a:headEnd type="none" w="med" len="med"/>
-                      <a:tailEnd type="none" w="med" len="med"/>
-                    </a:lnB>
-                  </a:tcPr>
-                </a:tc>
-                <a:extLst>
-                  <a:ext uri="{0D108BD9-81ED-4DB2-BD59-A6C34878D82A}">
-                    <a16:rowId xmlns:a16="http://schemas.microsoft.com/office/drawing/2014/main" val="10001"/>
-                  </a:ext>
-                </a:extLst>
-              </a:tr>
-              <a:tr h="440000">
-                <a:tc>
-                  <a:txBody>
-                    <a:bodyPr/>
-                    <a:lstStyle/>
-                    <a:p>
-                      <a:pPr marL="0" indent="0">
-                        <a:buNone/>
-                      </a:pPr>
-                      <a:r>
-                        <a:rPr lang="en-US" sz="1000" b="1" dirty="0">
-                          <a:solidFill>
-                            <a:srgbClr val="000000"/>
-                          </a:solidFill>
-                          <a:latin typeface="Calibri" pitchFamily="34" charset="0"/>
-                          <a:ea typeface="Calibri" pitchFamily="34" charset="-122"/>
-                          <a:cs typeface="Calibri" pitchFamily="34" charset="-120"/>
-                        </a:rPr>
-                        <a:t>Faker</a:t>
-                      </a:r>
-                      <a:endParaRPr lang="en-US" sz="1000" dirty="0"/>
-                    </a:p>
-                  </a:txBody>
-                  <a:tcPr marL="54864" marR="54864" marT="54864" marB="54864" anchor="ctr">
-                    <a:lnL w="9525" cap="flat" cmpd="sng" algn="ctr">
-                      <a:solidFill>
-                        <a:srgbClr val="BFBFBF"/>
-                      </a:solidFill>
-                      <a:prstDash val="solid"/>
-                      <a:round/>
-                      <a:headEnd type="none" w="med" len="med"/>
-                      <a:tailEnd type="none" w="med" len="med"/>
-                    </a:lnL>
-                    <a:lnR w="9525" cap="flat" cmpd="sng" algn="ctr">
-                      <a:solidFill>
-                        <a:srgbClr val="BFBFBF"/>
-                      </a:solidFill>
-                      <a:prstDash val="solid"/>
-                      <a:round/>
-                      <a:headEnd type="none" w="med" len="med"/>
-                      <a:tailEnd type="none" w="med" len="med"/>
-                    </a:lnR>
-                    <a:lnT w="9525" cap="flat" cmpd="sng" algn="ctr">
-                      <a:solidFill>
-                        <a:srgbClr val="BFBFBF"/>
-                      </a:solidFill>
-                      <a:prstDash val="solid"/>
-                      <a:round/>
-                      <a:headEnd type="none" w="med" len="med"/>
-                      <a:tailEnd type="none" w="med" len="med"/>
-                    </a:lnT>
-                    <a:lnB w="9525" cap="flat" cmpd="sng" algn="ctr">
-                      <a:solidFill>
-                        <a:srgbClr val="BFBFBF"/>
-                      </a:solidFill>
-                      <a:prstDash val="solid"/>
-                      <a:round/>
-                      <a:headEnd type="none" w="med" len="med"/>
-                      <a:tailEnd type="none" w="med" len="med"/>
-                    </a:lnB>
-                  </a:tcPr>
-                </a:tc>
-                <a:tc>
-                  <a:txBody>
-                    <a:bodyPr/>
-                    <a:lstStyle/>
-                    <a:p>
-                      <a:pPr marL="0" indent="0">
-                        <a:buNone/>
-                      </a:pPr>
-                      <a:r>
-                        <a:rPr lang="en-US" sz="1000" dirty="0">
-                          <a:solidFill>
-                            <a:srgbClr val="000000"/>
-                          </a:solidFill>
-                          <a:latin typeface="Calibri" pitchFamily="34" charset="0"/>
-                          <a:ea typeface="Calibri" pitchFamily="34" charset="-122"/>
-                          <a:cs typeface="Calibri" pitchFamily="34" charset="-120"/>
-                        </a:rPr>
-                        <a:t>Synthetic HIS record generation</a:t>
-                      </a:r>
-                      <a:endParaRPr lang="en-US" sz="1000" dirty="0"/>
-                    </a:p>
-                  </a:txBody>
-                  <a:tcPr marL="54864" marR="54864" marT="54864" marB="54864" anchor="ctr">
-                    <a:lnL w="9525" cap="flat" cmpd="sng" algn="ctr">
-                      <a:solidFill>
-                        <a:srgbClr val="BFBFBF"/>
-                      </a:solidFill>
-                      <a:prstDash val="solid"/>
-                      <a:round/>
-                      <a:headEnd type="none" w="med" len="med"/>
-                      <a:tailEnd type="none" w="med" len="med"/>
-                    </a:lnL>
-                    <a:lnR w="9525" cap="flat" cmpd="sng" algn="ctr">
-                      <a:solidFill>
-                        <a:srgbClr val="BFBFBF"/>
-                      </a:solidFill>
-                      <a:prstDash val="solid"/>
-                      <a:round/>
-                      <a:headEnd type="none" w="med" len="med"/>
-                      <a:tailEnd type="none" w="med" len="med"/>
-                    </a:lnR>
-                    <a:lnT w="9525" cap="flat" cmpd="sng" algn="ctr">
-                      <a:solidFill>
-                        <a:srgbClr val="BFBFBF"/>
-                      </a:solidFill>
-                      <a:prstDash val="solid"/>
-                      <a:round/>
-                      <a:headEnd type="none" w="med" len="med"/>
-                      <a:tailEnd type="none" w="med" len="med"/>
-                    </a:lnT>
-                    <a:lnB w="9525" cap="flat" cmpd="sng" algn="ctr">
-                      <a:solidFill>
-                        <a:srgbClr val="BFBFBF"/>
-                      </a:solidFill>
-                      <a:prstDash val="solid"/>
-                      <a:round/>
-                      <a:headEnd type="none" w="med" len="med"/>
-                      <a:tailEnd type="none" w="med" len="med"/>
-                    </a:lnB>
-                  </a:tcPr>
-                </a:tc>
-                <a:tc>
-                  <a:txBody>
-                    <a:bodyPr/>
-                    <a:lstStyle/>
-                    <a:p>
-                      <a:pPr marL="0" indent="0">
-                        <a:buNone/>
-                      </a:pPr>
-                      <a:r>
-                        <a:rPr lang="en-US" sz="950" dirty="0">
-                          <a:solidFill>
-                            <a:srgbClr val="000000"/>
-                          </a:solidFill>
-                          <a:latin typeface="Calibri" pitchFamily="34" charset="0"/>
-                          <a:ea typeface="Calibri" pitchFamily="34" charset="-122"/>
-                          <a:cs typeface="Calibri" pitchFamily="34" charset="-120"/>
-                        </a:rPr>
-                        <a:t>Realistic values with no real patient; seeded, so every demo run reproduces exactly</a:t>
-                      </a:r>
-                      <a:endParaRPr lang="en-US" sz="950" dirty="0"/>
-                    </a:p>
-                  </a:txBody>
-                  <a:tcPr marL="54864" marR="54864" marT="54864" marB="54864" anchor="ctr">
-                    <a:lnL w="9525" cap="flat" cmpd="sng" algn="ctr">
-                      <a:solidFill>
-                        <a:srgbClr val="BFBFBF"/>
-                      </a:solidFill>
-                      <a:prstDash val="solid"/>
-                      <a:round/>
-                      <a:headEnd type="none" w="med" len="med"/>
-                      <a:tailEnd type="none" w="med" len="med"/>
-                    </a:lnL>
-                    <a:lnR w="9525" cap="flat" cmpd="sng" algn="ctr">
-                      <a:solidFill>
-                        <a:srgbClr val="BFBFBF"/>
-                      </a:solidFill>
-                      <a:prstDash val="solid"/>
-                      <a:round/>
-                      <a:headEnd type="none" w="med" len="med"/>
-                      <a:tailEnd type="none" w="med" len="med"/>
-                    </a:lnR>
-                    <a:lnT w="9525" cap="flat" cmpd="sng" algn="ctr">
-                      <a:solidFill>
-                        <a:srgbClr val="BFBFBF"/>
-                      </a:solidFill>
-                      <a:prstDash val="solid"/>
-                      <a:round/>
-                      <a:headEnd type="none" w="med" len="med"/>
-                      <a:tailEnd type="none" w="med" len="med"/>
-                    </a:lnT>
-                    <a:lnB w="9525" cap="flat" cmpd="sng" algn="ctr">
-                      <a:solidFill>
-                        <a:srgbClr val="BFBFBF"/>
-                      </a:solidFill>
-                      <a:prstDash val="solid"/>
-                      <a:round/>
-                      <a:headEnd type="none" w="med" len="med"/>
-                      <a:tailEnd type="none" w="med" len="med"/>
-                    </a:lnB>
-                  </a:tcPr>
-                </a:tc>
-                <a:extLst>
-                  <a:ext uri="{0D108BD9-81ED-4DB2-BD59-A6C34878D82A}">
-                    <a16:rowId xmlns:a16="http://schemas.microsoft.com/office/drawing/2014/main" val="10001"/>
-                  </a:ext>
-                </a:extLst>
-              </a:tr>
-              <a:tr h="440000">
-                <a:tc>
-                  <a:txBody>
-                    <a:bodyPr/>
-                    <a:lstStyle/>
-                    <a:p>
-                      <a:pPr marL="0" indent="0">
-                        <a:buNone/>
-                      </a:pPr>
-                      <a:r>
-                        <a:rPr lang="en-US" sz="1000" b="1" dirty="0">
-                          <a:solidFill>
-                            <a:srgbClr val="000000"/>
-                          </a:solidFill>
-                          <a:latin typeface="Calibri" pitchFamily="34" charset="0"/>
-                          <a:ea typeface="Calibri" pitchFamily="34" charset="-122"/>
-                          <a:cs typeface="Calibri" pitchFamily="34" charset="-120"/>
-                        </a:rPr>
-                        <a:t>pytest</a:t>
-                      </a:r>
-                      <a:endParaRPr lang="en-US" sz="1000" dirty="0"/>
-                    </a:p>
-                  </a:txBody>
-                  <a:tcPr marL="54864" marR="54864" marT="54864" marB="54864" anchor="ctr">
-                    <a:lnL w="9525" cap="flat" cmpd="sng" algn="ctr">
-                      <a:solidFill>
-                        <a:srgbClr val="BFBFBF"/>
-                      </a:solidFill>
-                      <a:prstDash val="solid"/>
-                      <a:round/>
-                      <a:headEnd type="none" w="med" len="med"/>
-                      <a:tailEnd type="none" w="med" len="med"/>
-                    </a:lnL>
-                    <a:lnR w="9525" cap="flat" cmpd="sng" algn="ctr">
-                      <a:solidFill>
-                        <a:srgbClr val="BFBFBF"/>
-                      </a:solidFill>
-                      <a:prstDash val="solid"/>
-                      <a:round/>
-                      <a:headEnd type="none" w="med" len="med"/>
-                      <a:tailEnd type="none" w="med" len="med"/>
-                    </a:lnR>
-                    <a:lnT w="9525" cap="flat" cmpd="sng" algn="ctr">
-                      <a:solidFill>
-                        <a:srgbClr val="BFBFBF"/>
-                      </a:solidFill>
-                      <a:prstDash val="solid"/>
-                      <a:round/>
-                      <a:headEnd type="none" w="med" len="med"/>
-                      <a:tailEnd type="none" w="med" len="med"/>
-                    </a:lnT>
-                    <a:lnB w="9525" cap="flat" cmpd="sng" algn="ctr">
-                      <a:solidFill>
-                        <a:srgbClr val="BFBFBF"/>
-                      </a:solidFill>
-                      <a:prstDash val="solid"/>
-                      <a:round/>
-                      <a:headEnd type="none" w="med" len="med"/>
-                      <a:tailEnd type="none" w="med" len="med"/>
-                    </a:lnB>
-                  </a:tcPr>
-                </a:tc>
-                <a:tc>
-                  <a:txBody>
-                    <a:bodyPr/>
-                    <a:lstStyle/>
-                    <a:p>
-                      <a:pPr marL="0" indent="0">
-                        <a:buNone/>
-                      </a:pPr>
-                      <a:r>
-                        <a:rPr lang="en-US" sz="1000" dirty="0">
-                          <a:solidFill>
-                            <a:srgbClr val="000000"/>
-                          </a:solidFill>
-                          <a:latin typeface="Calibri" pitchFamily="34" charset="0"/>
-                          <a:ea typeface="Calibri" pitchFamily="34" charset="-122"/>
-                          <a:cs typeface="Calibri" pitchFamily="34" charset="-120"/>
-                        </a:rPr>
-                        <a:t>91 tests across rules, techniques and adapters</a:t>
-                      </a:r>
-                      <a:endParaRPr lang="en-US" sz="1000" dirty="0"/>
-                    </a:p>
-                  </a:txBody>
-                  <a:tcPr marL="54864" marR="54864" marT="54864" marB="54864" anchor="ctr">
-                    <a:lnL w="9525" cap="flat" cmpd="sng" algn="ctr">
-                      <a:solidFill>
-                        <a:srgbClr val="BFBFBF"/>
-                      </a:solidFill>
-                      <a:prstDash val="solid"/>
-                      <a:round/>
-                      <a:headEnd type="none" w="med" len="med"/>
-                      <a:tailEnd type="none" w="med" len="med"/>
-                    </a:lnL>
-                    <a:lnR w="9525" cap="flat" cmpd="sng" algn="ctr">
-                      <a:solidFill>
-                        <a:srgbClr val="BFBFBF"/>
-                      </a:solidFill>
-                      <a:prstDash val="solid"/>
-                      <a:round/>
-                      <a:headEnd type="none" w="med" len="med"/>
-                      <a:tailEnd type="none" w="med" len="med"/>
-                    </a:lnR>
-                    <a:lnT w="9525" cap="flat" cmpd="sng" algn="ctr">
-                      <a:solidFill>
-                        <a:srgbClr val="BFBFBF"/>
-                      </a:solidFill>
-                      <a:prstDash val="solid"/>
-                      <a:round/>
-                      <a:headEnd type="none" w="med" len="med"/>
-                      <a:tailEnd type="none" w="med" len="med"/>
-                    </a:lnT>
-                    <a:lnB w="9525" cap="flat" cmpd="sng" algn="ctr">
-                      <a:solidFill>
-                        <a:srgbClr val="BFBFBF"/>
-                      </a:solidFill>
-                      <a:prstDash val="solid"/>
-                      <a:round/>
-                      <a:headEnd type="none" w="med" len="med"/>
-                      <a:tailEnd type="none" w="med" len="med"/>
-                    </a:lnB>
-                  </a:tcPr>
-                </a:tc>
-                <a:tc>
-                  <a:txBody>
-                    <a:bodyPr/>
-                    <a:lstStyle/>
-                    <a:p>
-                      <a:pPr marL="0" indent="0">
-                        <a:buNone/>
-                      </a:pPr>
-                      <a:r>
-                        <a:rPr lang="en-US" sz="950" dirty="0">
-                          <a:solidFill>
-                            <a:srgbClr val="000000"/>
-                          </a:solidFill>
-                          <a:latin typeface="Calibri" pitchFamily="34" charset="0"/>
-                          <a:ea typeface="Calibri" pitchFamily="34" charset="-122"/>
-                          <a:cs typeface="Calibri" pitchFamily="34" charset="-120"/>
-                        </a:rPr>
-                        <a:t>The rules are the contribution, so they are pinned by tests rather than asserted</a:t>
-                      </a:r>
-                      <a:endParaRPr lang="en-US" sz="950" dirty="0"/>
-                    </a:p>
-                  </a:txBody>
-                  <a:tcPr marL="54864" marR="54864" marT="54864" marB="54864" anchor="ctr">
-                    <a:lnL w="9525" cap="flat" cmpd="sng" algn="ctr">
-                      <a:solidFill>
-                        <a:srgbClr val="BFBFBF"/>
-                      </a:solidFill>
-                      <a:prstDash val="solid"/>
-                      <a:round/>
-                      <a:headEnd type="none" w="med" len="med"/>
-                      <a:tailEnd type="none" w="med" len="med"/>
-                    </a:lnL>
-                    <a:lnR w="9525" cap="flat" cmpd="sng" algn="ctr">
-                      <a:solidFill>
-                        <a:srgbClr val="BFBFBF"/>
-                      </a:solidFill>
-                      <a:prstDash val="solid"/>
-                      <a:round/>
-                      <a:headEnd type="none" w="med" len="med"/>
-                      <a:tailEnd type="none" w="med" len="med"/>
-                    </a:lnR>
-                    <a:lnT w="9525" cap="flat" cmpd="sng" algn="ctr">
-                      <a:solidFill>
-                        <a:srgbClr val="BFBFBF"/>
-                      </a:solidFill>
-                      <a:prstDash val="solid"/>
-                      <a:round/>
-                      <a:headEnd type="none" w="med" len="med"/>
-                      <a:tailEnd type="none" w="med" len="med"/>
-                    </a:lnT>
-                    <a:lnB w="9525" cap="flat" cmpd="sng" algn="ctr">
-                      <a:solidFill>
-                        <a:srgbClr val="BFBFBF"/>
-                      </a:solidFill>
-                      <a:prstDash val="solid"/>
-                      <a:round/>
-                      <a:headEnd type="none" w="med" len="med"/>
-                      <a:tailEnd type="none" w="med" len="med"/>
-                    </a:lnB>
-                  </a:tcPr>
-                </a:tc>
-                <a:extLst>
-                  <a:ext uri="{0D108BD9-81ED-4DB2-BD59-A6C34878D82A}">
-                    <a16:rowId xmlns:a16="http://schemas.microsoft.com/office/drawing/2014/main" val="10001"/>
-                  </a:ext>
-                </a:extLst>
-              </a:tr>
-              <a:tr h="440000">
-                <a:tc>
-                  <a:txBody>
-                    <a:bodyPr/>
-                    <a:lstStyle/>
-                    <a:p>
-                      <a:pPr marL="0" indent="0">
-                        <a:buNone/>
-                      </a:pPr>
-                      <a:r>
-                        <a:rPr lang="en-US" sz="1000" b="1" dirty="0">
-                          <a:solidFill>
-                            <a:srgbClr val="000000"/>
-                          </a:solidFill>
-                          <a:latin typeface="Calibri" pitchFamily="34" charset="0"/>
-                          <a:ea typeface="Calibri" pitchFamily="34" charset="-122"/>
-                          <a:cs typeface="Calibri" pitchFamily="34" charset="-120"/>
-                        </a:rPr>
-                        <a:t>Playwright</a:t>
-                      </a:r>
-                      <a:endParaRPr lang="en-US" sz="1000" dirty="0"/>
-                    </a:p>
-                  </a:txBody>
-                  <a:tcPr marL="54864" marR="54864" marT="54864" marB="54864" anchor="ctr">
-                    <a:lnL w="9525" cap="flat" cmpd="sng" algn="ctr">
-                      <a:solidFill>
-                        <a:srgbClr val="BFBFBF"/>
-                      </a:solidFill>
-                      <a:prstDash val="solid"/>
-                      <a:round/>
-                      <a:headEnd type="none" w="med" len="med"/>
-                      <a:tailEnd type="none" w="med" len="med"/>
-                    </a:lnL>
-                    <a:lnR w="9525" cap="flat" cmpd="sng" algn="ctr">
-                      <a:solidFill>
-                        <a:srgbClr val="BFBFBF"/>
-                      </a:solidFill>
-                      <a:prstDash val="solid"/>
-                      <a:round/>
-                      <a:headEnd type="none" w="med" len="med"/>
-                      <a:tailEnd type="none" w="med" len="med"/>
-                    </a:lnR>
-                    <a:lnT w="9525" cap="flat" cmpd="sng" algn="ctr">
-                      <a:solidFill>
-                        <a:srgbClr val="BFBFBF"/>
-                      </a:solidFill>
-                      <a:prstDash val="solid"/>
-                      <a:round/>
-                      <a:headEnd type="none" w="med" len="med"/>
-                      <a:tailEnd type="none" w="med" len="med"/>
-                    </a:lnT>
-                    <a:lnB w="9525" cap="flat" cmpd="sng" algn="ctr">
-                      <a:solidFill>
-                        <a:srgbClr val="BFBFBF"/>
-                      </a:solidFill>
-                      <a:prstDash val="solid"/>
-                      <a:round/>
-                      <a:headEnd type="none" w="med" len="med"/>
-                      <a:tailEnd type="none" w="med" len="med"/>
-                    </a:lnB>
-                  </a:tcPr>
-                </a:tc>
-                <a:tc>
-                  <a:txBody>
-                    <a:bodyPr/>
-                    <a:lstStyle/>
-                    <a:p>
-                      <a:pPr marL="0" indent="0">
-                        <a:buNone/>
-                      </a:pPr>
-                      <a:r>
-                        <a:rPr lang="en-US" sz="1000" dirty="0">
-                          <a:solidFill>
-                            <a:srgbClr val="000000"/>
-                          </a:solidFill>
-                          <a:latin typeface="Calibri" pitchFamily="34" charset="0"/>
-                          <a:ea typeface="Calibri" pitchFamily="34" charset="-122"/>
-                          <a:cs typeface="Calibri" pitchFamily="34" charset="-120"/>
-                        </a:rPr>
-                        <a:t>Tier-2 credentialed portal scraping</a:t>
-                      </a:r>
-                      <a:endParaRPr lang="en-US" sz="1000" dirty="0"/>
-                    </a:p>
-                  </a:txBody>
-                  <a:tcPr marL="54864" marR="54864" marT="54864" marB="54864" anchor="ctr">
-                    <a:lnL w="9525" cap="flat" cmpd="sng" algn="ctr">
-                      <a:solidFill>
-                        <a:srgbClr val="BFBFBF"/>
-                      </a:solidFill>
-                      <a:prstDash val="solid"/>
-                      <a:round/>
-                      <a:headEnd type="none" w="med" len="med"/>
-                      <a:tailEnd type="none" w="med" len="med"/>
-                    </a:lnL>
-                    <a:lnR w="9525" cap="flat" cmpd="sng" algn="ctr">
-                      <a:solidFill>
-                        <a:srgbClr val="BFBFBF"/>
-                      </a:solidFill>
-                      <a:prstDash val="solid"/>
-                      <a:round/>
-                      <a:headEnd type="none" w="med" len="med"/>
-                      <a:tailEnd type="none" w="med" len="med"/>
-                    </a:lnR>
-                    <a:lnT w="9525" cap="flat" cmpd="sng" algn="ctr">
-                      <a:solidFill>
-                        <a:srgbClr val="BFBFBF"/>
-                      </a:solidFill>
-                      <a:prstDash val="solid"/>
-                      <a:round/>
-                      <a:headEnd type="none" w="med" len="med"/>
-                      <a:tailEnd type="none" w="med" len="med"/>
-                    </a:lnT>
-                    <a:lnB w="9525" cap="flat" cmpd="sng" algn="ctr">
-                      <a:solidFill>
-                        <a:srgbClr val="BFBFBF"/>
-                      </a:solidFill>
-                      <a:prstDash val="solid"/>
-                      <a:round/>
-                      <a:headEnd type="none" w="med" len="med"/>
-                      <a:tailEnd type="none" w="med" len="med"/>
-                    </a:lnB>
-                  </a:tcPr>
-                </a:tc>
-                <a:tc>
-                  <a:txBody>
-                    <a:bodyPr/>
-                    <a:lstStyle/>
-                    <a:p>
-                      <a:pPr marL="0" indent="0">
-                        <a:buNone/>
-                      </a:pPr>
-                      <a:r>
-                        <a:rPr lang="en-US" sz="950" dirty="0">
-                          <a:solidFill>
-                            <a:srgbClr val="000000"/>
-                          </a:solidFill>
-                          <a:latin typeface="Calibri" pitchFamily="34" charset="0"/>
-                          <a:ea typeface="Calibri" pitchFamily="34" charset="-122"/>
-                          <a:cs typeface="Calibri" pitchFamily="34" charset="-120"/>
-                        </a:rPr>
-                        <a:t>Hospital portals need login, session persistence and JavaScript rendering. Stubbed until access</a:t>
-                      </a:r>
-                      <a:endParaRPr lang="en-US" sz="950" dirty="0"/>
-                    </a:p>
-                  </a:txBody>
-                  <a:tcPr marL="54864" marR="54864" marT="54864" marB="54864" anchor="ctr">
-                    <a:lnL w="9525" cap="flat" cmpd="sng" algn="ctr">
-                      <a:solidFill>
-                        <a:srgbClr val="BFBFBF"/>
-                      </a:solidFill>
-                      <a:prstDash val="solid"/>
-                      <a:round/>
-                      <a:headEnd type="none" w="med" len="med"/>
-                      <a:tailEnd type="none" w="med" len="med"/>
-                    </a:lnL>
-                    <a:lnR w="9525" cap="flat" cmpd="sng" algn="ctr">
-                      <a:solidFill>
-                        <a:srgbClr val="BFBFBF"/>
-                      </a:solidFill>
-                      <a:prstDash val="solid"/>
-                      <a:round/>
-                      <a:headEnd type="none" w="med" len="med"/>
-                      <a:tailEnd type="none" w="med" len="med"/>
-                    </a:lnR>
-                    <a:lnT w="9525" cap="flat" cmpd="sng" algn="ctr">
-                      <a:solidFill>
-                        <a:srgbClr val="BFBFBF"/>
-                      </a:solidFill>
-                      <a:prstDash val="solid"/>
-                      <a:round/>
-                      <a:headEnd type="none" w="med" len="med"/>
-                      <a:tailEnd type="none" w="med" len="med"/>
-                    </a:lnT>
-                    <a:lnB w="9525" cap="flat" cmpd="sng" algn="ctr">
-                      <a:solidFill>
-                        <a:srgbClr val="BFBFBF"/>
-                      </a:solidFill>
-                      <a:prstDash val="solid"/>
-                      <a:round/>
-                      <a:headEnd type="none" w="med" len="med"/>
-                      <a:tailEnd type="none" w="med" len="med"/>
-                    </a:lnB>
-                  </a:tcPr>
-                </a:tc>
-                <a:extLst>
-                  <a:ext uri="{0D108BD9-81ED-4DB2-BD59-A6C34878D82A}">
-                    <a16:rowId xmlns:a16="http://schemas.microsoft.com/office/drawing/2014/main" val="10001"/>
-                  </a:ext>
-                </a:extLst>
-              </a:tr>
-              <a:tr h="440000">
-                <a:tc>
-                  <a:txBody>
-                    <a:bodyPr/>
-                    <a:lstStyle/>
-                    <a:p>
-                      <a:pPr marL="0" indent="0">
-                        <a:buNone/>
-                      </a:pPr>
-                      <a:r>
-                        <a:rPr lang="en-US" sz="1000" b="1" dirty="0">
-                          <a:solidFill>
-                            <a:srgbClr val="000000"/>
-                          </a:solidFill>
-                          <a:latin typeface="Calibri" pitchFamily="34" charset="0"/>
-                          <a:ea typeface="Calibri" pitchFamily="34" charset="-122"/>
-                          <a:cs typeface="Calibri" pitchFamily="34" charset="-120"/>
-                        </a:rPr>
-                        <a:t>Anthropic Claude API</a:t>
-                      </a:r>
-                      <a:endParaRPr lang="en-US" sz="1000" dirty="0"/>
-                    </a:p>
-                  </a:txBody>
-                  <a:tcPr marL="54864" marR="54864" marT="54864" marB="54864" anchor="ctr">
-                    <a:lnL w="9525" cap="flat" cmpd="sng" algn="ctr">
-                      <a:solidFill>
-                        <a:srgbClr val="BFBFBF"/>
-                      </a:solidFill>
-                      <a:prstDash val="solid"/>
-                      <a:round/>
-                      <a:headEnd type="none" w="med" len="med"/>
-                      <a:tailEnd type="none" w="med" len="med"/>
-                    </a:lnL>
-                    <a:lnR w="9525" cap="flat" cmpd="sng" algn="ctr">
-                      <a:solidFill>
-                        <a:srgbClr val="BFBFBF"/>
-                      </a:solidFill>
-                      <a:prstDash val="solid"/>
-                      <a:round/>
-                      <a:headEnd type="none" w="med" len="med"/>
-                      <a:tailEnd type="none" w="med" len="med"/>
-                    </a:lnR>
-                    <a:lnT w="9525" cap="flat" cmpd="sng" algn="ctr">
-                      <a:solidFill>
-                        <a:srgbClr val="BFBFBF"/>
-                      </a:solidFill>
-                      <a:prstDash val="solid"/>
-                      <a:round/>
-                      <a:headEnd type="none" w="med" len="med"/>
-                      <a:tailEnd type="none" w="med" len="med"/>
-                    </a:lnT>
-                    <a:lnB w="9525" cap="flat" cmpd="sng" algn="ctr">
-                      <a:solidFill>
-                        <a:srgbClr val="BFBFBF"/>
-                      </a:solidFill>
-                      <a:prstDash val="solid"/>
-                      <a:round/>
-                      <a:headEnd type="none" w="med" len="med"/>
-                      <a:tailEnd type="none" w="med" len="med"/>
-                    </a:lnB>
-                  </a:tcPr>
-                </a:tc>
-                <a:tc>
-                  <a:txBody>
-                    <a:bodyPr/>
-                    <a:lstStyle/>
-                    <a:p>
-                      <a:pPr marL="0" indent="0">
-                        <a:buNone/>
-                      </a:pPr>
-                      <a:r>
-                        <a:rPr lang="en-US" sz="1000" dirty="0">
-                          <a:solidFill>
-                            <a:srgbClr val="000000"/>
-                          </a:solidFill>
-                          <a:latin typeface="Calibri" pitchFamily="34" charset="0"/>
-                          <a:ea typeface="Calibri" pitchFamily="34" charset="-122"/>
-                          <a:cs typeface="Calibri" pitchFamily="34" charset="-120"/>
-                        </a:rPr>
-                        <a:t>The extraction agent (build step 6)</a:t>
-                      </a:r>
-                      <a:endParaRPr lang="en-US" sz="1000" dirty="0"/>
-                    </a:p>
-                  </a:txBody>
-                  <a:tcPr marL="54864" marR="54864" marT="54864" marB="54864" anchor="ctr">
-                    <a:lnL w="9525" cap="flat" cmpd="sng" algn="ctr">
-                      <a:solidFill>
-                        <a:srgbClr val="BFBFBF"/>
-                      </a:solidFill>
-                      <a:prstDash val="solid"/>
-                      <a:round/>
-                      <a:headEnd type="none" w="med" len="med"/>
-                      <a:tailEnd type="none" w="med" len="med"/>
-                    </a:lnL>
-                    <a:lnR w="9525" cap="flat" cmpd="sng" algn="ctr">
-                      <a:solidFill>
-                        <a:srgbClr val="BFBFBF"/>
-                      </a:solidFill>
-                      <a:prstDash val="solid"/>
-                      <a:round/>
-                      <a:headEnd type="none" w="med" len="med"/>
-                      <a:tailEnd type="none" w="med" len="med"/>
-                    </a:lnR>
-                    <a:lnT w="9525" cap="flat" cmpd="sng" algn="ctr">
-                      <a:solidFill>
-                        <a:srgbClr val="BFBFBF"/>
-                      </a:solidFill>
-                      <a:prstDash val="solid"/>
-                      <a:round/>
-                      <a:headEnd type="none" w="med" len="med"/>
-                      <a:tailEnd type="none" w="med" len="med"/>
-                    </a:lnT>
-                    <a:lnB w="9525" cap="flat" cmpd="sng" algn="ctr">
-                      <a:solidFill>
-                        <a:srgbClr val="BFBFBF"/>
-                      </a:solidFill>
-                      <a:prstDash val="solid"/>
-                      <a:round/>
-                      <a:headEnd type="none" w="med" len="med"/>
-                      <a:tailEnd type="none" w="med" len="med"/>
-                    </a:lnB>
-                  </a:tcPr>
-                </a:tc>
-                <a:tc>
-                  <a:txBody>
-                    <a:bodyPr/>
-                    <a:lstStyle/>
-                    <a:p>
-                      <a:pPr marL="0" indent="0">
-                        <a:buNone/>
-                      </a:pPr>
-                      <a:r>
-                        <a:rPr lang="en-US" sz="950" dirty="0">
-                          <a:solidFill>
-                            <a:srgbClr val="000000"/>
-                          </a:solidFill>
-                          <a:latin typeface="Calibri" pitchFamily="34" charset="0"/>
-                          <a:ea typeface="Calibri" pitchFamily="34" charset="-122"/>
-                          <a:cs typeface="Calibri" pitchFamily="34" charset="-120"/>
-                        </a:rPr>
-                        <a:t>Off-the-shelf, no fine-tuning; chosen for structured output and tool use. Not yet called</a:t>
-                      </a:r>
-                      <a:endParaRPr lang="en-US" sz="950" dirty="0"/>
-                    </a:p>
-                  </a:txBody>
-                  <a:tcPr marL="54864" marR="54864" marT="54864" marB="54864" anchor="ctr">
-                    <a:lnL w="9525" cap="flat" cmpd="sng" algn="ctr">
-                      <a:solidFill>
-                        <a:srgbClr val="BFBFBF"/>
-                      </a:solidFill>
-                      <a:prstDash val="solid"/>
-                      <a:round/>
-                      <a:headEnd type="none" w="med" len="med"/>
-                      <a:tailEnd type="none" w="med" len="med"/>
-                    </a:lnL>
-                    <a:lnR w="9525" cap="flat" cmpd="sng" algn="ctr">
-                      <a:solidFill>
-                        <a:srgbClr val="BFBFBF"/>
-                      </a:solidFill>
-                      <a:prstDash val="solid"/>
-                      <a:round/>
-                      <a:headEnd type="none" w="med" len="med"/>
-                      <a:tailEnd type="none" w="med" len="med"/>
-                    </a:lnR>
-                    <a:lnT w="9525" cap="flat" cmpd="sng" algn="ctr">
-                      <a:solidFill>
-                        <a:srgbClr val="BFBFBF"/>
-                      </a:solidFill>
-                      <a:prstDash val="solid"/>
-                      <a:round/>
-                      <a:headEnd type="none" w="med" len="med"/>
-                      <a:tailEnd type="none" w="med" len="med"/>
-                    </a:lnT>
-                    <a:lnB w="9525" cap="flat" cmpd="sng" algn="ctr">
-                      <a:solidFill>
-                        <a:srgbClr val="BFBFBF"/>
-                      </a:solidFill>
-                      <a:prstDash val="solid"/>
-                      <a:round/>
-                      <a:headEnd type="none" w="med" len="med"/>
-                      <a:tailEnd type="none" w="med" len="med"/>
-                    </a:lnB>
-                  </a:tcPr>
-                </a:tc>
-                <a:extLst>
-                  <a:ext uri="{0D108BD9-81ED-4DB2-BD59-A6C34878D82A}">
-                    <a16:rowId xmlns:a16="http://schemas.microsoft.com/office/drawing/2014/main" val="10001"/>
-                  </a:ext>
-                </a:extLst>
-              </a:tr>
-              <a:tr h="440000">
-                <a:tc>
-                  <a:txBody>
-                    <a:bodyPr/>
-                    <a:lstStyle/>
-                    <a:p>
-                      <a:pPr marL="0" indent="0">
-                        <a:buNone/>
-                      </a:pPr>
-                      <a:r>
-                        <a:rPr lang="en-US" sz="1000" b="1" dirty="0">
-                          <a:solidFill>
-                            <a:srgbClr val="000000"/>
-                          </a:solidFill>
-                          <a:latin typeface="Calibri" pitchFamily="34" charset="0"/>
-                          <a:ea typeface="Calibri" pitchFamily="34" charset="-122"/>
-                          <a:cs typeface="Calibri" pitchFamily="34" charset="-120"/>
-                        </a:rPr>
-                        <a:t>HL7 / FHIR / DICOM / ISO-IEEE 11073</a:t>
-                      </a:r>
-                      <a:endParaRPr lang="en-US" sz="1000" dirty="0"/>
-                    </a:p>
-                  </a:txBody>
-                  <a:tcPr marL="54864" marR="54864" marT="54864" marB="54864" anchor="ctr">
-                    <a:lnL w="9525" cap="flat" cmpd="sng" algn="ctr">
-                      <a:solidFill>
-                        <a:srgbClr val="BFBFBF"/>
-                      </a:solidFill>
-                      <a:prstDash val="solid"/>
-                      <a:round/>
-                      <a:headEnd type="none" w="med" len="med"/>
-                      <a:tailEnd type="none" w="med" len="med"/>
-                    </a:lnL>
-                    <a:lnR w="9525" cap="flat" cmpd="sng" algn="ctr">
-                      <a:solidFill>
-                        <a:srgbClr val="BFBFBF"/>
-                      </a:solidFill>
-                      <a:prstDash val="solid"/>
-                      <a:round/>
-                      <a:headEnd type="none" w="med" len="med"/>
-                      <a:tailEnd type="none" w="med" len="med"/>
-                    </a:lnR>
-                    <a:lnT w="9525" cap="flat" cmpd="sng" algn="ctr">
-                      <a:solidFill>
-                        <a:srgbClr val="BFBFBF"/>
-                      </a:solidFill>
-                      <a:prstDash val="solid"/>
-                      <a:round/>
-                      <a:headEnd type="none" w="med" len="med"/>
-                      <a:tailEnd type="none" w="med" len="med"/>
-                    </a:lnT>
-                    <a:lnB w="9525" cap="flat" cmpd="sng" algn="ctr">
-                      <a:solidFill>
-                        <a:srgbClr val="BFBFBF"/>
-                      </a:solidFill>
-                      <a:prstDash val="solid"/>
-                      <a:round/>
-                      <a:headEnd type="none" w="med" len="med"/>
-                      <a:tailEnd type="none" w="med" len="med"/>
-                    </a:lnB>
-                  </a:tcPr>
-                </a:tc>
-                <a:tc>
-                  <a:txBody>
-                    <a:bodyPr/>
-                    <a:lstStyle/>
-                    <a:p>
-                      <a:pPr marL="0" indent="0">
-                        <a:buNone/>
-                      </a:pPr>
-                      <a:r>
-                        <a:rPr lang="en-US" sz="1000" dirty="0">
-                          <a:solidFill>
-                            <a:srgbClr val="000000"/>
-                          </a:solidFill>
-                          <a:latin typeface="Calibri" pitchFamily="34" charset="0"/>
-                          <a:ea typeface="Calibri" pitchFamily="34" charset="-122"/>
-                          <a:cs typeface="Calibri" pitchFamily="34" charset="-120"/>
-                        </a:rPr>
-                        <a:t>Interoperability shaping per HIS layer</a:t>
-                      </a:r>
-                      <a:endParaRPr lang="en-US" sz="1000" dirty="0"/>
-                    </a:p>
-                  </a:txBody>
-                  <a:tcPr marL="54864" marR="54864" marT="54864" marB="54864" anchor="ctr">
-                    <a:lnL w="9525" cap="flat" cmpd="sng" algn="ctr">
-                      <a:solidFill>
-                        <a:srgbClr val="BFBFBF"/>
-                      </a:solidFill>
-                      <a:prstDash val="solid"/>
-                      <a:round/>
-                      <a:headEnd type="none" w="med" len="med"/>
-                      <a:tailEnd type="none" w="med" len="med"/>
-                    </a:lnL>
-                    <a:lnR w="9525" cap="flat" cmpd="sng" algn="ctr">
-                      <a:solidFill>
-                        <a:srgbClr val="BFBFBF"/>
-                      </a:solidFill>
-                      <a:prstDash val="solid"/>
-                      <a:round/>
-                      <a:headEnd type="none" w="med" len="med"/>
-                      <a:tailEnd type="none" w="med" len="med"/>
-                    </a:lnR>
-                    <a:lnT w="9525" cap="flat" cmpd="sng" algn="ctr">
-                      <a:solidFill>
-                        <a:srgbClr val="BFBFBF"/>
-                      </a:solidFill>
-                      <a:prstDash val="solid"/>
-                      <a:round/>
-                      <a:headEnd type="none" w="med" len="med"/>
-                      <a:tailEnd type="none" w="med" len="med"/>
-                    </a:lnT>
-                    <a:lnB w="9525" cap="flat" cmpd="sng" algn="ctr">
-                      <a:solidFill>
-                        <a:srgbClr val="BFBFBF"/>
-                      </a:solidFill>
-                      <a:prstDash val="solid"/>
-                      <a:round/>
-                      <a:headEnd type="none" w="med" len="med"/>
-                      <a:tailEnd type="none" w="med" len="med"/>
-                    </a:lnB>
-                  </a:tcPr>
-                </a:tc>
-                <a:tc>
-                  <a:txBody>
-                    <a:bodyPr/>
-                    <a:lstStyle/>
-                    <a:p>
-                      <a:pPr marL="0" indent="0">
-                        <a:buNone/>
-                      </a:pPr>
-                      <a:r>
-                        <a:rPr lang="en-US" sz="950" dirty="0">
-                          <a:solidFill>
-                            <a:srgbClr val="000000"/>
-                          </a:solidFill>
-                          <a:latin typeface="Calibri" pitchFamily="34" charset="0"/>
-                          <a:ea typeface="Calibri" pitchFamily="34" charset="-122"/>
-                          <a:cs typeface="Calibri" pitchFamily="34" charset="-120"/>
-                        </a:rPr>
-                        <a:t>Hand-rolled lightweight shapers — no vendor libraries and no vendor names in core logic</a:t>
-                      </a:r>
-                      <a:endParaRPr lang="en-US" sz="950" dirty="0"/>
-                    </a:p>
-                  </a:txBody>
-                  <a:tcPr marL="54864" marR="54864" marT="54864" marB="54864" anchor="ctr">
-                    <a:lnL w="9525" cap="flat" cmpd="sng" algn="ctr">
-                      <a:solidFill>
-                        <a:srgbClr val="BFBFBF"/>
-                      </a:solidFill>
-                      <a:prstDash val="solid"/>
-                      <a:round/>
-                      <a:headEnd type="none" w="med" len="med"/>
-                      <a:tailEnd type="none" w="med" len="med"/>
-                    </a:lnL>
-                    <a:lnR w="9525" cap="flat" cmpd="sng" algn="ctr">
-                      <a:solidFill>
-                        <a:srgbClr val="BFBFBF"/>
-                      </a:solidFill>
-                      <a:prstDash val="solid"/>
-                      <a:round/>
-                      <a:headEnd type="none" w="med" len="med"/>
-                      <a:tailEnd type="none" w="med" len="med"/>
-                    </a:lnR>
-                    <a:lnT w="9525" cap="flat" cmpd="sng" algn="ctr">
-                      <a:solidFill>
-                        <a:srgbClr val="BFBFBF"/>
-                      </a:solidFill>
-                      <a:prstDash val="solid"/>
-                      <a:round/>
-                      <a:headEnd type="none" w="med" len="med"/>
-                      <a:tailEnd type="none" w="med" len="med"/>
-                    </a:lnT>
-                    <a:lnB w="9525" cap="flat" cmpd="sng" algn="ctr">
-                      <a:solidFill>
-                        <a:srgbClr val="BFBFBF"/>
-                      </a:solidFill>
-                      <a:prstDash val="solid"/>
-                      <a:round/>
-                      <a:headEnd type="none" w="med" len="med"/>
-                      <a:tailEnd type="none" w="med" len="med"/>
-                    </a:lnB>
-                  </a:tcPr>
-                </a:tc>
-                <a:extLst>
-                  <a:ext uri="{0D108BD9-81ED-4DB2-BD59-A6C34878D82A}">
-                    <a16:rowId xmlns:a16="http://schemas.microsoft.com/office/drawing/2014/main" val="10001"/>
-                  </a:ext>
-                </a:extLst>
-              </a:tr>
-            </a:tbl>
-          </a:graphicData>
-        </a:graphic>
-      </p:graphicFrame>
-      <p:sp>
-        <p:nvSpPr>
-          <p:cNvPr id="41" name="Text 41"/>
-          <p:cNvSpPr txBox="1"/>
-          <p:nvPr/>
-        </p:nvSpPr>
-        <p:spPr>
-          <a:xfrm>
-            <a:off x="640080" y="4900000"/>
-            <a:ext cx="10900000" cy="1500000"/>
-          </a:xfrm>
-          <a:prstGeom prst="rect">
-            <a:avLst/>
-          </a:prstGeom>
-          <a:noFill/>
-          <a:ln/>
-        </p:spPr>
-        <p:txBody>
-          <a:bodyPr wrap="square" lIns="0" tIns="0" rIns="0" bIns="0" rtlCol="0" anchor="t"/>
-          <a:lstStyle/>
-          <a:p>
-            <a:pPr marL="177800" indent="-177800">
-              <a:spcAft>
-                <a:spcPts val="380"/>
-              </a:spcAft>
-              <a:buSzPct val="100000"/>
-              <a:buChar char="•"/>
-            </a:pPr>
-            <a:r>
-              <a:rPr lang="en-US" sz="1100" dirty="0">
-                <a:solidFill>
-                  <a:srgbClr val="000000"/>
-                </a:solidFill>
-                <a:latin typeface="Calibri" pitchFamily="34" charset="0"/>
-                <a:ea typeface="Calibri" pitchFamily="34" charset="-122"/>
-                <a:cs typeface="Calibri" pitchFamily="34" charset="-120"/>
-              </a:rPr>
-              <a:t>Where this runs: everything executes locally on project machines against self-generated synthetic data — 50 records per layer across four HIS layers, seeded. No network calls, no cloud service, no connection to any hospital system.</a:t>
-            </a:r>
-          </a:p>
-          <a:p>
-            <a:pPr marL="177800" indent="-177800">
-              <a:spcAft>
-                <a:spcPts val="380"/>
-              </a:spcAft>
-              <a:buSzPct val="100000"/>
-              <a:buChar char="•"/>
-            </a:pPr>
-            <a:r>
-              <a:rPr lang="en-US" sz="1100" dirty="0">
-                <a:solidFill>
-                  <a:srgbClr val="000000"/>
-                </a:solidFill>
-                <a:latin typeface="Calibri" pitchFamily="34" charset="0"/>
-                <a:ea typeface="Calibri" pitchFamily="34" charset="-122"/>
-                <a:cs typeface="Calibri" pitchFamily="34" charset="-120"/>
-              </a:rPr>
-              <a:t>Code, the seven rules, the benchmarking harness and three runnable demos live in one Git repository; every result is written out as JSON and Markdown so the report can cite the artifact rather than a screenshot.</a:t>
-            </a:r>
-          </a:p>
-          <a:p>
-            <a:pPr marL="177800" indent="-177800">
-              <a:spcAft>
-                <a:spcPts val="380"/>
-              </a:spcAft>
-              <a:buSzPct val="100000"/>
-              <a:buChar char="•"/>
-            </a:pPr>
-            <a:r>
-              <a:rPr lang="en-US" sz="1100" dirty="0">
-                <a:solidFill>
-                  <a:srgbClr val="000000"/>
-                </a:solidFill>
-                <a:latin typeface="Calibri" pitchFamily="34" charset="0"/>
-                <a:ea typeface="Calibri" pitchFamily="34" charset="-122"/>
-                <a:cs typeface="Calibri" pitchFamily="34" charset="-120"/>
-              </a:rPr>
-              <a:t>Live HIS access, when it opens, changes exactly one thing: the adapter behind the HISDataSource interface (build step 7).</a:t>
-            </a:r>
           </a:p>
         </p:txBody>
       </p:sp>
@@ -9891,6 +8126,2284 @@
 
 <file path=ppt/slides/slide6.xml><?xml version="1.0" encoding="utf-8"?>
 <p:sld xmlns:a="http://schemas.openxmlformats.org/drawingml/2006/main" xmlns:r="http://schemas.openxmlformats.org/officeDocument/2006/relationships" xmlns:p="http://schemas.openxmlformats.org/presentationml/2006/main">
+  <p:cSld name="Slide 6">
+    <p:bg>
+      <p:bgPr>
+        <a:solidFill>
+          <a:srgbClr val="FFFFFF"/>
+        </a:solidFill>
+        <a:effectLst/>
+      </p:bgPr>
+    </p:bg>
+    <p:spTree>
+      <p:nvGrpSpPr>
+        <p:cNvPr id="1" name=""/>
+        <p:cNvGrpSpPr/>
+        <p:nvPr/>
+      </p:nvGrpSpPr>
+      <p:grpSpPr>
+        <a:xfrm>
+          <a:off x="0" y="0"/>
+          <a:ext cx="0" cy="0"/>
+          <a:chOff x="0" y="0"/>
+          <a:chExt cx="0" cy="0"/>
+        </a:xfrm>
+      </p:grpSpPr>
+      <p:sp>
+        <p:nvSpPr>
+          <p:cNvPr id="2" name="Text 0"/>
+          <p:cNvSpPr txBox="1"/>
+          <p:nvPr/>
+        </p:nvSpPr>
+        <p:spPr>
+          <a:xfrm>
+            <a:off x="11460175" y="6446520"/>
+            <a:ext cx="457200" cy="274320"/>
+          </a:xfrm>
+          <a:prstGeom prst="rect">
+            <a:avLst/>
+          </a:prstGeom>
+          <a:noFill/>
+          <a:ln/>
+        </p:spPr>
+        <p:txBody>
+          <a:bodyPr wrap="square" lIns="0" tIns="0" rIns="0" bIns="0" rtlCol="0" anchor="ctr"/>
+          <a:lstStyle/>
+          <a:p>
+            <a:pPr marL="0" indent="0" algn="r">
+              <a:buNone/>
+            </a:pPr>
+            <a:r>
+              <a:rPr lang="en-US" sz="1000" dirty="0">
+                <a:solidFill>
+                  <a:srgbClr val="808080"/>
+                </a:solidFill>
+                <a:latin typeface="Calibri" pitchFamily="34" charset="0"/>
+                <a:ea typeface="Calibri" pitchFamily="34" charset="-122"/>
+                <a:cs typeface="Calibri" pitchFamily="34" charset="-120"/>
+              </a:rPr>
+              <a:t>6</a:t>
+            </a:r>
+            <a:endParaRPr lang="en-US" sz="1000" dirty="0"/>
+          </a:p>
+        </p:txBody>
+      </p:sp>
+      <p:sp>
+        <p:nvSpPr>
+          <p:cNvPr id="3" name="Text 1"/>
+          <p:cNvSpPr txBox="1"/>
+          <p:nvPr/>
+        </p:nvSpPr>
+        <p:spPr>
+          <a:xfrm>
+            <a:off x="548640" y="320040"/>
+            <a:ext cx="9601200" cy="685800"/>
+          </a:xfrm>
+          <a:prstGeom prst="rect">
+            <a:avLst/>
+          </a:prstGeom>
+          <a:noFill/>
+          <a:ln/>
+        </p:spPr>
+        <p:txBody>
+          <a:bodyPr wrap="square" lIns="0" tIns="0" rIns="0" bIns="0" rtlCol="0" anchor="ctr"/>
+          <a:lstStyle/>
+          <a:p>
+            <a:pPr marL="0" indent="0">
+              <a:buNone/>
+            </a:pPr>
+            <a:r>
+              <a:rPr lang="en-US" sz="2800" b="1" dirty="0">
+                <a:solidFill>
+                  <a:srgbClr val="1D2F82"/>
+                </a:solidFill>
+                <a:latin typeface="Calibri" pitchFamily="34" charset="0"/>
+                <a:ea typeface="Calibri" pitchFamily="34" charset="-122"/>
+                <a:cs typeface="Calibri" pitchFamily="34" charset="-120"/>
+              </a:rPr>
+              <a:t>Methodology — Rules, Scoring &amp; Extraction</a:t>
+            </a:r>
+            <a:endParaRPr lang="en-US" sz="2800" dirty="0"/>
+          </a:p>
+        </p:txBody>
+      </p:sp>
+      <p:pic>
+        <p:nvPicPr>
+          <p:cNvPr id="4" name="Image 0" descr="logo.png"/>
+          <p:cNvPicPr>
+            <a:picLocks noChangeAspect="1"/>
+          </p:cNvPicPr>
+          <p:nvPr/>
+        </p:nvPicPr>
+        <p:blipFill>
+          <a:blip r:embed="rId2"/>
+          <a:stretch>
+            <a:fillRect/>
+          </a:stretch>
+        </p:blipFill>
+        <p:spPr>
+          <a:xfrm>
+            <a:off x="10362895" y="320040"/>
+            <a:ext cx="1371600" cy="518746"/>
+          </a:xfrm>
+          <a:prstGeom prst="rect">
+            <a:avLst/>
+          </a:prstGeom>
+        </p:spPr>
+      </p:pic>
+      <p:sp>
+        <p:nvSpPr>
+          <p:cNvPr id="5" name="Text 2"/>
+          <p:cNvSpPr txBox="1"/>
+          <p:nvPr/>
+        </p:nvSpPr>
+        <p:spPr>
+          <a:xfrm>
+            <a:off x="640080" y="1325880"/>
+            <a:ext cx="10881360" cy="4937760"/>
+          </a:xfrm>
+          <a:prstGeom prst="rect">
+            <a:avLst/>
+          </a:prstGeom>
+          <a:noFill/>
+          <a:ln/>
+        </p:spPr>
+        <p:txBody>
+          <a:bodyPr wrap="square" lIns="0" tIns="0" rIns="0" bIns="0" rtlCol="0" anchor="t"/>
+          <a:lstStyle/>
+          <a:p>
+            <a:pPr marL="177800" indent="-177800">
+              <a:spcBef>
+                <a:spcPts val="600"/>
+              </a:spcBef>
+              <a:spcAft>
+                <a:spcPts val="250"/>
+              </a:spcAft>
+              <a:buSzPct val="100000"/>
+              <a:buChar char="•"/>
+            </a:pPr>
+            <a:r>
+              <a:rPr lang="en-US" sz="1400" b="1" dirty="0">
+                <a:solidFill>
+                  <a:srgbClr val="1D2F82"/>
+                </a:solidFill>
+                <a:latin typeface="Calibri" pitchFamily="34" charset="0"/>
+                <a:ea typeface="Calibri" pitchFamily="34" charset="-122"/>
+                <a:cs typeface="Calibri" pitchFamily="34" charset="-120"/>
+              </a:rPr>
+              <a:t>Seven executable DPDP rules, each a distinct check:</a:t>
+            </a:r>
+          </a:p>
+          <a:p>
+            <a:pPr marL="457200" lvl="1" indent="-228600">
+              <a:spcAft>
+                <a:spcPts val="360"/>
+              </a:spcAft>
+              <a:buSzPct val="90000"/>
+              <a:buChar char="–"/>
+            </a:pPr>
+            <a:r>
+              <a:rPr lang="en-US" sz="1150" dirty="0">
+                <a:solidFill>
+                  <a:srgbClr val="000000"/>
+                </a:solidFill>
+                <a:latin typeface="Calibri" pitchFamily="34" charset="0"/>
+                <a:ea typeface="Calibri" pitchFamily="34" charset="-122"/>
+                <a:cs typeface="Calibri" pitchFamily="34" charset="-120"/>
+              </a:rPr>
+              <a:t>DM-01 data minimisation — extracted categories must sit inside the purpose policy; score = 1 − excess / total.</a:t>
+            </a:r>
+          </a:p>
+          <a:p>
+            <a:pPr marL="457200" lvl="1" indent="-228600">
+              <a:spcAft>
+                <a:spcPts val="360"/>
+              </a:spcAft>
+              <a:buSzPct val="90000"/>
+              <a:buChar char="–"/>
+            </a:pPr>
+            <a:r>
+              <a:rPr lang="en-US" sz="1150" dirty="0">
+                <a:solidFill>
+                  <a:srgbClr val="000000"/>
+                </a:solidFill>
+                <a:latin typeface="Calibri" pitchFamily="34" charset="0"/>
+                <a:ea typeface="Calibri" pitchFamily="34" charset="-122"/>
+                <a:cs typeface="Calibri" pitchFamily="34" charset="-120"/>
+              </a:rPr>
+              <a:t>LB-01 lawful basis — a basis is declared, recognised, and carries a specific reference.</a:t>
+            </a:r>
+          </a:p>
+          <a:p>
+            <a:pPr marL="457200" lvl="1" indent="-228600">
+              <a:spcAft>
+                <a:spcPts val="360"/>
+              </a:spcAft>
+              <a:buSzPct val="90000"/>
+              <a:buChar char="–"/>
+            </a:pPr>
+            <a:r>
+              <a:rPr lang="en-US" sz="1150" dirty="0">
+                <a:solidFill>
+                  <a:srgbClr val="000000"/>
+                </a:solidFill>
+                <a:latin typeface="Calibri" pitchFamily="34" charset="0"/>
+                <a:ea typeface="Calibri" pitchFamily="34" charset="-122"/>
+                <a:cs typeface="Calibri" pitchFamily="34" charset="-120"/>
+              </a:rPr>
+              <a:t>SL-01 storage limitation — retention declared and within the ceiling, plus a stated deletion mechanism.</a:t>
+            </a:r>
+          </a:p>
+          <a:p>
+            <a:pPr marL="457200" lvl="1" indent="-228600">
+              <a:spcAft>
+                <a:spcPts val="360"/>
+              </a:spcAft>
+              <a:buSzPct val="90000"/>
+              <a:buChar char="–"/>
+            </a:pPr>
+            <a:r>
+              <a:rPr lang="en-US" sz="1150" dirty="0">
+                <a:solidFill>
+                  <a:srgbClr val="000000"/>
+                </a:solidFill>
+                <a:latin typeface="Calibri" pitchFamily="34" charset="0"/>
+                <a:ea typeface="Calibri" pitchFamily="34" charset="-122"/>
+                <a:cs typeface="Calibri" pitchFamily="34" charset="-120"/>
+              </a:rPr>
+              <a:t>SS-01 security safeguards — fraction of TLS, encryption at rest, access control and pseudonymisation in place.</a:t>
+            </a:r>
+          </a:p>
+          <a:p>
+            <a:pPr marL="457200" lvl="1" indent="-228600">
+              <a:spcAft>
+                <a:spcPts val="360"/>
+              </a:spcAft>
+              <a:buSzPct val="90000"/>
+              <a:buChar char="–"/>
+            </a:pPr>
+            <a:r>
+              <a:rPr lang="en-US" sz="1150" dirty="0">
+                <a:solidFill>
+                  <a:srgbClr val="000000"/>
+                </a:solidFill>
+                <a:latin typeface="Calibri" pitchFamily="34" charset="0"/>
+                <a:ea typeface="Calibri" pitchFamily="34" charset="-122"/>
+                <a:cs typeface="Calibri" pitchFamily="34" charset="-120"/>
+              </a:rPr>
+              <a:t>PL-01 purpose limitation — a single specific purpose, with no undeclared onward use.</a:t>
+            </a:r>
+          </a:p>
+          <a:p>
+            <a:pPr marL="457200" lvl="1" indent="-228600">
+              <a:spcAft>
+                <a:spcPts val="360"/>
+              </a:spcAft>
+              <a:buSzPct val="90000"/>
+              <a:buChar char="–"/>
+            </a:pPr>
+            <a:r>
+              <a:rPr lang="en-US" sz="1150" dirty="0">
+                <a:solidFill>
+                  <a:srgbClr val="000000"/>
+                </a:solidFill>
+                <a:latin typeface="Calibri" pitchFamily="34" charset="0"/>
+                <a:ea typeface="Calibri" pitchFamily="34" charset="-122"/>
+                <a:cs typeface="Calibri" pitchFamily="34" charset="-120"/>
+              </a:rPr>
+              <a:t>NT-01 transparency / notice — a privacy notice is on record and covers the stated purpose.</a:t>
+            </a:r>
+          </a:p>
+          <a:p>
+            <a:pPr marL="457200" lvl="1" indent="-228600">
+              <a:spcAft>
+                <a:spcPts val="360"/>
+              </a:spcAft>
+              <a:buSzPct val="90000"/>
+              <a:buChar char="–"/>
+            </a:pPr>
+            <a:r>
+              <a:rPr lang="en-US" sz="1150" dirty="0">
+                <a:solidFill>
+                  <a:srgbClr val="000000"/>
+                </a:solidFill>
+                <a:latin typeface="Calibri" pitchFamily="34" charset="0"/>
+                <a:ea typeface="Calibri" pitchFamily="34" charset="-122"/>
+                <a:cs typeface="Calibri" pitchFamily="34" charset="-120"/>
+              </a:rPr>
+              <a:t>AC-01 accountability — audit logging, a named accountable party, and a retained record of processing.</a:t>
+            </a:r>
+          </a:p>
+          <a:p>
+            <a:pPr marL="177800" indent="-177800">
+              <a:spcBef>
+                <a:spcPts val="600"/>
+              </a:spcBef>
+              <a:spcAft>
+                <a:spcPts val="250"/>
+              </a:spcAft>
+              <a:buSzPct val="100000"/>
+              <a:buChar char="•"/>
+            </a:pPr>
+            <a:r>
+              <a:rPr lang="en-US" sz="1400" b="1" dirty="0">
+                <a:solidFill>
+                  <a:srgbClr val="1D2F82"/>
+                </a:solidFill>
+                <a:latin typeface="Calibri" pitchFamily="34" charset="0"/>
+                <a:ea typeface="Calibri" pitchFamily="34" charset="-122"/>
+                <a:cs typeface="Calibri" pitchFamily="34" charset="-120"/>
+              </a:rPr>
+              <a:t>Scoring:</a:t>
+            </a:r>
+          </a:p>
+          <a:p>
+            <a:pPr marL="457200" lvl="1" indent="-228600">
+              <a:spcAft>
+                <a:spcPts val="360"/>
+              </a:spcAft>
+              <a:buSzPct val="90000"/>
+              <a:buChar char="–"/>
+            </a:pPr>
+            <a:r>
+              <a:rPr lang="en-US" sz="1150" dirty="0">
+                <a:solidFill>
+                  <a:srgbClr val="000000"/>
+                </a:solidFill>
+                <a:latin typeface="Calibri" pitchFamily="34" charset="0"/>
+                <a:ea typeface="Calibri" pitchFamily="34" charset="-122"/>
+                <a:cs typeface="Calibri" pitchFamily="34" charset="-120"/>
+              </a:rPr>
+              <a:t>Every rule returns pass / fail / not-applicable, a 0–1 score and plain-language findings; the overall score is the weighted mean of applicable rules, with equal weights until a weighting can be justified.</a:t>
+            </a:r>
+          </a:p>
+          <a:p>
+            <a:pPr marL="457200" lvl="1" indent="-228600">
+              <a:spcAft>
+                <a:spcPts val="360"/>
+              </a:spcAft>
+              <a:buSzPct val="90000"/>
+              <a:buChar char="–"/>
+            </a:pPr>
+            <a:r>
+              <a:rPr lang="en-US" sz="1150" dirty="0">
+                <a:solidFill>
+                  <a:srgbClr val="000000"/>
+                </a:solidFill>
+                <a:latin typeface="Calibri" pitchFamily="34" charset="0"/>
+                <a:ea typeface="Calibri" pitchFamily="34" charset="-122"/>
+                <a:cs typeface="Calibri" pitchFamily="34" charset="-120"/>
+              </a:rPr>
+              <a:t>Partial credit is deliberate — it lets the harness rank techniques rather than merely reject them, which is what makes it a benchmark and not a checklist.</a:t>
+            </a:r>
+          </a:p>
+          <a:p>
+            <a:pPr marL="177800" indent="-177800">
+              <a:spcBef>
+                <a:spcPts val="600"/>
+              </a:spcBef>
+              <a:spcAft>
+                <a:spcPts val="250"/>
+              </a:spcAft>
+              <a:buSzPct val="100000"/>
+              <a:buChar char="•"/>
+            </a:pPr>
+            <a:r>
+              <a:rPr lang="en-US" sz="1400" b="1" dirty="0">
+                <a:solidFill>
+                  <a:srgbClr val="1D2F82"/>
+                </a:solidFill>
+                <a:latin typeface="Calibri" pitchFamily="34" charset="0"/>
+                <a:ea typeface="Calibri" pitchFamily="34" charset="-122"/>
+                <a:cs typeface="Calibri" pitchFamily="34" charset="-120"/>
+              </a:rPr>
+              <a:t>Extraction and HIS heterogeneity:</a:t>
+            </a:r>
+          </a:p>
+          <a:p>
+            <a:pPr marL="457200" lvl="1" indent="-228600">
+              <a:spcAft>
+                <a:spcPts val="360"/>
+              </a:spcAft>
+              <a:buSzPct val="90000"/>
+              <a:buChar char="–"/>
+            </a:pPr>
+            <a:r>
+              <a:rPr lang="en-US" sz="1150" dirty="0">
+                <a:solidFill>
+                  <a:srgbClr val="000000"/>
+                </a:solidFill>
+                <a:latin typeface="Calibri" pitchFamily="34" charset="0"/>
+                <a:ea typeface="Calibri" pitchFamily="34" charset="-122"/>
+                <a:cs typeface="Calibri" pitchFamily="34" charset="-120"/>
+              </a:rPr>
+              <a:t>A pluggable HISDataSource adapter: the synthetic generator now, a credentialed live HIS later, with no downstream change.</a:t>
+            </a:r>
+          </a:p>
+          <a:p>
+            <a:pPr marL="457200" lvl="1" indent="-228600">
+              <a:spcAft>
+                <a:spcPts val="360"/>
+              </a:spcAft>
+              <a:buSzPct val="90000"/>
+              <a:buChar char="–"/>
+            </a:pPr>
+            <a:r>
+              <a:rPr lang="en-US" sz="1150" dirty="0">
+                <a:solidFill>
+                  <a:srgbClr val="000000"/>
+                </a:solidFill>
+                <a:latin typeface="Calibri" pitchFamily="34" charset="0"/>
+                <a:ea typeface="Calibri" pitchFamily="34" charset="-122"/>
+                <a:cs typeface="Calibri" pitchFamily="34" charset="-120"/>
+              </a:rPr>
+              <a:t>Heterogeneity is absorbed twice — once at the adapter, and again by scoring data categories instead of vendor field names.</a:t>
+            </a:r>
+          </a:p>
+          <a:p>
+            <a:pPr marL="177800" indent="-177800">
+              <a:spcBef>
+                <a:spcPts val="600"/>
+              </a:spcBef>
+              <a:spcAft>
+                <a:spcPts val="250"/>
+              </a:spcAft>
+              <a:buSzPct val="100000"/>
+              <a:buChar char="•"/>
+            </a:pPr>
+            <a:r>
+              <a:rPr lang="en-US" sz="1400" b="1" dirty="0">
+                <a:solidFill>
+                  <a:srgbClr val="1D2F82"/>
+                </a:solidFill>
+                <a:latin typeface="Calibri" pitchFamily="34" charset="0"/>
+                <a:ea typeface="Calibri" pitchFamily="34" charset="-122"/>
+                <a:cs typeface="Calibri" pitchFamily="34" charset="-120"/>
+              </a:rPr>
+              <a:t>The extraction agent (build step 6, not yet started):</a:t>
+            </a:r>
+          </a:p>
+          <a:p>
+            <a:pPr marL="457200" lvl="1" indent="-228600">
+              <a:spcAft>
+                <a:spcPts val="360"/>
+              </a:spcAft>
+              <a:buSzPct val="90000"/>
+              <a:buChar char="–"/>
+            </a:pPr>
+            <a:r>
+              <a:rPr lang="en-US" sz="1150" dirty="0">
+                <a:solidFill>
+                  <a:srgbClr val="000000"/>
+                </a:solidFill>
+                <a:latin typeface="Calibri" pitchFamily="34" charset="0"/>
+                <a:ea typeface="Calibri" pitchFamily="34" charset="-122"/>
+                <a:cs typeface="Calibri" pitchFamily="34" charset="-120"/>
+              </a:rPr>
+              <a:t>An off-the-shelf LLM driven agentically, AXE-method inspired: prompt design, tool design and evaluation against synthetic data — no fine-tuning and no training set. The scorer stays deterministic so the benchmark is reproducible.</a:t>
+            </a:r>
+          </a:p>
+        </p:txBody>
+      </p:sp>
+    </p:spTree>
+  </p:cSld>
+  <p:clrMapOvr>
+    <a:masterClrMapping/>
+  </p:clrMapOvr>
+</p:sld>
+</file>
+
+<file path=ppt/slides/slide7.xml><?xml version="1.0" encoding="utf-8"?>
+<p:sld xmlns:a="http://schemas.openxmlformats.org/drawingml/2006/main" xmlns:r="http://schemas.openxmlformats.org/officeDocument/2006/relationships" xmlns:p="http://schemas.openxmlformats.org/presentationml/2006/main">
+  <p:cSld name="Slide 6">
+    <p:bg>
+      <p:bgPr>
+        <a:solidFill>
+          <a:srgbClr val="FFFFFF"/>
+        </a:solidFill>
+        <a:effectLst/>
+      </p:bgPr>
+    </p:bg>
+    <p:spTree>
+      <p:nvGrpSpPr>
+        <p:cNvPr id="1" name=""/>
+        <p:cNvGrpSpPr/>
+        <p:nvPr/>
+      </p:nvGrpSpPr>
+      <p:grpSpPr>
+        <a:xfrm>
+          <a:off x="0" y="0"/>
+          <a:ext cx="0" cy="0"/>
+          <a:chOff x="0" y="0"/>
+          <a:chExt cx="0" cy="0"/>
+        </a:xfrm>
+      </p:grpSpPr>
+      <p:sp>
+        <p:nvSpPr>
+          <p:cNvPr id="2" name="Text 0"/>
+          <p:cNvSpPr txBox="1"/>
+          <p:nvPr/>
+        </p:nvSpPr>
+        <p:spPr>
+          <a:xfrm>
+            <a:off x="11460175" y="6446520"/>
+            <a:ext cx="457200" cy="274320"/>
+          </a:xfrm>
+          <a:prstGeom prst="rect">
+            <a:avLst/>
+          </a:prstGeom>
+          <a:noFill/>
+          <a:ln/>
+        </p:spPr>
+        <p:txBody>
+          <a:bodyPr wrap="square" lIns="0" tIns="0" rIns="0" bIns="0" rtlCol="0" anchor="ctr"/>
+          <a:lstStyle/>
+          <a:p>
+            <a:pPr marL="0" indent="0" algn="r">
+              <a:buNone/>
+            </a:pPr>
+            <a:r>
+              <a:rPr lang="en-US" sz="1000" dirty="0">
+                <a:solidFill>
+                  <a:srgbClr val="808080"/>
+                </a:solidFill>
+                <a:latin typeface="Calibri" pitchFamily="34" charset="0"/>
+                <a:ea typeface="Calibri" pitchFamily="34" charset="-122"/>
+                <a:cs typeface="Calibri" pitchFamily="34" charset="-120"/>
+              </a:rPr>
+              <a:t>7</a:t>
+            </a:r>
+            <a:endParaRPr lang="en-US" sz="1000" dirty="0"/>
+          </a:p>
+        </p:txBody>
+      </p:sp>
+      <p:sp>
+        <p:nvSpPr>
+          <p:cNvPr id="3" name="Text 1"/>
+          <p:cNvSpPr txBox="1"/>
+          <p:nvPr/>
+        </p:nvSpPr>
+        <p:spPr>
+          <a:xfrm>
+            <a:off x="548640" y="320040"/>
+            <a:ext cx="9601200" cy="685800"/>
+          </a:xfrm>
+          <a:prstGeom prst="rect">
+            <a:avLst/>
+          </a:prstGeom>
+          <a:noFill/>
+          <a:ln/>
+        </p:spPr>
+        <p:txBody>
+          <a:bodyPr wrap="square" lIns="0" tIns="0" rIns="0" bIns="0" rtlCol="0" anchor="ctr"/>
+          <a:lstStyle/>
+          <a:p>
+            <a:pPr marL="0" indent="0">
+              <a:buNone/>
+            </a:pPr>
+            <a:r>
+              <a:rPr lang="en-US" sz="2800" b="1" dirty="0">
+                <a:solidFill>
+                  <a:srgbClr val="1D2F82"/>
+                </a:solidFill>
+                <a:latin typeface="Calibri" pitchFamily="34" charset="0"/>
+                <a:ea typeface="Calibri" pitchFamily="34" charset="-122"/>
+                <a:cs typeface="Calibri" pitchFamily="34" charset="-120"/>
+              </a:rPr>
+              <a:t>Tools &amp; Technologies</a:t>
+            </a:r>
+            <a:endParaRPr lang="en-US" sz="2800" dirty="0"/>
+          </a:p>
+        </p:txBody>
+      </p:sp>
+      <p:pic>
+        <p:nvPicPr>
+          <p:cNvPr id="4" name="Image 0" descr="logo.png"/>
+          <p:cNvPicPr>
+            <a:picLocks noChangeAspect="1"/>
+          </p:cNvPicPr>
+          <p:nvPr/>
+        </p:nvPicPr>
+        <p:blipFill>
+          <a:blip r:embed="rId2"/>
+          <a:stretch>
+            <a:fillRect/>
+          </a:stretch>
+        </p:blipFill>
+        <p:spPr>
+          <a:xfrm>
+            <a:off x="10362895" y="320040"/>
+            <a:ext cx="1371600" cy="518746"/>
+          </a:xfrm>
+          <a:prstGeom prst="rect">
+            <a:avLst/>
+          </a:prstGeom>
+        </p:spPr>
+      </p:pic>
+      <p:graphicFrame>
+        <p:nvGraphicFramePr>
+          <p:cNvPr id="40" name="Tools Table"/>
+          <p:cNvGraphicFramePr>
+            <a:graphicFrameLocks noGrp="1"/>
+          </p:cNvGraphicFramePr>
+          <p:nvPr/>
+        </p:nvGraphicFramePr>
+        <p:xfrm>
+          <a:off x="548640" y="1230000"/>
+          <a:ext cx="11091672" cy="3520000"/>
+        </p:xfrm>
+        <a:graphic>
+          <a:graphicData uri="http://schemas.openxmlformats.org/drawingml/2006/table">
+            <a:tbl>
+              <a:tblPr/>
+              <a:tblGrid>
+                <a:gridCol w="2300000">
+                  <a:extLst>
+                    <a:ext uri="{9D8B030D-6E8A-4147-A177-3AD203B41FA5}">
+                      <a16:colId xmlns:a16="http://schemas.microsoft.com/office/drawing/2014/main" val="20000"/>
+                    </a:ext>
+                  </a:extLst>
+                </a:gridCol>
+                <a:gridCol w="3300000">
+                  <a:extLst>
+                    <a:ext uri="{9D8B030D-6E8A-4147-A177-3AD203B41FA5}">
+                      <a16:colId xmlns:a16="http://schemas.microsoft.com/office/drawing/2014/main" val="20001"/>
+                    </a:ext>
+                  </a:extLst>
+                </a:gridCol>
+                <a:gridCol w="5491672">
+                  <a:extLst>
+                    <a:ext uri="{9D8B030D-6E8A-4147-A177-3AD203B41FA5}">
+                      <a16:colId xmlns:a16="http://schemas.microsoft.com/office/drawing/2014/main" val="20002"/>
+                    </a:ext>
+                  </a:extLst>
+                </a:gridCol>
+              </a:tblGrid>
+              <a:tr h="440000">
+                <a:tc>
+                  <a:txBody>
+                    <a:bodyPr/>
+                    <a:lstStyle/>
+                    <a:p>
+                      <a:pPr marL="0" indent="0">
+                        <a:buNone/>
+                      </a:pPr>
+                      <a:r>
+                        <a:rPr lang="en-US" sz="1100" b="1" dirty="0">
+                          <a:solidFill>
+                            <a:srgbClr val="FFFFFF"/>
+                          </a:solidFill>
+                          <a:latin typeface="Calibri" pitchFamily="34" charset="0"/>
+                          <a:ea typeface="Calibri" pitchFamily="34" charset="-122"/>
+                          <a:cs typeface="Calibri" pitchFamily="34" charset="-120"/>
+                        </a:rPr>
+                        <a:t>Technology</a:t>
+                      </a:r>
+                      <a:endParaRPr lang="en-US" sz="1100" dirty="0"/>
+                    </a:p>
+                  </a:txBody>
+                  <a:tcPr marL="54864" marR="54864" marT="54864" marB="54864" anchor="ctr">
+                    <a:lnL w="9525" cap="flat" cmpd="sng" algn="ctr">
+                      <a:solidFill>
+                        <a:srgbClr val="BFBFBF"/>
+                      </a:solidFill>
+                      <a:prstDash val="solid"/>
+                      <a:round/>
+                      <a:headEnd type="none" w="med" len="med"/>
+                      <a:tailEnd type="none" w="med" len="med"/>
+                    </a:lnL>
+                    <a:lnR w="9525" cap="flat" cmpd="sng" algn="ctr">
+                      <a:solidFill>
+                        <a:srgbClr val="BFBFBF"/>
+                      </a:solidFill>
+                      <a:prstDash val="solid"/>
+                      <a:round/>
+                      <a:headEnd type="none" w="med" len="med"/>
+                      <a:tailEnd type="none" w="med" len="med"/>
+                    </a:lnR>
+                    <a:lnT w="9525" cap="flat" cmpd="sng" algn="ctr">
+                      <a:solidFill>
+                        <a:srgbClr val="BFBFBF"/>
+                      </a:solidFill>
+                      <a:prstDash val="solid"/>
+                      <a:round/>
+                      <a:headEnd type="none" w="med" len="med"/>
+                      <a:tailEnd type="none" w="med" len="med"/>
+                    </a:lnT>
+                    <a:lnB w="9525" cap="flat" cmpd="sng" algn="ctr">
+                      <a:solidFill>
+                        <a:srgbClr val="BFBFBF"/>
+                      </a:solidFill>
+                      <a:prstDash val="solid"/>
+                      <a:round/>
+                      <a:headEnd type="none" w="med" len="med"/>
+                      <a:tailEnd type="none" w="med" len="med"/>
+                    </a:lnB>
+                    <a:solidFill>
+                      <a:srgbClr val="1D2F82"/>
+                    </a:solidFill>
+                  </a:tcPr>
+                </a:tc>
+                <a:tc>
+                  <a:txBody>
+                    <a:bodyPr/>
+                    <a:lstStyle/>
+                    <a:p>
+                      <a:pPr marL="0" indent="0">
+                        <a:buNone/>
+                      </a:pPr>
+                      <a:r>
+                        <a:rPr lang="en-US" sz="1100" b="1" dirty="0">
+                          <a:solidFill>
+                            <a:srgbClr val="FFFFFF"/>
+                          </a:solidFill>
+                          <a:latin typeface="Calibri" pitchFamily="34" charset="0"/>
+                          <a:ea typeface="Calibri" pitchFamily="34" charset="-122"/>
+                          <a:cs typeface="Calibri" pitchFamily="34" charset="-120"/>
+                        </a:rPr>
+                        <a:t>Where it is used</a:t>
+                      </a:r>
+                      <a:endParaRPr lang="en-US" sz="1100" dirty="0"/>
+                    </a:p>
+                  </a:txBody>
+                  <a:tcPr marL="54864" marR="54864" marT="54864" marB="54864" anchor="ctr">
+                    <a:lnL w="9525" cap="flat" cmpd="sng" algn="ctr">
+                      <a:solidFill>
+                        <a:srgbClr val="BFBFBF"/>
+                      </a:solidFill>
+                      <a:prstDash val="solid"/>
+                      <a:round/>
+                      <a:headEnd type="none" w="med" len="med"/>
+                      <a:tailEnd type="none" w="med" len="med"/>
+                    </a:lnL>
+                    <a:lnR w="9525" cap="flat" cmpd="sng" algn="ctr">
+                      <a:solidFill>
+                        <a:srgbClr val="BFBFBF"/>
+                      </a:solidFill>
+                      <a:prstDash val="solid"/>
+                      <a:round/>
+                      <a:headEnd type="none" w="med" len="med"/>
+                      <a:tailEnd type="none" w="med" len="med"/>
+                    </a:lnR>
+                    <a:lnT w="9525" cap="flat" cmpd="sng" algn="ctr">
+                      <a:solidFill>
+                        <a:srgbClr val="BFBFBF"/>
+                      </a:solidFill>
+                      <a:prstDash val="solid"/>
+                      <a:round/>
+                      <a:headEnd type="none" w="med" len="med"/>
+                      <a:tailEnd type="none" w="med" len="med"/>
+                    </a:lnT>
+                    <a:lnB w="9525" cap="flat" cmpd="sng" algn="ctr">
+                      <a:solidFill>
+                        <a:srgbClr val="BFBFBF"/>
+                      </a:solidFill>
+                      <a:prstDash val="solid"/>
+                      <a:round/>
+                      <a:headEnd type="none" w="med" len="med"/>
+                      <a:tailEnd type="none" w="med" len="med"/>
+                    </a:lnB>
+                    <a:solidFill>
+                      <a:srgbClr val="1D2F82"/>
+                    </a:solidFill>
+                  </a:tcPr>
+                </a:tc>
+                <a:tc>
+                  <a:txBody>
+                    <a:bodyPr/>
+                    <a:lstStyle/>
+                    <a:p>
+                      <a:pPr marL="0" indent="0">
+                        <a:buNone/>
+                      </a:pPr>
+                      <a:r>
+                        <a:rPr lang="en-US" sz="1100" b="1" dirty="0">
+                          <a:solidFill>
+                            <a:srgbClr val="FFFFFF"/>
+                          </a:solidFill>
+                          <a:latin typeface="Calibri" pitchFamily="34" charset="0"/>
+                          <a:ea typeface="Calibri" pitchFamily="34" charset="-122"/>
+                          <a:cs typeface="Calibri" pitchFamily="34" charset="-120"/>
+                        </a:rPr>
+                        <a:t>Why this choice</a:t>
+                      </a:r>
+                      <a:endParaRPr lang="en-US" sz="1100" dirty="0"/>
+                    </a:p>
+                  </a:txBody>
+                  <a:tcPr marL="54864" marR="54864" marT="54864" marB="54864" anchor="ctr">
+                    <a:lnL w="9525" cap="flat" cmpd="sng" algn="ctr">
+                      <a:solidFill>
+                        <a:srgbClr val="BFBFBF"/>
+                      </a:solidFill>
+                      <a:prstDash val="solid"/>
+                      <a:round/>
+                      <a:headEnd type="none" w="med" len="med"/>
+                      <a:tailEnd type="none" w="med" len="med"/>
+                    </a:lnL>
+                    <a:lnR w="9525" cap="flat" cmpd="sng" algn="ctr">
+                      <a:solidFill>
+                        <a:srgbClr val="BFBFBF"/>
+                      </a:solidFill>
+                      <a:prstDash val="solid"/>
+                      <a:round/>
+                      <a:headEnd type="none" w="med" len="med"/>
+                      <a:tailEnd type="none" w="med" len="med"/>
+                    </a:lnR>
+                    <a:lnT w="9525" cap="flat" cmpd="sng" algn="ctr">
+                      <a:solidFill>
+                        <a:srgbClr val="BFBFBF"/>
+                      </a:solidFill>
+                      <a:prstDash val="solid"/>
+                      <a:round/>
+                      <a:headEnd type="none" w="med" len="med"/>
+                      <a:tailEnd type="none" w="med" len="med"/>
+                    </a:lnT>
+                    <a:lnB w="9525" cap="flat" cmpd="sng" algn="ctr">
+                      <a:solidFill>
+                        <a:srgbClr val="BFBFBF"/>
+                      </a:solidFill>
+                      <a:prstDash val="solid"/>
+                      <a:round/>
+                      <a:headEnd type="none" w="med" len="med"/>
+                      <a:tailEnd type="none" w="med" len="med"/>
+                    </a:lnB>
+                    <a:solidFill>
+                      <a:srgbClr val="1D2F82"/>
+                    </a:solidFill>
+                  </a:tcPr>
+                </a:tc>
+                <a:extLst>
+                  <a:ext uri="{0D108BD9-81ED-4DB2-BD59-A6C34878D82A}">
+                    <a16:rowId xmlns:a16="http://schemas.microsoft.com/office/drawing/2014/main" val="10001"/>
+                  </a:ext>
+                </a:extLst>
+              </a:tr>
+              <a:tr h="440000">
+                <a:tc>
+                  <a:txBody>
+                    <a:bodyPr/>
+                    <a:lstStyle/>
+                    <a:p>
+                      <a:pPr marL="0" indent="0">
+                        <a:buNone/>
+                      </a:pPr>
+                      <a:r>
+                        <a:rPr lang="en-US" sz="1000" b="1" dirty="0">
+                          <a:solidFill>
+                            <a:srgbClr val="000000"/>
+                          </a:solidFill>
+                          <a:latin typeface="Calibri" pitchFamily="34" charset="0"/>
+                          <a:ea typeface="Calibri" pitchFamily="34" charset="-122"/>
+                          <a:cs typeface="Calibri" pitchFamily="34" charset="-120"/>
+                        </a:rPr>
+                        <a:t>Python 3.10+</a:t>
+                      </a:r>
+                      <a:endParaRPr lang="en-US" sz="1000" dirty="0"/>
+                    </a:p>
+                  </a:txBody>
+                  <a:tcPr marL="54864" marR="54864" marT="54864" marB="54864" anchor="ctr">
+                    <a:lnL w="9525" cap="flat" cmpd="sng" algn="ctr">
+                      <a:solidFill>
+                        <a:srgbClr val="BFBFBF"/>
+                      </a:solidFill>
+                      <a:prstDash val="solid"/>
+                      <a:round/>
+                      <a:headEnd type="none" w="med" len="med"/>
+                      <a:tailEnd type="none" w="med" len="med"/>
+                    </a:lnL>
+                    <a:lnR w="9525" cap="flat" cmpd="sng" algn="ctr">
+                      <a:solidFill>
+                        <a:srgbClr val="BFBFBF"/>
+                      </a:solidFill>
+                      <a:prstDash val="solid"/>
+                      <a:round/>
+                      <a:headEnd type="none" w="med" len="med"/>
+                      <a:tailEnd type="none" w="med" len="med"/>
+                    </a:lnR>
+                    <a:lnT w="9525" cap="flat" cmpd="sng" algn="ctr">
+                      <a:solidFill>
+                        <a:srgbClr val="BFBFBF"/>
+                      </a:solidFill>
+                      <a:prstDash val="solid"/>
+                      <a:round/>
+                      <a:headEnd type="none" w="med" len="med"/>
+                      <a:tailEnd type="none" w="med" len="med"/>
+                    </a:lnT>
+                    <a:lnB w="9525" cap="flat" cmpd="sng" algn="ctr">
+                      <a:solidFill>
+                        <a:srgbClr val="BFBFBF"/>
+                      </a:solidFill>
+                      <a:prstDash val="solid"/>
+                      <a:round/>
+                      <a:headEnd type="none" w="med" len="med"/>
+                      <a:tailEnd type="none" w="med" len="med"/>
+                    </a:lnB>
+                  </a:tcPr>
+                </a:tc>
+                <a:tc>
+                  <a:txBody>
+                    <a:bodyPr/>
+                    <a:lstStyle/>
+                    <a:p>
+                      <a:pPr marL="0" indent="0">
+                        <a:buNone/>
+                      </a:pPr>
+                      <a:r>
+                        <a:rPr lang="en-US" sz="1000" dirty="0">
+                          <a:solidFill>
+                            <a:srgbClr val="000000"/>
+                          </a:solidFill>
+                          <a:latin typeface="Calibri" pitchFamily="34" charset="0"/>
+                          <a:ea typeface="Calibri" pitchFamily="34" charset="-122"/>
+                          <a:cs typeface="Calibri" pitchFamily="34" charset="-120"/>
+                        </a:rPr>
+                        <a:t>The entire pipeline — data generation, extraction, rules, benchmark</a:t>
+                      </a:r>
+                      <a:endParaRPr lang="en-US" sz="1000" dirty="0"/>
+                    </a:p>
+                  </a:txBody>
+                  <a:tcPr marL="54864" marR="54864" marT="54864" marB="54864" anchor="ctr">
+                    <a:lnL w="9525" cap="flat" cmpd="sng" algn="ctr">
+                      <a:solidFill>
+                        <a:srgbClr val="BFBFBF"/>
+                      </a:solidFill>
+                      <a:prstDash val="solid"/>
+                      <a:round/>
+                      <a:headEnd type="none" w="med" len="med"/>
+                      <a:tailEnd type="none" w="med" len="med"/>
+                    </a:lnL>
+                    <a:lnR w="9525" cap="flat" cmpd="sng" algn="ctr">
+                      <a:solidFill>
+                        <a:srgbClr val="BFBFBF"/>
+                      </a:solidFill>
+                      <a:prstDash val="solid"/>
+                      <a:round/>
+                      <a:headEnd type="none" w="med" len="med"/>
+                      <a:tailEnd type="none" w="med" len="med"/>
+                    </a:lnR>
+                    <a:lnT w="9525" cap="flat" cmpd="sng" algn="ctr">
+                      <a:solidFill>
+                        <a:srgbClr val="BFBFBF"/>
+                      </a:solidFill>
+                      <a:prstDash val="solid"/>
+                      <a:round/>
+                      <a:headEnd type="none" w="med" len="med"/>
+                      <a:tailEnd type="none" w="med" len="med"/>
+                    </a:lnT>
+                    <a:lnB w="9525" cap="flat" cmpd="sng" algn="ctr">
+                      <a:solidFill>
+                        <a:srgbClr val="BFBFBF"/>
+                      </a:solidFill>
+                      <a:prstDash val="solid"/>
+                      <a:round/>
+                      <a:headEnd type="none" w="med" len="med"/>
+                      <a:tailEnd type="none" w="med" len="med"/>
+                    </a:lnB>
+                  </a:tcPr>
+                </a:tc>
+                <a:tc>
+                  <a:txBody>
+                    <a:bodyPr/>
+                    <a:lstStyle/>
+                    <a:p>
+                      <a:pPr marL="0" indent="0">
+                        <a:buNone/>
+                      </a:pPr>
+                      <a:r>
+                        <a:rPr lang="en-US" sz="950" dirty="0">
+                          <a:solidFill>
+                            <a:srgbClr val="000000"/>
+                          </a:solidFill>
+                          <a:latin typeface="Calibri" pitchFamily="34" charset="0"/>
+                          <a:ea typeface="Calibri" pitchFamily="34" charset="-122"/>
+                          <a:cs typeface="Calibri" pitchFamily="34" charset="-120"/>
+                        </a:rPr>
+                        <a:t>Standard for research and scraping work; the libraries this project needs already live here</a:t>
+                      </a:r>
+                      <a:endParaRPr lang="en-US" sz="950" dirty="0"/>
+                    </a:p>
+                  </a:txBody>
+                  <a:tcPr marL="54864" marR="54864" marT="54864" marB="54864" anchor="ctr">
+                    <a:lnL w="9525" cap="flat" cmpd="sng" algn="ctr">
+                      <a:solidFill>
+                        <a:srgbClr val="BFBFBF"/>
+                      </a:solidFill>
+                      <a:prstDash val="solid"/>
+                      <a:round/>
+                      <a:headEnd type="none" w="med" len="med"/>
+                      <a:tailEnd type="none" w="med" len="med"/>
+                    </a:lnL>
+                    <a:lnR w="9525" cap="flat" cmpd="sng" algn="ctr">
+                      <a:solidFill>
+                        <a:srgbClr val="BFBFBF"/>
+                      </a:solidFill>
+                      <a:prstDash val="solid"/>
+                      <a:round/>
+                      <a:headEnd type="none" w="med" len="med"/>
+                      <a:tailEnd type="none" w="med" len="med"/>
+                    </a:lnR>
+                    <a:lnT w="9525" cap="flat" cmpd="sng" algn="ctr">
+                      <a:solidFill>
+                        <a:srgbClr val="BFBFBF"/>
+                      </a:solidFill>
+                      <a:prstDash val="solid"/>
+                      <a:round/>
+                      <a:headEnd type="none" w="med" len="med"/>
+                      <a:tailEnd type="none" w="med" len="med"/>
+                    </a:lnT>
+                    <a:lnB w="9525" cap="flat" cmpd="sng" algn="ctr">
+                      <a:solidFill>
+                        <a:srgbClr val="BFBFBF"/>
+                      </a:solidFill>
+                      <a:prstDash val="solid"/>
+                      <a:round/>
+                      <a:headEnd type="none" w="med" len="med"/>
+                      <a:tailEnd type="none" w="med" len="med"/>
+                    </a:lnB>
+                  </a:tcPr>
+                </a:tc>
+                <a:extLst>
+                  <a:ext uri="{0D108BD9-81ED-4DB2-BD59-A6C34878D82A}">
+                    <a16:rowId xmlns:a16="http://schemas.microsoft.com/office/drawing/2014/main" val="2555728365"/>
+                  </a:ext>
+                </a:extLst>
+              </a:tr>
+              <a:tr h="440000">
+                <a:tc>
+                  <a:txBody>
+                    <a:bodyPr/>
+                    <a:lstStyle/>
+                    <a:p>
+                      <a:pPr marL="0" indent="0">
+                        <a:buNone/>
+                      </a:pPr>
+                      <a:r>
+                        <a:rPr lang="en-US" sz="1000" b="1" dirty="0">
+                          <a:solidFill>
+                            <a:srgbClr val="000000"/>
+                          </a:solidFill>
+                          <a:latin typeface="Calibri" pitchFamily="34" charset="0"/>
+                          <a:ea typeface="Calibri" pitchFamily="34" charset="-122"/>
+                          <a:cs typeface="Calibri" pitchFamily="34" charset="-120"/>
+                        </a:rPr>
+                        <a:t>Pydantic v2</a:t>
+                      </a:r>
+                      <a:endParaRPr lang="en-US" sz="1000" dirty="0"/>
+                    </a:p>
+                  </a:txBody>
+                  <a:tcPr marL="54864" marR="54864" marT="54864" marB="54864" anchor="ctr">
+                    <a:lnL w="9525" cap="flat" cmpd="sng" algn="ctr">
+                      <a:solidFill>
+                        <a:srgbClr val="BFBFBF"/>
+                      </a:solidFill>
+                      <a:prstDash val="solid"/>
+                      <a:round/>
+                      <a:headEnd type="none" w="med" len="med"/>
+                      <a:tailEnd type="none" w="med" len="med"/>
+                    </a:lnL>
+                    <a:lnR w="9525" cap="flat" cmpd="sng" algn="ctr">
+                      <a:solidFill>
+                        <a:srgbClr val="BFBFBF"/>
+                      </a:solidFill>
+                      <a:prstDash val="solid"/>
+                      <a:round/>
+                      <a:headEnd type="none" w="med" len="med"/>
+                      <a:tailEnd type="none" w="med" len="med"/>
+                    </a:lnR>
+                    <a:lnT w="9525" cap="flat" cmpd="sng" algn="ctr">
+                      <a:solidFill>
+                        <a:srgbClr val="BFBFBF"/>
+                      </a:solidFill>
+                      <a:prstDash val="solid"/>
+                      <a:round/>
+                      <a:headEnd type="none" w="med" len="med"/>
+                      <a:tailEnd type="none" w="med" len="med"/>
+                    </a:lnT>
+                    <a:lnB w="9525" cap="flat" cmpd="sng" algn="ctr">
+                      <a:solidFill>
+                        <a:srgbClr val="BFBFBF"/>
+                      </a:solidFill>
+                      <a:prstDash val="solid"/>
+                      <a:round/>
+                      <a:headEnd type="none" w="med" len="med"/>
+                      <a:tailEnd type="none" w="med" len="med"/>
+                    </a:lnB>
+                  </a:tcPr>
+                </a:tc>
+                <a:tc>
+                  <a:txBody>
+                    <a:bodyPr/>
+                    <a:lstStyle/>
+                    <a:p>
+                      <a:pPr marL="0" indent="0">
+                        <a:buNone/>
+                      </a:pPr>
+                      <a:r>
+                        <a:rPr lang="en-US" sz="1000" dirty="0">
+                          <a:solidFill>
+                            <a:srgbClr val="000000"/>
+                          </a:solidFill>
+                          <a:latin typeface="Calibri" pitchFamily="34" charset="0"/>
+                          <a:ea typeface="Calibri" pitchFamily="34" charset="-122"/>
+                          <a:cs typeface="Calibri" pitchFamily="34" charset="-120"/>
+                        </a:rPr>
+                        <a:t>Compliance manifest, the seven rules, HIS record shapes</a:t>
+                      </a:r>
+                      <a:endParaRPr lang="en-US" sz="1000" dirty="0"/>
+                    </a:p>
+                  </a:txBody>
+                  <a:tcPr marL="54864" marR="54864" marT="54864" marB="54864" anchor="ctr">
+                    <a:lnL w="9525" cap="flat" cmpd="sng" algn="ctr">
+                      <a:solidFill>
+                        <a:srgbClr val="BFBFBF"/>
+                      </a:solidFill>
+                      <a:prstDash val="solid"/>
+                      <a:round/>
+                      <a:headEnd type="none" w="med" len="med"/>
+                      <a:tailEnd type="none" w="med" len="med"/>
+                    </a:lnL>
+                    <a:lnR w="9525" cap="flat" cmpd="sng" algn="ctr">
+                      <a:solidFill>
+                        <a:srgbClr val="BFBFBF"/>
+                      </a:solidFill>
+                      <a:prstDash val="solid"/>
+                      <a:round/>
+                      <a:headEnd type="none" w="med" len="med"/>
+                      <a:tailEnd type="none" w="med" len="med"/>
+                    </a:lnR>
+                    <a:lnT w="9525" cap="flat" cmpd="sng" algn="ctr">
+                      <a:solidFill>
+                        <a:srgbClr val="BFBFBF"/>
+                      </a:solidFill>
+                      <a:prstDash val="solid"/>
+                      <a:round/>
+                      <a:headEnd type="none" w="med" len="med"/>
+                      <a:tailEnd type="none" w="med" len="med"/>
+                    </a:lnT>
+                    <a:lnB w="9525" cap="flat" cmpd="sng" algn="ctr">
+                      <a:solidFill>
+                        <a:srgbClr val="BFBFBF"/>
+                      </a:solidFill>
+                      <a:prstDash val="solid"/>
+                      <a:round/>
+                      <a:headEnd type="none" w="med" len="med"/>
+                      <a:tailEnd type="none" w="med" len="med"/>
+                    </a:lnB>
+                  </a:tcPr>
+                </a:tc>
+                <a:tc>
+                  <a:txBody>
+                    <a:bodyPr/>
+                    <a:lstStyle/>
+                    <a:p>
+                      <a:pPr marL="0" indent="0">
+                        <a:buNone/>
+                      </a:pPr>
+                      <a:r>
+                        <a:rPr lang="en-US" sz="950" dirty="0">
+                          <a:solidFill>
+                            <a:srgbClr val="000000"/>
+                          </a:solidFill>
+                          <a:latin typeface="Calibri" pitchFamily="34" charset="0"/>
+                          <a:ea typeface="Calibri" pitchFamily="34" charset="-122"/>
+                          <a:cs typeface="Calibri" pitchFamily="34" charset="-120"/>
+                        </a:rPr>
+                        <a:t>Rejects a malformed manifest at the boundary and serialises every report to JSON</a:t>
+                      </a:r>
+                      <a:endParaRPr lang="en-US" sz="950" dirty="0"/>
+                    </a:p>
+                  </a:txBody>
+                  <a:tcPr marL="54864" marR="54864" marT="54864" marB="54864" anchor="ctr">
+                    <a:lnL w="9525" cap="flat" cmpd="sng" algn="ctr">
+                      <a:solidFill>
+                        <a:srgbClr val="BFBFBF"/>
+                      </a:solidFill>
+                      <a:prstDash val="solid"/>
+                      <a:round/>
+                      <a:headEnd type="none" w="med" len="med"/>
+                      <a:tailEnd type="none" w="med" len="med"/>
+                    </a:lnL>
+                    <a:lnR w="9525" cap="flat" cmpd="sng" algn="ctr">
+                      <a:solidFill>
+                        <a:srgbClr val="BFBFBF"/>
+                      </a:solidFill>
+                      <a:prstDash val="solid"/>
+                      <a:round/>
+                      <a:headEnd type="none" w="med" len="med"/>
+                      <a:tailEnd type="none" w="med" len="med"/>
+                    </a:lnR>
+                    <a:lnT w="9525" cap="flat" cmpd="sng" algn="ctr">
+                      <a:solidFill>
+                        <a:srgbClr val="BFBFBF"/>
+                      </a:solidFill>
+                      <a:prstDash val="solid"/>
+                      <a:round/>
+                      <a:headEnd type="none" w="med" len="med"/>
+                      <a:tailEnd type="none" w="med" len="med"/>
+                    </a:lnT>
+                    <a:lnB w="9525" cap="flat" cmpd="sng" algn="ctr">
+                      <a:solidFill>
+                        <a:srgbClr val="BFBFBF"/>
+                      </a:solidFill>
+                      <a:prstDash val="solid"/>
+                      <a:round/>
+                      <a:headEnd type="none" w="med" len="med"/>
+                      <a:tailEnd type="none" w="med" len="med"/>
+                    </a:lnB>
+                  </a:tcPr>
+                </a:tc>
+                <a:extLst>
+                  <a:ext uri="{0D108BD9-81ED-4DB2-BD59-A6C34878D82A}">
+                    <a16:rowId xmlns:a16="http://schemas.microsoft.com/office/drawing/2014/main" val="3952541296"/>
+                  </a:ext>
+                </a:extLst>
+              </a:tr>
+              <a:tr h="440000">
+                <a:tc>
+                  <a:txBody>
+                    <a:bodyPr/>
+                    <a:lstStyle/>
+                    <a:p>
+                      <a:pPr marL="0" indent="0">
+                        <a:buNone/>
+                      </a:pPr>
+                      <a:r>
+                        <a:rPr lang="en-US" sz="1000" b="1" dirty="0">
+                          <a:solidFill>
+                            <a:srgbClr val="000000"/>
+                          </a:solidFill>
+                          <a:latin typeface="Calibri" pitchFamily="34" charset="0"/>
+                          <a:ea typeface="Calibri" pitchFamily="34" charset="-122"/>
+                          <a:cs typeface="Calibri" pitchFamily="34" charset="-120"/>
+                        </a:rPr>
+                        <a:t>Faker</a:t>
+                      </a:r>
+                      <a:endParaRPr lang="en-US" sz="1000" dirty="0"/>
+                    </a:p>
+                  </a:txBody>
+                  <a:tcPr marL="54864" marR="54864" marT="54864" marB="54864" anchor="ctr">
+                    <a:lnL w="9525" cap="flat" cmpd="sng" algn="ctr">
+                      <a:solidFill>
+                        <a:srgbClr val="BFBFBF"/>
+                      </a:solidFill>
+                      <a:prstDash val="solid"/>
+                      <a:round/>
+                      <a:headEnd type="none" w="med" len="med"/>
+                      <a:tailEnd type="none" w="med" len="med"/>
+                    </a:lnL>
+                    <a:lnR w="9525" cap="flat" cmpd="sng" algn="ctr">
+                      <a:solidFill>
+                        <a:srgbClr val="BFBFBF"/>
+                      </a:solidFill>
+                      <a:prstDash val="solid"/>
+                      <a:round/>
+                      <a:headEnd type="none" w="med" len="med"/>
+                      <a:tailEnd type="none" w="med" len="med"/>
+                    </a:lnR>
+                    <a:lnT w="9525" cap="flat" cmpd="sng" algn="ctr">
+                      <a:solidFill>
+                        <a:srgbClr val="BFBFBF"/>
+                      </a:solidFill>
+                      <a:prstDash val="solid"/>
+                      <a:round/>
+                      <a:headEnd type="none" w="med" len="med"/>
+                      <a:tailEnd type="none" w="med" len="med"/>
+                    </a:lnT>
+                    <a:lnB w="9525" cap="flat" cmpd="sng" algn="ctr">
+                      <a:solidFill>
+                        <a:srgbClr val="BFBFBF"/>
+                      </a:solidFill>
+                      <a:prstDash val="solid"/>
+                      <a:round/>
+                      <a:headEnd type="none" w="med" len="med"/>
+                      <a:tailEnd type="none" w="med" len="med"/>
+                    </a:lnB>
+                  </a:tcPr>
+                </a:tc>
+                <a:tc>
+                  <a:txBody>
+                    <a:bodyPr/>
+                    <a:lstStyle/>
+                    <a:p>
+                      <a:pPr marL="0" indent="0">
+                        <a:buNone/>
+                      </a:pPr>
+                      <a:r>
+                        <a:rPr lang="en-US" sz="1000" dirty="0">
+                          <a:solidFill>
+                            <a:srgbClr val="000000"/>
+                          </a:solidFill>
+                          <a:latin typeface="Calibri" pitchFamily="34" charset="0"/>
+                          <a:ea typeface="Calibri" pitchFamily="34" charset="-122"/>
+                          <a:cs typeface="Calibri" pitchFamily="34" charset="-120"/>
+                        </a:rPr>
+                        <a:t>Synthetic HIS record generation</a:t>
+                      </a:r>
+                      <a:endParaRPr lang="en-US" sz="1000" dirty="0"/>
+                    </a:p>
+                  </a:txBody>
+                  <a:tcPr marL="54864" marR="54864" marT="54864" marB="54864" anchor="ctr">
+                    <a:lnL w="9525" cap="flat" cmpd="sng" algn="ctr">
+                      <a:solidFill>
+                        <a:srgbClr val="BFBFBF"/>
+                      </a:solidFill>
+                      <a:prstDash val="solid"/>
+                      <a:round/>
+                      <a:headEnd type="none" w="med" len="med"/>
+                      <a:tailEnd type="none" w="med" len="med"/>
+                    </a:lnL>
+                    <a:lnR w="9525" cap="flat" cmpd="sng" algn="ctr">
+                      <a:solidFill>
+                        <a:srgbClr val="BFBFBF"/>
+                      </a:solidFill>
+                      <a:prstDash val="solid"/>
+                      <a:round/>
+                      <a:headEnd type="none" w="med" len="med"/>
+                      <a:tailEnd type="none" w="med" len="med"/>
+                    </a:lnR>
+                    <a:lnT w="9525" cap="flat" cmpd="sng" algn="ctr">
+                      <a:solidFill>
+                        <a:srgbClr val="BFBFBF"/>
+                      </a:solidFill>
+                      <a:prstDash val="solid"/>
+                      <a:round/>
+                      <a:headEnd type="none" w="med" len="med"/>
+                      <a:tailEnd type="none" w="med" len="med"/>
+                    </a:lnT>
+                    <a:lnB w="9525" cap="flat" cmpd="sng" algn="ctr">
+                      <a:solidFill>
+                        <a:srgbClr val="BFBFBF"/>
+                      </a:solidFill>
+                      <a:prstDash val="solid"/>
+                      <a:round/>
+                      <a:headEnd type="none" w="med" len="med"/>
+                      <a:tailEnd type="none" w="med" len="med"/>
+                    </a:lnB>
+                  </a:tcPr>
+                </a:tc>
+                <a:tc>
+                  <a:txBody>
+                    <a:bodyPr/>
+                    <a:lstStyle/>
+                    <a:p>
+                      <a:pPr marL="0" indent="0">
+                        <a:buNone/>
+                      </a:pPr>
+                      <a:r>
+                        <a:rPr lang="en-US" sz="950" dirty="0">
+                          <a:solidFill>
+                            <a:srgbClr val="000000"/>
+                          </a:solidFill>
+                          <a:latin typeface="Calibri" pitchFamily="34" charset="0"/>
+                          <a:ea typeface="Calibri" pitchFamily="34" charset="-122"/>
+                          <a:cs typeface="Calibri" pitchFamily="34" charset="-120"/>
+                        </a:rPr>
+                        <a:t>Realistic values with no real patient; seeded, so every demo run reproduces exactly</a:t>
+                      </a:r>
+                      <a:endParaRPr lang="en-US" sz="950" dirty="0"/>
+                    </a:p>
+                  </a:txBody>
+                  <a:tcPr marL="54864" marR="54864" marT="54864" marB="54864" anchor="ctr">
+                    <a:lnL w="9525" cap="flat" cmpd="sng" algn="ctr">
+                      <a:solidFill>
+                        <a:srgbClr val="BFBFBF"/>
+                      </a:solidFill>
+                      <a:prstDash val="solid"/>
+                      <a:round/>
+                      <a:headEnd type="none" w="med" len="med"/>
+                      <a:tailEnd type="none" w="med" len="med"/>
+                    </a:lnL>
+                    <a:lnR w="9525" cap="flat" cmpd="sng" algn="ctr">
+                      <a:solidFill>
+                        <a:srgbClr val="BFBFBF"/>
+                      </a:solidFill>
+                      <a:prstDash val="solid"/>
+                      <a:round/>
+                      <a:headEnd type="none" w="med" len="med"/>
+                      <a:tailEnd type="none" w="med" len="med"/>
+                    </a:lnR>
+                    <a:lnT w="9525" cap="flat" cmpd="sng" algn="ctr">
+                      <a:solidFill>
+                        <a:srgbClr val="BFBFBF"/>
+                      </a:solidFill>
+                      <a:prstDash val="solid"/>
+                      <a:round/>
+                      <a:headEnd type="none" w="med" len="med"/>
+                      <a:tailEnd type="none" w="med" len="med"/>
+                    </a:lnT>
+                    <a:lnB w="9525" cap="flat" cmpd="sng" algn="ctr">
+                      <a:solidFill>
+                        <a:srgbClr val="BFBFBF"/>
+                      </a:solidFill>
+                      <a:prstDash val="solid"/>
+                      <a:round/>
+                      <a:headEnd type="none" w="med" len="med"/>
+                      <a:tailEnd type="none" w="med" len="med"/>
+                    </a:lnB>
+                  </a:tcPr>
+                </a:tc>
+                <a:extLst>
+                  <a:ext uri="{0D108BD9-81ED-4DB2-BD59-A6C34878D82A}">
+                    <a16:rowId xmlns:a16="http://schemas.microsoft.com/office/drawing/2014/main" val="3878049012"/>
+                  </a:ext>
+                </a:extLst>
+              </a:tr>
+              <a:tr h="440000">
+                <a:tc>
+                  <a:txBody>
+                    <a:bodyPr/>
+                    <a:lstStyle/>
+                    <a:p>
+                      <a:pPr marL="0" indent="0">
+                        <a:buNone/>
+                      </a:pPr>
+                      <a:r>
+                        <a:rPr lang="en-US" sz="1000" b="1" dirty="0">
+                          <a:solidFill>
+                            <a:srgbClr val="000000"/>
+                          </a:solidFill>
+                          <a:latin typeface="Calibri" pitchFamily="34" charset="0"/>
+                          <a:ea typeface="Calibri" pitchFamily="34" charset="-122"/>
+                          <a:cs typeface="Calibri" pitchFamily="34" charset="-120"/>
+                        </a:rPr>
+                        <a:t>pytest</a:t>
+                      </a:r>
+                      <a:endParaRPr lang="en-US" sz="1000" dirty="0"/>
+                    </a:p>
+                  </a:txBody>
+                  <a:tcPr marL="54864" marR="54864" marT="54864" marB="54864" anchor="ctr">
+                    <a:lnL w="9525" cap="flat" cmpd="sng" algn="ctr">
+                      <a:solidFill>
+                        <a:srgbClr val="BFBFBF"/>
+                      </a:solidFill>
+                      <a:prstDash val="solid"/>
+                      <a:round/>
+                      <a:headEnd type="none" w="med" len="med"/>
+                      <a:tailEnd type="none" w="med" len="med"/>
+                    </a:lnL>
+                    <a:lnR w="9525" cap="flat" cmpd="sng" algn="ctr">
+                      <a:solidFill>
+                        <a:srgbClr val="BFBFBF"/>
+                      </a:solidFill>
+                      <a:prstDash val="solid"/>
+                      <a:round/>
+                      <a:headEnd type="none" w="med" len="med"/>
+                      <a:tailEnd type="none" w="med" len="med"/>
+                    </a:lnR>
+                    <a:lnT w="9525" cap="flat" cmpd="sng" algn="ctr">
+                      <a:solidFill>
+                        <a:srgbClr val="BFBFBF"/>
+                      </a:solidFill>
+                      <a:prstDash val="solid"/>
+                      <a:round/>
+                      <a:headEnd type="none" w="med" len="med"/>
+                      <a:tailEnd type="none" w="med" len="med"/>
+                    </a:lnT>
+                    <a:lnB w="9525" cap="flat" cmpd="sng" algn="ctr">
+                      <a:solidFill>
+                        <a:srgbClr val="BFBFBF"/>
+                      </a:solidFill>
+                      <a:prstDash val="solid"/>
+                      <a:round/>
+                      <a:headEnd type="none" w="med" len="med"/>
+                      <a:tailEnd type="none" w="med" len="med"/>
+                    </a:lnB>
+                  </a:tcPr>
+                </a:tc>
+                <a:tc>
+                  <a:txBody>
+                    <a:bodyPr/>
+                    <a:lstStyle/>
+                    <a:p>
+                      <a:pPr marL="0" indent="0">
+                        <a:buNone/>
+                      </a:pPr>
+                      <a:r>
+                        <a:rPr lang="en-US" sz="1000" dirty="0">
+                          <a:solidFill>
+                            <a:srgbClr val="000000"/>
+                          </a:solidFill>
+                          <a:latin typeface="Calibri" pitchFamily="34" charset="0"/>
+                          <a:ea typeface="Calibri" pitchFamily="34" charset="-122"/>
+                          <a:cs typeface="Calibri" pitchFamily="34" charset="-120"/>
+                        </a:rPr>
+                        <a:t>91 tests across rules, techniques and adapters</a:t>
+                      </a:r>
+                      <a:endParaRPr lang="en-US" sz="1000" dirty="0"/>
+                    </a:p>
+                  </a:txBody>
+                  <a:tcPr marL="54864" marR="54864" marT="54864" marB="54864" anchor="ctr">
+                    <a:lnL w="9525" cap="flat" cmpd="sng" algn="ctr">
+                      <a:solidFill>
+                        <a:srgbClr val="BFBFBF"/>
+                      </a:solidFill>
+                      <a:prstDash val="solid"/>
+                      <a:round/>
+                      <a:headEnd type="none" w="med" len="med"/>
+                      <a:tailEnd type="none" w="med" len="med"/>
+                    </a:lnL>
+                    <a:lnR w="9525" cap="flat" cmpd="sng" algn="ctr">
+                      <a:solidFill>
+                        <a:srgbClr val="BFBFBF"/>
+                      </a:solidFill>
+                      <a:prstDash val="solid"/>
+                      <a:round/>
+                      <a:headEnd type="none" w="med" len="med"/>
+                      <a:tailEnd type="none" w="med" len="med"/>
+                    </a:lnR>
+                    <a:lnT w="9525" cap="flat" cmpd="sng" algn="ctr">
+                      <a:solidFill>
+                        <a:srgbClr val="BFBFBF"/>
+                      </a:solidFill>
+                      <a:prstDash val="solid"/>
+                      <a:round/>
+                      <a:headEnd type="none" w="med" len="med"/>
+                      <a:tailEnd type="none" w="med" len="med"/>
+                    </a:lnT>
+                    <a:lnB w="9525" cap="flat" cmpd="sng" algn="ctr">
+                      <a:solidFill>
+                        <a:srgbClr val="BFBFBF"/>
+                      </a:solidFill>
+                      <a:prstDash val="solid"/>
+                      <a:round/>
+                      <a:headEnd type="none" w="med" len="med"/>
+                      <a:tailEnd type="none" w="med" len="med"/>
+                    </a:lnB>
+                  </a:tcPr>
+                </a:tc>
+                <a:tc>
+                  <a:txBody>
+                    <a:bodyPr/>
+                    <a:lstStyle/>
+                    <a:p>
+                      <a:pPr marL="0" indent="0">
+                        <a:buNone/>
+                      </a:pPr>
+                      <a:r>
+                        <a:rPr lang="en-US" sz="950" dirty="0">
+                          <a:solidFill>
+                            <a:srgbClr val="000000"/>
+                          </a:solidFill>
+                          <a:latin typeface="Calibri" pitchFamily="34" charset="0"/>
+                          <a:ea typeface="Calibri" pitchFamily="34" charset="-122"/>
+                          <a:cs typeface="Calibri" pitchFamily="34" charset="-120"/>
+                        </a:rPr>
+                        <a:t>The rules are the contribution, so they are pinned by tests rather than asserted</a:t>
+                      </a:r>
+                      <a:endParaRPr lang="en-US" sz="950" dirty="0"/>
+                    </a:p>
+                  </a:txBody>
+                  <a:tcPr marL="54864" marR="54864" marT="54864" marB="54864" anchor="ctr">
+                    <a:lnL w="9525" cap="flat" cmpd="sng" algn="ctr">
+                      <a:solidFill>
+                        <a:srgbClr val="BFBFBF"/>
+                      </a:solidFill>
+                      <a:prstDash val="solid"/>
+                      <a:round/>
+                      <a:headEnd type="none" w="med" len="med"/>
+                      <a:tailEnd type="none" w="med" len="med"/>
+                    </a:lnL>
+                    <a:lnR w="9525" cap="flat" cmpd="sng" algn="ctr">
+                      <a:solidFill>
+                        <a:srgbClr val="BFBFBF"/>
+                      </a:solidFill>
+                      <a:prstDash val="solid"/>
+                      <a:round/>
+                      <a:headEnd type="none" w="med" len="med"/>
+                      <a:tailEnd type="none" w="med" len="med"/>
+                    </a:lnR>
+                    <a:lnT w="9525" cap="flat" cmpd="sng" algn="ctr">
+                      <a:solidFill>
+                        <a:srgbClr val="BFBFBF"/>
+                      </a:solidFill>
+                      <a:prstDash val="solid"/>
+                      <a:round/>
+                      <a:headEnd type="none" w="med" len="med"/>
+                      <a:tailEnd type="none" w="med" len="med"/>
+                    </a:lnT>
+                    <a:lnB w="9525" cap="flat" cmpd="sng" algn="ctr">
+                      <a:solidFill>
+                        <a:srgbClr val="BFBFBF"/>
+                      </a:solidFill>
+                      <a:prstDash val="solid"/>
+                      <a:round/>
+                      <a:headEnd type="none" w="med" len="med"/>
+                      <a:tailEnd type="none" w="med" len="med"/>
+                    </a:lnB>
+                  </a:tcPr>
+                </a:tc>
+                <a:extLst>
+                  <a:ext uri="{0D108BD9-81ED-4DB2-BD59-A6C34878D82A}">
+                    <a16:rowId xmlns:a16="http://schemas.microsoft.com/office/drawing/2014/main" val="2906488420"/>
+                  </a:ext>
+                </a:extLst>
+              </a:tr>
+              <a:tr h="440000">
+                <a:tc>
+                  <a:txBody>
+                    <a:bodyPr/>
+                    <a:lstStyle/>
+                    <a:p>
+                      <a:pPr marL="0" indent="0">
+                        <a:buNone/>
+                      </a:pPr>
+                      <a:r>
+                        <a:rPr lang="en-US" sz="1000" b="1" dirty="0">
+                          <a:solidFill>
+                            <a:srgbClr val="000000"/>
+                          </a:solidFill>
+                          <a:latin typeface="Calibri" pitchFamily="34" charset="0"/>
+                          <a:ea typeface="Calibri" pitchFamily="34" charset="-122"/>
+                          <a:cs typeface="Calibri" pitchFamily="34" charset="-120"/>
+                        </a:rPr>
+                        <a:t>Playwright</a:t>
+                      </a:r>
+                      <a:endParaRPr lang="en-US" sz="1000" dirty="0"/>
+                    </a:p>
+                  </a:txBody>
+                  <a:tcPr marL="54864" marR="54864" marT="54864" marB="54864" anchor="ctr">
+                    <a:lnL w="9525" cap="flat" cmpd="sng" algn="ctr">
+                      <a:solidFill>
+                        <a:srgbClr val="BFBFBF"/>
+                      </a:solidFill>
+                      <a:prstDash val="solid"/>
+                      <a:round/>
+                      <a:headEnd type="none" w="med" len="med"/>
+                      <a:tailEnd type="none" w="med" len="med"/>
+                    </a:lnL>
+                    <a:lnR w="9525" cap="flat" cmpd="sng" algn="ctr">
+                      <a:solidFill>
+                        <a:srgbClr val="BFBFBF"/>
+                      </a:solidFill>
+                      <a:prstDash val="solid"/>
+                      <a:round/>
+                      <a:headEnd type="none" w="med" len="med"/>
+                      <a:tailEnd type="none" w="med" len="med"/>
+                    </a:lnR>
+                    <a:lnT w="9525" cap="flat" cmpd="sng" algn="ctr">
+                      <a:solidFill>
+                        <a:srgbClr val="BFBFBF"/>
+                      </a:solidFill>
+                      <a:prstDash val="solid"/>
+                      <a:round/>
+                      <a:headEnd type="none" w="med" len="med"/>
+                      <a:tailEnd type="none" w="med" len="med"/>
+                    </a:lnT>
+                    <a:lnB w="9525" cap="flat" cmpd="sng" algn="ctr">
+                      <a:solidFill>
+                        <a:srgbClr val="BFBFBF"/>
+                      </a:solidFill>
+                      <a:prstDash val="solid"/>
+                      <a:round/>
+                      <a:headEnd type="none" w="med" len="med"/>
+                      <a:tailEnd type="none" w="med" len="med"/>
+                    </a:lnB>
+                  </a:tcPr>
+                </a:tc>
+                <a:tc>
+                  <a:txBody>
+                    <a:bodyPr/>
+                    <a:lstStyle/>
+                    <a:p>
+                      <a:pPr marL="0" indent="0">
+                        <a:buNone/>
+                      </a:pPr>
+                      <a:r>
+                        <a:rPr lang="en-US" sz="1000" dirty="0">
+                          <a:solidFill>
+                            <a:srgbClr val="000000"/>
+                          </a:solidFill>
+                          <a:latin typeface="Calibri" pitchFamily="34" charset="0"/>
+                          <a:ea typeface="Calibri" pitchFamily="34" charset="-122"/>
+                          <a:cs typeface="Calibri" pitchFamily="34" charset="-120"/>
+                        </a:rPr>
+                        <a:t>Tier-2 credentialed portal scraping</a:t>
+                      </a:r>
+                      <a:endParaRPr lang="en-US" sz="1000" dirty="0"/>
+                    </a:p>
+                  </a:txBody>
+                  <a:tcPr marL="54864" marR="54864" marT="54864" marB="54864" anchor="ctr">
+                    <a:lnL w="9525" cap="flat" cmpd="sng" algn="ctr">
+                      <a:solidFill>
+                        <a:srgbClr val="BFBFBF"/>
+                      </a:solidFill>
+                      <a:prstDash val="solid"/>
+                      <a:round/>
+                      <a:headEnd type="none" w="med" len="med"/>
+                      <a:tailEnd type="none" w="med" len="med"/>
+                    </a:lnL>
+                    <a:lnR w="9525" cap="flat" cmpd="sng" algn="ctr">
+                      <a:solidFill>
+                        <a:srgbClr val="BFBFBF"/>
+                      </a:solidFill>
+                      <a:prstDash val="solid"/>
+                      <a:round/>
+                      <a:headEnd type="none" w="med" len="med"/>
+                      <a:tailEnd type="none" w="med" len="med"/>
+                    </a:lnR>
+                    <a:lnT w="9525" cap="flat" cmpd="sng" algn="ctr">
+                      <a:solidFill>
+                        <a:srgbClr val="BFBFBF"/>
+                      </a:solidFill>
+                      <a:prstDash val="solid"/>
+                      <a:round/>
+                      <a:headEnd type="none" w="med" len="med"/>
+                      <a:tailEnd type="none" w="med" len="med"/>
+                    </a:lnT>
+                    <a:lnB w="9525" cap="flat" cmpd="sng" algn="ctr">
+                      <a:solidFill>
+                        <a:srgbClr val="BFBFBF"/>
+                      </a:solidFill>
+                      <a:prstDash val="solid"/>
+                      <a:round/>
+                      <a:headEnd type="none" w="med" len="med"/>
+                      <a:tailEnd type="none" w="med" len="med"/>
+                    </a:lnB>
+                  </a:tcPr>
+                </a:tc>
+                <a:tc>
+                  <a:txBody>
+                    <a:bodyPr/>
+                    <a:lstStyle/>
+                    <a:p>
+                      <a:pPr marL="0" indent="0">
+                        <a:buNone/>
+                      </a:pPr>
+                      <a:r>
+                        <a:rPr lang="en-US" sz="950" dirty="0">
+                          <a:solidFill>
+                            <a:srgbClr val="000000"/>
+                          </a:solidFill>
+                          <a:latin typeface="Calibri" pitchFamily="34" charset="0"/>
+                          <a:ea typeface="Calibri" pitchFamily="34" charset="-122"/>
+                          <a:cs typeface="Calibri" pitchFamily="34" charset="-120"/>
+                        </a:rPr>
+                        <a:t>Hospital portals need login, session persistence and JavaScript rendering. Stubbed until access</a:t>
+                      </a:r>
+                      <a:endParaRPr lang="en-US" sz="950" dirty="0"/>
+                    </a:p>
+                  </a:txBody>
+                  <a:tcPr marL="54864" marR="54864" marT="54864" marB="54864" anchor="ctr">
+                    <a:lnL w="9525" cap="flat" cmpd="sng" algn="ctr">
+                      <a:solidFill>
+                        <a:srgbClr val="BFBFBF"/>
+                      </a:solidFill>
+                      <a:prstDash val="solid"/>
+                      <a:round/>
+                      <a:headEnd type="none" w="med" len="med"/>
+                      <a:tailEnd type="none" w="med" len="med"/>
+                    </a:lnL>
+                    <a:lnR w="9525" cap="flat" cmpd="sng" algn="ctr">
+                      <a:solidFill>
+                        <a:srgbClr val="BFBFBF"/>
+                      </a:solidFill>
+                      <a:prstDash val="solid"/>
+                      <a:round/>
+                      <a:headEnd type="none" w="med" len="med"/>
+                      <a:tailEnd type="none" w="med" len="med"/>
+                    </a:lnR>
+                    <a:lnT w="9525" cap="flat" cmpd="sng" algn="ctr">
+                      <a:solidFill>
+                        <a:srgbClr val="BFBFBF"/>
+                      </a:solidFill>
+                      <a:prstDash val="solid"/>
+                      <a:round/>
+                      <a:headEnd type="none" w="med" len="med"/>
+                      <a:tailEnd type="none" w="med" len="med"/>
+                    </a:lnT>
+                    <a:lnB w="9525" cap="flat" cmpd="sng" algn="ctr">
+                      <a:solidFill>
+                        <a:srgbClr val="BFBFBF"/>
+                      </a:solidFill>
+                      <a:prstDash val="solid"/>
+                      <a:round/>
+                      <a:headEnd type="none" w="med" len="med"/>
+                      <a:tailEnd type="none" w="med" len="med"/>
+                    </a:lnB>
+                  </a:tcPr>
+                </a:tc>
+                <a:extLst>
+                  <a:ext uri="{0D108BD9-81ED-4DB2-BD59-A6C34878D82A}">
+                    <a16:rowId xmlns:a16="http://schemas.microsoft.com/office/drawing/2014/main" val="975821219"/>
+                  </a:ext>
+                </a:extLst>
+              </a:tr>
+              <a:tr h="440000">
+                <a:tc>
+                  <a:txBody>
+                    <a:bodyPr/>
+                    <a:lstStyle/>
+                    <a:p>
+                      <a:pPr marL="0" indent="0">
+                        <a:buNone/>
+                      </a:pPr>
+                      <a:r>
+                        <a:rPr lang="en-US" sz="1000" b="1" dirty="0">
+                          <a:solidFill>
+                            <a:srgbClr val="000000"/>
+                          </a:solidFill>
+                          <a:latin typeface="Calibri" pitchFamily="34" charset="0"/>
+                          <a:ea typeface="Calibri" pitchFamily="34" charset="-122"/>
+                          <a:cs typeface="Calibri" pitchFamily="34" charset="-120"/>
+                        </a:rPr>
+                        <a:t>Anthropic Claude API</a:t>
+                      </a:r>
+                      <a:endParaRPr lang="en-US" sz="1000" dirty="0"/>
+                    </a:p>
+                  </a:txBody>
+                  <a:tcPr marL="54864" marR="54864" marT="54864" marB="54864" anchor="ctr">
+                    <a:lnL w="9525" cap="flat" cmpd="sng" algn="ctr">
+                      <a:solidFill>
+                        <a:srgbClr val="BFBFBF"/>
+                      </a:solidFill>
+                      <a:prstDash val="solid"/>
+                      <a:round/>
+                      <a:headEnd type="none" w="med" len="med"/>
+                      <a:tailEnd type="none" w="med" len="med"/>
+                    </a:lnL>
+                    <a:lnR w="9525" cap="flat" cmpd="sng" algn="ctr">
+                      <a:solidFill>
+                        <a:srgbClr val="BFBFBF"/>
+                      </a:solidFill>
+                      <a:prstDash val="solid"/>
+                      <a:round/>
+                      <a:headEnd type="none" w="med" len="med"/>
+                      <a:tailEnd type="none" w="med" len="med"/>
+                    </a:lnR>
+                    <a:lnT w="9525" cap="flat" cmpd="sng" algn="ctr">
+                      <a:solidFill>
+                        <a:srgbClr val="BFBFBF"/>
+                      </a:solidFill>
+                      <a:prstDash val="solid"/>
+                      <a:round/>
+                      <a:headEnd type="none" w="med" len="med"/>
+                      <a:tailEnd type="none" w="med" len="med"/>
+                    </a:lnT>
+                    <a:lnB w="9525" cap="flat" cmpd="sng" algn="ctr">
+                      <a:solidFill>
+                        <a:srgbClr val="BFBFBF"/>
+                      </a:solidFill>
+                      <a:prstDash val="solid"/>
+                      <a:round/>
+                      <a:headEnd type="none" w="med" len="med"/>
+                      <a:tailEnd type="none" w="med" len="med"/>
+                    </a:lnB>
+                  </a:tcPr>
+                </a:tc>
+                <a:tc>
+                  <a:txBody>
+                    <a:bodyPr/>
+                    <a:lstStyle/>
+                    <a:p>
+                      <a:pPr marL="0" indent="0">
+                        <a:buNone/>
+                      </a:pPr>
+                      <a:r>
+                        <a:rPr lang="en-US" sz="1000" dirty="0">
+                          <a:solidFill>
+                            <a:srgbClr val="000000"/>
+                          </a:solidFill>
+                          <a:latin typeface="Calibri" pitchFamily="34" charset="0"/>
+                          <a:ea typeface="Calibri" pitchFamily="34" charset="-122"/>
+                          <a:cs typeface="Calibri" pitchFamily="34" charset="-120"/>
+                        </a:rPr>
+                        <a:t>The extraction agent (build step 6)</a:t>
+                      </a:r>
+                      <a:endParaRPr lang="en-US" sz="1000" dirty="0"/>
+                    </a:p>
+                  </a:txBody>
+                  <a:tcPr marL="54864" marR="54864" marT="54864" marB="54864" anchor="ctr">
+                    <a:lnL w="9525" cap="flat" cmpd="sng" algn="ctr">
+                      <a:solidFill>
+                        <a:srgbClr val="BFBFBF"/>
+                      </a:solidFill>
+                      <a:prstDash val="solid"/>
+                      <a:round/>
+                      <a:headEnd type="none" w="med" len="med"/>
+                      <a:tailEnd type="none" w="med" len="med"/>
+                    </a:lnL>
+                    <a:lnR w="9525" cap="flat" cmpd="sng" algn="ctr">
+                      <a:solidFill>
+                        <a:srgbClr val="BFBFBF"/>
+                      </a:solidFill>
+                      <a:prstDash val="solid"/>
+                      <a:round/>
+                      <a:headEnd type="none" w="med" len="med"/>
+                      <a:tailEnd type="none" w="med" len="med"/>
+                    </a:lnR>
+                    <a:lnT w="9525" cap="flat" cmpd="sng" algn="ctr">
+                      <a:solidFill>
+                        <a:srgbClr val="BFBFBF"/>
+                      </a:solidFill>
+                      <a:prstDash val="solid"/>
+                      <a:round/>
+                      <a:headEnd type="none" w="med" len="med"/>
+                      <a:tailEnd type="none" w="med" len="med"/>
+                    </a:lnT>
+                    <a:lnB w="9525" cap="flat" cmpd="sng" algn="ctr">
+                      <a:solidFill>
+                        <a:srgbClr val="BFBFBF"/>
+                      </a:solidFill>
+                      <a:prstDash val="solid"/>
+                      <a:round/>
+                      <a:headEnd type="none" w="med" len="med"/>
+                      <a:tailEnd type="none" w="med" len="med"/>
+                    </a:lnB>
+                  </a:tcPr>
+                </a:tc>
+                <a:tc>
+                  <a:txBody>
+                    <a:bodyPr/>
+                    <a:lstStyle/>
+                    <a:p>
+                      <a:pPr marL="0" indent="0">
+                        <a:buNone/>
+                      </a:pPr>
+                      <a:r>
+                        <a:rPr lang="en-US" sz="950" dirty="0">
+                          <a:solidFill>
+                            <a:srgbClr val="000000"/>
+                          </a:solidFill>
+                          <a:latin typeface="Calibri" pitchFamily="34" charset="0"/>
+                          <a:ea typeface="Calibri" pitchFamily="34" charset="-122"/>
+                          <a:cs typeface="Calibri" pitchFamily="34" charset="-120"/>
+                        </a:rPr>
+                        <a:t>Off-the-shelf, no fine-tuning; chosen for structured output and tool use. Not yet called</a:t>
+                      </a:r>
+                      <a:endParaRPr lang="en-US" sz="950" dirty="0"/>
+                    </a:p>
+                  </a:txBody>
+                  <a:tcPr marL="54864" marR="54864" marT="54864" marB="54864" anchor="ctr">
+                    <a:lnL w="9525" cap="flat" cmpd="sng" algn="ctr">
+                      <a:solidFill>
+                        <a:srgbClr val="BFBFBF"/>
+                      </a:solidFill>
+                      <a:prstDash val="solid"/>
+                      <a:round/>
+                      <a:headEnd type="none" w="med" len="med"/>
+                      <a:tailEnd type="none" w="med" len="med"/>
+                    </a:lnL>
+                    <a:lnR w="9525" cap="flat" cmpd="sng" algn="ctr">
+                      <a:solidFill>
+                        <a:srgbClr val="BFBFBF"/>
+                      </a:solidFill>
+                      <a:prstDash val="solid"/>
+                      <a:round/>
+                      <a:headEnd type="none" w="med" len="med"/>
+                      <a:tailEnd type="none" w="med" len="med"/>
+                    </a:lnR>
+                    <a:lnT w="9525" cap="flat" cmpd="sng" algn="ctr">
+                      <a:solidFill>
+                        <a:srgbClr val="BFBFBF"/>
+                      </a:solidFill>
+                      <a:prstDash val="solid"/>
+                      <a:round/>
+                      <a:headEnd type="none" w="med" len="med"/>
+                      <a:tailEnd type="none" w="med" len="med"/>
+                    </a:lnT>
+                    <a:lnB w="9525" cap="flat" cmpd="sng" algn="ctr">
+                      <a:solidFill>
+                        <a:srgbClr val="BFBFBF"/>
+                      </a:solidFill>
+                      <a:prstDash val="solid"/>
+                      <a:round/>
+                      <a:headEnd type="none" w="med" len="med"/>
+                      <a:tailEnd type="none" w="med" len="med"/>
+                    </a:lnB>
+                  </a:tcPr>
+                </a:tc>
+                <a:extLst>
+                  <a:ext uri="{0D108BD9-81ED-4DB2-BD59-A6C34878D82A}">
+                    <a16:rowId xmlns:a16="http://schemas.microsoft.com/office/drawing/2014/main" val="2598124037"/>
+                  </a:ext>
+                </a:extLst>
+              </a:tr>
+              <a:tr h="440000">
+                <a:tc>
+                  <a:txBody>
+                    <a:bodyPr/>
+                    <a:lstStyle/>
+                    <a:p>
+                      <a:pPr marL="0" indent="0">
+                        <a:buNone/>
+                      </a:pPr>
+                      <a:r>
+                        <a:rPr lang="en-US" sz="1000" b="1" dirty="0">
+                          <a:solidFill>
+                            <a:srgbClr val="000000"/>
+                          </a:solidFill>
+                          <a:latin typeface="Calibri" pitchFamily="34" charset="0"/>
+                          <a:ea typeface="Calibri" pitchFamily="34" charset="-122"/>
+                          <a:cs typeface="Calibri" pitchFamily="34" charset="-120"/>
+                        </a:rPr>
+                        <a:t>HL7 / FHIR / DICOM / ISO-IEEE 11073</a:t>
+                      </a:r>
+                      <a:endParaRPr lang="en-US" sz="1000" dirty="0"/>
+                    </a:p>
+                  </a:txBody>
+                  <a:tcPr marL="54864" marR="54864" marT="54864" marB="54864" anchor="ctr">
+                    <a:lnL w="9525" cap="flat" cmpd="sng" algn="ctr">
+                      <a:solidFill>
+                        <a:srgbClr val="BFBFBF"/>
+                      </a:solidFill>
+                      <a:prstDash val="solid"/>
+                      <a:round/>
+                      <a:headEnd type="none" w="med" len="med"/>
+                      <a:tailEnd type="none" w="med" len="med"/>
+                    </a:lnL>
+                    <a:lnR w="9525" cap="flat" cmpd="sng" algn="ctr">
+                      <a:solidFill>
+                        <a:srgbClr val="BFBFBF"/>
+                      </a:solidFill>
+                      <a:prstDash val="solid"/>
+                      <a:round/>
+                      <a:headEnd type="none" w="med" len="med"/>
+                      <a:tailEnd type="none" w="med" len="med"/>
+                    </a:lnR>
+                    <a:lnT w="9525" cap="flat" cmpd="sng" algn="ctr">
+                      <a:solidFill>
+                        <a:srgbClr val="BFBFBF"/>
+                      </a:solidFill>
+                      <a:prstDash val="solid"/>
+                      <a:round/>
+                      <a:headEnd type="none" w="med" len="med"/>
+                      <a:tailEnd type="none" w="med" len="med"/>
+                    </a:lnT>
+                    <a:lnB w="9525" cap="flat" cmpd="sng" algn="ctr">
+                      <a:solidFill>
+                        <a:srgbClr val="BFBFBF"/>
+                      </a:solidFill>
+                      <a:prstDash val="solid"/>
+                      <a:round/>
+                      <a:headEnd type="none" w="med" len="med"/>
+                      <a:tailEnd type="none" w="med" len="med"/>
+                    </a:lnB>
+                  </a:tcPr>
+                </a:tc>
+                <a:tc>
+                  <a:txBody>
+                    <a:bodyPr/>
+                    <a:lstStyle/>
+                    <a:p>
+                      <a:pPr marL="0" indent="0">
+                        <a:buNone/>
+                      </a:pPr>
+                      <a:r>
+                        <a:rPr lang="en-US" sz="1000" dirty="0">
+                          <a:solidFill>
+                            <a:srgbClr val="000000"/>
+                          </a:solidFill>
+                          <a:latin typeface="Calibri" pitchFamily="34" charset="0"/>
+                          <a:ea typeface="Calibri" pitchFamily="34" charset="-122"/>
+                          <a:cs typeface="Calibri" pitchFamily="34" charset="-120"/>
+                        </a:rPr>
+                        <a:t>Interoperability shaping per HIS layer</a:t>
+                      </a:r>
+                      <a:endParaRPr lang="en-US" sz="1000" dirty="0"/>
+                    </a:p>
+                  </a:txBody>
+                  <a:tcPr marL="54864" marR="54864" marT="54864" marB="54864" anchor="ctr">
+                    <a:lnL w="9525" cap="flat" cmpd="sng" algn="ctr">
+                      <a:solidFill>
+                        <a:srgbClr val="BFBFBF"/>
+                      </a:solidFill>
+                      <a:prstDash val="solid"/>
+                      <a:round/>
+                      <a:headEnd type="none" w="med" len="med"/>
+                      <a:tailEnd type="none" w="med" len="med"/>
+                    </a:lnL>
+                    <a:lnR w="9525" cap="flat" cmpd="sng" algn="ctr">
+                      <a:solidFill>
+                        <a:srgbClr val="BFBFBF"/>
+                      </a:solidFill>
+                      <a:prstDash val="solid"/>
+                      <a:round/>
+                      <a:headEnd type="none" w="med" len="med"/>
+                      <a:tailEnd type="none" w="med" len="med"/>
+                    </a:lnR>
+                    <a:lnT w="9525" cap="flat" cmpd="sng" algn="ctr">
+                      <a:solidFill>
+                        <a:srgbClr val="BFBFBF"/>
+                      </a:solidFill>
+                      <a:prstDash val="solid"/>
+                      <a:round/>
+                      <a:headEnd type="none" w="med" len="med"/>
+                      <a:tailEnd type="none" w="med" len="med"/>
+                    </a:lnT>
+                    <a:lnB w="9525" cap="flat" cmpd="sng" algn="ctr">
+                      <a:solidFill>
+                        <a:srgbClr val="BFBFBF"/>
+                      </a:solidFill>
+                      <a:prstDash val="solid"/>
+                      <a:round/>
+                      <a:headEnd type="none" w="med" len="med"/>
+                      <a:tailEnd type="none" w="med" len="med"/>
+                    </a:lnB>
+                  </a:tcPr>
+                </a:tc>
+                <a:tc>
+                  <a:txBody>
+                    <a:bodyPr/>
+                    <a:lstStyle/>
+                    <a:p>
+                      <a:pPr marL="0" indent="0">
+                        <a:buNone/>
+                      </a:pPr>
+                      <a:r>
+                        <a:rPr lang="en-US" sz="950" dirty="0">
+                          <a:solidFill>
+                            <a:srgbClr val="000000"/>
+                          </a:solidFill>
+                          <a:latin typeface="Calibri" pitchFamily="34" charset="0"/>
+                          <a:ea typeface="Calibri" pitchFamily="34" charset="-122"/>
+                          <a:cs typeface="Calibri" pitchFamily="34" charset="-120"/>
+                        </a:rPr>
+                        <a:t>Hand-rolled lightweight shapers — no vendor libraries and no vendor names in core logic</a:t>
+                      </a:r>
+                      <a:endParaRPr lang="en-US" sz="950" dirty="0"/>
+                    </a:p>
+                  </a:txBody>
+                  <a:tcPr marL="54864" marR="54864" marT="54864" marB="54864" anchor="ctr">
+                    <a:lnL w="9525" cap="flat" cmpd="sng" algn="ctr">
+                      <a:solidFill>
+                        <a:srgbClr val="BFBFBF"/>
+                      </a:solidFill>
+                      <a:prstDash val="solid"/>
+                      <a:round/>
+                      <a:headEnd type="none" w="med" len="med"/>
+                      <a:tailEnd type="none" w="med" len="med"/>
+                    </a:lnL>
+                    <a:lnR w="9525" cap="flat" cmpd="sng" algn="ctr">
+                      <a:solidFill>
+                        <a:srgbClr val="BFBFBF"/>
+                      </a:solidFill>
+                      <a:prstDash val="solid"/>
+                      <a:round/>
+                      <a:headEnd type="none" w="med" len="med"/>
+                      <a:tailEnd type="none" w="med" len="med"/>
+                    </a:lnR>
+                    <a:lnT w="9525" cap="flat" cmpd="sng" algn="ctr">
+                      <a:solidFill>
+                        <a:srgbClr val="BFBFBF"/>
+                      </a:solidFill>
+                      <a:prstDash val="solid"/>
+                      <a:round/>
+                      <a:headEnd type="none" w="med" len="med"/>
+                      <a:tailEnd type="none" w="med" len="med"/>
+                    </a:lnT>
+                    <a:lnB w="9525" cap="flat" cmpd="sng" algn="ctr">
+                      <a:solidFill>
+                        <a:srgbClr val="BFBFBF"/>
+                      </a:solidFill>
+                      <a:prstDash val="solid"/>
+                      <a:round/>
+                      <a:headEnd type="none" w="med" len="med"/>
+                      <a:tailEnd type="none" w="med" len="med"/>
+                    </a:lnB>
+                  </a:tcPr>
+                </a:tc>
+                <a:extLst>
+                  <a:ext uri="{0D108BD9-81ED-4DB2-BD59-A6C34878D82A}">
+                    <a16:rowId xmlns:a16="http://schemas.microsoft.com/office/drawing/2014/main" val="1496979897"/>
+                  </a:ext>
+                </a:extLst>
+              </a:tr>
+            </a:tbl>
+          </a:graphicData>
+        </a:graphic>
+      </p:graphicFrame>
+      <p:sp>
+        <p:nvSpPr>
+          <p:cNvPr id="41" name="Text 41"/>
+          <p:cNvSpPr txBox="1"/>
+          <p:nvPr/>
+        </p:nvSpPr>
+        <p:spPr>
+          <a:xfrm>
+            <a:off x="640080" y="4900000"/>
+            <a:ext cx="10900000" cy="1500000"/>
+          </a:xfrm>
+          <a:prstGeom prst="rect">
+            <a:avLst/>
+          </a:prstGeom>
+          <a:noFill/>
+          <a:ln/>
+        </p:spPr>
+        <p:txBody>
+          <a:bodyPr wrap="square" lIns="0" tIns="0" rIns="0" bIns="0" rtlCol="0" anchor="t"/>
+          <a:lstStyle/>
+          <a:p>
+            <a:pPr marL="177800" indent="-177800">
+              <a:spcAft>
+                <a:spcPts val="380"/>
+              </a:spcAft>
+              <a:buSzPct val="100000"/>
+              <a:buChar char="•"/>
+            </a:pPr>
+            <a:r>
+              <a:rPr lang="en-US" sz="1100" dirty="0">
+                <a:solidFill>
+                  <a:srgbClr val="000000"/>
+                </a:solidFill>
+                <a:latin typeface="Calibri" pitchFamily="34" charset="0"/>
+                <a:ea typeface="Calibri" pitchFamily="34" charset="-122"/>
+                <a:cs typeface="Calibri" pitchFamily="34" charset="-120"/>
+              </a:rPr>
+              <a:t>Where this runs: everything executes locally on project machines against self-generated synthetic data — 50 records per layer across four HIS layers, seeded. No network calls, no cloud service, no connection to any hospital system.</a:t>
+            </a:r>
+          </a:p>
+          <a:p>
+            <a:pPr marL="177800" indent="-177800">
+              <a:spcAft>
+                <a:spcPts val="380"/>
+              </a:spcAft>
+              <a:buSzPct val="100000"/>
+              <a:buChar char="•"/>
+            </a:pPr>
+            <a:r>
+              <a:rPr lang="en-US" sz="1100" dirty="0">
+                <a:solidFill>
+                  <a:srgbClr val="000000"/>
+                </a:solidFill>
+                <a:latin typeface="Calibri" pitchFamily="34" charset="0"/>
+                <a:ea typeface="Calibri" pitchFamily="34" charset="-122"/>
+                <a:cs typeface="Calibri" pitchFamily="34" charset="-120"/>
+              </a:rPr>
+              <a:t>Code, the seven rules, the benchmarking harness and three runnable demos live in one Git repository; every result is written out as JSON and Markdown so the report can cite the artifact rather than a screenshot.</a:t>
+            </a:r>
+          </a:p>
+          <a:p>
+            <a:pPr marL="177800" indent="-177800">
+              <a:spcAft>
+                <a:spcPts val="380"/>
+              </a:spcAft>
+              <a:buSzPct val="100000"/>
+              <a:buChar char="•"/>
+            </a:pPr>
+            <a:r>
+              <a:rPr lang="en-US" sz="1100" dirty="0">
+                <a:solidFill>
+                  <a:srgbClr val="000000"/>
+                </a:solidFill>
+                <a:latin typeface="Calibri" pitchFamily="34" charset="0"/>
+                <a:ea typeface="Calibri" pitchFamily="34" charset="-122"/>
+                <a:cs typeface="Calibri" pitchFamily="34" charset="-120"/>
+              </a:rPr>
+              <a:t>Live HIS access, when it opens, changes exactly one thing: the adapter behind the HISDataSource interface (build step 7).</a:t>
+            </a:r>
+          </a:p>
+        </p:txBody>
+      </p:sp>
+    </p:spTree>
+  </p:cSld>
+  <p:clrMapOvr>
+    <a:masterClrMapping/>
+  </p:clrMapOvr>
+</p:sld>
+</file>
+
+<file path=ppt/slides/slide8.xml><?xml version="1.0" encoding="utf-8"?>
+<p:sld xmlns:a="http://schemas.openxmlformats.org/drawingml/2006/main" xmlns:r="http://schemas.openxmlformats.org/officeDocument/2006/relationships" xmlns:p="http://schemas.openxmlformats.org/presentationml/2006/main">
   <p:cSld name="Slide 7">
     <p:bg>
       <p:bgPr>
@@ -10048,7 +10561,7 @@
               <a:buChar char="•"/>
             </a:pPr>
             <a:r>
-              <a:rPr lang="en-US" sz="1400" b="1" dirty="0">
+              <a:rPr lang="en-US" b="1" dirty="0">
                 <a:solidFill>
                   <a:srgbClr val="1D2F82"/>
                 </a:solidFill>
@@ -10068,7 +10581,7 @@
               <a:buChar char="–"/>
             </a:pPr>
             <a:r>
-              <a:rPr lang="en-US" sz="1150" dirty="0">
+              <a:rPr lang="en-US" sz="1400" dirty="0">
                 <a:solidFill>
                   <a:srgbClr val="000000"/>
                 </a:solidFill>
@@ -10088,7 +10601,7 @@
               <a:buChar char="–"/>
             </a:pPr>
             <a:r>
-              <a:rPr lang="en-US" sz="1150" dirty="0">
+              <a:rPr lang="en-US" sz="1400" dirty="0">
                 <a:solidFill>
                   <a:srgbClr val="000000"/>
                 </a:solidFill>
@@ -10108,7 +10621,7 @@
               <a:buChar char="–"/>
             </a:pPr>
             <a:r>
-              <a:rPr lang="en-US" sz="1150" dirty="0">
+              <a:rPr lang="en-US" sz="1400" dirty="0">
                 <a:solidFill>
                   <a:srgbClr val="000000"/>
                 </a:solidFill>
@@ -10128,7 +10641,7 @@
               <a:buChar char="–"/>
             </a:pPr>
             <a:r>
-              <a:rPr lang="en-US" sz="1150" dirty="0">
+              <a:rPr lang="en-US" sz="1400" dirty="0">
                 <a:solidFill>
                   <a:srgbClr val="000000"/>
                 </a:solidFill>
@@ -10138,6 +10651,39 @@
               </a:rPr>
               <a:t>Benchmarking harness: three techniques scored on the identical rule set — compliance-aware 1.000, minimising-but-undocumented 0.500, unconstrained baseline 0.131. 91 tests passing.</a:t>
             </a:r>
+          </a:p>
+          <a:p>
+            <a:pPr marL="457200" lvl="1" indent="-228600">
+              <a:spcAft>
+                <a:spcPts val="360"/>
+              </a:spcAft>
+              <a:buSzPct val="90000"/>
+              <a:buChar char="–"/>
+            </a:pPr>
+            <a:endParaRPr lang="en-US" sz="1400" dirty="0">
+              <a:solidFill>
+                <a:srgbClr val="000000"/>
+              </a:solidFill>
+              <a:latin typeface="Calibri" pitchFamily="34" charset="0"/>
+              <a:ea typeface="Calibri" pitchFamily="34" charset="-122"/>
+              <a:cs typeface="Calibri" pitchFamily="34" charset="-120"/>
+            </a:endParaRPr>
+          </a:p>
+          <a:p>
+            <a:pPr marL="228600" lvl="1">
+              <a:spcAft>
+                <a:spcPts val="360"/>
+              </a:spcAft>
+              <a:buSzPct val="90000"/>
+            </a:pPr>
+            <a:endParaRPr lang="en-US" sz="1400" dirty="0">
+              <a:solidFill>
+                <a:srgbClr val="000000"/>
+              </a:solidFill>
+              <a:latin typeface="Calibri" pitchFamily="34" charset="0"/>
+              <a:ea typeface="Calibri" pitchFamily="34" charset="-122"/>
+              <a:cs typeface="Calibri" pitchFamily="34" charset="-120"/>
+            </a:endParaRPr>
           </a:p>
           <a:p>
             <a:pPr marL="177800" indent="-177800">
@@ -10151,7 +10697,7 @@
               <a:buChar char="•"/>
             </a:pPr>
             <a:r>
-              <a:rPr lang="en-US" sz="1400" b="1" dirty="0">
+              <a:rPr lang="en-US" b="1" dirty="0">
                 <a:solidFill>
                   <a:srgbClr val="1D2F82"/>
                 </a:solidFill>
@@ -10171,7 +10717,7 @@
               <a:buChar char="–"/>
             </a:pPr>
             <a:r>
-              <a:rPr lang="en-US" sz="1150" dirty="0">
+              <a:rPr lang="en-US" sz="1400" dirty="0">
                 <a:solidFill>
                   <a:srgbClr val="000000"/>
                 </a:solidFill>
@@ -10191,7 +10737,7 @@
               <a:buChar char="–"/>
             </a:pPr>
             <a:r>
-              <a:rPr lang="en-US" sz="1150" dirty="0">
+              <a:rPr lang="en-US" sz="1400" dirty="0">
                 <a:solidFill>
                   <a:srgbClr val="000000"/>
                 </a:solidFill>
@@ -10211,7 +10757,7 @@
               <a:buChar char="–"/>
             </a:pPr>
             <a:r>
-              <a:rPr lang="en-US" sz="1150" dirty="0">
+              <a:rPr lang="en-US" sz="1400" dirty="0">
                 <a:solidFill>
                   <a:srgbClr val="000000"/>
                 </a:solidFill>
@@ -10232,7 +10778,7 @@
 </p:sld>
 </file>
 
-<file path=ppt/slides/slide7.xml><?xml version="1.0" encoding="utf-8"?>
+<file path=ppt/slides/slide9.xml><?xml version="1.0" encoding="utf-8"?>
 <p:sld xmlns:a="http://schemas.openxmlformats.org/drawingml/2006/main" xmlns:r="http://schemas.openxmlformats.org/officeDocument/2006/relationships" xmlns:p="http://schemas.openxmlformats.org/presentationml/2006/main">
   <p:cSld name="Slide 8">
     <p:bg>
@@ -11550,501 +12096,6 @@
         </p:txBody>
       </p:sp>
     </p:spTree>
-  </p:cSld>
-  <p:clrMapOvr>
-    <a:masterClrMapping/>
-  </p:clrMapOvr>
-</p:sld>
-</file>
-
-<file path=ppt/slides/slide8.xml><?xml version="1.0" encoding="utf-8"?>
-<p:sld xmlns:a="http://schemas.openxmlformats.org/drawingml/2006/main" xmlns:r="http://schemas.openxmlformats.org/officeDocument/2006/relationships" xmlns:p="http://schemas.openxmlformats.org/presentationml/2006/main">
-  <p:cSld name="Slide 9">
-    <p:bg>
-      <p:bgPr>
-        <a:solidFill>
-          <a:srgbClr val="FFFFFF"/>
-        </a:solidFill>
-        <a:effectLst/>
-      </p:bgPr>
-    </p:bg>
-    <p:spTree>
-      <p:nvGrpSpPr>
-        <p:cNvPr id="1" name=""/>
-        <p:cNvGrpSpPr/>
-        <p:nvPr/>
-      </p:nvGrpSpPr>
-      <p:grpSpPr>
-        <a:xfrm>
-          <a:off x="0" y="0"/>
-          <a:ext cx="0" cy="0"/>
-          <a:chOff x="0" y="0"/>
-          <a:chExt cx="0" cy="0"/>
-        </a:xfrm>
-      </p:grpSpPr>
-      <p:sp>
-        <p:nvSpPr>
-          <p:cNvPr id="2" name="Text 0"/>
-          <p:cNvSpPr txBox="1"/>
-          <p:nvPr/>
-        </p:nvSpPr>
-        <p:spPr>
-          <a:xfrm>
-            <a:off x="11460175" y="6446520"/>
-            <a:ext cx="457200" cy="274320"/>
-          </a:xfrm>
-          <a:prstGeom prst="rect">
-            <a:avLst/>
-          </a:prstGeom>
-          <a:noFill/>
-          <a:ln/>
-        </p:spPr>
-        <p:txBody>
-          <a:bodyPr wrap="square" lIns="0" tIns="0" rIns="0" bIns="0" rtlCol="0" anchor="ctr"/>
-          <a:lstStyle/>
-          <a:p>
-            <a:pPr marL="0" indent="0" algn="r">
-              <a:buNone/>
-            </a:pPr>
-            <a:r>
-              <a:rPr lang="en-US" sz="1000" dirty="0">
-                <a:solidFill>
-                  <a:srgbClr val="808080"/>
-                </a:solidFill>
-                <a:latin typeface="Calibri" pitchFamily="34" charset="0"/>
-                <a:ea typeface="Calibri" pitchFamily="34" charset="-122"/>
-                <a:cs typeface="Calibri" pitchFamily="34" charset="-120"/>
-              </a:rPr>
-              <a:t>10</a:t>
-            </a:r>
-            <a:endParaRPr lang="en-US" sz="1000" dirty="0"/>
-          </a:p>
-        </p:txBody>
-      </p:sp>
-      <p:sp>
-        <p:nvSpPr>
-          <p:cNvPr id="3" name="Text 1"/>
-          <p:cNvSpPr txBox="1"/>
-          <p:nvPr/>
-        </p:nvSpPr>
-        <p:spPr>
-          <a:xfrm>
-            <a:off x="548640" y="320040"/>
-            <a:ext cx="9601200" cy="685800"/>
-          </a:xfrm>
-          <a:prstGeom prst="rect">
-            <a:avLst/>
-          </a:prstGeom>
-          <a:noFill/>
-          <a:ln/>
-        </p:spPr>
-        <p:txBody>
-          <a:bodyPr wrap="square" lIns="0" tIns="0" rIns="0" bIns="0" rtlCol="0" anchor="ctr"/>
-          <a:lstStyle/>
-          <a:p>
-            <a:pPr marL="0" indent="0">
-              <a:buNone/>
-            </a:pPr>
-            <a:r>
-              <a:rPr lang="en-US" sz="2800" b="1" dirty="0">
-                <a:solidFill>
-                  <a:srgbClr val="1D2F82"/>
-                </a:solidFill>
-                <a:latin typeface="Calibri" pitchFamily="34" charset="0"/>
-                <a:ea typeface="Calibri" pitchFamily="34" charset="-122"/>
-                <a:cs typeface="Calibri" pitchFamily="34" charset="-120"/>
-              </a:rPr>
-              <a:t>Results (contd.)</a:t>
-            </a:r>
-            <a:endParaRPr lang="en-US" sz="2800" dirty="0"/>
-          </a:p>
-        </p:txBody>
-      </p:sp>
-      <p:pic>
-        <p:nvPicPr>
-          <p:cNvPr id="4" name="Image 0" descr="logo.png"/>
-          <p:cNvPicPr>
-            <a:picLocks noChangeAspect="1"/>
-          </p:cNvPicPr>
-          <p:nvPr/>
-        </p:nvPicPr>
-        <p:blipFill>
-          <a:blip r:embed="rId3"/>
-          <a:stretch>
-            <a:fillRect/>
-          </a:stretch>
-        </p:blipFill>
-        <p:spPr>
-          <a:xfrm>
-            <a:off x="10362895" y="320040"/>
-            <a:ext cx="1371600" cy="518746"/>
-          </a:xfrm>
-          <a:prstGeom prst="rect">
-            <a:avLst/>
-          </a:prstGeom>
-        </p:spPr>
-      </p:pic>
-      <p:sp>
-        <p:nvSpPr>
-          <p:cNvPr id="20" name="Text 20"/>
-          <p:cNvSpPr txBox="1"/>
-          <p:nvPr/>
-        </p:nvSpPr>
-        <p:spPr>
-          <a:xfrm>
-            <a:off x="640080" y="1200000"/>
-            <a:ext cx="10900000" cy="1100000"/>
-          </a:xfrm>
-          <a:prstGeom prst="rect">
-            <a:avLst/>
-          </a:prstGeom>
-          <a:noFill/>
-          <a:ln/>
-        </p:spPr>
-        <p:txBody>
-          <a:bodyPr wrap="square" lIns="0" tIns="0" rIns="0" bIns="0" rtlCol="0" anchor="t"/>
-          <a:lstStyle/>
-          <a:p>
-            <a:pPr marL="177800" indent="-177800">
-              <a:spcAft>
-                <a:spcPts val="400"/>
-              </a:spcAft>
-              <a:buSzPct val="100000"/>
-              <a:buChar char="•"/>
-            </a:pPr>
-            <a:r>
-              <a:rPr lang="en-US" sz="1250" dirty="0">
-                <a:solidFill>
-                  <a:srgbClr val="000000"/>
-                </a:solidFill>
-                <a:latin typeface="Calibri" pitchFamily="34" charset="0"/>
-                <a:ea typeface="Calibri" pitchFamily="34" charset="-122"/>
-                <a:cs typeface="Calibri" pitchFamily="34" charset="-120"/>
-              </a:rPr>
-              <a:t>Every deduction is explained in words, not just scored — “no lawful basis declared”, “1/4 required safeguards in place”.</a:t>
-            </a:r>
-          </a:p>
-          <a:p>
-            <a:pPr marL="177800" indent="-177800">
-              <a:spcAft>
-                <a:spcPts val="400"/>
-              </a:spcAft>
-              <a:buSzPct val="100000"/>
-              <a:buChar char="•"/>
-            </a:pPr>
-            <a:r>
-              <a:rPr lang="en-US" sz="1250" dirty="0">
-                <a:solidFill>
-                  <a:srgbClr val="000000"/>
-                </a:solidFill>
-                <a:latin typeface="Calibri" pitchFamily="34" charset="0"/>
-                <a:ea typeface="Calibri" pitchFamily="34" charset="-122"/>
-                <a:cs typeface="Calibri" pitchFamily="34" charset="-120"/>
-              </a:rPr>
-              <a:t>This is what makes the score auditable rather than arbitrary, and why the scorer is deterministic code and not a language model.</a:t>
-            </a:r>
-          </a:p>
-        </p:txBody>
-      </p:sp>
-      <p:pic>
-        <p:nvPicPr>
-          <p:cNvPr id="6" name="Picture 5">
-            <a:extLst>
-              <a:ext uri="{FF2B5EF4-FFF2-40B4-BE49-F238E27FC236}">
-                <a16:creationId xmlns:a16="http://schemas.microsoft.com/office/drawing/2014/main" id="{6DAF0333-4B62-37AD-3E1B-5E54782CD6F2}"/>
-              </a:ext>
-            </a:extLst>
-          </p:cNvPr>
-          <p:cNvPicPr>
-            <a:picLocks noChangeAspect="1"/>
-          </p:cNvPicPr>
-          <p:nvPr/>
-        </p:nvPicPr>
-        <p:blipFill>
-          <a:blip r:embed="rId4"/>
-          <a:stretch>
-            <a:fillRect/>
-          </a:stretch>
-        </p:blipFill>
-        <p:spPr>
-          <a:xfrm>
-            <a:off x="923270" y="2988876"/>
-            <a:ext cx="9810540" cy="2030133"/>
-          </a:xfrm>
-          <a:prstGeom prst="rect">
-            <a:avLst/>
-          </a:prstGeom>
-        </p:spPr>
-      </p:pic>
-    </p:spTree>
-  </p:cSld>
-  <p:clrMapOvr>
-    <a:masterClrMapping/>
-  </p:clrMapOvr>
-</p:sld>
-</file>
-
-<file path=ppt/slides/slide9.xml><?xml version="1.0" encoding="utf-8"?>
-<p:sld xmlns:a="http://schemas.openxmlformats.org/drawingml/2006/main" xmlns:r="http://schemas.openxmlformats.org/officeDocument/2006/relationships" xmlns:p="http://schemas.openxmlformats.org/presentationml/2006/main">
-  <p:cSld>
-    <p:bg>
-      <p:bgPr>
-        <a:solidFill>
-          <a:srgbClr val="FFFFFF"/>
-        </a:solidFill>
-        <a:effectLst/>
-      </p:bgPr>
-    </p:bg>
-    <p:spTree>
-      <p:nvGrpSpPr>
-        <p:cNvPr id="1" name="">
-          <a:extLst>
-            <a:ext uri="{FF2B5EF4-FFF2-40B4-BE49-F238E27FC236}">
-              <a16:creationId xmlns:a16="http://schemas.microsoft.com/office/drawing/2014/main" id="{6FC344E8-FF77-B286-38F9-3CBB36A2545D}"/>
-            </a:ext>
-          </a:extLst>
-        </p:cNvPr>
-        <p:cNvGrpSpPr/>
-        <p:nvPr/>
-      </p:nvGrpSpPr>
-      <p:grpSpPr>
-        <a:xfrm>
-          <a:off x="0" y="0"/>
-          <a:ext cx="0" cy="0"/>
-          <a:chOff x="0" y="0"/>
-          <a:chExt cx="0" cy="0"/>
-        </a:xfrm>
-      </p:grpSpPr>
-      <p:sp>
-        <p:nvSpPr>
-          <p:cNvPr id="2" name="Text 0">
-            <a:extLst>
-              <a:ext uri="{FF2B5EF4-FFF2-40B4-BE49-F238E27FC236}">
-                <a16:creationId xmlns:a16="http://schemas.microsoft.com/office/drawing/2014/main" id="{2D85B9BF-6755-C963-22E2-175FD4533DFC}"/>
-              </a:ext>
-            </a:extLst>
-          </p:cNvPr>
-          <p:cNvSpPr txBox="1"/>
-          <p:nvPr/>
-        </p:nvSpPr>
-        <p:spPr>
-          <a:xfrm>
-            <a:off x="11460175" y="6446520"/>
-            <a:ext cx="457200" cy="274320"/>
-          </a:xfrm>
-          <a:prstGeom prst="rect">
-            <a:avLst/>
-          </a:prstGeom>
-          <a:noFill/>
-          <a:ln/>
-        </p:spPr>
-        <p:txBody>
-          <a:bodyPr wrap="square" lIns="0" tIns="0" rIns="0" bIns="0" rtlCol="0" anchor="ctr"/>
-          <a:lstStyle/>
-          <a:p>
-            <a:pPr marL="0" indent="0" algn="r">
-              <a:buNone/>
-            </a:pPr>
-            <a:r>
-              <a:rPr lang="en-US" sz="1000" dirty="0">
-                <a:solidFill>
-                  <a:srgbClr val="808080"/>
-                </a:solidFill>
-                <a:latin typeface="Calibri" pitchFamily="34" charset="0"/>
-                <a:ea typeface="Calibri" pitchFamily="34" charset="-122"/>
-                <a:cs typeface="Calibri" pitchFamily="34" charset="-120"/>
-              </a:rPr>
-              <a:t>11</a:t>
-            </a:r>
-            <a:endParaRPr lang="en-US" sz="1000" dirty="0"/>
-          </a:p>
-        </p:txBody>
-      </p:sp>
-      <p:sp>
-        <p:nvSpPr>
-          <p:cNvPr id="3" name="Text 1">
-            <a:extLst>
-              <a:ext uri="{FF2B5EF4-FFF2-40B4-BE49-F238E27FC236}">
-                <a16:creationId xmlns:a16="http://schemas.microsoft.com/office/drawing/2014/main" id="{68C27DB9-0E08-CA8E-1475-DE17D83E42B3}"/>
-              </a:ext>
-            </a:extLst>
-          </p:cNvPr>
-          <p:cNvSpPr txBox="1"/>
-          <p:nvPr/>
-        </p:nvSpPr>
-        <p:spPr>
-          <a:xfrm>
-            <a:off x="548640" y="320040"/>
-            <a:ext cx="9601200" cy="685800"/>
-          </a:xfrm>
-          <a:prstGeom prst="rect">
-            <a:avLst/>
-          </a:prstGeom>
-          <a:noFill/>
-          <a:ln/>
-        </p:spPr>
-        <p:txBody>
-          <a:bodyPr wrap="square" lIns="0" tIns="0" rIns="0" bIns="0" rtlCol="0" anchor="ctr"/>
-          <a:lstStyle/>
-          <a:p>
-            <a:r>
-              <a:rPr lang="en-US" sz="2800" b="1" dirty="0">
-                <a:solidFill>
-                  <a:srgbClr val="1D2F82"/>
-                </a:solidFill>
-                <a:latin typeface="Calibri" pitchFamily="34" charset="0"/>
-                <a:ea typeface="Calibri" pitchFamily="34" charset="-122"/>
-                <a:cs typeface="Calibri" pitchFamily="34" charset="-120"/>
-              </a:rPr>
-              <a:t>Results — One Patient, End to End</a:t>
-            </a:r>
-            <a:endParaRPr lang="en-US" sz="2800" dirty="0"/>
-          </a:p>
-        </p:txBody>
-      </p:sp>
-      <p:pic>
-        <p:nvPicPr>
-          <p:cNvPr id="4" name="Image 0" descr="logo.png">
-            <a:extLst>
-              <a:ext uri="{FF2B5EF4-FFF2-40B4-BE49-F238E27FC236}">
-                <a16:creationId xmlns:a16="http://schemas.microsoft.com/office/drawing/2014/main" id="{916227F1-668A-E5CE-03EE-FCFA4BA3063C}"/>
-              </a:ext>
-            </a:extLst>
-          </p:cNvPr>
-          <p:cNvPicPr>
-            <a:picLocks noChangeAspect="1"/>
-          </p:cNvPicPr>
-          <p:nvPr/>
-        </p:nvPicPr>
-        <p:blipFill>
-          <a:blip r:embed="rId3"/>
-          <a:stretch>
-            <a:fillRect/>
-          </a:stretch>
-        </p:blipFill>
-        <p:spPr>
-          <a:xfrm>
-            <a:off x="10362895" y="320040"/>
-            <a:ext cx="1371600" cy="518746"/>
-          </a:xfrm>
-          <a:prstGeom prst="rect">
-            <a:avLst/>
-          </a:prstGeom>
-        </p:spPr>
-      </p:pic>
-      <p:sp>
-        <p:nvSpPr>
-          <p:cNvPr id="20" name="Text 20">
-            <a:extLst>
-              <a:ext uri="{FF2B5EF4-FFF2-40B4-BE49-F238E27FC236}">
-                <a16:creationId xmlns:a16="http://schemas.microsoft.com/office/drawing/2014/main" id="{C10CA6AB-E420-29F4-8BB6-FDBE494F7F28}"/>
-              </a:ext>
-            </a:extLst>
-          </p:cNvPr>
-          <p:cNvSpPr txBox="1"/>
-          <p:nvPr/>
-        </p:nvSpPr>
-        <p:spPr>
-          <a:xfrm>
-            <a:off x="640080" y="1200000"/>
-            <a:ext cx="10900000" cy="1100000"/>
-          </a:xfrm>
-          <a:prstGeom prst="rect">
-            <a:avLst/>
-          </a:prstGeom>
-          <a:noFill/>
-          <a:ln/>
-        </p:spPr>
-        <p:txBody>
-          <a:bodyPr wrap="square" lIns="0" tIns="0" rIns="0" bIns="0" rtlCol="0" anchor="t"/>
-          <a:lstStyle/>
-          <a:p>
-            <a:pPr lvl="0"/>
-            <a:r>
-              <a:rPr lang="en-IN" sz="1400" dirty="0"/>
-              <a:t>The six fields the baseline takes that no care-coordination purpose permits are an email address, a street address, and four billing fields — including an insurance policy number. None of them serve the clinical task that was asked for.</a:t>
-            </a:r>
-          </a:p>
-          <a:p>
-            <a:pPr lvl="0"/>
-            <a:endParaRPr lang="en-IN" sz="1400" dirty="0"/>
-          </a:p>
-          <a:p>
-            <a:pPr lvl="0"/>
-            <a:r>
-              <a:rPr lang="en-IN" sz="1400" dirty="0"/>
-              <a:t>Same patient, same source, same seven rules. The </a:t>
-            </a:r>
-            <a:r>
-              <a:rPr lang="en-IN" sz="1400" b="1" dirty="0"/>
-              <a:t>0.869 gap is traceable to specific fields taken and specific paperwork missing; </a:t>
-            </a:r>
-            <a:r>
-              <a:rPr lang="en-IN" sz="1400" dirty="0"/>
-              <a:t>not to speed, coverage, or how much data was pulled.</a:t>
-            </a:r>
-          </a:p>
-          <a:p>
-            <a:br>
-              <a:rPr lang="en-IN" sz="1400" dirty="0"/>
-            </a:br>
-            <a:endParaRPr lang="en-IN" sz="1400" dirty="0"/>
-          </a:p>
-          <a:p>
-            <a:pPr marL="177800" indent="-177800">
-              <a:spcAft>
-                <a:spcPts val="400"/>
-              </a:spcAft>
-              <a:buSzPct val="100000"/>
-              <a:buChar char="•"/>
-            </a:pPr>
-            <a:endParaRPr lang="en-US" sz="1250" dirty="0">
-              <a:solidFill>
-                <a:srgbClr val="000000"/>
-              </a:solidFill>
-              <a:latin typeface="Calibri" pitchFamily="34" charset="0"/>
-              <a:ea typeface="Calibri" pitchFamily="34" charset="-122"/>
-              <a:cs typeface="Calibri" pitchFamily="34" charset="-120"/>
-            </a:endParaRPr>
-          </a:p>
-        </p:txBody>
-      </p:sp>
-      <p:pic>
-        <p:nvPicPr>
-          <p:cNvPr id="7" name="Picture 6">
-            <a:extLst>
-              <a:ext uri="{FF2B5EF4-FFF2-40B4-BE49-F238E27FC236}">
-                <a16:creationId xmlns:a16="http://schemas.microsoft.com/office/drawing/2014/main" id="{66530355-1EDB-0921-D609-BA70BCCCB7E2}"/>
-              </a:ext>
-            </a:extLst>
-          </p:cNvPr>
-          <p:cNvPicPr>
-            <a:picLocks noChangeAspect="1"/>
-          </p:cNvPicPr>
-          <p:nvPr/>
-        </p:nvPicPr>
-        <p:blipFill>
-          <a:blip r:embed="rId4"/>
-          <a:stretch>
-            <a:fillRect/>
-          </a:stretch>
-        </p:blipFill>
-        <p:spPr>
-          <a:xfrm>
-            <a:off x="1169520" y="2760645"/>
-            <a:ext cx="9841120" cy="3892082"/>
-          </a:xfrm>
-          <a:prstGeom prst="rect">
-            <a:avLst/>
-          </a:prstGeom>
-        </p:spPr>
-      </p:pic>
-    </p:spTree>
-    <p:extLst>
-      <p:ext uri="{BB962C8B-B14F-4D97-AF65-F5344CB8AC3E}">
-        <p14:creationId xmlns:p14="http://schemas.microsoft.com/office/powerpoint/2010/main" val="1883206486"/>
-      </p:ext>
-    </p:extLst>
   </p:cSld>
   <p:clrMapOvr>
     <a:masterClrMapping/>
